--- a/Olist_Delivery_Performance_SLA_Analysis.pptx
+++ b/Olist_Delivery_Performance_SLA_Analysis.pptx
@@ -338,12 +338,6 @@
             <c:idx val="0"/>
             <c:invertIfNegative val="0"/>
             <c:bubble3D val="0"/>
-            <c:spPr>
-              <a:solidFill>
-                <a:srgbClr val="0D9488"/>
-              </a:solidFill>
-              <a:effectLst/>
-            </c:spPr>
             <c:extLst>
               <c:ext xmlns:c16="http://schemas.microsoft.com/office/drawing/2014/chart" uri="{C3380CC4-5D6E-409C-BE32-E72D297353CC}">
                 <c16:uniqueId val="{00000001-2014-4CB4-B605-CD41C3ABB2FD}"/>
@@ -637,12 +631,6 @@
             <c:idx val="0"/>
             <c:invertIfNegative val="0"/>
             <c:bubble3D val="0"/>
-            <c:spPr>
-              <a:solidFill>
-                <a:srgbClr val="0D9488"/>
-              </a:solidFill>
-              <a:effectLst/>
-            </c:spPr>
             <c:extLst>
               <c:ext xmlns:c16="http://schemas.microsoft.com/office/drawing/2014/chart" uri="{C3380CC4-5D6E-409C-BE32-E72D297353CC}">
                 <c16:uniqueId val="{00000001-903D-4961-9897-37657A4D8A23}"/>
@@ -6771,6 +6759,13 @@
           </p:nvPr>
         </p:nvSpPr>
         <p:spPr/>
+        <p:txBody>
+          <a:bodyPr/>
+          <a:lstStyle/>
+          <a:p>
+            <a:endParaRPr lang="en-US"/>
+          </a:p>
+        </p:txBody>
       </p:sp>
       <p:sp>
         <p:nvSpPr>
@@ -6855,6 +6850,13 @@
           </p:nvPr>
         </p:nvSpPr>
         <p:spPr/>
+        <p:txBody>
+          <a:bodyPr/>
+          <a:lstStyle/>
+          <a:p>
+            <a:endParaRPr lang="en-US"/>
+          </a:p>
+        </p:txBody>
       </p:sp>
       <p:sp>
         <p:nvSpPr>
@@ -6939,6 +6941,13 @@
           </p:nvPr>
         </p:nvSpPr>
         <p:spPr/>
+        <p:txBody>
+          <a:bodyPr/>
+          <a:lstStyle/>
+          <a:p>
+            <a:endParaRPr lang="en-US"/>
+          </a:p>
+        </p:txBody>
       </p:sp>
       <p:sp>
         <p:nvSpPr>
@@ -7023,6 +7032,13 @@
           </p:nvPr>
         </p:nvSpPr>
         <p:spPr/>
+        <p:txBody>
+          <a:bodyPr/>
+          <a:lstStyle/>
+          <a:p>
+            <a:endParaRPr lang="en-US"/>
+          </a:p>
+        </p:txBody>
       </p:sp>
       <p:sp>
         <p:nvSpPr>
@@ -7107,6 +7123,13 @@
           </p:nvPr>
         </p:nvSpPr>
         <p:spPr/>
+        <p:txBody>
+          <a:bodyPr/>
+          <a:lstStyle/>
+          <a:p>
+            <a:endParaRPr lang="en-US"/>
+          </a:p>
+        </p:txBody>
       </p:sp>
       <p:sp>
         <p:nvSpPr>
@@ -7191,6 +7214,13 @@
           </p:nvPr>
         </p:nvSpPr>
         <p:spPr/>
+        <p:txBody>
+          <a:bodyPr/>
+          <a:lstStyle/>
+          <a:p>
+            <a:endParaRPr lang="en-US"/>
+          </a:p>
+        </p:txBody>
       </p:sp>
       <p:sp>
         <p:nvSpPr>
@@ -7275,6 +7305,13 @@
           </p:nvPr>
         </p:nvSpPr>
         <p:spPr/>
+        <p:txBody>
+          <a:bodyPr/>
+          <a:lstStyle/>
+          <a:p>
+            <a:endParaRPr lang="en-US"/>
+          </a:p>
+        </p:txBody>
       </p:sp>
       <p:sp>
         <p:nvSpPr>
@@ -7359,6 +7396,13 @@
           </p:nvPr>
         </p:nvSpPr>
         <p:spPr/>
+        <p:txBody>
+          <a:bodyPr/>
+          <a:lstStyle/>
+          <a:p>
+            <a:endParaRPr lang="en-US"/>
+          </a:p>
+        </p:txBody>
       </p:sp>
       <p:sp>
         <p:nvSpPr>
@@ -7443,6 +7487,13 @@
           </p:nvPr>
         </p:nvSpPr>
         <p:spPr/>
+        <p:txBody>
+          <a:bodyPr/>
+          <a:lstStyle/>
+          <a:p>
+            <a:endParaRPr lang="en-US"/>
+          </a:p>
+        </p:txBody>
       </p:sp>
       <p:sp>
         <p:nvSpPr>
@@ -7527,6 +7578,13 @@
           </p:nvPr>
         </p:nvSpPr>
         <p:spPr/>
+        <p:txBody>
+          <a:bodyPr/>
+          <a:lstStyle/>
+          <a:p>
+            <a:endParaRPr lang="en-US"/>
+          </a:p>
+        </p:txBody>
       </p:sp>
       <p:sp>
         <p:nvSpPr>
@@ -7611,6 +7669,13 @@
           </p:nvPr>
         </p:nvSpPr>
         <p:spPr/>
+        <p:txBody>
+          <a:bodyPr/>
+          <a:lstStyle/>
+          <a:p>
+            <a:endParaRPr lang="en-US"/>
+          </a:p>
+        </p:txBody>
       </p:sp>
       <p:sp>
         <p:nvSpPr>
@@ -7695,6 +7760,13 @@
           </p:nvPr>
         </p:nvSpPr>
         <p:spPr/>
+        <p:txBody>
+          <a:bodyPr/>
+          <a:lstStyle/>
+          <a:p>
+            <a:endParaRPr lang="en-US"/>
+          </a:p>
+        </p:txBody>
       </p:sp>
       <p:sp>
         <p:nvSpPr>
@@ -7779,6 +7851,13 @@
           </p:nvPr>
         </p:nvSpPr>
         <p:spPr/>
+        <p:txBody>
+          <a:bodyPr/>
+          <a:lstStyle/>
+          <a:p>
+            <a:endParaRPr lang="en-US"/>
+          </a:p>
+        </p:txBody>
       </p:sp>
       <p:sp>
         <p:nvSpPr>
@@ -7863,6 +7942,13 @@
           </p:nvPr>
         </p:nvSpPr>
         <p:spPr/>
+        <p:txBody>
+          <a:bodyPr/>
+          <a:lstStyle/>
+          <a:p>
+            <a:endParaRPr lang="en-US"/>
+          </a:p>
+        </p:txBody>
       </p:sp>
       <p:sp>
         <p:nvSpPr>
@@ -7947,6 +8033,13 @@
           </p:nvPr>
         </p:nvSpPr>
         <p:spPr/>
+        <p:txBody>
+          <a:bodyPr/>
+          <a:lstStyle/>
+          <a:p>
+            <a:endParaRPr lang="en-US"/>
+          </a:p>
+        </p:txBody>
       </p:sp>
       <p:sp>
         <p:nvSpPr>
@@ -8031,6 +8124,13 @@
           </p:nvPr>
         </p:nvSpPr>
         <p:spPr/>
+        <p:txBody>
+          <a:bodyPr/>
+          <a:lstStyle/>
+          <a:p>
+            <a:endParaRPr lang="en-US"/>
+          </a:p>
+        </p:txBody>
       </p:sp>
       <p:sp>
         <p:nvSpPr>
@@ -8115,6 +8215,13 @@
           </p:nvPr>
         </p:nvSpPr>
         <p:spPr/>
+        <p:txBody>
+          <a:bodyPr/>
+          <a:lstStyle/>
+          <a:p>
+            <a:endParaRPr lang="en-US"/>
+          </a:p>
+        </p:txBody>
       </p:sp>
       <p:sp>
         <p:nvSpPr>
@@ -8527,6 +8634,13 @@
           </a:solidFill>
           <a:ln/>
         </p:spPr>
+        <p:txBody>
+          <a:bodyPr/>
+          <a:lstStyle/>
+          <a:p>
+            <a:endParaRPr lang="en-US"/>
+          </a:p>
+        </p:txBody>
       </p:sp>
       <p:sp>
         <p:nvSpPr>
@@ -8547,6 +8661,13 @@
           </a:solidFill>
           <a:ln/>
         </p:spPr>
+        <p:txBody>
+          <a:bodyPr/>
+          <a:lstStyle/>
+          <a:p>
+            <a:endParaRPr lang="en-US"/>
+          </a:p>
+        </p:txBody>
       </p:sp>
       <p:sp>
         <p:nvSpPr>
@@ -8567,6 +8688,13 @@
           </a:solidFill>
           <a:ln/>
         </p:spPr>
+        <p:txBody>
+          <a:bodyPr/>
+          <a:lstStyle/>
+          <a:p>
+            <a:endParaRPr lang="en-US"/>
+          </a:p>
+        </p:txBody>
       </p:sp>
       <p:sp>
         <p:nvSpPr>
@@ -8587,6 +8715,13 @@
           </a:solidFill>
           <a:ln/>
         </p:spPr>
+        <p:txBody>
+          <a:bodyPr/>
+          <a:lstStyle/>
+          <a:p>
+            <a:endParaRPr lang="en-US"/>
+          </a:p>
+        </p:txBody>
       </p:sp>
       <p:sp>
         <p:nvSpPr>
@@ -8607,6 +8742,13 @@
           </a:solidFill>
           <a:ln/>
         </p:spPr>
+        <p:txBody>
+          <a:bodyPr/>
+          <a:lstStyle/>
+          <a:p>
+            <a:endParaRPr lang="en-US"/>
+          </a:p>
+        </p:txBody>
       </p:sp>
       <p:sp>
         <p:nvSpPr>
@@ -8627,6 +8769,13 @@
           </a:solidFill>
           <a:ln/>
         </p:spPr>
+        <p:txBody>
+          <a:bodyPr/>
+          <a:lstStyle/>
+          <a:p>
+            <a:endParaRPr lang="en-US"/>
+          </a:p>
+        </p:txBody>
       </p:sp>
       <p:sp>
         <p:nvSpPr>
@@ -8647,6 +8796,13 @@
           </a:solidFill>
           <a:ln/>
         </p:spPr>
+        <p:txBody>
+          <a:bodyPr/>
+          <a:lstStyle/>
+          <a:p>
+            <a:endParaRPr lang="en-US"/>
+          </a:p>
+        </p:txBody>
       </p:sp>
       <p:sp>
         <p:nvSpPr>
@@ -8667,6 +8823,13 @@
           </a:solidFill>
           <a:ln/>
         </p:spPr>
+        <p:txBody>
+          <a:bodyPr/>
+          <a:lstStyle/>
+          <a:p>
+            <a:endParaRPr lang="en-US"/>
+          </a:p>
+        </p:txBody>
       </p:sp>
       <p:sp>
         <p:nvSpPr>
@@ -8687,6 +8850,13 @@
           </a:solidFill>
           <a:ln/>
         </p:spPr>
+        <p:txBody>
+          <a:bodyPr/>
+          <a:lstStyle/>
+          <a:p>
+            <a:endParaRPr lang="en-US"/>
+          </a:p>
+        </p:txBody>
       </p:sp>
       <p:sp>
         <p:nvSpPr>
@@ -8707,6 +8877,13 @@
           </a:solidFill>
           <a:ln/>
         </p:spPr>
+        <p:txBody>
+          <a:bodyPr/>
+          <a:lstStyle/>
+          <a:p>
+            <a:endParaRPr lang="en-US"/>
+          </a:p>
+        </p:txBody>
       </p:sp>
       <p:sp>
         <p:nvSpPr>
@@ -8727,6 +8904,13 @@
           </a:solidFill>
           <a:ln/>
         </p:spPr>
+        <p:txBody>
+          <a:bodyPr/>
+          <a:lstStyle/>
+          <a:p>
+            <a:endParaRPr lang="en-US"/>
+          </a:p>
+        </p:txBody>
       </p:sp>
       <p:sp>
         <p:nvSpPr>
@@ -8747,6 +8931,13 @@
           </a:solidFill>
           <a:ln/>
         </p:spPr>
+        <p:txBody>
+          <a:bodyPr/>
+          <a:lstStyle/>
+          <a:p>
+            <a:endParaRPr lang="en-US"/>
+          </a:p>
+        </p:txBody>
       </p:sp>
       <p:sp>
         <p:nvSpPr>
@@ -8767,6 +8958,13 @@
           </a:solidFill>
           <a:ln/>
         </p:spPr>
+        <p:txBody>
+          <a:bodyPr/>
+          <a:lstStyle/>
+          <a:p>
+            <a:endParaRPr lang="en-US"/>
+          </a:p>
+        </p:txBody>
       </p:sp>
       <p:sp>
         <p:nvSpPr>
@@ -8787,6 +8985,13 @@
           </a:solidFill>
           <a:ln/>
         </p:spPr>
+        <p:txBody>
+          <a:bodyPr/>
+          <a:lstStyle/>
+          <a:p>
+            <a:endParaRPr lang="en-US"/>
+          </a:p>
+        </p:txBody>
       </p:sp>
       <p:sp>
         <p:nvSpPr>
@@ -8807,6 +9012,13 @@
           </a:solidFill>
           <a:ln/>
         </p:spPr>
+        <p:txBody>
+          <a:bodyPr/>
+          <a:lstStyle/>
+          <a:p>
+            <a:endParaRPr lang="en-US"/>
+          </a:p>
+        </p:txBody>
       </p:sp>
       <p:sp>
         <p:nvSpPr>
@@ -8827,6 +9039,13 @@
           </a:solidFill>
           <a:ln/>
         </p:spPr>
+        <p:txBody>
+          <a:bodyPr/>
+          <a:lstStyle/>
+          <a:p>
+            <a:endParaRPr lang="en-US"/>
+          </a:p>
+        </p:txBody>
       </p:sp>
       <p:sp>
         <p:nvSpPr>
@@ -8847,6 +9066,13 @@
           </a:solidFill>
           <a:ln/>
         </p:spPr>
+        <p:txBody>
+          <a:bodyPr/>
+          <a:lstStyle/>
+          <a:p>
+            <a:endParaRPr lang="en-US"/>
+          </a:p>
+        </p:txBody>
       </p:sp>
       <p:sp>
         <p:nvSpPr>
@@ -8867,6 +9093,13 @@
           </a:solidFill>
           <a:ln/>
         </p:spPr>
+        <p:txBody>
+          <a:bodyPr/>
+          <a:lstStyle/>
+          <a:p>
+            <a:endParaRPr lang="en-US"/>
+          </a:p>
+        </p:txBody>
       </p:sp>
       <p:sp>
         <p:nvSpPr>
@@ -8887,6 +9120,13 @@
           </a:solidFill>
           <a:ln/>
         </p:spPr>
+        <p:txBody>
+          <a:bodyPr/>
+          <a:lstStyle/>
+          <a:p>
+            <a:endParaRPr lang="en-US"/>
+          </a:p>
+        </p:txBody>
       </p:sp>
       <p:sp>
         <p:nvSpPr>
@@ -8907,6 +9147,13 @@
           </a:solidFill>
           <a:ln/>
         </p:spPr>
+        <p:txBody>
+          <a:bodyPr/>
+          <a:lstStyle/>
+          <a:p>
+            <a:endParaRPr lang="en-US"/>
+          </a:p>
+        </p:txBody>
       </p:sp>
       <p:sp>
         <p:nvSpPr>
@@ -8927,6 +9174,13 @@
           </a:solidFill>
           <a:ln/>
         </p:spPr>
+        <p:txBody>
+          <a:bodyPr/>
+          <a:lstStyle/>
+          <a:p>
+            <a:endParaRPr lang="en-US"/>
+          </a:p>
+        </p:txBody>
       </p:sp>
       <p:sp>
         <p:nvSpPr>
@@ -8947,6 +9201,13 @@
           </a:solidFill>
           <a:ln/>
         </p:spPr>
+        <p:txBody>
+          <a:bodyPr/>
+          <a:lstStyle/>
+          <a:p>
+            <a:endParaRPr lang="en-US"/>
+          </a:p>
+        </p:txBody>
       </p:sp>
       <p:sp>
         <p:nvSpPr>
@@ -8967,6 +9228,13 @@
           </a:solidFill>
           <a:ln/>
         </p:spPr>
+        <p:txBody>
+          <a:bodyPr/>
+          <a:lstStyle/>
+          <a:p>
+            <a:endParaRPr lang="en-US"/>
+          </a:p>
+        </p:txBody>
       </p:sp>
       <p:sp>
         <p:nvSpPr>
@@ -8987,6 +9255,13 @@
           </a:solidFill>
           <a:ln/>
         </p:spPr>
+        <p:txBody>
+          <a:bodyPr/>
+          <a:lstStyle/>
+          <a:p>
+            <a:endParaRPr lang="en-US"/>
+          </a:p>
+        </p:txBody>
       </p:sp>
       <p:sp>
         <p:nvSpPr>
@@ -9007,6 +9282,13 @@
           </a:solidFill>
           <a:ln/>
         </p:spPr>
+        <p:txBody>
+          <a:bodyPr/>
+          <a:lstStyle/>
+          <a:p>
+            <a:endParaRPr lang="en-US"/>
+          </a:p>
+        </p:txBody>
       </p:sp>
       <p:sp>
         <p:nvSpPr>
@@ -9027,6 +9309,13 @@
           </a:solidFill>
           <a:ln/>
         </p:spPr>
+        <p:txBody>
+          <a:bodyPr/>
+          <a:lstStyle/>
+          <a:p>
+            <a:endParaRPr lang="en-US"/>
+          </a:p>
+        </p:txBody>
       </p:sp>
       <p:sp>
         <p:nvSpPr>
@@ -9047,6 +9336,13 @@
           </a:solidFill>
           <a:ln/>
         </p:spPr>
+        <p:txBody>
+          <a:bodyPr/>
+          <a:lstStyle/>
+          <a:p>
+            <a:endParaRPr lang="en-US"/>
+          </a:p>
+        </p:txBody>
       </p:sp>
       <p:sp>
         <p:nvSpPr>
@@ -9067,6 +9363,13 @@
           </a:solidFill>
           <a:ln/>
         </p:spPr>
+        <p:txBody>
+          <a:bodyPr/>
+          <a:lstStyle/>
+          <a:p>
+            <a:endParaRPr lang="en-US"/>
+          </a:p>
+        </p:txBody>
       </p:sp>
       <p:sp>
         <p:nvSpPr>
@@ -9087,6 +9390,13 @@
           </a:solidFill>
           <a:ln/>
         </p:spPr>
+        <p:txBody>
+          <a:bodyPr/>
+          <a:lstStyle/>
+          <a:p>
+            <a:endParaRPr lang="en-US"/>
+          </a:p>
+        </p:txBody>
       </p:sp>
       <p:sp>
         <p:nvSpPr>
@@ -9107,6 +9417,13 @@
           </a:solidFill>
           <a:ln/>
         </p:spPr>
+        <p:txBody>
+          <a:bodyPr/>
+          <a:lstStyle/>
+          <a:p>
+            <a:endParaRPr lang="en-US"/>
+          </a:p>
+        </p:txBody>
       </p:sp>
       <p:sp>
         <p:nvSpPr>
@@ -9127,6 +9444,13 @@
           </a:solidFill>
           <a:ln/>
         </p:spPr>
+        <p:txBody>
+          <a:bodyPr/>
+          <a:lstStyle/>
+          <a:p>
+            <a:endParaRPr lang="en-US"/>
+          </a:p>
+        </p:txBody>
       </p:sp>
       <p:sp>
         <p:nvSpPr>
@@ -9147,6 +9471,13 @@
           </a:solidFill>
           <a:ln/>
         </p:spPr>
+        <p:txBody>
+          <a:bodyPr/>
+          <a:lstStyle/>
+          <a:p>
+            <a:endParaRPr lang="en-US"/>
+          </a:p>
+        </p:txBody>
       </p:sp>
       <p:sp>
         <p:nvSpPr>
@@ -9167,6 +9498,13 @@
           </a:solidFill>
           <a:ln/>
         </p:spPr>
+        <p:txBody>
+          <a:bodyPr/>
+          <a:lstStyle/>
+          <a:p>
+            <a:endParaRPr lang="en-US"/>
+          </a:p>
+        </p:txBody>
       </p:sp>
       <p:sp>
         <p:nvSpPr>
@@ -9187,6 +9525,13 @@
           </a:solidFill>
           <a:ln/>
         </p:spPr>
+        <p:txBody>
+          <a:bodyPr/>
+          <a:lstStyle/>
+          <a:p>
+            <a:endParaRPr lang="en-US"/>
+          </a:p>
+        </p:txBody>
       </p:sp>
       <p:sp>
         <p:nvSpPr>
@@ -9207,6 +9552,13 @@
           </a:solidFill>
           <a:ln/>
         </p:spPr>
+        <p:txBody>
+          <a:bodyPr/>
+          <a:lstStyle/>
+          <a:p>
+            <a:endParaRPr lang="en-US"/>
+          </a:p>
+        </p:txBody>
       </p:sp>
       <p:sp>
         <p:nvSpPr>
@@ -9386,6 +9738,13 @@
           </a:solidFill>
           <a:ln/>
         </p:spPr>
+        <p:txBody>
+          <a:bodyPr/>
+          <a:lstStyle/>
+          <a:p>
+            <a:endParaRPr lang="en-US"/>
+          </a:p>
+        </p:txBody>
       </p:sp>
       <p:sp>
         <p:nvSpPr>
@@ -9411,6 +9770,13 @@
             <a:prstDash val="solid"/>
           </a:ln>
         </p:spPr>
+        <p:txBody>
+          <a:bodyPr/>
+          <a:lstStyle/>
+          <a:p>
+            <a:endParaRPr lang="en-US"/>
+          </a:p>
+        </p:txBody>
       </p:sp>
       <p:sp>
         <p:nvSpPr>
@@ -9431,6 +9797,13 @@
           </a:solidFill>
           <a:ln/>
         </p:spPr>
+        <p:txBody>
+          <a:bodyPr/>
+          <a:lstStyle/>
+          <a:p>
+            <a:endParaRPr lang="en-US"/>
+          </a:p>
+        </p:txBody>
       </p:sp>
       <p:sp>
         <p:nvSpPr>
@@ -9534,6 +9907,13 @@
             <a:prstDash val="solid"/>
           </a:ln>
         </p:spPr>
+        <p:txBody>
+          <a:bodyPr/>
+          <a:lstStyle/>
+          <a:p>
+            <a:endParaRPr lang="en-US"/>
+          </a:p>
+        </p:txBody>
       </p:sp>
       <p:sp>
         <p:nvSpPr>
@@ -9554,6 +9934,13 @@
           </a:solidFill>
           <a:ln/>
         </p:spPr>
+        <p:txBody>
+          <a:bodyPr/>
+          <a:lstStyle/>
+          <a:p>
+            <a:endParaRPr lang="en-US"/>
+          </a:p>
+        </p:txBody>
       </p:sp>
       <p:sp>
         <p:nvSpPr>
@@ -9657,6 +10044,13 @@
             <a:prstDash val="solid"/>
           </a:ln>
         </p:spPr>
+        <p:txBody>
+          <a:bodyPr/>
+          <a:lstStyle/>
+          <a:p>
+            <a:endParaRPr lang="en-US"/>
+          </a:p>
+        </p:txBody>
       </p:sp>
       <p:sp>
         <p:nvSpPr>
@@ -9677,6 +10071,13 @@
           </a:solidFill>
           <a:ln/>
         </p:spPr>
+        <p:txBody>
+          <a:bodyPr/>
+          <a:lstStyle/>
+          <a:p>
+            <a:endParaRPr lang="en-US"/>
+          </a:p>
+        </p:txBody>
       </p:sp>
       <p:sp>
         <p:nvSpPr>
@@ -9780,6 +10181,13 @@
             <a:prstDash val="solid"/>
           </a:ln>
         </p:spPr>
+        <p:txBody>
+          <a:bodyPr/>
+          <a:lstStyle/>
+          <a:p>
+            <a:endParaRPr lang="en-US"/>
+          </a:p>
+        </p:txBody>
       </p:sp>
       <p:sp>
         <p:nvSpPr>
@@ -9800,6 +10208,13 @@
           </a:solidFill>
           <a:ln/>
         </p:spPr>
+        <p:txBody>
+          <a:bodyPr/>
+          <a:lstStyle/>
+          <a:p>
+            <a:endParaRPr lang="en-US"/>
+          </a:p>
+        </p:txBody>
       </p:sp>
       <p:sp>
         <p:nvSpPr>
@@ -9989,6 +10404,13 @@
           </a:solidFill>
           <a:ln/>
         </p:spPr>
+        <p:txBody>
+          <a:bodyPr/>
+          <a:lstStyle/>
+          <a:p>
+            <a:endParaRPr lang="en-US"/>
+          </a:p>
+        </p:txBody>
       </p:sp>
       <p:sp>
         <p:nvSpPr>
@@ -10138,6 +10560,13 @@
             </a:outerShdw>
           </a:effectLst>
         </p:spPr>
+        <p:txBody>
+          <a:bodyPr/>
+          <a:lstStyle/>
+          <a:p>
+            <a:endParaRPr lang="en-US"/>
+          </a:p>
+        </p:txBody>
       </p:sp>
       <p:sp>
         <p:nvSpPr>
@@ -10158,6 +10587,13 @@
           </a:solidFill>
           <a:ln/>
         </p:spPr>
+        <p:txBody>
+          <a:bodyPr/>
+          <a:lstStyle/>
+          <a:p>
+            <a:endParaRPr lang="en-US"/>
+          </a:p>
+        </p:txBody>
       </p:sp>
       <p:pic>
         <p:nvPicPr>
@@ -10361,6 +10797,13 @@
             <a:prstDash val="solid"/>
           </a:ln>
         </p:spPr>
+        <p:txBody>
+          <a:bodyPr/>
+          <a:lstStyle/>
+          <a:p>
+            <a:endParaRPr lang="en-US"/>
+          </a:p>
+        </p:txBody>
       </p:sp>
       <p:sp>
         <p:nvSpPr>
@@ -10498,6 +10941,13 @@
           </a:solidFill>
           <a:ln/>
         </p:spPr>
+        <p:txBody>
+          <a:bodyPr/>
+          <a:lstStyle/>
+          <a:p>
+            <a:endParaRPr lang="en-US"/>
+          </a:p>
+        </p:txBody>
       </p:sp>
       <p:sp>
         <p:nvSpPr>
@@ -10569,6 +11019,13 @@
             </a:outerShdw>
           </a:effectLst>
         </p:spPr>
+        <p:txBody>
+          <a:bodyPr/>
+          <a:lstStyle/>
+          <a:p>
+            <a:endParaRPr lang="en-US"/>
+          </a:p>
+        </p:txBody>
       </p:sp>
       <p:sp>
         <p:nvSpPr>
@@ -10589,6 +11046,13 @@
           </a:solidFill>
           <a:ln/>
         </p:spPr>
+        <p:txBody>
+          <a:bodyPr/>
+          <a:lstStyle/>
+          <a:p>
+            <a:endParaRPr lang="en-US"/>
+          </a:p>
+        </p:txBody>
       </p:sp>
       <p:pic>
         <p:nvPicPr>
@@ -10792,6 +11256,13 @@
             <a:prstDash val="solid"/>
           </a:ln>
         </p:spPr>
+        <p:txBody>
+          <a:bodyPr/>
+          <a:lstStyle/>
+          <a:p>
+            <a:endParaRPr lang="en-US"/>
+          </a:p>
+        </p:txBody>
       </p:sp>
       <p:sp>
         <p:nvSpPr>
@@ -10929,6 +11400,13 @@
           </a:solidFill>
           <a:ln/>
         </p:spPr>
+        <p:txBody>
+          <a:bodyPr/>
+          <a:lstStyle/>
+          <a:p>
+            <a:endParaRPr lang="en-US"/>
+          </a:p>
+        </p:txBody>
       </p:sp>
       <p:sp>
         <p:nvSpPr>
@@ -11000,6 +11478,13 @@
             </a:outerShdw>
           </a:effectLst>
         </p:spPr>
+        <p:txBody>
+          <a:bodyPr/>
+          <a:lstStyle/>
+          <a:p>
+            <a:endParaRPr lang="en-US"/>
+          </a:p>
+        </p:txBody>
       </p:sp>
       <p:sp>
         <p:nvSpPr>
@@ -11020,6 +11505,13 @@
           </a:solidFill>
           <a:ln/>
         </p:spPr>
+        <p:txBody>
+          <a:bodyPr/>
+          <a:lstStyle/>
+          <a:p>
+            <a:endParaRPr lang="en-US"/>
+          </a:p>
+        </p:txBody>
       </p:sp>
       <p:sp>
         <p:nvSpPr>
@@ -11040,6 +11532,13 @@
           </a:solidFill>
           <a:ln/>
         </p:spPr>
+        <p:txBody>
+          <a:bodyPr/>
+          <a:lstStyle/>
+          <a:p>
+            <a:endParaRPr lang="en-US"/>
+          </a:p>
+        </p:txBody>
       </p:sp>
       <p:pic>
         <p:nvPicPr>
@@ -11243,6 +11742,13 @@
             <a:prstDash val="solid"/>
           </a:ln>
         </p:spPr>
+        <p:txBody>
+          <a:bodyPr/>
+          <a:lstStyle/>
+          <a:p>
+            <a:endParaRPr lang="en-US"/>
+          </a:p>
+        </p:txBody>
       </p:sp>
       <p:sp>
         <p:nvSpPr>
@@ -11380,6 +11886,13 @@
           </a:solidFill>
           <a:ln/>
         </p:spPr>
+        <p:txBody>
+          <a:bodyPr/>
+          <a:lstStyle/>
+          <a:p>
+            <a:endParaRPr lang="en-US"/>
+          </a:p>
+        </p:txBody>
       </p:sp>
       <p:sp>
         <p:nvSpPr>
@@ -11550,6 +12063,13 @@
           </a:solidFill>
           <a:ln/>
         </p:spPr>
+        <p:txBody>
+          <a:bodyPr/>
+          <a:lstStyle/>
+          <a:p>
+            <a:endParaRPr lang="en-US"/>
+          </a:p>
+        </p:txBody>
       </p:sp>
       <p:sp>
         <p:nvSpPr>
@@ -11721,6 +12241,13 @@
             </a:outerShdw>
           </a:effectLst>
         </p:spPr>
+        <p:txBody>
+          <a:bodyPr/>
+          <a:lstStyle/>
+          <a:p>
+            <a:endParaRPr lang="en-US"/>
+          </a:p>
+        </p:txBody>
       </p:sp>
       <p:sp>
         <p:nvSpPr>
@@ -11741,6 +12268,13 @@
           </a:solidFill>
           <a:ln/>
         </p:spPr>
+        <p:txBody>
+          <a:bodyPr/>
+          <a:lstStyle/>
+          <a:p>
+            <a:endParaRPr lang="en-US"/>
+          </a:p>
+        </p:txBody>
       </p:sp>
       <p:sp>
         <p:nvSpPr>
@@ -11851,6 +12385,13 @@
             </a:outerShdw>
           </a:effectLst>
         </p:spPr>
+        <p:txBody>
+          <a:bodyPr/>
+          <a:lstStyle/>
+          <a:p>
+            <a:endParaRPr lang="en-US"/>
+          </a:p>
+        </p:txBody>
       </p:sp>
       <p:sp>
         <p:nvSpPr>
@@ -11957,6 +12498,13 @@
             <a:prstDash val="solid"/>
           </a:ln>
         </p:spPr>
+        <p:txBody>
+          <a:bodyPr/>
+          <a:lstStyle/>
+          <a:p>
+            <a:endParaRPr lang="en-US"/>
+          </a:p>
+        </p:txBody>
       </p:sp>
       <p:sp>
         <p:nvSpPr>
@@ -11977,6 +12525,13 @@
           </a:solidFill>
           <a:ln/>
         </p:spPr>
+        <p:txBody>
+          <a:bodyPr/>
+          <a:lstStyle/>
+          <a:p>
+            <a:endParaRPr lang="en-US"/>
+          </a:p>
+        </p:txBody>
       </p:sp>
       <p:sp>
         <p:nvSpPr>
@@ -12189,6 +12744,13 @@
           </a:solidFill>
           <a:ln/>
         </p:spPr>
+        <p:txBody>
+          <a:bodyPr/>
+          <a:lstStyle/>
+          <a:p>
+            <a:endParaRPr lang="en-US"/>
+          </a:p>
+        </p:txBody>
       </p:sp>
       <p:sp>
         <p:nvSpPr>
@@ -12360,6 +12922,13 @@
             </a:outerShdw>
           </a:effectLst>
         </p:spPr>
+        <p:txBody>
+          <a:bodyPr/>
+          <a:lstStyle/>
+          <a:p>
+            <a:endParaRPr lang="en-US"/>
+          </a:p>
+        </p:txBody>
       </p:sp>
       <p:sp>
         <p:nvSpPr>
@@ -12380,6 +12949,13 @@
           </a:solidFill>
           <a:ln/>
         </p:spPr>
+        <p:txBody>
+          <a:bodyPr/>
+          <a:lstStyle/>
+          <a:p>
+            <a:endParaRPr lang="en-US"/>
+          </a:p>
+        </p:txBody>
       </p:sp>
       <p:sp>
         <p:nvSpPr>
@@ -12490,6 +13066,13 @@
             </a:outerShdw>
           </a:effectLst>
         </p:spPr>
+        <p:txBody>
+          <a:bodyPr/>
+          <a:lstStyle/>
+          <a:p>
+            <a:endParaRPr lang="en-US"/>
+          </a:p>
+        </p:txBody>
       </p:sp>
       <p:sp>
         <p:nvSpPr>
@@ -12510,6 +13093,13 @@
           </a:solidFill>
           <a:ln/>
         </p:spPr>
+        <p:txBody>
+          <a:bodyPr/>
+          <a:lstStyle/>
+          <a:p>
+            <a:endParaRPr lang="en-US"/>
+          </a:p>
+        </p:txBody>
       </p:sp>
       <p:sp>
         <p:nvSpPr>
@@ -12613,6 +13203,13 @@
             <a:prstDash val="solid"/>
           </a:ln>
         </p:spPr>
+        <p:txBody>
+          <a:bodyPr/>
+          <a:lstStyle/>
+          <a:p>
+            <a:endParaRPr lang="en-US"/>
+          </a:p>
+        </p:txBody>
       </p:sp>
       <p:sp>
         <p:nvSpPr>
@@ -12633,6 +13230,13 @@
           </a:solidFill>
           <a:ln/>
         </p:spPr>
+        <p:txBody>
+          <a:bodyPr/>
+          <a:lstStyle/>
+          <a:p>
+            <a:endParaRPr lang="en-US"/>
+          </a:p>
+        </p:txBody>
       </p:sp>
       <p:sp>
         <p:nvSpPr>
@@ -12845,6 +13449,13 @@
           </a:solidFill>
           <a:ln/>
         </p:spPr>
+        <p:txBody>
+          <a:bodyPr/>
+          <a:lstStyle/>
+          <a:p>
+            <a:endParaRPr lang="en-US"/>
+          </a:p>
+        </p:txBody>
       </p:sp>
       <p:sp>
         <p:nvSpPr>
@@ -13010,6 +13621,13 @@
             </a:outerShdw>
           </a:effectLst>
         </p:spPr>
+        <p:txBody>
+          <a:bodyPr/>
+          <a:lstStyle/>
+          <a:p>
+            <a:endParaRPr lang="en-US"/>
+          </a:p>
+        </p:txBody>
       </p:sp>
       <p:sp>
         <p:nvSpPr>
@@ -13030,6 +13648,13 @@
           </a:solidFill>
           <a:ln/>
         </p:spPr>
+        <p:txBody>
+          <a:bodyPr/>
+          <a:lstStyle/>
+          <a:p>
+            <a:endParaRPr lang="en-US"/>
+          </a:p>
+        </p:txBody>
       </p:sp>
       <p:pic>
         <p:nvPicPr>
@@ -13194,6 +13819,13 @@
             <a:prstDash val="solid"/>
           </a:ln>
         </p:spPr>
+        <p:txBody>
+          <a:bodyPr/>
+          <a:lstStyle/>
+          <a:p>
+            <a:endParaRPr lang="en-US"/>
+          </a:p>
+        </p:txBody>
       </p:sp>
       <p:sp>
         <p:nvSpPr>
@@ -13214,6 +13846,13 @@
           </a:solidFill>
           <a:ln/>
         </p:spPr>
+        <p:txBody>
+          <a:bodyPr/>
+          <a:lstStyle/>
+          <a:p>
+            <a:endParaRPr lang="en-US"/>
+          </a:p>
+        </p:txBody>
       </p:sp>
       <p:pic>
         <p:nvPicPr>
@@ -13387,6 +14026,13 @@
             </a:outerShdw>
           </a:effectLst>
         </p:spPr>
+        <p:txBody>
+          <a:bodyPr/>
+          <a:lstStyle/>
+          <a:p>
+            <a:endParaRPr lang="en-US"/>
+          </a:p>
+        </p:txBody>
       </p:sp>
       <p:sp>
         <p:nvSpPr>
@@ -13407,6 +14053,13 @@
           </a:solidFill>
           <a:ln/>
         </p:spPr>
+        <p:txBody>
+          <a:bodyPr/>
+          <a:lstStyle/>
+          <a:p>
+            <a:endParaRPr lang="en-US"/>
+          </a:p>
+        </p:txBody>
       </p:sp>
       <p:sp>
         <p:nvSpPr>
@@ -13510,6 +14163,13 @@
             <a:prstDash val="solid"/>
           </a:ln>
         </p:spPr>
+        <p:txBody>
+          <a:bodyPr/>
+          <a:lstStyle/>
+          <a:p>
+            <a:endParaRPr lang="en-US"/>
+          </a:p>
+        </p:txBody>
       </p:sp>
       <p:sp>
         <p:nvSpPr>
@@ -13530,6 +14190,13 @@
           </a:solidFill>
           <a:ln/>
         </p:spPr>
+        <p:txBody>
+          <a:bodyPr/>
+          <a:lstStyle/>
+          <a:p>
+            <a:endParaRPr lang="en-US"/>
+          </a:p>
+        </p:txBody>
       </p:sp>
       <p:sp>
         <p:nvSpPr>
@@ -13742,6 +14409,13 @@
           </a:solidFill>
           <a:ln/>
         </p:spPr>
+        <p:txBody>
+          <a:bodyPr/>
+          <a:lstStyle/>
+          <a:p>
+            <a:endParaRPr lang="en-US"/>
+          </a:p>
+        </p:txBody>
       </p:sp>
       <p:sp>
         <p:nvSpPr>
@@ -13891,6 +14565,13 @@
             </a:outerShdw>
           </a:effectLst>
         </p:spPr>
+        <p:txBody>
+          <a:bodyPr/>
+          <a:lstStyle/>
+          <a:p>
+            <a:endParaRPr lang="en-US"/>
+          </a:p>
+        </p:txBody>
       </p:sp>
       <p:sp>
         <p:nvSpPr>
@@ -13911,6 +14592,13 @@
           </a:solidFill>
           <a:ln/>
         </p:spPr>
+        <p:txBody>
+          <a:bodyPr/>
+          <a:lstStyle/>
+          <a:p>
+            <a:endParaRPr lang="en-US"/>
+          </a:p>
+        </p:txBody>
       </p:sp>
       <p:sp>
         <p:nvSpPr>
@@ -14066,6 +14754,13 @@
             </a:outerShdw>
           </a:effectLst>
         </p:spPr>
+        <p:txBody>
+          <a:bodyPr/>
+          <a:lstStyle/>
+          <a:p>
+            <a:endParaRPr lang="en-US"/>
+          </a:p>
+        </p:txBody>
       </p:sp>
       <p:sp>
         <p:nvSpPr>
@@ -14086,6 +14781,13 @@
           </a:solidFill>
           <a:ln/>
         </p:spPr>
+        <p:txBody>
+          <a:bodyPr/>
+          <a:lstStyle/>
+          <a:p>
+            <a:endParaRPr lang="en-US"/>
+          </a:p>
+        </p:txBody>
       </p:sp>
       <p:sp>
         <p:nvSpPr>
@@ -14241,6 +14943,13 @@
             </a:outerShdw>
           </a:effectLst>
         </p:spPr>
+        <p:txBody>
+          <a:bodyPr/>
+          <a:lstStyle/>
+          <a:p>
+            <a:endParaRPr lang="en-US"/>
+          </a:p>
+        </p:txBody>
       </p:sp>
       <p:sp>
         <p:nvSpPr>
@@ -14261,6 +14970,13 @@
           </a:solidFill>
           <a:ln/>
         </p:spPr>
+        <p:txBody>
+          <a:bodyPr/>
+          <a:lstStyle/>
+          <a:p>
+            <a:endParaRPr lang="en-US"/>
+          </a:p>
+        </p:txBody>
       </p:sp>
       <p:sp>
         <p:nvSpPr>
@@ -14416,6 +15132,13 @@
             </a:outerShdw>
           </a:effectLst>
         </p:spPr>
+        <p:txBody>
+          <a:bodyPr/>
+          <a:lstStyle/>
+          <a:p>
+            <a:endParaRPr lang="en-US"/>
+          </a:p>
+        </p:txBody>
       </p:sp>
       <p:sp>
         <p:nvSpPr>
@@ -14436,6 +15159,13 @@
           </a:solidFill>
           <a:ln/>
         </p:spPr>
+        <p:txBody>
+          <a:bodyPr/>
+          <a:lstStyle/>
+          <a:p>
+            <a:endParaRPr lang="en-US"/>
+          </a:p>
+        </p:txBody>
       </p:sp>
       <p:sp>
         <p:nvSpPr>
@@ -14591,6 +15321,13 @@
             </a:outerShdw>
           </a:effectLst>
         </p:spPr>
+        <p:txBody>
+          <a:bodyPr/>
+          <a:lstStyle/>
+          <a:p>
+            <a:endParaRPr lang="en-US"/>
+          </a:p>
+        </p:txBody>
       </p:sp>
       <p:sp>
         <p:nvSpPr>
@@ -14611,6 +15348,13 @@
           </a:solidFill>
           <a:ln/>
         </p:spPr>
+        <p:txBody>
+          <a:bodyPr/>
+          <a:lstStyle/>
+          <a:p>
+            <a:endParaRPr lang="en-US"/>
+          </a:p>
+        </p:txBody>
       </p:sp>
       <p:sp>
         <p:nvSpPr>
@@ -14766,6 +15510,13 @@
             </a:outerShdw>
           </a:effectLst>
         </p:spPr>
+        <p:txBody>
+          <a:bodyPr/>
+          <a:lstStyle/>
+          <a:p>
+            <a:endParaRPr lang="en-US"/>
+          </a:p>
+        </p:txBody>
       </p:sp>
       <p:sp>
         <p:nvSpPr>
@@ -14786,6 +15537,13 @@
           </a:solidFill>
           <a:ln/>
         </p:spPr>
+        <p:txBody>
+          <a:bodyPr/>
+          <a:lstStyle/>
+          <a:p>
+            <a:endParaRPr lang="en-US"/>
+          </a:p>
+        </p:txBody>
       </p:sp>
       <p:sp>
         <p:nvSpPr>
@@ -15040,6 +15798,13 @@
           </a:solidFill>
           <a:ln/>
         </p:spPr>
+        <p:txBody>
+          <a:bodyPr/>
+          <a:lstStyle/>
+          <a:p>
+            <a:endParaRPr lang="en-US"/>
+          </a:p>
+        </p:txBody>
       </p:sp>
       <p:sp>
         <p:nvSpPr>
@@ -15189,6 +15954,13 @@
             </a:outerShdw>
           </a:effectLst>
         </p:spPr>
+        <p:txBody>
+          <a:bodyPr/>
+          <a:lstStyle/>
+          <a:p>
+            <a:endParaRPr lang="en-US"/>
+          </a:p>
+        </p:txBody>
       </p:sp>
       <p:sp>
         <p:nvSpPr>
@@ -15209,6 +15981,13 @@
           </a:solidFill>
           <a:ln/>
         </p:spPr>
+        <p:txBody>
+          <a:bodyPr/>
+          <a:lstStyle/>
+          <a:p>
+            <a:endParaRPr lang="en-US"/>
+          </a:p>
+        </p:txBody>
       </p:sp>
       <p:sp>
         <p:nvSpPr>
@@ -15355,6 +16134,13 @@
             <a:prstDash val="solid"/>
           </a:ln>
         </p:spPr>
+        <p:txBody>
+          <a:bodyPr/>
+          <a:lstStyle/>
+          <a:p>
+            <a:endParaRPr lang="en-US"/>
+          </a:p>
+        </p:txBody>
       </p:sp>
       <p:sp>
         <p:nvSpPr>
@@ -15426,6 +16212,13 @@
             </a:outerShdw>
           </a:effectLst>
         </p:spPr>
+        <p:txBody>
+          <a:bodyPr/>
+          <a:lstStyle/>
+          <a:p>
+            <a:endParaRPr lang="en-US"/>
+          </a:p>
+        </p:txBody>
       </p:sp>
       <p:sp>
         <p:nvSpPr>
@@ -15446,6 +16239,13 @@
           </a:solidFill>
           <a:ln/>
         </p:spPr>
+        <p:txBody>
+          <a:bodyPr/>
+          <a:lstStyle/>
+          <a:p>
+            <a:endParaRPr lang="en-US"/>
+          </a:p>
+        </p:txBody>
       </p:sp>
       <p:sp>
         <p:nvSpPr>
@@ -15592,6 +16392,13 @@
             <a:prstDash val="solid"/>
           </a:ln>
         </p:spPr>
+        <p:txBody>
+          <a:bodyPr/>
+          <a:lstStyle/>
+          <a:p>
+            <a:endParaRPr lang="en-US"/>
+          </a:p>
+        </p:txBody>
       </p:sp>
       <p:sp>
         <p:nvSpPr>
@@ -15663,6 +16470,13 @@
             </a:outerShdw>
           </a:effectLst>
         </p:spPr>
+        <p:txBody>
+          <a:bodyPr/>
+          <a:lstStyle/>
+          <a:p>
+            <a:endParaRPr lang="en-US"/>
+          </a:p>
+        </p:txBody>
       </p:sp>
       <p:sp>
         <p:nvSpPr>
@@ -15683,6 +16497,13 @@
           </a:solidFill>
           <a:ln/>
         </p:spPr>
+        <p:txBody>
+          <a:bodyPr/>
+          <a:lstStyle/>
+          <a:p>
+            <a:endParaRPr lang="en-US"/>
+          </a:p>
+        </p:txBody>
       </p:sp>
       <p:sp>
         <p:nvSpPr>
@@ -15829,6 +16650,13 @@
             <a:prstDash val="solid"/>
           </a:ln>
         </p:spPr>
+        <p:txBody>
+          <a:bodyPr/>
+          <a:lstStyle/>
+          <a:p>
+            <a:endParaRPr lang="en-US"/>
+          </a:p>
+        </p:txBody>
       </p:sp>
       <p:sp>
         <p:nvSpPr>
@@ -15900,6 +16728,13 @@
             </a:outerShdw>
           </a:effectLst>
         </p:spPr>
+        <p:txBody>
+          <a:bodyPr/>
+          <a:lstStyle/>
+          <a:p>
+            <a:endParaRPr lang="en-US"/>
+          </a:p>
+        </p:txBody>
       </p:sp>
       <p:sp>
         <p:nvSpPr>
@@ -15920,6 +16755,13 @@
           </a:solidFill>
           <a:ln/>
         </p:spPr>
+        <p:txBody>
+          <a:bodyPr/>
+          <a:lstStyle/>
+          <a:p>
+            <a:endParaRPr lang="en-US"/>
+          </a:p>
+        </p:txBody>
       </p:sp>
       <p:sp>
         <p:nvSpPr>
@@ -16066,6 +16908,13 @@
             <a:prstDash val="solid"/>
           </a:ln>
         </p:spPr>
+        <p:txBody>
+          <a:bodyPr/>
+          <a:lstStyle/>
+          <a:p>
+            <a:endParaRPr lang="en-US"/>
+          </a:p>
+        </p:txBody>
       </p:sp>
       <p:sp>
         <p:nvSpPr>
@@ -16236,6 +17085,13 @@
           </a:solidFill>
           <a:ln/>
         </p:spPr>
+        <p:txBody>
+          <a:bodyPr/>
+          <a:lstStyle/>
+          <a:p>
+            <a:endParaRPr lang="en-US"/>
+          </a:p>
+        </p:txBody>
       </p:sp>
       <p:sp>
         <p:nvSpPr>
@@ -16373,6 +17229,13 @@
           </a:solidFill>
           <a:ln/>
         </p:spPr>
+        <p:txBody>
+          <a:bodyPr/>
+          <a:lstStyle/>
+          <a:p>
+            <a:endParaRPr lang="en-US"/>
+          </a:p>
+        </p:txBody>
       </p:sp>
       <p:sp>
         <p:nvSpPr>
@@ -16476,6 +17339,13 @@
             <a:prstDash val="solid"/>
           </a:ln>
         </p:spPr>
+        <p:txBody>
+          <a:bodyPr/>
+          <a:lstStyle/>
+          <a:p>
+            <a:endParaRPr lang="en-US"/>
+          </a:p>
+        </p:txBody>
       </p:sp>
       <p:sp>
         <p:nvSpPr>
@@ -16579,6 +17449,13 @@
             <a:prstDash val="solid"/>
           </a:ln>
         </p:spPr>
+        <p:txBody>
+          <a:bodyPr/>
+          <a:lstStyle/>
+          <a:p>
+            <a:endParaRPr lang="en-US"/>
+          </a:p>
+        </p:txBody>
       </p:sp>
       <p:sp>
         <p:nvSpPr>
@@ -16682,6 +17559,13 @@
             <a:prstDash val="solid"/>
           </a:ln>
         </p:spPr>
+        <p:txBody>
+          <a:bodyPr/>
+          <a:lstStyle/>
+          <a:p>
+            <a:endParaRPr lang="en-US"/>
+          </a:p>
+        </p:txBody>
       </p:sp>
       <p:sp>
         <p:nvSpPr>
@@ -16785,6 +17669,13 @@
             <a:prstDash val="solid"/>
           </a:ln>
         </p:spPr>
+        <p:txBody>
+          <a:bodyPr/>
+          <a:lstStyle/>
+          <a:p>
+            <a:endParaRPr lang="en-US"/>
+          </a:p>
+        </p:txBody>
       </p:sp>
       <p:sp>
         <p:nvSpPr>
@@ -16888,6 +17779,13 @@
             <a:prstDash val="solid"/>
           </a:ln>
         </p:spPr>
+        <p:txBody>
+          <a:bodyPr/>
+          <a:lstStyle/>
+          <a:p>
+            <a:endParaRPr lang="en-US"/>
+          </a:p>
+        </p:txBody>
       </p:sp>
       <p:sp>
         <p:nvSpPr>
@@ -16991,6 +17889,13 @@
             <a:prstDash val="solid"/>
           </a:ln>
         </p:spPr>
+        <p:txBody>
+          <a:bodyPr/>
+          <a:lstStyle/>
+          <a:p>
+            <a:endParaRPr lang="en-US"/>
+          </a:p>
+        </p:txBody>
       </p:sp>
       <p:sp>
         <p:nvSpPr>
@@ -17094,6 +17999,13 @@
             <a:prstDash val="solid"/>
           </a:ln>
         </p:spPr>
+        <p:txBody>
+          <a:bodyPr/>
+          <a:lstStyle/>
+          <a:p>
+            <a:endParaRPr lang="en-US"/>
+          </a:p>
+        </p:txBody>
       </p:sp>
       <p:sp>
         <p:nvSpPr>
@@ -17197,6 +18109,13 @@
             <a:prstDash val="solid"/>
           </a:ln>
         </p:spPr>
+        <p:txBody>
+          <a:bodyPr/>
+          <a:lstStyle/>
+          <a:p>
+            <a:endParaRPr lang="en-US"/>
+          </a:p>
+        </p:txBody>
       </p:sp>
       <p:sp>
         <p:nvSpPr>
@@ -17300,6 +18219,13 @@
             <a:prstDash val="solid"/>
           </a:ln>
         </p:spPr>
+        <p:txBody>
+          <a:bodyPr/>
+          <a:lstStyle/>
+          <a:p>
+            <a:endParaRPr lang="en-US"/>
+          </a:p>
+        </p:txBody>
       </p:sp>
       <p:sp>
         <p:nvSpPr>
@@ -17551,6 +18477,13 @@
           </a:solidFill>
           <a:ln/>
         </p:spPr>
+        <p:txBody>
+          <a:bodyPr/>
+          <a:lstStyle/>
+          <a:p>
+            <a:endParaRPr lang="en-US"/>
+          </a:p>
+        </p:txBody>
       </p:sp>
       <p:sp>
         <p:nvSpPr>
@@ -17571,6 +18504,13 @@
           </a:solidFill>
           <a:ln/>
         </p:spPr>
+        <p:txBody>
+          <a:bodyPr/>
+          <a:lstStyle/>
+          <a:p>
+            <a:endParaRPr lang="en-US"/>
+          </a:p>
+        </p:txBody>
       </p:sp>
       <p:sp>
         <p:nvSpPr>
@@ -17591,6 +18531,13 @@
           </a:solidFill>
           <a:ln/>
         </p:spPr>
+        <p:txBody>
+          <a:bodyPr/>
+          <a:lstStyle/>
+          <a:p>
+            <a:endParaRPr lang="en-US"/>
+          </a:p>
+        </p:txBody>
       </p:sp>
       <p:sp>
         <p:nvSpPr>
@@ -17611,6 +18558,13 @@
           </a:solidFill>
           <a:ln/>
         </p:spPr>
+        <p:txBody>
+          <a:bodyPr/>
+          <a:lstStyle/>
+          <a:p>
+            <a:endParaRPr lang="en-US"/>
+          </a:p>
+        </p:txBody>
       </p:sp>
       <p:sp>
         <p:nvSpPr>
@@ -17631,6 +18585,13 @@
           </a:solidFill>
           <a:ln/>
         </p:spPr>
+        <p:txBody>
+          <a:bodyPr/>
+          <a:lstStyle/>
+          <a:p>
+            <a:endParaRPr lang="en-US"/>
+          </a:p>
+        </p:txBody>
       </p:sp>
       <p:sp>
         <p:nvSpPr>
@@ -17651,6 +18612,13 @@
           </a:solidFill>
           <a:ln/>
         </p:spPr>
+        <p:txBody>
+          <a:bodyPr/>
+          <a:lstStyle/>
+          <a:p>
+            <a:endParaRPr lang="en-US"/>
+          </a:p>
+        </p:txBody>
       </p:sp>
       <p:sp>
         <p:nvSpPr>
@@ -17671,6 +18639,13 @@
           </a:solidFill>
           <a:ln/>
         </p:spPr>
+        <p:txBody>
+          <a:bodyPr/>
+          <a:lstStyle/>
+          <a:p>
+            <a:endParaRPr lang="en-US"/>
+          </a:p>
+        </p:txBody>
       </p:sp>
       <p:sp>
         <p:nvSpPr>
@@ -17691,6 +18666,13 @@
           </a:solidFill>
           <a:ln/>
         </p:spPr>
+        <p:txBody>
+          <a:bodyPr/>
+          <a:lstStyle/>
+          <a:p>
+            <a:endParaRPr lang="en-US"/>
+          </a:p>
+        </p:txBody>
       </p:sp>
       <p:sp>
         <p:nvSpPr>
@@ -17711,6 +18693,13 @@
           </a:solidFill>
           <a:ln/>
         </p:spPr>
+        <p:txBody>
+          <a:bodyPr/>
+          <a:lstStyle/>
+          <a:p>
+            <a:endParaRPr lang="en-US"/>
+          </a:p>
+        </p:txBody>
       </p:sp>
       <p:sp>
         <p:nvSpPr>
@@ -17731,6 +18720,13 @@
           </a:solidFill>
           <a:ln/>
         </p:spPr>
+        <p:txBody>
+          <a:bodyPr/>
+          <a:lstStyle/>
+          <a:p>
+            <a:endParaRPr lang="en-US"/>
+          </a:p>
+        </p:txBody>
       </p:sp>
       <p:sp>
         <p:nvSpPr>
@@ -17751,6 +18747,13 @@
           </a:solidFill>
           <a:ln/>
         </p:spPr>
+        <p:txBody>
+          <a:bodyPr/>
+          <a:lstStyle/>
+          <a:p>
+            <a:endParaRPr lang="en-US"/>
+          </a:p>
+        </p:txBody>
       </p:sp>
       <p:sp>
         <p:nvSpPr>
@@ -17771,6 +18774,13 @@
           </a:solidFill>
           <a:ln/>
         </p:spPr>
+        <p:txBody>
+          <a:bodyPr/>
+          <a:lstStyle/>
+          <a:p>
+            <a:endParaRPr lang="en-US"/>
+          </a:p>
+        </p:txBody>
       </p:sp>
       <p:sp>
         <p:nvSpPr>
@@ -17791,6 +18801,13 @@
           </a:solidFill>
           <a:ln/>
         </p:spPr>
+        <p:txBody>
+          <a:bodyPr/>
+          <a:lstStyle/>
+          <a:p>
+            <a:endParaRPr lang="en-US"/>
+          </a:p>
+        </p:txBody>
       </p:sp>
       <p:sp>
         <p:nvSpPr>
@@ -17811,6 +18828,13 @@
           </a:solidFill>
           <a:ln/>
         </p:spPr>
+        <p:txBody>
+          <a:bodyPr/>
+          <a:lstStyle/>
+          <a:p>
+            <a:endParaRPr lang="en-US"/>
+          </a:p>
+        </p:txBody>
       </p:sp>
       <p:sp>
         <p:nvSpPr>
@@ -17831,6 +18855,13 @@
           </a:solidFill>
           <a:ln/>
         </p:spPr>
+        <p:txBody>
+          <a:bodyPr/>
+          <a:lstStyle/>
+          <a:p>
+            <a:endParaRPr lang="en-US"/>
+          </a:p>
+        </p:txBody>
       </p:sp>
       <p:sp>
         <p:nvSpPr>
@@ -17851,6 +18882,13 @@
           </a:solidFill>
           <a:ln/>
         </p:spPr>
+        <p:txBody>
+          <a:bodyPr/>
+          <a:lstStyle/>
+          <a:p>
+            <a:endParaRPr lang="en-US"/>
+          </a:p>
+        </p:txBody>
       </p:sp>
       <p:sp>
         <p:nvSpPr>
@@ -17871,6 +18909,13 @@
           </a:solidFill>
           <a:ln/>
         </p:spPr>
+        <p:txBody>
+          <a:bodyPr/>
+          <a:lstStyle/>
+          <a:p>
+            <a:endParaRPr lang="en-US"/>
+          </a:p>
+        </p:txBody>
       </p:sp>
       <p:sp>
         <p:nvSpPr>
@@ -17891,6 +18936,13 @@
           </a:solidFill>
           <a:ln/>
         </p:spPr>
+        <p:txBody>
+          <a:bodyPr/>
+          <a:lstStyle/>
+          <a:p>
+            <a:endParaRPr lang="en-US"/>
+          </a:p>
+        </p:txBody>
       </p:sp>
       <p:sp>
         <p:nvSpPr>
@@ -17911,6 +18963,13 @@
           </a:solidFill>
           <a:ln/>
         </p:spPr>
+        <p:txBody>
+          <a:bodyPr/>
+          <a:lstStyle/>
+          <a:p>
+            <a:endParaRPr lang="en-US"/>
+          </a:p>
+        </p:txBody>
       </p:sp>
       <p:sp>
         <p:nvSpPr>
@@ -17931,6 +18990,13 @@
           </a:solidFill>
           <a:ln/>
         </p:spPr>
+        <p:txBody>
+          <a:bodyPr/>
+          <a:lstStyle/>
+          <a:p>
+            <a:endParaRPr lang="en-US"/>
+          </a:p>
+        </p:txBody>
       </p:sp>
       <p:sp>
         <p:nvSpPr>
@@ -17951,6 +19017,13 @@
           </a:solidFill>
           <a:ln/>
         </p:spPr>
+        <p:txBody>
+          <a:bodyPr/>
+          <a:lstStyle/>
+          <a:p>
+            <a:endParaRPr lang="en-US"/>
+          </a:p>
+        </p:txBody>
       </p:sp>
       <p:sp>
         <p:nvSpPr>
@@ -17971,6 +19044,13 @@
           </a:solidFill>
           <a:ln/>
         </p:spPr>
+        <p:txBody>
+          <a:bodyPr/>
+          <a:lstStyle/>
+          <a:p>
+            <a:endParaRPr lang="en-US"/>
+          </a:p>
+        </p:txBody>
       </p:sp>
       <p:sp>
         <p:nvSpPr>
@@ -17991,6 +19071,13 @@
           </a:solidFill>
           <a:ln/>
         </p:spPr>
+        <p:txBody>
+          <a:bodyPr/>
+          <a:lstStyle/>
+          <a:p>
+            <a:endParaRPr lang="en-US"/>
+          </a:p>
+        </p:txBody>
       </p:sp>
       <p:sp>
         <p:nvSpPr>
@@ -18011,6 +19098,13 @@
           </a:solidFill>
           <a:ln/>
         </p:spPr>
+        <p:txBody>
+          <a:bodyPr/>
+          <a:lstStyle/>
+          <a:p>
+            <a:endParaRPr lang="en-US"/>
+          </a:p>
+        </p:txBody>
       </p:sp>
       <p:sp>
         <p:nvSpPr>
@@ -18031,6 +19125,13 @@
           </a:solidFill>
           <a:ln/>
         </p:spPr>
+        <p:txBody>
+          <a:bodyPr/>
+          <a:lstStyle/>
+          <a:p>
+            <a:endParaRPr lang="en-US"/>
+          </a:p>
+        </p:txBody>
       </p:sp>
       <p:sp>
         <p:nvSpPr>
@@ -18051,6 +19152,13 @@
           </a:solidFill>
           <a:ln/>
         </p:spPr>
+        <p:txBody>
+          <a:bodyPr/>
+          <a:lstStyle/>
+          <a:p>
+            <a:endParaRPr lang="en-US"/>
+          </a:p>
+        </p:txBody>
       </p:sp>
       <p:sp>
         <p:nvSpPr>
@@ -18071,6 +19179,13 @@
           </a:solidFill>
           <a:ln/>
         </p:spPr>
+        <p:txBody>
+          <a:bodyPr/>
+          <a:lstStyle/>
+          <a:p>
+            <a:endParaRPr lang="en-US"/>
+          </a:p>
+        </p:txBody>
       </p:sp>
       <p:sp>
         <p:nvSpPr>
@@ -18091,6 +19206,13 @@
           </a:solidFill>
           <a:ln/>
         </p:spPr>
+        <p:txBody>
+          <a:bodyPr/>
+          <a:lstStyle/>
+          <a:p>
+            <a:endParaRPr lang="en-US"/>
+          </a:p>
+        </p:txBody>
       </p:sp>
       <p:sp>
         <p:nvSpPr>
@@ -18111,6 +19233,13 @@
           </a:solidFill>
           <a:ln/>
         </p:spPr>
+        <p:txBody>
+          <a:bodyPr/>
+          <a:lstStyle/>
+          <a:p>
+            <a:endParaRPr lang="en-US"/>
+          </a:p>
+        </p:txBody>
       </p:sp>
       <p:sp>
         <p:nvSpPr>
@@ -18131,6 +19260,13 @@
           </a:solidFill>
           <a:ln/>
         </p:spPr>
+        <p:txBody>
+          <a:bodyPr/>
+          <a:lstStyle/>
+          <a:p>
+            <a:endParaRPr lang="en-US"/>
+          </a:p>
+        </p:txBody>
       </p:sp>
       <p:sp>
         <p:nvSpPr>
@@ -18151,6 +19287,13 @@
           </a:solidFill>
           <a:ln/>
         </p:spPr>
+        <p:txBody>
+          <a:bodyPr/>
+          <a:lstStyle/>
+          <a:p>
+            <a:endParaRPr lang="en-US"/>
+          </a:p>
+        </p:txBody>
       </p:sp>
       <p:sp>
         <p:nvSpPr>
@@ -18171,6 +19314,13 @@
           </a:solidFill>
           <a:ln/>
         </p:spPr>
+        <p:txBody>
+          <a:bodyPr/>
+          <a:lstStyle/>
+          <a:p>
+            <a:endParaRPr lang="en-US"/>
+          </a:p>
+        </p:txBody>
       </p:sp>
       <p:sp>
         <p:nvSpPr>
@@ -18191,6 +19341,13 @@
           </a:solidFill>
           <a:ln/>
         </p:spPr>
+        <p:txBody>
+          <a:bodyPr/>
+          <a:lstStyle/>
+          <a:p>
+            <a:endParaRPr lang="en-US"/>
+          </a:p>
+        </p:txBody>
       </p:sp>
       <p:sp>
         <p:nvSpPr>
@@ -18211,6 +19368,13 @@
           </a:solidFill>
           <a:ln/>
         </p:spPr>
+        <p:txBody>
+          <a:bodyPr/>
+          <a:lstStyle/>
+          <a:p>
+            <a:endParaRPr lang="en-US"/>
+          </a:p>
+        </p:txBody>
       </p:sp>
       <p:sp>
         <p:nvSpPr>
@@ -18231,6 +19395,13 @@
           </a:solidFill>
           <a:ln/>
         </p:spPr>
+        <p:txBody>
+          <a:bodyPr/>
+          <a:lstStyle/>
+          <a:p>
+            <a:endParaRPr lang="en-US"/>
+          </a:p>
+        </p:txBody>
       </p:sp>
       <p:sp>
         <p:nvSpPr>
@@ -18240,8 +19411,8 @@
         </p:nvSpPr>
         <p:spPr>
           <a:xfrm>
-            <a:off x="548640" y="1828800"/>
-            <a:ext cx="8229600" cy="1005840"/>
+            <a:off x="548640" y="1828799"/>
+            <a:ext cx="8844742" cy="1874521"/>
           </a:xfrm>
           <a:prstGeom prst="rect">
             <a:avLst/>
@@ -18295,8 +19466,63 @@
             <a:pPr marL="0" indent="0">
               <a:buNone/>
             </a:pPr>
-            <a:r>
-              <a:rPr lang="en-US" sz="1900" i="1" dirty="0">
+            <a:endParaRPr lang="en-US" sz="1900" dirty="0"/>
+          </a:p>
+        </p:txBody>
+      </p:sp>
+      <p:sp>
+        <p:nvSpPr>
+          <p:cNvPr id="39" name="Shape 37"/>
+          <p:cNvSpPr/>
+          <p:nvPr/>
+        </p:nvSpPr>
+        <p:spPr>
+          <a:xfrm>
+            <a:off x="0" y="3703320"/>
+            <a:ext cx="12191695" cy="16459"/>
+          </a:xfrm>
+          <a:prstGeom prst="rect">
+            <a:avLst/>
+          </a:prstGeom>
+          <a:solidFill>
+            <a:srgbClr val="D97706"/>
+          </a:solidFill>
+          <a:ln/>
+        </p:spPr>
+        <p:txBody>
+          <a:bodyPr/>
+          <a:lstStyle/>
+          <a:p>
+            <a:endParaRPr lang="en-US"/>
+          </a:p>
+        </p:txBody>
+      </p:sp>
+      <p:sp>
+        <p:nvSpPr>
+          <p:cNvPr id="40" name="Text 38"/>
+          <p:cNvSpPr/>
+          <p:nvPr/>
+        </p:nvSpPr>
+        <p:spPr>
+          <a:xfrm>
+            <a:off x="548640" y="4023360"/>
+            <a:ext cx="10515600" cy="274320"/>
+          </a:xfrm>
+          <a:prstGeom prst="rect">
+            <a:avLst/>
+          </a:prstGeom>
+          <a:noFill/>
+          <a:ln/>
+        </p:spPr>
+        <p:txBody>
+          <a:bodyPr wrap="square" lIns="0" tIns="0" rIns="0" bIns="0" rtlCol="0" anchor="ctr"/>
+          <a:lstStyle/>
+          <a:p>
+            <a:pPr marL="0" indent="0">
+              <a:buNone/>
+            </a:pPr>
+            <a:r>
+              <a:rPr lang="en-US" sz="1250" dirty="0">
                 <a:solidFill>
                   <a:srgbClr val="C9D9E8"/>
                 </a:solidFill>
@@ -18304,42 +19530,22 @@
                 <a:ea typeface="Calibri" pitchFamily="34" charset="-122"/>
                 <a:cs typeface="Calibri" pitchFamily="34" charset="-120"/>
               </a:rPr>
-              <a:t>Questions &amp; Discussion</a:t>
-            </a:r>
-            <a:endParaRPr lang="en-US" sz="1900" dirty="0"/>
-          </a:p>
-        </p:txBody>
-      </p:sp>
-      <p:sp>
-        <p:nvSpPr>
-          <p:cNvPr id="39" name="Shape 37"/>
-          <p:cNvSpPr/>
-          <p:nvPr/>
-        </p:nvSpPr>
-        <p:spPr>
-          <a:xfrm>
-            <a:off x="0" y="3703320"/>
-            <a:ext cx="12191695" cy="16459"/>
-          </a:xfrm>
-          <a:prstGeom prst="rect">
-            <a:avLst/>
-          </a:prstGeom>
-          <a:solidFill>
-            <a:srgbClr val="D97706"/>
-          </a:solidFill>
-          <a:ln/>
-        </p:spPr>
-      </p:sp>
-      <p:sp>
-        <p:nvSpPr>
-          <p:cNvPr id="40" name="Text 38"/>
-          <p:cNvSpPr/>
-          <p:nvPr/>
-        </p:nvSpPr>
-        <p:spPr>
-          <a:xfrm>
-            <a:off x="548640" y="4023360"/>
-            <a:ext cx="10515600" cy="274320"/>
+              <a:t>Data Source: Olist Brazilian E-Commerce Public Dataset (Kaggle)  |  Analysis Period: Jan 2017 – Aug 2018</a:t>
+            </a:r>
+            <a:endParaRPr lang="en-US" sz="1250" dirty="0"/>
+          </a:p>
+        </p:txBody>
+      </p:sp>
+      <p:sp>
+        <p:nvSpPr>
+          <p:cNvPr id="41" name="Text 39"/>
+          <p:cNvSpPr/>
+          <p:nvPr/>
+        </p:nvSpPr>
+        <p:spPr>
+          <a:xfrm>
+            <a:off x="548640" y="4370832"/>
+            <a:ext cx="8686800" cy="274320"/>
           </a:xfrm>
           <a:prstGeom prst="rect">
             <a:avLst/>
@@ -18351,9 +19557,6 @@
           <a:bodyPr wrap="square" lIns="0" tIns="0" rIns="0" bIns="0" rtlCol="0" anchor="ctr"/>
           <a:lstStyle/>
           <a:p>
-            <a:pPr marL="0" indent="0">
-              <a:buNone/>
-            </a:pPr>
             <a:r>
               <a:rPr lang="en-US" sz="1250" dirty="0">
                 <a:solidFill>
@@ -18363,46 +19566,7 @@
                 <a:ea typeface="Calibri" pitchFamily="34" charset="-122"/>
                 <a:cs typeface="Calibri" pitchFamily="34" charset="-120"/>
               </a:rPr>
-              <a:t>Data Source: Olist Brazilian E-Commerce Public Dataset (Kaggle)  |  Analysis Period: Jan 2017 – Aug 2018</a:t>
-            </a:r>
-            <a:endParaRPr lang="en-US" sz="1250" dirty="0"/>
-          </a:p>
-        </p:txBody>
-      </p:sp>
-      <p:sp>
-        <p:nvSpPr>
-          <p:cNvPr id="41" name="Text 39"/>
-          <p:cNvSpPr/>
-          <p:nvPr/>
-        </p:nvSpPr>
-        <p:spPr>
-          <a:xfrm>
-            <a:off x="548640" y="4370832"/>
-            <a:ext cx="8686800" cy="274320"/>
-          </a:xfrm>
-          <a:prstGeom prst="rect">
-            <a:avLst/>
-          </a:prstGeom>
-          <a:noFill/>
-          <a:ln/>
-        </p:spPr>
-        <p:txBody>
-          <a:bodyPr wrap="square" lIns="0" tIns="0" rIns="0" bIns="0" rtlCol="0" anchor="ctr"/>
-          <a:lstStyle/>
-          <a:p>
-            <a:pPr marL="0" indent="0">
-              <a:buNone/>
-            </a:pPr>
-            <a:r>
-              <a:rPr lang="en-US" sz="1250" dirty="0">
-                <a:solidFill>
-                  <a:srgbClr val="C9D9E8"/>
-                </a:solidFill>
-                <a:latin typeface="Calibri" pitchFamily="34" charset="0"/>
-                <a:ea typeface="Calibri" pitchFamily="34" charset="-122"/>
-                <a:cs typeface="Calibri" pitchFamily="34" charset="-120"/>
-              </a:rPr>
-              <a:t>Analysis performed with Python: pandas, NumPy, Matplotlib, Seaborn</a:t>
+              <a:t>Analysis performed using Python, Pandas, NumPy, Matplotlib, and Seaborn.</a:t>
             </a:r>
             <a:endParaRPr lang="en-US" sz="1250" dirty="0"/>
           </a:p>
@@ -18432,6 +19596,13 @@
             <a:prstDash val="solid"/>
           </a:ln>
         </p:spPr>
+        <p:txBody>
+          <a:bodyPr/>
+          <a:lstStyle/>
+          <a:p>
+            <a:endParaRPr lang="en-US"/>
+          </a:p>
+        </p:txBody>
       </p:sp>
       <p:sp>
         <p:nvSpPr>
@@ -18546,7 +19717,7 @@
                 <a:ea typeface="Calibri" pitchFamily="34" charset="-122"/>
                 <a:cs typeface="Calibri" pitchFamily="34" charset="-120"/>
               </a:rPr>
-              <a:t>: </a:t>
+              <a:t> </a:t>
             </a:r>
           </a:p>
           <a:p>
@@ -18609,7 +19780,7 @@
                   <a:schemeClr val="bg1"/>
                 </a:solidFill>
               </a:rPr>
-              <a:t> :</a:t>
+              <a:t> </a:t>
             </a:r>
           </a:p>
           <a:p>
@@ -18619,21 +19790,8 @@
                   <a:schemeClr val="bg1"/>
                 </a:solidFill>
               </a:rPr>
-              <a:t> 	Mariam </a:t>
-            </a:r>
-            <a:r>
-              <a:rPr lang="en-US" b="1" dirty="0" err="1">
-                <a:solidFill>
-                  <a:schemeClr val="bg1"/>
-                </a:solidFill>
-              </a:rPr>
-              <a:t>Metawe’e</a:t>
-            </a:r>
-            <a:endParaRPr lang="en-US" b="1" dirty="0">
-              <a:solidFill>
-                <a:schemeClr val="bg1"/>
-              </a:solidFill>
-            </a:endParaRPr>
+              <a:t> 	Mariam Metawe’e</a:t>
+            </a:r>
           </a:p>
           <a:p>
             <a:r>
@@ -18652,7 +19810,7 @@
                   <a:schemeClr val="bg1"/>
                 </a:solidFill>
               </a:rPr>
-              <a:t> :</a:t>
+              <a:t> </a:t>
             </a:r>
           </a:p>
           <a:p>
@@ -18722,6 +19880,13 @@
           </a:solidFill>
           <a:ln/>
         </p:spPr>
+        <p:txBody>
+          <a:bodyPr/>
+          <a:lstStyle/>
+          <a:p>
+            <a:endParaRPr lang="en-US"/>
+          </a:p>
+        </p:txBody>
       </p:sp>
       <p:sp>
         <p:nvSpPr>
@@ -18820,6 +19985,13 @@
           </a:solidFill>
           <a:ln/>
         </p:spPr>
+        <p:txBody>
+          <a:bodyPr/>
+          <a:lstStyle/>
+          <a:p>
+            <a:endParaRPr lang="en-US"/>
+          </a:p>
+        </p:txBody>
       </p:sp>
       <p:sp>
         <p:nvSpPr>
@@ -18960,6 +20132,13 @@
             <a:prstDash val="solid"/>
           </a:ln>
         </p:spPr>
+        <p:txBody>
+          <a:bodyPr/>
+          <a:lstStyle/>
+          <a:p>
+            <a:endParaRPr lang="en-US"/>
+          </a:p>
+        </p:txBody>
       </p:sp>
       <p:sp>
         <p:nvSpPr>
@@ -18980,6 +20159,13 @@
           </a:solidFill>
           <a:ln/>
         </p:spPr>
+        <p:txBody>
+          <a:bodyPr/>
+          <a:lstStyle/>
+          <a:p>
+            <a:endParaRPr lang="en-US"/>
+          </a:p>
+        </p:txBody>
       </p:sp>
       <p:sp>
         <p:nvSpPr>
@@ -19120,6 +20306,13 @@
             <a:prstDash val="solid"/>
           </a:ln>
         </p:spPr>
+        <p:txBody>
+          <a:bodyPr/>
+          <a:lstStyle/>
+          <a:p>
+            <a:endParaRPr lang="en-US"/>
+          </a:p>
+        </p:txBody>
       </p:sp>
       <p:sp>
         <p:nvSpPr>
@@ -19140,6 +20333,13 @@
           </a:solidFill>
           <a:ln/>
         </p:spPr>
+        <p:txBody>
+          <a:bodyPr/>
+          <a:lstStyle/>
+          <a:p>
+            <a:endParaRPr lang="en-US"/>
+          </a:p>
+        </p:txBody>
       </p:sp>
       <p:sp>
         <p:nvSpPr>
@@ -19280,6 +20480,13 @@
             <a:prstDash val="solid"/>
           </a:ln>
         </p:spPr>
+        <p:txBody>
+          <a:bodyPr/>
+          <a:lstStyle/>
+          <a:p>
+            <a:endParaRPr lang="en-US"/>
+          </a:p>
+        </p:txBody>
       </p:sp>
       <p:sp>
         <p:nvSpPr>
@@ -19300,6 +20507,13 @@
           </a:solidFill>
           <a:ln/>
         </p:spPr>
+        <p:txBody>
+          <a:bodyPr/>
+          <a:lstStyle/>
+          <a:p>
+            <a:endParaRPr lang="en-US"/>
+          </a:p>
+        </p:txBody>
       </p:sp>
       <p:sp>
         <p:nvSpPr>
@@ -19440,6 +20654,13 @@
             <a:prstDash val="solid"/>
           </a:ln>
         </p:spPr>
+        <p:txBody>
+          <a:bodyPr/>
+          <a:lstStyle/>
+          <a:p>
+            <a:endParaRPr lang="en-US"/>
+          </a:p>
+        </p:txBody>
       </p:sp>
       <p:sp>
         <p:nvSpPr>
@@ -19460,6 +20681,13 @@
           </a:solidFill>
           <a:ln/>
         </p:spPr>
+        <p:txBody>
+          <a:bodyPr/>
+          <a:lstStyle/>
+          <a:p>
+            <a:endParaRPr lang="en-US"/>
+          </a:p>
+        </p:txBody>
       </p:sp>
       <p:sp>
         <p:nvSpPr>
@@ -19600,6 +20828,13 @@
             <a:prstDash val="solid"/>
           </a:ln>
         </p:spPr>
+        <p:txBody>
+          <a:bodyPr/>
+          <a:lstStyle/>
+          <a:p>
+            <a:endParaRPr lang="en-US"/>
+          </a:p>
+        </p:txBody>
       </p:sp>
       <p:sp>
         <p:nvSpPr>
@@ -19620,6 +20855,13 @@
           </a:solidFill>
           <a:ln/>
         </p:spPr>
+        <p:txBody>
+          <a:bodyPr/>
+          <a:lstStyle/>
+          <a:p>
+            <a:endParaRPr lang="en-US"/>
+          </a:p>
+        </p:txBody>
       </p:sp>
       <p:sp>
         <p:nvSpPr>
@@ -19760,6 +21002,13 @@
             <a:prstDash val="solid"/>
           </a:ln>
         </p:spPr>
+        <p:txBody>
+          <a:bodyPr/>
+          <a:lstStyle/>
+          <a:p>
+            <a:endParaRPr lang="en-US"/>
+          </a:p>
+        </p:txBody>
       </p:sp>
       <p:sp>
         <p:nvSpPr>
@@ -19780,6 +21029,13 @@
           </a:solidFill>
           <a:ln/>
         </p:spPr>
+        <p:txBody>
+          <a:bodyPr/>
+          <a:lstStyle/>
+          <a:p>
+            <a:endParaRPr lang="en-US"/>
+          </a:p>
+        </p:txBody>
       </p:sp>
       <p:sp>
         <p:nvSpPr>
@@ -19950,6 +21206,13 @@
           </a:solidFill>
           <a:ln/>
         </p:spPr>
+        <p:txBody>
+          <a:bodyPr/>
+          <a:lstStyle/>
+          <a:p>
+            <a:endParaRPr lang="en-US"/>
+          </a:p>
+        </p:txBody>
       </p:sp>
       <p:sp>
         <p:nvSpPr>
@@ -20159,6 +21422,13 @@
           </a:solidFill>
           <a:ln/>
         </p:spPr>
+        <p:txBody>
+          <a:bodyPr/>
+          <a:lstStyle/>
+          <a:p>
+            <a:endParaRPr lang="en-US"/>
+          </a:p>
+        </p:txBody>
       </p:sp>
       <p:sp>
         <p:nvSpPr>
@@ -20218,6 +21488,13 @@
           </a:solidFill>
           <a:ln/>
         </p:spPr>
+        <p:txBody>
+          <a:bodyPr/>
+          <a:lstStyle/>
+          <a:p>
+            <a:endParaRPr lang="en-US"/>
+          </a:p>
+        </p:txBody>
       </p:sp>
       <p:sp>
         <p:nvSpPr>
@@ -20289,6 +21566,13 @@
             </a:outerShdw>
           </a:effectLst>
         </p:spPr>
+        <p:txBody>
+          <a:bodyPr/>
+          <a:lstStyle/>
+          <a:p>
+            <a:endParaRPr lang="en-US"/>
+          </a:p>
+        </p:txBody>
       </p:sp>
       <p:sp>
         <p:nvSpPr>
@@ -20309,6 +21593,13 @@
           </a:solidFill>
           <a:ln/>
         </p:spPr>
+        <p:txBody>
+          <a:bodyPr/>
+          <a:lstStyle/>
+          <a:p>
+            <a:endParaRPr lang="en-US"/>
+          </a:p>
+        </p:txBody>
       </p:sp>
       <p:sp>
         <p:nvSpPr>
@@ -20419,6 +21710,13 @@
             </a:outerShdw>
           </a:effectLst>
         </p:spPr>
+        <p:txBody>
+          <a:bodyPr/>
+          <a:lstStyle/>
+          <a:p>
+            <a:endParaRPr lang="en-US"/>
+          </a:p>
+        </p:txBody>
       </p:sp>
       <p:sp>
         <p:nvSpPr>
@@ -20439,6 +21737,13 @@
           </a:solidFill>
           <a:ln/>
         </p:spPr>
+        <p:txBody>
+          <a:bodyPr/>
+          <a:lstStyle/>
+          <a:p>
+            <a:endParaRPr lang="en-US"/>
+          </a:p>
+        </p:txBody>
       </p:sp>
       <p:sp>
         <p:nvSpPr>
@@ -20549,6 +21854,13 @@
             </a:outerShdw>
           </a:effectLst>
         </p:spPr>
+        <p:txBody>
+          <a:bodyPr/>
+          <a:lstStyle/>
+          <a:p>
+            <a:endParaRPr lang="en-US"/>
+          </a:p>
+        </p:txBody>
       </p:sp>
       <p:sp>
         <p:nvSpPr>
@@ -20569,6 +21881,13 @@
           </a:solidFill>
           <a:ln/>
         </p:spPr>
+        <p:txBody>
+          <a:bodyPr/>
+          <a:lstStyle/>
+          <a:p>
+            <a:endParaRPr lang="en-US"/>
+          </a:p>
+        </p:txBody>
       </p:sp>
       <p:sp>
         <p:nvSpPr>
@@ -20672,6 +21991,13 @@
             <a:prstDash val="solid"/>
           </a:ln>
         </p:spPr>
+        <p:txBody>
+          <a:bodyPr/>
+          <a:lstStyle/>
+          <a:p>
+            <a:endParaRPr lang="en-US"/>
+          </a:p>
+        </p:txBody>
       </p:sp>
       <p:sp>
         <p:nvSpPr>
@@ -20692,6 +22018,13 @@
           </a:solidFill>
           <a:ln/>
         </p:spPr>
+        <p:txBody>
+          <a:bodyPr/>
+          <a:lstStyle/>
+          <a:p>
+            <a:endParaRPr lang="en-US"/>
+          </a:p>
+        </p:txBody>
       </p:sp>
       <p:sp>
         <p:nvSpPr>
@@ -20904,6 +22237,13 @@
           </a:solidFill>
           <a:ln/>
         </p:spPr>
+        <p:txBody>
+          <a:bodyPr/>
+          <a:lstStyle/>
+          <a:p>
+            <a:endParaRPr lang="en-US"/>
+          </a:p>
+        </p:txBody>
       </p:sp>
       <p:sp>
         <p:nvSpPr>
@@ -21069,6 +22409,13 @@
             </a:outerShdw>
           </a:effectLst>
         </p:spPr>
+        <p:txBody>
+          <a:bodyPr/>
+          <a:lstStyle/>
+          <a:p>
+            <a:endParaRPr lang="en-US"/>
+          </a:p>
+        </p:txBody>
       </p:sp>
       <p:sp>
         <p:nvSpPr>
@@ -21089,6 +22436,13 @@
           </a:solidFill>
           <a:ln/>
         </p:spPr>
+        <p:txBody>
+          <a:bodyPr/>
+          <a:lstStyle/>
+          <a:p>
+            <a:endParaRPr lang="en-US"/>
+          </a:p>
+        </p:txBody>
       </p:sp>
       <p:sp>
         <p:nvSpPr>
@@ -21199,6 +22553,13 @@
             </a:outerShdw>
           </a:effectLst>
         </p:spPr>
+        <p:txBody>
+          <a:bodyPr/>
+          <a:lstStyle/>
+          <a:p>
+            <a:endParaRPr lang="en-US"/>
+          </a:p>
+        </p:txBody>
       </p:sp>
       <p:sp>
         <p:nvSpPr>
@@ -21219,6 +22580,13 @@
           </a:solidFill>
           <a:ln/>
         </p:spPr>
+        <p:txBody>
+          <a:bodyPr/>
+          <a:lstStyle/>
+          <a:p>
+            <a:endParaRPr lang="en-US"/>
+          </a:p>
+        </p:txBody>
       </p:sp>
       <p:sp>
         <p:nvSpPr>
@@ -21322,6 +22690,13 @@
             <a:prstDash val="solid"/>
           </a:ln>
         </p:spPr>
+        <p:txBody>
+          <a:bodyPr/>
+          <a:lstStyle/>
+          <a:p>
+            <a:endParaRPr lang="en-US"/>
+          </a:p>
+        </p:txBody>
       </p:sp>
       <p:sp>
         <p:nvSpPr>
@@ -21342,6 +22717,13 @@
           </a:solidFill>
           <a:ln/>
         </p:spPr>
+        <p:txBody>
+          <a:bodyPr/>
+          <a:lstStyle/>
+          <a:p>
+            <a:endParaRPr lang="en-US"/>
+          </a:p>
+        </p:txBody>
       </p:sp>
       <p:sp>
         <p:nvSpPr>
@@ -21554,6 +22936,13 @@
           </a:solidFill>
           <a:ln/>
         </p:spPr>
+        <p:txBody>
+          <a:bodyPr/>
+          <a:lstStyle/>
+          <a:p>
+            <a:endParaRPr lang="en-US"/>
+          </a:p>
+        </p:txBody>
       </p:sp>
       <p:sp>
         <p:nvSpPr>
@@ -21719,6 +23108,13 @@
             </a:outerShdw>
           </a:effectLst>
         </p:spPr>
+        <p:txBody>
+          <a:bodyPr/>
+          <a:lstStyle/>
+          <a:p>
+            <a:endParaRPr lang="en-US"/>
+          </a:p>
+        </p:txBody>
       </p:sp>
       <p:sp>
         <p:nvSpPr>
@@ -21739,6 +23135,13 @@
           </a:solidFill>
           <a:ln/>
         </p:spPr>
+        <p:txBody>
+          <a:bodyPr/>
+          <a:lstStyle/>
+          <a:p>
+            <a:endParaRPr lang="en-US"/>
+          </a:p>
+        </p:txBody>
       </p:sp>
       <p:sp>
         <p:nvSpPr>
@@ -21849,6 +23252,13 @@
             </a:outerShdw>
           </a:effectLst>
         </p:spPr>
+        <p:txBody>
+          <a:bodyPr/>
+          <a:lstStyle/>
+          <a:p>
+            <a:endParaRPr lang="en-US"/>
+          </a:p>
+        </p:txBody>
       </p:sp>
       <p:sp>
         <p:nvSpPr>
@@ -21869,6 +23279,13 @@
           </a:solidFill>
           <a:ln/>
         </p:spPr>
+        <p:txBody>
+          <a:bodyPr/>
+          <a:lstStyle/>
+          <a:p>
+            <a:endParaRPr lang="en-US"/>
+          </a:p>
+        </p:txBody>
       </p:sp>
       <p:sp>
         <p:nvSpPr>
@@ -21979,6 +23396,13 @@
             </a:outerShdw>
           </a:effectLst>
         </p:spPr>
+        <p:txBody>
+          <a:bodyPr/>
+          <a:lstStyle/>
+          <a:p>
+            <a:endParaRPr lang="en-US"/>
+          </a:p>
+        </p:txBody>
       </p:sp>
       <p:sp>
         <p:nvSpPr>
@@ -21999,6 +23423,13 @@
           </a:solidFill>
           <a:ln/>
         </p:spPr>
+        <p:txBody>
+          <a:bodyPr/>
+          <a:lstStyle/>
+          <a:p>
+            <a:endParaRPr lang="en-US"/>
+          </a:p>
+        </p:txBody>
       </p:sp>
       <p:sp>
         <p:nvSpPr>
@@ -22102,6 +23533,13 @@
             <a:prstDash val="solid"/>
           </a:ln>
         </p:spPr>
+        <p:txBody>
+          <a:bodyPr/>
+          <a:lstStyle/>
+          <a:p>
+            <a:endParaRPr lang="en-US"/>
+          </a:p>
+        </p:txBody>
       </p:sp>
       <p:sp>
         <p:nvSpPr>
@@ -22122,6 +23560,13 @@
           </a:solidFill>
           <a:ln/>
         </p:spPr>
+        <p:txBody>
+          <a:bodyPr/>
+          <a:lstStyle/>
+          <a:p>
+            <a:endParaRPr lang="en-US"/>
+          </a:p>
+        </p:txBody>
       </p:sp>
       <p:sp>
         <p:nvSpPr>
@@ -22334,6 +23779,13 @@
           </a:solidFill>
           <a:ln/>
         </p:spPr>
+        <p:txBody>
+          <a:bodyPr/>
+          <a:lstStyle/>
+          <a:p>
+            <a:endParaRPr lang="en-US"/>
+          </a:p>
+        </p:txBody>
       </p:sp>
       <p:sp>
         <p:nvSpPr>
@@ -22499,6 +23951,13 @@
             </a:outerShdw>
           </a:effectLst>
         </p:spPr>
+        <p:txBody>
+          <a:bodyPr/>
+          <a:lstStyle/>
+          <a:p>
+            <a:endParaRPr lang="en-US"/>
+          </a:p>
+        </p:txBody>
       </p:sp>
       <p:sp>
         <p:nvSpPr>
@@ -22657,6 +24116,13 @@
             <a:prstDash val="solid"/>
           </a:ln>
         </p:spPr>
+        <p:txBody>
+          <a:bodyPr/>
+          <a:lstStyle/>
+          <a:p>
+            <a:endParaRPr lang="en-US"/>
+          </a:p>
+        </p:txBody>
       </p:sp>
       <p:sp>
         <p:nvSpPr>
@@ -22677,6 +24143,13 @@
           </a:solidFill>
           <a:ln/>
         </p:spPr>
+        <p:txBody>
+          <a:bodyPr/>
+          <a:lstStyle/>
+          <a:p>
+            <a:endParaRPr lang="en-US"/>
+          </a:p>
+        </p:txBody>
       </p:sp>
       <p:sp>
         <p:nvSpPr>
@@ -22889,6 +24362,13 @@
           </a:solidFill>
           <a:ln/>
         </p:spPr>
+        <p:txBody>
+          <a:bodyPr/>
+          <a:lstStyle/>
+          <a:p>
+            <a:endParaRPr lang="en-US"/>
+          </a:p>
+        </p:txBody>
       </p:sp>
       <p:sp>
         <p:nvSpPr>
@@ -23060,6 +24540,13 @@
             </a:outerShdw>
           </a:effectLst>
         </p:spPr>
+        <p:txBody>
+          <a:bodyPr/>
+          <a:lstStyle/>
+          <a:p>
+            <a:endParaRPr lang="en-US"/>
+          </a:p>
+        </p:txBody>
       </p:sp>
       <p:sp>
         <p:nvSpPr>
@@ -23080,6 +24567,13 @@
           </a:solidFill>
           <a:ln/>
         </p:spPr>
+        <p:txBody>
+          <a:bodyPr/>
+          <a:lstStyle/>
+          <a:p>
+            <a:endParaRPr lang="en-US"/>
+          </a:p>
+        </p:txBody>
       </p:sp>
       <p:sp>
         <p:nvSpPr>
@@ -23190,6 +24684,13 @@
             </a:outerShdw>
           </a:effectLst>
         </p:spPr>
+        <p:txBody>
+          <a:bodyPr/>
+          <a:lstStyle/>
+          <a:p>
+            <a:endParaRPr lang="en-US"/>
+          </a:p>
+        </p:txBody>
       </p:sp>
       <p:sp>
         <p:nvSpPr>
@@ -23210,6 +24711,13 @@
           </a:solidFill>
           <a:ln/>
         </p:spPr>
+        <p:txBody>
+          <a:bodyPr/>
+          <a:lstStyle/>
+          <a:p>
+            <a:endParaRPr lang="en-US"/>
+          </a:p>
+        </p:txBody>
       </p:sp>
       <p:sp>
         <p:nvSpPr>
@@ -23313,6 +24821,13 @@
             <a:prstDash val="solid"/>
           </a:ln>
         </p:spPr>
+        <p:txBody>
+          <a:bodyPr/>
+          <a:lstStyle/>
+          <a:p>
+            <a:endParaRPr lang="en-US"/>
+          </a:p>
+        </p:txBody>
       </p:sp>
       <p:sp>
         <p:nvSpPr>
@@ -23333,6 +24848,13 @@
           </a:solidFill>
           <a:ln/>
         </p:spPr>
+        <p:txBody>
+          <a:bodyPr/>
+          <a:lstStyle/>
+          <a:p>
+            <a:endParaRPr lang="en-US"/>
+          </a:p>
+        </p:txBody>
       </p:sp>
       <p:sp>
         <p:nvSpPr>
@@ -23545,6 +25067,13 @@
           </a:solidFill>
           <a:ln/>
         </p:spPr>
+        <p:txBody>
+          <a:bodyPr/>
+          <a:lstStyle/>
+          <a:p>
+            <a:endParaRPr lang="en-US"/>
+          </a:p>
+        </p:txBody>
       </p:sp>
       <p:sp>
         <p:nvSpPr>
@@ -23716,6 +25245,13 @@
             </a:outerShdw>
           </a:effectLst>
         </p:spPr>
+        <p:txBody>
+          <a:bodyPr/>
+          <a:lstStyle/>
+          <a:p>
+            <a:endParaRPr lang="en-US"/>
+          </a:p>
+        </p:txBody>
       </p:sp>
       <p:sp>
         <p:nvSpPr>
@@ -23736,6 +25272,13 @@
           </a:solidFill>
           <a:ln/>
         </p:spPr>
+        <p:txBody>
+          <a:bodyPr/>
+          <a:lstStyle/>
+          <a:p>
+            <a:endParaRPr lang="en-US"/>
+          </a:p>
+        </p:txBody>
       </p:sp>
       <p:sp>
         <p:nvSpPr>
@@ -23846,6 +25389,13 @@
             </a:outerShdw>
           </a:effectLst>
         </p:spPr>
+        <p:txBody>
+          <a:bodyPr/>
+          <a:lstStyle/>
+          <a:p>
+            <a:endParaRPr lang="en-US"/>
+          </a:p>
+        </p:txBody>
       </p:sp>
       <p:sp>
         <p:nvSpPr>
@@ -23866,6 +25416,13 @@
           </a:solidFill>
           <a:ln/>
         </p:spPr>
+        <p:txBody>
+          <a:bodyPr/>
+          <a:lstStyle/>
+          <a:p>
+            <a:endParaRPr lang="en-US"/>
+          </a:p>
+        </p:txBody>
       </p:sp>
       <p:sp>
         <p:nvSpPr>
@@ -23969,6 +25526,13 @@
             <a:prstDash val="solid"/>
           </a:ln>
         </p:spPr>
+        <p:txBody>
+          <a:bodyPr/>
+          <a:lstStyle/>
+          <a:p>
+            <a:endParaRPr lang="en-US"/>
+          </a:p>
+        </p:txBody>
       </p:sp>
       <p:sp>
         <p:nvSpPr>
@@ -23989,6 +25553,13 @@
           </a:solidFill>
           <a:ln/>
         </p:spPr>
+        <p:txBody>
+          <a:bodyPr/>
+          <a:lstStyle/>
+          <a:p>
+            <a:endParaRPr lang="en-US"/>
+          </a:p>
+        </p:txBody>
       </p:sp>
       <p:sp>
         <p:nvSpPr>
@@ -24201,6 +25772,13 @@
           </a:solidFill>
           <a:ln/>
         </p:spPr>
+        <p:txBody>
+          <a:bodyPr/>
+          <a:lstStyle/>
+          <a:p>
+            <a:endParaRPr lang="en-US"/>
+          </a:p>
+        </p:txBody>
       </p:sp>
       <p:sp>
         <p:nvSpPr>
@@ -24372,6 +25950,13 @@
             </a:outerShdw>
           </a:effectLst>
         </p:spPr>
+        <p:txBody>
+          <a:bodyPr/>
+          <a:lstStyle/>
+          <a:p>
+            <a:endParaRPr lang="en-US"/>
+          </a:p>
+        </p:txBody>
       </p:sp>
       <p:sp>
         <p:nvSpPr>
@@ -24392,6 +25977,13 @@
           </a:solidFill>
           <a:ln/>
         </p:spPr>
+        <p:txBody>
+          <a:bodyPr/>
+          <a:lstStyle/>
+          <a:p>
+            <a:endParaRPr lang="en-US"/>
+          </a:p>
+        </p:txBody>
       </p:sp>
       <p:sp>
         <p:nvSpPr>
@@ -24580,6 +26172,13 @@
             </a:outerShdw>
           </a:effectLst>
         </p:spPr>
+        <p:txBody>
+          <a:bodyPr/>
+          <a:lstStyle/>
+          <a:p>
+            <a:endParaRPr lang="en-US"/>
+          </a:p>
+        </p:txBody>
       </p:sp>
       <p:sp>
         <p:nvSpPr>
@@ -24600,6 +26199,13 @@
           </a:solidFill>
           <a:ln/>
         </p:spPr>
+        <p:txBody>
+          <a:bodyPr/>
+          <a:lstStyle/>
+          <a:p>
+            <a:endParaRPr lang="en-US"/>
+          </a:p>
+        </p:txBody>
       </p:sp>
       <p:sp>
         <p:nvSpPr>
@@ -24788,6 +26394,13 @@
             </a:outerShdw>
           </a:effectLst>
         </p:spPr>
+        <p:txBody>
+          <a:bodyPr/>
+          <a:lstStyle/>
+          <a:p>
+            <a:endParaRPr lang="en-US"/>
+          </a:p>
+        </p:txBody>
       </p:sp>
       <p:sp>
         <p:nvSpPr>
@@ -24808,6 +26421,13 @@
           </a:solidFill>
           <a:ln/>
         </p:spPr>
+        <p:txBody>
+          <a:bodyPr/>
+          <a:lstStyle/>
+          <a:p>
+            <a:endParaRPr lang="en-US"/>
+          </a:p>
+        </p:txBody>
       </p:sp>
       <p:sp>
         <p:nvSpPr>
@@ -24989,6 +26609,13 @@
             <a:prstDash val="solid"/>
           </a:ln>
         </p:spPr>
+        <p:txBody>
+          <a:bodyPr/>
+          <a:lstStyle/>
+          <a:p>
+            <a:endParaRPr lang="en-US"/>
+          </a:p>
+        </p:txBody>
       </p:sp>
       <p:sp>
         <p:nvSpPr>
@@ -25009,6 +26636,13 @@
           </a:solidFill>
           <a:ln/>
         </p:spPr>
+        <p:txBody>
+          <a:bodyPr/>
+          <a:lstStyle/>
+          <a:p>
+            <a:endParaRPr lang="en-US"/>
+          </a:p>
+        </p:txBody>
       </p:sp>
       <p:sp>
         <p:nvSpPr>

--- a/Olist_Delivery_Performance_SLA_Analysis.pptx
+++ b/Olist_Delivery_Performance_SLA_Analysis.pptx
@@ -160,7 +160,7 @@
             </a:solidFill>
             <a:ln w="9525" cap="flat">
               <a:solidFill>
-                <a:srgbClr val="F9F9F9"/>
+                <a:srgbClr val="352F6E"/>
               </a:solidFill>
               <a:prstDash val="solid"/>
               <a:round/>
@@ -172,7 +172,7 @@
             <c:bubble3D val="0"/>
             <c:spPr>
               <a:solidFill>
-                <a:srgbClr val="0D9488"/>
+                <a:srgbClr val="5ED9B8"/>
               </a:solidFill>
               <a:effectLst/>
             </c:spPr>
@@ -187,7 +187,7 @@
             <c:bubble3D val="0"/>
             <c:spPr>
               <a:solidFill>
-                <a:srgbClr val="DC2626"/>
+                <a:srgbClr val="EB5C75"/>
               </a:solidFill>
               <a:effectLst/>
             </c:spPr>
@@ -257,9 +257,7 @@
     <c:showDLblsOverMax val="1"/>
   </c:chart>
   <c:spPr>
-    <a:solidFill>
-      <a:srgbClr val="FFFFFF"/>
-    </a:solidFill>
+    <a:noFill/>
     <a:ln>
       <a:noFill/>
     </a:ln>
@@ -287,7 +285,7 @@
             <a:pPr>
               <a:defRPr sz="1300" b="0" i="0" u="none" strike="noStrike">
                 <a:solidFill>
-                  <a:srgbClr val="0F2A47"/>
+                  <a:srgbClr val="FFFFFF"/>
                 </a:solidFill>
                 <a:latin typeface="Arial"/>
               </a:defRPr>
@@ -295,7 +293,7 @@
             <a:r>
               <a:rPr lang="en-US" sz="1300" b="0" i="0" u="none" strike="noStrike">
                 <a:solidFill>
-                  <a:srgbClr val="0F2A47"/>
+                  <a:srgbClr val="FFFFFF"/>
                 </a:solidFill>
                 <a:latin typeface="Arial"/>
               </a:rPr>
@@ -329,7 +327,7 @@
           </c:tx>
           <c:spPr>
             <a:solidFill>
-              <a:srgbClr val="0D9488"/>
+              <a:srgbClr val="5ED9B8"/>
             </a:solidFill>
             <a:effectLst/>
           </c:spPr>
@@ -350,7 +348,7 @@
             <c:bubble3D val="0"/>
             <c:spPr>
               <a:solidFill>
-                <a:srgbClr val="DC2626"/>
+                <a:srgbClr val="EB5C75"/>
               </a:solidFill>
               <a:effectLst/>
             </c:spPr>
@@ -376,7 +374,7 @@
                 <a:pPr>
                   <a:defRPr sz="1400" b="0" i="0" u="none" strike="noStrike">
                     <a:solidFill>
-                      <a:srgbClr val="0F2A47"/>
+                      <a:srgbClr val="FFFFFF"/>
                     </a:solidFill>
                     <a:latin typeface="Cambria"/>
                   </a:defRPr>
@@ -458,7 +456,7 @@
         <c:spPr>
           <a:ln w="12700" cap="flat">
             <a:solidFill>
-              <a:srgbClr val="888888"/>
+              <a:srgbClr val="B3ABDD"/>
             </a:solidFill>
             <a:prstDash val="solid"/>
             <a:round/>
@@ -471,7 +469,7 @@
             <a:pPr>
               <a:defRPr sz="1200" b="0" i="0" u="none" strike="noStrike">
                 <a:solidFill>
-                  <a:srgbClr val="475569"/>
+                  <a:srgbClr val="D8D4F0"/>
                 </a:solidFill>
                 <a:latin typeface="Arial"/>
               </a:defRPr>
@@ -498,7 +496,7 @@
           <c:spPr>
             <a:ln w="6350" cap="flat">
               <a:solidFill>
-                <a:srgbClr val="E2E8F0"/>
+                <a:srgbClr val="352F6E"/>
               </a:solidFill>
               <a:prstDash val="solid"/>
               <a:round/>
@@ -512,7 +510,7 @@
         <c:spPr>
           <a:ln w="12700" cap="flat">
             <a:solidFill>
-              <a:srgbClr val="888888"/>
+              <a:srgbClr val="B3ABDD"/>
             </a:solidFill>
             <a:prstDash val="solid"/>
             <a:round/>
@@ -525,7 +523,7 @@
             <a:pPr>
               <a:defRPr sz="1000" b="0" i="0" u="none" strike="noStrike">
                 <a:solidFill>
-                  <a:srgbClr val="64748B"/>
+                  <a:srgbClr val="B3ABDD"/>
                 </a:solidFill>
                 <a:latin typeface="Arial"/>
               </a:defRPr>
@@ -550,9 +548,7 @@
     <c:showDLblsOverMax val="1"/>
   </c:chart>
   <c:spPr>
-    <a:solidFill>
-      <a:srgbClr val="FFFFFF"/>
-    </a:solidFill>
+    <a:noFill/>
     <a:ln>
       <a:noFill/>
     </a:ln>
@@ -580,7 +576,7 @@
             <a:pPr>
               <a:defRPr sz="1300" b="0" i="0" u="none" strike="noStrike">
                 <a:solidFill>
-                  <a:srgbClr val="0F2A47"/>
+                  <a:srgbClr val="FFFFFF"/>
                 </a:solidFill>
                 <a:latin typeface="Arial"/>
               </a:defRPr>
@@ -588,7 +584,7 @@
             <a:r>
               <a:rPr lang="en-US" sz="1300" b="0" i="0" u="none" strike="noStrike">
                 <a:solidFill>
-                  <a:srgbClr val="0F2A47"/>
+                  <a:srgbClr val="FFFFFF"/>
                 </a:solidFill>
                 <a:latin typeface="Arial"/>
               </a:rPr>
@@ -622,7 +618,7 @@
           </c:tx>
           <c:spPr>
             <a:solidFill>
-              <a:srgbClr val="0D9488"/>
+              <a:srgbClr val="5ED9B8"/>
             </a:solidFill>
             <a:effectLst/>
           </c:spPr>
@@ -643,7 +639,7 @@
             <c:bubble3D val="0"/>
             <c:spPr>
               <a:solidFill>
-                <a:srgbClr val="FCD34D"/>
+                <a:srgbClr val="F0A35E"/>
               </a:solidFill>
               <a:effectLst/>
             </c:spPr>
@@ -659,7 +655,7 @@
             <c:bubble3D val="0"/>
             <c:spPr>
               <a:solidFill>
-                <a:srgbClr val="D97706"/>
+                <a:srgbClr val="F0A35E"/>
               </a:solidFill>
               <a:effectLst/>
             </c:spPr>
@@ -675,7 +671,7 @@
             <c:bubble3D val="0"/>
             <c:spPr>
               <a:solidFill>
-                <a:srgbClr val="DC2626"/>
+                <a:srgbClr val="EB5C75"/>
               </a:solidFill>
               <a:effectLst/>
             </c:spPr>
@@ -701,7 +697,7 @@
                 <a:pPr>
                   <a:defRPr sz="1100" b="0" i="0" u="none" strike="noStrike">
                     <a:solidFill>
-                      <a:srgbClr val="0F2A47"/>
+                      <a:srgbClr val="FFFFFF"/>
                     </a:solidFill>
                     <a:latin typeface="Arial"/>
                   </a:defRPr>
@@ -795,7 +791,7 @@
         <c:spPr>
           <a:ln w="12700" cap="flat">
             <a:solidFill>
-              <a:srgbClr val="888888"/>
+              <a:srgbClr val="B3ABDD"/>
             </a:solidFill>
             <a:prstDash val="solid"/>
             <a:round/>
@@ -808,7 +804,7 @@
             <a:pPr>
               <a:defRPr sz="1100" b="0" i="0" u="none" strike="noStrike">
                 <a:solidFill>
-                  <a:srgbClr val="475569"/>
+                  <a:srgbClr val="D8D4F0"/>
                 </a:solidFill>
                 <a:latin typeface="Arial"/>
               </a:defRPr>
@@ -836,7 +832,7 @@
           <c:spPr>
             <a:ln w="6350" cap="flat">
               <a:solidFill>
-                <a:srgbClr val="E2E8F0"/>
+                <a:srgbClr val="352F6E"/>
               </a:solidFill>
               <a:prstDash val="solid"/>
               <a:round/>
@@ -850,7 +846,7 @@
         <c:spPr>
           <a:ln w="12700" cap="flat">
             <a:solidFill>
-              <a:srgbClr val="888888"/>
+              <a:srgbClr val="B3ABDD"/>
             </a:solidFill>
             <a:prstDash val="solid"/>
             <a:round/>
@@ -863,7 +859,7 @@
             <a:pPr>
               <a:defRPr sz="1000" b="0" i="0" u="none" strike="noStrike">
                 <a:solidFill>
-                  <a:srgbClr val="64748B"/>
+                  <a:srgbClr val="B3ABDD"/>
                 </a:solidFill>
                 <a:latin typeface="Arial"/>
               </a:defRPr>
@@ -888,9 +884,7 @@
     <c:showDLblsOverMax val="1"/>
   </c:chart>
   <c:spPr>
-    <a:solidFill>
-      <a:srgbClr val="FFFFFF"/>
-    </a:solidFill>
+    <a:noFill/>
     <a:ln>
       <a:noFill/>
     </a:ln>
@@ -918,7 +912,7 @@
             <a:pPr>
               <a:defRPr sz="1300" b="0" i="0" u="none" strike="noStrike">
                 <a:solidFill>
-                  <a:srgbClr val="0F2A47"/>
+                  <a:srgbClr val="FFFFFF"/>
                 </a:solidFill>
                 <a:latin typeface="Arial"/>
               </a:defRPr>
@@ -926,7 +920,7 @@
             <a:r>
               <a:rPr lang="en-US" sz="1300" b="0" i="0" u="none" strike="noStrike">
                 <a:solidFill>
-                  <a:srgbClr val="0F2A47"/>
+                  <a:srgbClr val="FFFFFF"/>
                 </a:solidFill>
                 <a:latin typeface="Arial"/>
               </a:rPr>
@@ -960,7 +954,7 @@
           <c:spPr>
             <a:ln w="34925" cap="flat">
               <a:solidFill>
-                <a:srgbClr val="274A70"/>
+                <a:srgbClr val="8B85E8"/>
               </a:solidFill>
               <a:prstDash val="solid"/>
               <a:round/>
@@ -972,11 +966,11 @@
             <c:size val="6"/>
             <c:spPr>
               <a:solidFill>
-                <a:srgbClr val="274A70"/>
+                <a:srgbClr val="8B85E8"/>
               </a:solidFill>
               <a:ln w="9525" cap="flat">
                 <a:solidFill>
-                  <a:srgbClr val="274A70"/>
+                  <a:srgbClr val="8B85E8"/>
                 </a:solidFill>
                 <a:prstDash val="solid"/>
                 <a:round/>
@@ -1097,7 +1091,7 @@
           <c:spPr>
             <a:ln w="34925" cap="flat">
               <a:solidFill>
-                <a:srgbClr val="DC2626"/>
+                <a:srgbClr val="EB5C75"/>
               </a:solidFill>
               <a:prstDash val="solid"/>
               <a:round/>
@@ -1109,11 +1103,11 @@
             <c:size val="6"/>
             <c:spPr>
               <a:solidFill>
-                <a:srgbClr val="DC2626"/>
+                <a:srgbClr val="EB5C75"/>
               </a:solidFill>
               <a:ln w="9525" cap="flat">
                 <a:solidFill>
-                  <a:srgbClr val="DC2626"/>
+                  <a:srgbClr val="EB5C75"/>
                 </a:solidFill>
                 <a:prstDash val="solid"/>
                 <a:round/>
@@ -1232,7 +1226,7 @@
         <c:spPr>
           <a:ln w="12700" cap="flat">
             <a:solidFill>
-              <a:srgbClr val="888888"/>
+              <a:srgbClr val="B3ABDD"/>
             </a:solidFill>
             <a:prstDash val="solid"/>
             <a:round/>
@@ -1245,7 +1239,7 @@
             <a:pPr>
               <a:defRPr sz="1050" b="0" i="0" u="none" strike="noStrike">
                 <a:solidFill>
-                  <a:srgbClr val="475569"/>
+                  <a:srgbClr val="D8D4F0"/>
                 </a:solidFill>
                 <a:latin typeface="Arial"/>
               </a:defRPr>
@@ -1271,7 +1265,7 @@
           <c:spPr>
             <a:ln w="6350" cap="flat">
               <a:solidFill>
-                <a:srgbClr val="E2E8F0"/>
+                <a:srgbClr val="352F6E"/>
               </a:solidFill>
               <a:prstDash val="solid"/>
               <a:round/>
@@ -1285,7 +1279,7 @@
         <c:spPr>
           <a:ln w="12700" cap="flat">
             <a:solidFill>
-              <a:srgbClr val="888888"/>
+              <a:srgbClr val="B3ABDD"/>
             </a:solidFill>
             <a:prstDash val="solid"/>
             <a:round/>
@@ -1298,7 +1292,7 @@
             <a:pPr>
               <a:defRPr sz="1000" b="0" i="0" u="none" strike="noStrike">
                 <a:solidFill>
-                  <a:srgbClr val="64748B"/>
+                  <a:srgbClr val="B3ABDD"/>
                 </a:solidFill>
                 <a:latin typeface="Arial"/>
               </a:defRPr>
@@ -1328,7 +1322,7 @@
           <a:pPr>
             <a:defRPr sz="1100">
               <a:solidFill>
-                <a:srgbClr val="475569"/>
+                <a:srgbClr val="D8D4F0"/>
               </a:solidFill>
             </a:defRPr>
           </a:pPr>
@@ -1341,9 +1335,7 @@
     <c:showDLblsOverMax val="1"/>
   </c:chart>
   <c:spPr>
-    <a:solidFill>
-      <a:srgbClr val="FFFFFF"/>
-    </a:solidFill>
+    <a:noFill/>
     <a:ln>
       <a:noFill/>
     </a:ln>
@@ -1371,7 +1363,7 @@
             <a:pPr>
               <a:defRPr sz="1300" b="0" i="0" u="none" strike="noStrike">
                 <a:solidFill>
-                  <a:srgbClr val="0F2A47"/>
+                  <a:srgbClr val="FFFFFF"/>
                 </a:solidFill>
                 <a:latin typeface="Arial"/>
               </a:defRPr>
@@ -1379,7 +1371,7 @@
             <a:r>
               <a:rPr lang="en-US" sz="1300" b="0" i="0" u="none" strike="noStrike">
                 <a:solidFill>
-                  <a:srgbClr val="0F2A47"/>
+                  <a:srgbClr val="FFFFFF"/>
                 </a:solidFill>
                 <a:latin typeface="Arial"/>
               </a:rPr>
@@ -1421,11 +1413,11 @@
             <c:size val="9"/>
             <c:spPr>
               <a:solidFill>
-                <a:srgbClr val="274A70"/>
+                <a:srgbClr val="8B85E8"/>
               </a:solidFill>
               <a:ln w="9525" cap="flat">
                 <a:solidFill>
-                  <a:srgbClr val="274A70"/>
+                  <a:srgbClr val="8B85E8"/>
                 </a:solidFill>
                 <a:prstDash val="solid"/>
                 <a:round/>
@@ -1600,7 +1592,7 @@
           <c:spPr>
             <a:ln w="6350" cap="flat">
               <a:solidFill>
-                <a:srgbClr val="E2E8F0"/>
+                <a:srgbClr val="352F6E"/>
               </a:solidFill>
               <a:prstDash val="solid"/>
               <a:round/>
@@ -1614,7 +1606,7 @@
         <c:spPr>
           <a:ln w="12700" cap="flat">
             <a:solidFill>
-              <a:srgbClr val="888888"/>
+              <a:srgbClr val="B3ABDD"/>
             </a:solidFill>
             <a:prstDash val="solid"/>
             <a:round/>
@@ -1627,7 +1619,7 @@
             <a:pPr>
               <a:defRPr sz="1000" b="0" i="0" u="none" strike="noStrike">
                 <a:solidFill>
-                  <a:srgbClr val="64748B"/>
+                  <a:srgbClr val="B3ABDD"/>
                 </a:solidFill>
                 <a:latin typeface="Arial"/>
               </a:defRPr>
@@ -1650,7 +1642,7 @@
           <c:spPr>
             <a:ln w="6350" cap="flat">
               <a:solidFill>
-                <a:srgbClr val="E2E8F0"/>
+                <a:srgbClr val="352F6E"/>
               </a:solidFill>
               <a:prstDash val="solid"/>
               <a:round/>
@@ -1664,7 +1656,7 @@
         <c:spPr>
           <a:ln w="12700" cap="flat">
             <a:solidFill>
-              <a:srgbClr val="888888"/>
+              <a:srgbClr val="B3ABDD"/>
             </a:solidFill>
             <a:prstDash val="solid"/>
             <a:round/>
@@ -1677,7 +1669,7 @@
             <a:pPr>
               <a:defRPr sz="1000" b="0" i="0" u="none" strike="noStrike">
                 <a:solidFill>
-                  <a:srgbClr val="64748B"/>
+                  <a:srgbClr val="B3ABDD"/>
                 </a:solidFill>
                 <a:latin typeface="Arial"/>
               </a:defRPr>
@@ -1702,9 +1694,7 @@
     <c:showDLblsOverMax val="1"/>
   </c:chart>
   <c:spPr>
-    <a:solidFill>
-      <a:srgbClr val="FFFFFF"/>
-    </a:solidFill>
+    <a:noFill/>
     <a:ln>
       <a:noFill/>
     </a:ln>
@@ -1739,10 +1729,7 @@
             <a:pPr>
               <a:defRPr sz="2128" b="1" i="0" u="none" strike="noStrike" kern="1200" baseline="0">
                 <a:solidFill>
-                  <a:schemeClr val="tx1">
-                    <a:lumMod val="65000"/>
-                    <a:lumOff val="35000"/>
-                  </a:schemeClr>
+                  <a:srgbClr val="B3ABDD"/>
                 </a:solidFill>
                 <a:latin typeface="+mn-lt"/>
                 <a:ea typeface="+mn-ea"/>
@@ -1771,10 +1758,7 @@
           <a:pPr>
             <a:defRPr sz="2128" b="1" i="0" u="none" strike="noStrike" kern="1200" baseline="0">
               <a:solidFill>
-                <a:schemeClr val="tx1">
-                  <a:lumMod val="65000"/>
-                  <a:lumOff val="35000"/>
-                </a:schemeClr>
+                <a:srgbClr val="B3ABDD"/>
               </a:solidFill>
               <a:latin typeface="+mn-lt"/>
               <a:ea typeface="+mn-ea"/>
@@ -1808,7 +1792,7 @@
           </c:tx>
           <c:spPr>
             <a:solidFill>
-              <a:srgbClr val="C00000"/>
+              <a:srgbClr val="C7415C"/>
             </a:solidFill>
             <a:ln>
               <a:noFill/>
@@ -1828,7 +1812,7 @@
             <c:bubble3D val="0"/>
             <c:spPr>
               <a:solidFill>
-                <a:srgbClr val="C00000"/>
+                <a:srgbClr val="C7415C"/>
               </a:solidFill>
               <a:ln>
                 <a:noFill/>
@@ -2034,10 +2018,7 @@
             <a:pPr>
               <a:defRPr sz="1197" b="0" i="0" u="none" strike="noStrike" kern="1200" baseline="0">
                 <a:solidFill>
-                  <a:schemeClr val="tx1">
-                    <a:lumMod val="65000"/>
-                    <a:lumOff val="35000"/>
-                  </a:schemeClr>
+                  <a:srgbClr val="B3ABDD"/>
                 </a:solidFill>
                 <a:latin typeface="+mn-lt"/>
                 <a:ea typeface="+mn-ea"/>
@@ -2093,10 +2074,7 @@
             <a:pPr>
               <a:defRPr sz="1197" b="0" i="0" u="none" strike="noStrike" kern="1200" baseline="0">
                 <a:solidFill>
-                  <a:schemeClr val="tx1">
-                    <a:lumMod val="65000"/>
-                    <a:lumOff val="35000"/>
-                  </a:schemeClr>
+                  <a:srgbClr val="B3ABDD"/>
                 </a:solidFill>
                 <a:latin typeface="+mn-lt"/>
                 <a:ea typeface="+mn-ea"/>
@@ -2168,10 +2146,7 @@
             <a:pPr>
               <a:defRPr sz="2128" b="1" i="0" u="none" strike="noStrike" kern="1200" baseline="0">
                 <a:solidFill>
-                  <a:schemeClr val="tx1">
-                    <a:lumMod val="65000"/>
-                    <a:lumOff val="35000"/>
-                  </a:schemeClr>
+                  <a:srgbClr val="B3ABDD"/>
                 </a:solidFill>
                 <a:latin typeface="+mn-lt"/>
                 <a:ea typeface="+mn-ea"/>
@@ -2200,10 +2175,7 @@
           <a:pPr>
             <a:defRPr sz="2128" b="1" i="0" u="none" strike="noStrike" kern="1200" baseline="0">
               <a:solidFill>
-                <a:schemeClr val="tx1">
-                  <a:lumMod val="65000"/>
-                  <a:lumOff val="35000"/>
-                </a:schemeClr>
+                <a:srgbClr val="B3ABDD"/>
               </a:solidFill>
               <a:latin typeface="+mn-lt"/>
               <a:ea typeface="+mn-ea"/>
@@ -2267,12 +2239,9 @@
               <a:lstStyle/>
               <a:p>
                 <a:pPr>
-                  <a:defRPr sz="1197" b="0" i="0" u="none" strike="noStrike" kern="1200" baseline="0">
+                  <a:defRPr sz="1197" b="1" i="0" u="none" strike="noStrike" kern="1200" baseline="0">
                     <a:solidFill>
-                      <a:schemeClr val="tx1">
-                        <a:lumMod val="75000"/>
-                        <a:lumOff val="25000"/>
-                      </a:schemeClr>
+                      <a:schemeClr val="bg1"/>
                     </a:solidFill>
                     <a:latin typeface="+mn-lt"/>
                     <a:ea typeface="+mn-ea"/>
@@ -2422,10 +2391,7 @@
             <a:pPr>
               <a:defRPr sz="1197" b="0" i="0" u="none" strike="noStrike" kern="1200" baseline="0">
                 <a:solidFill>
-                  <a:schemeClr val="tx1">
-                    <a:lumMod val="65000"/>
-                    <a:lumOff val="35000"/>
-                  </a:schemeClr>
+                  <a:srgbClr val="B3ABDD"/>
                 </a:solidFill>
                 <a:latin typeface="+mn-lt"/>
                 <a:ea typeface="+mn-ea"/>
@@ -2481,10 +2447,7 @@
             <a:pPr>
               <a:defRPr sz="1197" b="0" i="0" u="none" strike="noStrike" kern="1200" baseline="0">
                 <a:solidFill>
-                  <a:schemeClr val="tx1">
-                    <a:lumMod val="65000"/>
-                    <a:lumOff val="35000"/>
-                  </a:schemeClr>
+                  <a:srgbClr val="B3ABDD"/>
                 </a:solidFill>
                 <a:latin typeface="+mn-lt"/>
                 <a:ea typeface="+mn-ea"/>
@@ -2556,10 +2519,7 @@
             <a:pPr>
               <a:defRPr sz="2128" b="1" i="0" u="none" strike="noStrike" kern="1200" baseline="0">
                 <a:solidFill>
-                  <a:schemeClr val="tx1">
-                    <a:lumMod val="65000"/>
-                    <a:lumOff val="35000"/>
-                  </a:schemeClr>
+                  <a:srgbClr val="B3ABDD"/>
                 </a:solidFill>
                 <a:latin typeface="+mn-lt"/>
                 <a:ea typeface="+mn-ea"/>
@@ -2588,10 +2548,7 @@
           <a:pPr>
             <a:defRPr sz="2128" b="1" i="0" u="none" strike="noStrike" kern="1200" baseline="0">
               <a:solidFill>
-                <a:schemeClr val="tx1">
-                  <a:lumMod val="65000"/>
-                  <a:lumOff val="35000"/>
-                </a:schemeClr>
+                <a:srgbClr val="B3ABDD"/>
               </a:solidFill>
               <a:latin typeface="+mn-lt"/>
               <a:ea typeface="+mn-ea"/>
@@ -2637,7 +2594,7 @@
           </c:spPr>
           <c:marker>
             <c:symbol val="circle"/>
-            <c:size val="6"/>
+            <c:size val="8"/>
             <c:spPr>
               <a:gradFill rotWithShape="1">
                 <a:gsLst>
@@ -3007,10 +2964,7 @@
             <a:pPr>
               <a:defRPr sz="1197" b="0" i="0" u="none" strike="noStrike" kern="1200" baseline="0">
                 <a:solidFill>
-                  <a:schemeClr val="tx1">
-                    <a:lumMod val="65000"/>
-                    <a:lumOff val="35000"/>
-                  </a:schemeClr>
+                  <a:srgbClr val="B3ABDD"/>
                 </a:solidFill>
                 <a:latin typeface="+mn-lt"/>
                 <a:ea typeface="+mn-ea"/>
@@ -3063,10 +3017,7 @@
             <a:pPr>
               <a:defRPr sz="1197" b="0" i="0" u="none" strike="noStrike" kern="1200" baseline="0">
                 <a:solidFill>
-                  <a:schemeClr val="tx1">
-                    <a:lumMod val="65000"/>
-                    <a:lumOff val="35000"/>
-                  </a:schemeClr>
+                  <a:srgbClr val="B3ABDD"/>
                 </a:solidFill>
                 <a:latin typeface="+mn-lt"/>
                 <a:ea typeface="+mn-ea"/>
@@ -3138,10 +3089,7 @@
             <a:pPr>
               <a:defRPr sz="2128" b="1" i="0" u="none" strike="noStrike" kern="1200" baseline="0">
                 <a:solidFill>
-                  <a:schemeClr val="tx1">
-                    <a:lumMod val="65000"/>
-                    <a:lumOff val="35000"/>
-                  </a:schemeClr>
+                  <a:srgbClr val="B3ABDD"/>
                 </a:solidFill>
                 <a:latin typeface="+mn-lt"/>
                 <a:ea typeface="+mn-ea"/>
@@ -3170,10 +3118,7 @@
           <a:pPr>
             <a:defRPr sz="2128" b="1" i="0" u="none" strike="noStrike" kern="1200" baseline="0">
               <a:solidFill>
-                <a:schemeClr val="tx1">
-                  <a:lumMod val="65000"/>
-                  <a:lumOff val="35000"/>
-                </a:schemeClr>
+                <a:srgbClr val="B3ABDD"/>
               </a:solidFill>
               <a:latin typeface="+mn-lt"/>
               <a:ea typeface="+mn-ea"/>
@@ -3207,7 +3152,7 @@
           </c:tx>
           <c:spPr>
             <a:solidFill>
-              <a:srgbClr val="DC2626"/>
+              <a:srgbClr val="EB5C75"/>
             </a:solidFill>
             <a:ln>
               <a:noFill/>
@@ -3237,12 +3182,9 @@
               <a:lstStyle/>
               <a:p>
                 <a:pPr>
-                  <a:defRPr sz="1197" b="0" i="0" u="none" strike="noStrike" kern="1200" baseline="0">
+                  <a:defRPr sz="1197" b="1" i="0" u="none" strike="noStrike" kern="1200" baseline="0">
                     <a:solidFill>
-                      <a:schemeClr val="tx1">
-                        <a:lumMod val="75000"/>
-                        <a:lumOff val="25000"/>
-                      </a:schemeClr>
+                      <a:schemeClr val="bg1"/>
                     </a:solidFill>
                     <a:latin typeface="+mn-lt"/>
                     <a:ea typeface="+mn-ea"/>
@@ -3350,10 +3292,7 @@
             <a:pPr>
               <a:defRPr sz="1197" b="0" i="0" u="none" strike="noStrike" kern="1200" baseline="0">
                 <a:solidFill>
-                  <a:schemeClr val="tx1">
-                    <a:lumMod val="65000"/>
-                    <a:lumOff val="35000"/>
-                  </a:schemeClr>
+                  <a:srgbClr val="B3ABDD"/>
                 </a:solidFill>
                 <a:latin typeface="+mn-lt"/>
                 <a:ea typeface="+mn-ea"/>
@@ -3410,10 +3349,7 @@
             <a:pPr>
               <a:defRPr sz="1197" b="0" i="0" u="none" strike="noStrike" kern="1200" baseline="0">
                 <a:solidFill>
-                  <a:schemeClr val="tx1">
-                    <a:lumMod val="65000"/>
-                    <a:lumOff val="35000"/>
-                  </a:schemeClr>
+                  <a:srgbClr val="B3ABDD"/>
                 </a:solidFill>
                 <a:latin typeface="+mn-lt"/>
                 <a:ea typeface="+mn-ea"/>
@@ -3485,10 +3421,7 @@
             <a:pPr>
               <a:defRPr sz="2128" b="1" i="0" u="none" strike="noStrike" kern="1200" baseline="0">
                 <a:solidFill>
-                  <a:schemeClr val="tx1">
-                    <a:lumMod val="65000"/>
-                    <a:lumOff val="35000"/>
-                  </a:schemeClr>
+                  <a:srgbClr val="B3ABDD"/>
                 </a:solidFill>
                 <a:latin typeface="+mn-lt"/>
                 <a:ea typeface="+mn-ea"/>
@@ -3517,10 +3450,7 @@
           <a:pPr>
             <a:defRPr sz="2128" b="1" i="0" u="none" strike="noStrike" kern="1200" baseline="0">
               <a:solidFill>
-                <a:schemeClr val="tx1">
-                  <a:lumMod val="65000"/>
-                  <a:lumOff val="35000"/>
-                </a:schemeClr>
+                <a:srgbClr val="B3ABDD"/>
               </a:solidFill>
               <a:latin typeface="+mn-lt"/>
               <a:ea typeface="+mn-ea"/>
@@ -3554,7 +3484,7 @@
           </c:tx>
           <c:spPr>
             <a:solidFill>
-              <a:srgbClr val="274A70"/>
+              <a:srgbClr val="8B85E8"/>
             </a:solidFill>
             <a:ln>
               <a:noFill/>
@@ -3785,10 +3715,7 @@
             <a:pPr>
               <a:defRPr sz="1197" b="0" i="0" u="none" strike="noStrike" kern="1200" baseline="0">
                 <a:solidFill>
-                  <a:schemeClr val="tx1">
-                    <a:lumMod val="65000"/>
-                    <a:lumOff val="35000"/>
-                  </a:schemeClr>
+                  <a:srgbClr val="B3ABDD"/>
                 </a:solidFill>
                 <a:latin typeface="+mn-lt"/>
                 <a:ea typeface="+mn-ea"/>
@@ -3844,10 +3771,7 @@
             <a:pPr>
               <a:defRPr sz="1197" b="0" i="0" u="none" strike="noStrike" kern="1200" baseline="0">
                 <a:solidFill>
-                  <a:schemeClr val="tx1">
-                    <a:lumMod val="65000"/>
-                    <a:lumOff val="35000"/>
-                  </a:schemeClr>
+                  <a:srgbClr val="B3ABDD"/>
                 </a:solidFill>
                 <a:latin typeface="+mn-lt"/>
                 <a:ea typeface="+mn-ea"/>
@@ -8595,9 +8519,12 @@
   <p:cSld name="Slide 1">
     <p:bg>
       <p:bgPr>
-        <a:solidFill>
-          <a:srgbClr val="0F2A47"/>
-        </a:solidFill>
+        <a:blipFill rotWithShape="1">
+          <a:blip r:embed="rId3"/>
+          <a:stretch>
+            <a:fillRect/>
+          </a:stretch>
+        </a:blipFill>
         <a:effectLst/>
       </p:bgPr>
     </p:bg>
@@ -8630,7 +8557,7 @@
             <a:avLst/>
           </a:prstGeom>
           <a:solidFill>
-            <a:srgbClr val="23456B"/>
+            <a:srgbClr val="2C2660"/>
           </a:solidFill>
           <a:ln/>
         </p:spPr>
@@ -8657,7 +8584,7 @@
             <a:avLst/>
           </a:prstGeom>
           <a:solidFill>
-            <a:srgbClr val="1B3A5C"/>
+            <a:srgbClr val="2C2660"/>
           </a:solidFill>
           <a:ln/>
         </p:spPr>
@@ -8684,7 +8611,7 @@
             <a:avLst/>
           </a:prstGeom>
           <a:solidFill>
-            <a:srgbClr val="1B3A5C"/>
+            <a:srgbClr val="2C2660"/>
           </a:solidFill>
           <a:ln/>
         </p:spPr>
@@ -8711,7 +8638,7 @@
             <a:avLst/>
           </a:prstGeom>
           <a:solidFill>
-            <a:srgbClr val="23456B"/>
+            <a:srgbClr val="2C2660"/>
           </a:solidFill>
           <a:ln/>
         </p:spPr>
@@ -8738,7 +8665,7 @@
             <a:avLst/>
           </a:prstGeom>
           <a:solidFill>
-            <a:srgbClr val="1B3A5C"/>
+            <a:srgbClr val="2C2660"/>
           </a:solidFill>
           <a:ln/>
         </p:spPr>
@@ -8765,7 +8692,7 @@
             <a:avLst/>
           </a:prstGeom>
           <a:solidFill>
-            <a:srgbClr val="1B3A5C"/>
+            <a:srgbClr val="2C2660"/>
           </a:solidFill>
           <a:ln/>
         </p:spPr>
@@ -8792,7 +8719,7 @@
             <a:avLst/>
           </a:prstGeom>
           <a:solidFill>
-            <a:srgbClr val="23456B"/>
+            <a:srgbClr val="2C2660"/>
           </a:solidFill>
           <a:ln/>
         </p:spPr>
@@ -8819,7 +8746,7 @@
             <a:avLst/>
           </a:prstGeom>
           <a:solidFill>
-            <a:srgbClr val="1B3A5C"/>
+            <a:srgbClr val="2C2660"/>
           </a:solidFill>
           <a:ln/>
         </p:spPr>
@@ -8846,7 +8773,7 @@
             <a:avLst/>
           </a:prstGeom>
           <a:solidFill>
-            <a:srgbClr val="1B3A5C"/>
+            <a:srgbClr val="2C2660"/>
           </a:solidFill>
           <a:ln/>
         </p:spPr>
@@ -8873,7 +8800,7 @@
             <a:avLst/>
           </a:prstGeom>
           <a:solidFill>
-            <a:srgbClr val="23456B"/>
+            <a:srgbClr val="2C2660"/>
           </a:solidFill>
           <a:ln/>
         </p:spPr>
@@ -8900,7 +8827,7 @@
             <a:avLst/>
           </a:prstGeom>
           <a:solidFill>
-            <a:srgbClr val="1B3A5C"/>
+            <a:srgbClr val="2C2660"/>
           </a:solidFill>
           <a:ln/>
         </p:spPr>
@@ -8927,7 +8854,7 @@
             <a:avLst/>
           </a:prstGeom>
           <a:solidFill>
-            <a:srgbClr val="1B3A5C"/>
+            <a:srgbClr val="2C2660"/>
           </a:solidFill>
           <a:ln/>
         </p:spPr>
@@ -8954,7 +8881,7 @@
             <a:avLst/>
           </a:prstGeom>
           <a:solidFill>
-            <a:srgbClr val="23456B"/>
+            <a:srgbClr val="2C2660"/>
           </a:solidFill>
           <a:ln/>
         </p:spPr>
@@ -8981,7 +8908,7 @@
             <a:avLst/>
           </a:prstGeom>
           <a:solidFill>
-            <a:srgbClr val="1B3A5C"/>
+            <a:srgbClr val="2C2660"/>
           </a:solidFill>
           <a:ln/>
         </p:spPr>
@@ -9008,7 +8935,7 @@
             <a:avLst/>
           </a:prstGeom>
           <a:solidFill>
-            <a:srgbClr val="1B3A5C"/>
+            <a:srgbClr val="2C2660"/>
           </a:solidFill>
           <a:ln/>
         </p:spPr>
@@ -9035,7 +8962,7 @@
             <a:avLst/>
           </a:prstGeom>
           <a:solidFill>
-            <a:srgbClr val="23456B"/>
+            <a:srgbClr val="2C2660"/>
           </a:solidFill>
           <a:ln/>
         </p:spPr>
@@ -9062,7 +8989,7 @@
             <a:avLst/>
           </a:prstGeom>
           <a:solidFill>
-            <a:srgbClr val="1B3A5C"/>
+            <a:srgbClr val="2C2660"/>
           </a:solidFill>
           <a:ln/>
         </p:spPr>
@@ -9089,7 +9016,7 @@
             <a:avLst/>
           </a:prstGeom>
           <a:solidFill>
-            <a:srgbClr val="1B3A5C"/>
+            <a:srgbClr val="2C2660"/>
           </a:solidFill>
           <a:ln/>
         </p:spPr>
@@ -9116,7 +9043,7 @@
             <a:avLst/>
           </a:prstGeom>
           <a:solidFill>
-            <a:srgbClr val="23456B"/>
+            <a:srgbClr val="2C2660"/>
           </a:solidFill>
           <a:ln/>
         </p:spPr>
@@ -9143,7 +9070,7 @@
             <a:avLst/>
           </a:prstGeom>
           <a:solidFill>
-            <a:srgbClr val="1B3A5C"/>
+            <a:srgbClr val="2C2660"/>
           </a:solidFill>
           <a:ln/>
         </p:spPr>
@@ -9170,7 +9097,7 @@
             <a:avLst/>
           </a:prstGeom>
           <a:solidFill>
-            <a:srgbClr val="1B3A5C"/>
+            <a:srgbClr val="2C2660"/>
           </a:solidFill>
           <a:ln/>
         </p:spPr>
@@ -9197,7 +9124,7 @@
             <a:avLst/>
           </a:prstGeom>
           <a:solidFill>
-            <a:srgbClr val="23456B"/>
+            <a:srgbClr val="2C2660"/>
           </a:solidFill>
           <a:ln/>
         </p:spPr>
@@ -9224,7 +9151,7 @@
             <a:avLst/>
           </a:prstGeom>
           <a:solidFill>
-            <a:srgbClr val="1B3A5C"/>
+            <a:srgbClr val="2C2660"/>
           </a:solidFill>
           <a:ln/>
         </p:spPr>
@@ -9251,7 +9178,7 @@
             <a:avLst/>
           </a:prstGeom>
           <a:solidFill>
-            <a:srgbClr val="1B3A5C"/>
+            <a:srgbClr val="2C2660"/>
           </a:solidFill>
           <a:ln/>
         </p:spPr>
@@ -9278,7 +9205,7 @@
             <a:avLst/>
           </a:prstGeom>
           <a:solidFill>
-            <a:srgbClr val="23456B"/>
+            <a:srgbClr val="2C2660"/>
           </a:solidFill>
           <a:ln/>
         </p:spPr>
@@ -9305,7 +9232,7 @@
             <a:avLst/>
           </a:prstGeom>
           <a:solidFill>
-            <a:srgbClr val="1B3A5C"/>
+            <a:srgbClr val="2C2660"/>
           </a:solidFill>
           <a:ln/>
         </p:spPr>
@@ -9332,7 +9259,7 @@
             <a:avLst/>
           </a:prstGeom>
           <a:solidFill>
-            <a:srgbClr val="1B3A5C"/>
+            <a:srgbClr val="2C2660"/>
           </a:solidFill>
           <a:ln/>
         </p:spPr>
@@ -9359,7 +9286,7 @@
             <a:avLst/>
           </a:prstGeom>
           <a:solidFill>
-            <a:srgbClr val="23456B"/>
+            <a:srgbClr val="2C2660"/>
           </a:solidFill>
           <a:ln/>
         </p:spPr>
@@ -9386,7 +9313,7 @@
             <a:avLst/>
           </a:prstGeom>
           <a:solidFill>
-            <a:srgbClr val="1B3A5C"/>
+            <a:srgbClr val="2C2660"/>
           </a:solidFill>
           <a:ln/>
         </p:spPr>
@@ -9413,7 +9340,7 @@
             <a:avLst/>
           </a:prstGeom>
           <a:solidFill>
-            <a:srgbClr val="1B3A5C"/>
+            <a:srgbClr val="2C2660"/>
           </a:solidFill>
           <a:ln/>
         </p:spPr>
@@ -9440,7 +9367,7 @@
             <a:avLst/>
           </a:prstGeom>
           <a:solidFill>
-            <a:srgbClr val="23456B"/>
+            <a:srgbClr val="2C2660"/>
           </a:solidFill>
           <a:ln/>
         </p:spPr>
@@ -9467,7 +9394,7 @@
             <a:avLst/>
           </a:prstGeom>
           <a:solidFill>
-            <a:srgbClr val="1B3A5C"/>
+            <a:srgbClr val="2C2660"/>
           </a:solidFill>
           <a:ln/>
         </p:spPr>
@@ -9494,7 +9421,7 @@
             <a:avLst/>
           </a:prstGeom>
           <a:solidFill>
-            <a:srgbClr val="1B3A5C"/>
+            <a:srgbClr val="2C2660"/>
           </a:solidFill>
           <a:ln/>
         </p:spPr>
@@ -9521,7 +9448,7 @@
             <a:avLst/>
           </a:prstGeom>
           <a:solidFill>
-            <a:srgbClr val="23456B"/>
+            <a:srgbClr val="2C2660"/>
           </a:solidFill>
           <a:ln/>
         </p:spPr>
@@ -9548,7 +9475,7 @@
             <a:avLst/>
           </a:prstGeom>
           <a:solidFill>
-            <a:srgbClr val="1B3A5C"/>
+            <a:srgbClr val="2C2660"/>
           </a:solidFill>
           <a:ln/>
         </p:spPr>
@@ -9587,7 +9514,7 @@
             <a:r>
               <a:rPr lang="en-US" sz="1300" b="1" kern="0" spc="200" dirty="0">
                 <a:solidFill>
-                  <a:srgbClr val="5EEAD4"/>
+                  <a:srgbClr val="F2A0B5"/>
                 </a:solidFill>
                 <a:latin typeface="Calibri" pitchFamily="34" charset="0"/>
                 <a:ea typeface="Calibri" pitchFamily="34" charset="-122"/>
@@ -9707,7 +9634,7 @@
             <a:r>
               <a:rPr lang="en-US" sz="1600" i="1" dirty="0">
                 <a:solidFill>
-                  <a:srgbClr val="C9D9E8"/>
+                  <a:srgbClr val="E4E1F5"/>
                 </a:solidFill>
                 <a:latin typeface="Calibri" pitchFamily="34" charset="0"/>
                 <a:ea typeface="Calibri" pitchFamily="34" charset="-122"/>
@@ -9734,7 +9661,7 @@
             <a:avLst/>
           </a:prstGeom>
           <a:solidFill>
-            <a:srgbClr val="D97706"/>
+            <a:srgbClr val="F0A35E"/>
           </a:solidFill>
           <a:ln/>
         </p:spPr>
@@ -9761,11 +9688,11 @@
             <a:avLst/>
           </a:prstGeom>
           <a:solidFill>
-            <a:srgbClr val="16324F"/>
+            <a:srgbClr val="241F52"/>
           </a:solidFill>
           <a:ln w="12700">
             <a:solidFill>
-              <a:srgbClr val="2A4A6B"/>
+              <a:srgbClr val="352E6E"/>
             </a:solidFill>
             <a:prstDash val="solid"/>
           </a:ln>
@@ -9793,7 +9720,7 @@
             <a:avLst/>
           </a:prstGeom>
           <a:solidFill>
-            <a:srgbClr val="5EEAD4"/>
+            <a:srgbClr val="F2A0B5"/>
           </a:solidFill>
           <a:ln/>
         </p:spPr>
@@ -9871,7 +9798,7 @@
             <a:r>
               <a:rPr lang="en-US" sz="1100" dirty="0">
                 <a:solidFill>
-                  <a:srgbClr val="C9D9E8"/>
+                  <a:srgbClr val="E4E1F5"/>
                 </a:solidFill>
                 <a:latin typeface="Calibri" pitchFamily="34" charset="0"/>
                 <a:ea typeface="Calibri" pitchFamily="34" charset="-122"/>
@@ -9898,11 +9825,11 @@
             <a:avLst/>
           </a:prstGeom>
           <a:solidFill>
-            <a:srgbClr val="16324F"/>
+            <a:srgbClr val="241F52"/>
           </a:solidFill>
           <a:ln w="12700">
             <a:solidFill>
-              <a:srgbClr val="2A4A6B"/>
+              <a:srgbClr val="352E6E"/>
             </a:solidFill>
             <a:prstDash val="solid"/>
           </a:ln>
@@ -9930,7 +9857,7 @@
             <a:avLst/>
           </a:prstGeom>
           <a:solidFill>
-            <a:srgbClr val="5EEAD4"/>
+            <a:srgbClr val="F2A0B5"/>
           </a:solidFill>
           <a:ln/>
         </p:spPr>
@@ -10008,7 +9935,7 @@
             <a:r>
               <a:rPr lang="en-US" sz="1100" dirty="0">
                 <a:solidFill>
-                  <a:srgbClr val="C9D9E8"/>
+                  <a:srgbClr val="E4E1F5"/>
                 </a:solidFill>
                 <a:latin typeface="Calibri" pitchFamily="34" charset="0"/>
                 <a:ea typeface="Calibri" pitchFamily="34" charset="-122"/>
@@ -10035,11 +9962,11 @@
             <a:avLst/>
           </a:prstGeom>
           <a:solidFill>
-            <a:srgbClr val="16324F"/>
+            <a:srgbClr val="241F52"/>
           </a:solidFill>
           <a:ln w="12700">
             <a:solidFill>
-              <a:srgbClr val="2A4A6B"/>
+              <a:srgbClr val="352E6E"/>
             </a:solidFill>
             <a:prstDash val="solid"/>
           </a:ln>
@@ -10067,7 +9994,7 @@
             <a:avLst/>
           </a:prstGeom>
           <a:solidFill>
-            <a:srgbClr val="5EEAD4"/>
+            <a:srgbClr val="F2A0B5"/>
           </a:solidFill>
           <a:ln/>
         </p:spPr>
@@ -10145,7 +10072,7 @@
             <a:r>
               <a:rPr lang="en-US" sz="1100" dirty="0">
                 <a:solidFill>
-                  <a:srgbClr val="C9D9E8"/>
+                  <a:srgbClr val="E4E1F5"/>
                 </a:solidFill>
                 <a:latin typeface="Calibri" pitchFamily="34" charset="0"/>
                 <a:ea typeface="Calibri" pitchFamily="34" charset="-122"/>
@@ -10172,11 +10099,11 @@
             <a:avLst/>
           </a:prstGeom>
           <a:solidFill>
-            <a:srgbClr val="16324F"/>
+            <a:srgbClr val="241F52"/>
           </a:solidFill>
           <a:ln w="12700">
             <a:solidFill>
-              <a:srgbClr val="2A4A6B"/>
+              <a:srgbClr val="352E6E"/>
             </a:solidFill>
             <a:prstDash val="solid"/>
           </a:ln>
@@ -10204,7 +10131,7 @@
             <a:avLst/>
           </a:prstGeom>
           <a:solidFill>
-            <a:srgbClr val="5EEAD4"/>
+            <a:srgbClr val="F2A0B5"/>
           </a:solidFill>
           <a:ln/>
         </p:spPr>
@@ -10282,7 +10209,7 @@
             <a:r>
               <a:rPr lang="en-US" sz="1100" dirty="0">
                 <a:solidFill>
-                  <a:srgbClr val="C9D9E8"/>
+                  <a:srgbClr val="E4E1F5"/>
                 </a:solidFill>
                 <a:latin typeface="Calibri" pitchFamily="34" charset="0"/>
                 <a:ea typeface="Calibri" pitchFamily="34" charset="-122"/>
@@ -10318,7 +10245,7 @@
             <a:r>
               <a:rPr lang="en-US" sz="1050" dirty="0">
                 <a:solidFill>
-                  <a:srgbClr val="7E97AE"/>
+                  <a:srgbClr val="B3ABDD"/>
                 </a:solidFill>
                 <a:latin typeface="Calibri" pitchFamily="34" charset="0"/>
                 <a:ea typeface="Calibri" pitchFamily="34" charset="-122"/>
@@ -10329,7 +10256,7 @@
             <a:r>
               <a:rPr lang="en-US" sz="1050" b="1" dirty="0">
                 <a:solidFill>
-                  <a:srgbClr val="7E97AE"/>
+                  <a:srgbClr val="B3ABDD"/>
                 </a:solidFill>
                 <a:latin typeface="Calibri" pitchFamily="34" charset="0"/>
                 <a:ea typeface="Calibri" pitchFamily="34" charset="-122"/>
@@ -10340,7 +10267,7 @@
             <a:r>
               <a:rPr lang="en-US" sz="1050" dirty="0">
                 <a:solidFill>
-                  <a:srgbClr val="7E97AE"/>
+                  <a:srgbClr val="B3ABDD"/>
                 </a:solidFill>
                 <a:latin typeface="Calibri" pitchFamily="34" charset="0"/>
                 <a:ea typeface="Calibri" pitchFamily="34" charset="-122"/>
@@ -10365,9 +10292,12 @@
   <p:cSld name="Slide 10">
     <p:bg>
       <p:bgPr>
-        <a:solidFill>
-          <a:srgbClr val="FFFFFF"/>
-        </a:solidFill>
+        <a:blipFill rotWithShape="1">
+          <a:blip r:embed="rId3"/>
+          <a:stretch>
+            <a:fillRect/>
+          </a:stretch>
+        </a:blipFill>
         <a:effectLst/>
       </p:bgPr>
     </p:bg>
@@ -10400,7 +10330,7 @@
             <a:avLst/>
           </a:prstGeom>
           <a:solidFill>
-            <a:srgbClr val="1B3A5C"/>
+            <a:srgbClr val="2C2660"/>
           </a:solidFill>
           <a:ln/>
         </p:spPr>
@@ -10439,7 +10369,7 @@
             <a:r>
               <a:rPr lang="en-US" sz="1100" b="1" kern="0" spc="200" dirty="0">
                 <a:solidFill>
-                  <a:srgbClr val="5EEAD4"/>
+                  <a:srgbClr val="F2A0B5"/>
                 </a:solidFill>
                 <a:latin typeface="Calibri" pitchFamily="34" charset="0"/>
                 <a:ea typeface="Calibri" pitchFamily="34" charset="-122"/>
@@ -10517,7 +10447,7 @@
             <a:r>
               <a:rPr lang="en-US" sz="1200" dirty="0">
                 <a:solidFill>
-                  <a:srgbClr val="C9D9E8"/>
+                  <a:srgbClr val="E4E1F5"/>
                 </a:solidFill>
                 <a:latin typeface="Calibri" pitchFamily="34" charset="0"/>
                 <a:ea typeface="Calibri" pitchFamily="34" charset="-122"/>
@@ -10544,17 +10474,17 @@
             <a:avLst/>
           </a:prstGeom>
           <a:solidFill>
-            <a:srgbClr val="F4F6F9"/>
+            <a:srgbClr val="352F6E"/>
           </a:solidFill>
           <a:ln w="12700">
             <a:solidFill>
-              <a:srgbClr val="E2E8F0"/>
+              <a:srgbClr val="352F6E"/>
             </a:solidFill>
             <a:prstDash val="solid"/>
           </a:ln>
           <a:effectLst>
             <a:outerShdw blurRad="88900" dist="25400" dir="5400000" algn="bl" rotWithShape="0">
-              <a:srgbClr val="1B3A5C">
+              <a:srgbClr val="2C2660">
                 <a:alpha val="8000"/>
               </a:srgbClr>
             </a:outerShdw>
@@ -10583,7 +10513,7 @@
             <a:avLst/>
           </a:prstGeom>
           <a:solidFill>
-            <a:srgbClr val="274A70"/>
+            <a:srgbClr val="352E6E"/>
           </a:solidFill>
           <a:ln/>
         </p:spPr>
@@ -10598,465 +10528,6 @@
       <p:pic>
         <p:nvPicPr>
           <p:cNvPr id="8" name="Image 0" descr="/home/claude/build/icons/invoice_white.png"/>
-          <p:cNvPicPr>
-            <a:picLocks noChangeAspect="1"/>
-          </p:cNvPicPr>
-          <p:nvPr/>
-        </p:nvPicPr>
-        <p:blipFill>
-          <a:blip r:embed="rId3"/>
-          <a:stretch>
-            <a:fillRect/>
-          </a:stretch>
-        </p:blipFill>
-        <p:spPr>
-          <a:xfrm>
-            <a:off x="2004365" y="1839773"/>
-            <a:ext cx="380390" cy="380390"/>
-          </a:xfrm>
-          <a:prstGeom prst="rect">
-            <a:avLst/>
-          </a:prstGeom>
-        </p:spPr>
-      </p:pic>
-      <p:sp>
-        <p:nvSpPr>
-          <p:cNvPr id="9" name="Text 6"/>
-          <p:cNvSpPr/>
-          <p:nvPr/>
-        </p:nvSpPr>
-        <p:spPr>
-          <a:xfrm>
-            <a:off x="502920" y="2514600"/>
-            <a:ext cx="3383280" cy="365760"/>
-          </a:xfrm>
-          <a:prstGeom prst="rect">
-            <a:avLst/>
-          </a:prstGeom>
-          <a:noFill/>
-          <a:ln/>
-        </p:spPr>
-        <p:txBody>
-          <a:bodyPr wrap="square" lIns="0" tIns="0" rIns="0" bIns="0" rtlCol="0" anchor="ctr"/>
-          <a:lstStyle/>
-          <a:p>
-            <a:pPr marL="0" indent="0" algn="ctr">
-              <a:buNone/>
-            </a:pPr>
-            <a:r>
-              <a:rPr lang="en-US" sz="1700" b="1" dirty="0">
-                <a:solidFill>
-                  <a:srgbClr val="0F2A47"/>
-                </a:solidFill>
-                <a:latin typeface="Cambria" pitchFamily="34" charset="0"/>
-                <a:ea typeface="Cambria" pitchFamily="34" charset="-122"/>
-                <a:cs typeface="Cambria" pitchFamily="34" charset="-120"/>
-              </a:rPr>
-              <a:t>Processing</a:t>
-            </a:r>
-            <a:endParaRPr lang="en-US" sz="1700" dirty="0"/>
-          </a:p>
-        </p:txBody>
-      </p:sp>
-      <p:sp>
-        <p:nvSpPr>
-          <p:cNvPr id="10" name="Text 7"/>
-          <p:cNvSpPr/>
-          <p:nvPr/>
-        </p:nvSpPr>
-        <p:spPr>
-          <a:xfrm>
-            <a:off x="502920" y="2852928"/>
-            <a:ext cx="3383280" cy="274320"/>
-          </a:xfrm>
-          <a:prstGeom prst="rect">
-            <a:avLst/>
-          </a:prstGeom>
-          <a:noFill/>
-          <a:ln/>
-        </p:spPr>
-        <p:txBody>
-          <a:bodyPr wrap="square" lIns="0" tIns="0" rIns="0" bIns="0" rtlCol="0" anchor="ctr"/>
-          <a:lstStyle/>
-          <a:p>
-            <a:pPr marL="0" indent="0" algn="ctr">
-              <a:buNone/>
-            </a:pPr>
-            <a:r>
-              <a:rPr lang="en-US" sz="1100" i="1" dirty="0">
-                <a:solidFill>
-                  <a:srgbClr val="64748B"/>
-                </a:solidFill>
-                <a:latin typeface="Calibri" pitchFamily="34" charset="0"/>
-                <a:ea typeface="Calibri" pitchFamily="34" charset="-122"/>
-                <a:cs typeface="Calibri" pitchFamily="34" charset="-120"/>
-              </a:rPr>
-              <a:t>Purchase → Approval</a:t>
-            </a:r>
-            <a:endParaRPr lang="en-US" sz="1100" dirty="0"/>
-          </a:p>
-        </p:txBody>
-      </p:sp>
-      <p:sp>
-        <p:nvSpPr>
-          <p:cNvPr id="11" name="Text 8"/>
-          <p:cNvSpPr/>
-          <p:nvPr/>
-        </p:nvSpPr>
-        <p:spPr>
-          <a:xfrm>
-            <a:off x="777240" y="3337560"/>
-            <a:ext cx="2834640" cy="228600"/>
-          </a:xfrm>
-          <a:prstGeom prst="rect">
-            <a:avLst/>
-          </a:prstGeom>
-          <a:noFill/>
-          <a:ln/>
-        </p:spPr>
-        <p:txBody>
-          <a:bodyPr wrap="square" lIns="0" tIns="0" rIns="0" bIns="0" rtlCol="0" anchor="ctr"/>
-          <a:lstStyle/>
-          <a:p>
-            <a:pPr marL="0" indent="0">
-              <a:buNone/>
-            </a:pPr>
-            <a:r>
-              <a:rPr lang="en-US" sz="1050" dirty="0">
-                <a:solidFill>
-                  <a:srgbClr val="64748B"/>
-                </a:solidFill>
-                <a:latin typeface="Calibri" pitchFamily="34" charset="0"/>
-                <a:ea typeface="Calibri" pitchFamily="34" charset="-122"/>
-                <a:cs typeface="Calibri" pitchFamily="34" charset="-120"/>
-              </a:rPr>
-              <a:t>On-Time Orders</a:t>
-            </a:r>
-            <a:endParaRPr lang="en-US" sz="1050" dirty="0"/>
-          </a:p>
-        </p:txBody>
-      </p:sp>
-      <p:sp>
-        <p:nvSpPr>
-          <p:cNvPr id="12" name="Text 9"/>
-          <p:cNvSpPr/>
-          <p:nvPr/>
-        </p:nvSpPr>
-        <p:spPr>
-          <a:xfrm>
-            <a:off x="777240" y="3557016"/>
-            <a:ext cx="2834640" cy="320040"/>
-          </a:xfrm>
-          <a:prstGeom prst="rect">
-            <a:avLst/>
-          </a:prstGeom>
-          <a:noFill/>
-          <a:ln/>
-        </p:spPr>
-        <p:txBody>
-          <a:bodyPr wrap="square" lIns="0" tIns="0" rIns="0" bIns="0" rtlCol="0" anchor="ctr"/>
-          <a:lstStyle/>
-          <a:p>
-            <a:pPr marL="0" indent="0">
-              <a:buNone/>
-            </a:pPr>
-            <a:r>
-              <a:rPr lang="en-US" sz="1700" b="1" dirty="0">
-                <a:solidFill>
-                  <a:srgbClr val="0D9488"/>
-                </a:solidFill>
-                <a:latin typeface="Cambria" pitchFamily="34" charset="0"/>
-                <a:ea typeface="Cambria" pitchFamily="34" charset="-122"/>
-                <a:cs typeface="Cambria" pitchFamily="34" charset="-120"/>
-              </a:rPr>
-              <a:t>0.26 days</a:t>
-            </a:r>
-            <a:endParaRPr lang="en-US" sz="1700" dirty="0"/>
-          </a:p>
-        </p:txBody>
-      </p:sp>
-      <p:sp>
-        <p:nvSpPr>
-          <p:cNvPr id="13" name="Shape 10"/>
-          <p:cNvSpPr/>
-          <p:nvPr/>
-        </p:nvSpPr>
-        <p:spPr>
-          <a:xfrm>
-            <a:off x="777240" y="3959352"/>
-            <a:ext cx="2834640" cy="0"/>
-          </a:xfrm>
-          <a:prstGeom prst="line">
-            <a:avLst/>
-          </a:prstGeom>
-          <a:noFill/>
-          <a:ln w="12700">
-            <a:solidFill>
-              <a:srgbClr val="E2E8F0"/>
-            </a:solidFill>
-            <a:prstDash val="solid"/>
-          </a:ln>
-        </p:spPr>
-        <p:txBody>
-          <a:bodyPr/>
-          <a:lstStyle/>
-          <a:p>
-            <a:endParaRPr lang="en-US"/>
-          </a:p>
-        </p:txBody>
-      </p:sp>
-      <p:sp>
-        <p:nvSpPr>
-          <p:cNvPr id="14" name="Text 11"/>
-          <p:cNvSpPr/>
-          <p:nvPr/>
-        </p:nvSpPr>
-        <p:spPr>
-          <a:xfrm>
-            <a:off x="777240" y="4050792"/>
-            <a:ext cx="2834640" cy="228600"/>
-          </a:xfrm>
-          <a:prstGeom prst="rect">
-            <a:avLst/>
-          </a:prstGeom>
-          <a:noFill/>
-          <a:ln/>
-        </p:spPr>
-        <p:txBody>
-          <a:bodyPr wrap="square" lIns="0" tIns="0" rIns="0" bIns="0" rtlCol="0" anchor="ctr"/>
-          <a:lstStyle/>
-          <a:p>
-            <a:pPr marL="0" indent="0">
-              <a:buNone/>
-            </a:pPr>
-            <a:r>
-              <a:rPr lang="en-US" sz="1050" dirty="0">
-                <a:solidFill>
-                  <a:srgbClr val="64748B"/>
-                </a:solidFill>
-                <a:latin typeface="Calibri" pitchFamily="34" charset="0"/>
-                <a:ea typeface="Calibri" pitchFamily="34" charset="-122"/>
-                <a:cs typeface="Calibri" pitchFamily="34" charset="-120"/>
-              </a:rPr>
-              <a:t>Late Orders</a:t>
-            </a:r>
-            <a:endParaRPr lang="en-US" sz="1050" dirty="0"/>
-          </a:p>
-        </p:txBody>
-      </p:sp>
-      <p:sp>
-        <p:nvSpPr>
-          <p:cNvPr id="15" name="Text 12"/>
-          <p:cNvSpPr/>
-          <p:nvPr/>
-        </p:nvSpPr>
-        <p:spPr>
-          <a:xfrm>
-            <a:off x="777240" y="4270248"/>
-            <a:ext cx="2834640" cy="320040"/>
-          </a:xfrm>
-          <a:prstGeom prst="rect">
-            <a:avLst/>
-          </a:prstGeom>
-          <a:noFill/>
-          <a:ln/>
-        </p:spPr>
-        <p:txBody>
-          <a:bodyPr wrap="square" lIns="0" tIns="0" rIns="0" bIns="0" rtlCol="0" anchor="ctr"/>
-          <a:lstStyle/>
-          <a:p>
-            <a:pPr marL="0" indent="0">
-              <a:buNone/>
-            </a:pPr>
-            <a:r>
-              <a:rPr lang="en-US" sz="1700" b="1" dirty="0">
-                <a:solidFill>
-                  <a:srgbClr val="0F2A47"/>
-                </a:solidFill>
-                <a:latin typeface="Cambria" pitchFamily="34" charset="0"/>
-                <a:ea typeface="Cambria" pitchFamily="34" charset="-122"/>
-                <a:cs typeface="Cambria" pitchFamily="34" charset="-120"/>
-              </a:rPr>
-              <a:t>0.33 days</a:t>
-            </a:r>
-            <a:endParaRPr lang="en-US" sz="1700" dirty="0"/>
-          </a:p>
-        </p:txBody>
-      </p:sp>
-      <p:sp>
-        <p:nvSpPr>
-          <p:cNvPr id="16" name="Text 13"/>
-          <p:cNvSpPr/>
-          <p:nvPr/>
-        </p:nvSpPr>
-        <p:spPr>
-          <a:xfrm>
-            <a:off x="777240" y="4672584"/>
-            <a:ext cx="2834640" cy="256032"/>
-          </a:xfrm>
-          <a:prstGeom prst="rect">
-            <a:avLst/>
-          </a:prstGeom>
-          <a:noFill/>
-          <a:ln/>
-        </p:spPr>
-        <p:txBody>
-          <a:bodyPr wrap="square" lIns="0" tIns="0" rIns="0" bIns="0" rtlCol="0" anchor="ctr"/>
-          <a:lstStyle/>
-          <a:p>
-            <a:pPr marL="0" indent="0">
-              <a:buNone/>
-            </a:pPr>
-            <a:r>
-              <a:rPr lang="en-US" sz="1200" b="1" dirty="0">
-                <a:solidFill>
-                  <a:srgbClr val="475569"/>
-                </a:solidFill>
-                <a:latin typeface="Calibri" pitchFamily="34" charset="0"/>
-                <a:ea typeface="Calibri" pitchFamily="34" charset="-122"/>
-                <a:cs typeface="Calibri" pitchFamily="34" charset="-120"/>
-              </a:rPr>
-              <a:t>Gap: +0.07d</a:t>
-            </a:r>
-            <a:endParaRPr lang="en-US" sz="1200" dirty="0"/>
-          </a:p>
-        </p:txBody>
-      </p:sp>
-      <p:sp>
-        <p:nvSpPr>
-          <p:cNvPr id="17" name="Shape 14"/>
-          <p:cNvSpPr/>
-          <p:nvPr/>
-        </p:nvSpPr>
-        <p:spPr>
-          <a:xfrm>
-            <a:off x="777240" y="5074920"/>
-            <a:ext cx="2834640" cy="347472"/>
-          </a:xfrm>
-          <a:prstGeom prst="rect">
-            <a:avLst/>
-          </a:prstGeom>
-          <a:solidFill>
-            <a:srgbClr val="0D9488"/>
-          </a:solidFill>
-          <a:ln/>
-        </p:spPr>
-        <p:txBody>
-          <a:bodyPr/>
-          <a:lstStyle/>
-          <a:p>
-            <a:endParaRPr lang="en-US"/>
-          </a:p>
-        </p:txBody>
-      </p:sp>
-      <p:sp>
-        <p:nvSpPr>
-          <p:cNvPr id="18" name="Text 15"/>
-          <p:cNvSpPr/>
-          <p:nvPr/>
-        </p:nvSpPr>
-        <p:spPr>
-          <a:xfrm>
-            <a:off x="777240" y="5074920"/>
-            <a:ext cx="2834640" cy="347472"/>
-          </a:xfrm>
-          <a:prstGeom prst="rect">
-            <a:avLst/>
-          </a:prstGeom>
-          <a:noFill/>
-          <a:ln/>
-        </p:spPr>
-        <p:txBody>
-          <a:bodyPr wrap="square" lIns="0" tIns="0" rIns="0" bIns="0" rtlCol="0" anchor="ctr"/>
-          <a:lstStyle/>
-          <a:p>
-            <a:pPr marL="0" indent="0" algn="ctr">
-              <a:buNone/>
-            </a:pPr>
-            <a:r>
-              <a:rPr lang="en-US" sz="1050" b="1" kern="0" spc="50" dirty="0">
-                <a:solidFill>
-                  <a:srgbClr val="FFFFFF"/>
-                </a:solidFill>
-                <a:latin typeface="Calibri" pitchFamily="34" charset="0"/>
-                <a:ea typeface="Calibri" pitchFamily="34" charset="-122"/>
-                <a:cs typeface="Calibri" pitchFamily="34" charset="-120"/>
-              </a:rPr>
-              <a:t>Not a bottleneck</a:t>
-            </a:r>
-            <a:endParaRPr lang="en-US" sz="1050" dirty="0"/>
-          </a:p>
-        </p:txBody>
-      </p:sp>
-      <p:sp>
-        <p:nvSpPr>
-          <p:cNvPr id="19" name="Shape 16"/>
-          <p:cNvSpPr/>
-          <p:nvPr/>
-        </p:nvSpPr>
-        <p:spPr>
-          <a:xfrm>
-            <a:off x="4206240" y="1371600"/>
-            <a:ext cx="3383280" cy="4160520"/>
-          </a:xfrm>
-          <a:prstGeom prst="rect">
-            <a:avLst/>
-          </a:prstGeom>
-          <a:solidFill>
-            <a:srgbClr val="F4F6F9"/>
-          </a:solidFill>
-          <a:ln w="12700">
-            <a:solidFill>
-              <a:srgbClr val="E2E8F0"/>
-            </a:solidFill>
-            <a:prstDash val="solid"/>
-          </a:ln>
-          <a:effectLst>
-            <a:outerShdw blurRad="88900" dist="25400" dir="5400000" algn="bl" rotWithShape="0">
-              <a:srgbClr val="1B3A5C">
-                <a:alpha val="8000"/>
-              </a:srgbClr>
-            </a:outerShdw>
-          </a:effectLst>
-        </p:spPr>
-        <p:txBody>
-          <a:bodyPr/>
-          <a:lstStyle/>
-          <a:p>
-            <a:endParaRPr lang="en-US"/>
-          </a:p>
-        </p:txBody>
-      </p:sp>
-      <p:sp>
-        <p:nvSpPr>
-          <p:cNvPr id="20" name="Shape 17"/>
-          <p:cNvSpPr/>
-          <p:nvPr/>
-        </p:nvSpPr>
-        <p:spPr>
-          <a:xfrm>
-            <a:off x="5532120" y="1664208"/>
-            <a:ext cx="731520" cy="731520"/>
-          </a:xfrm>
-          <a:prstGeom prst="ellipse">
-            <a:avLst/>
-          </a:prstGeom>
-          <a:solidFill>
-            <a:srgbClr val="274A70"/>
-          </a:solidFill>
-          <a:ln/>
-        </p:spPr>
-        <p:txBody>
-          <a:bodyPr/>
-          <a:lstStyle/>
-          <a:p>
-            <a:endParaRPr lang="en-US"/>
-          </a:p>
-        </p:txBody>
-      </p:sp>
-      <p:pic>
-        <p:nvPicPr>
-          <p:cNvPr id="21" name="Image 1" descr="/home/claude/build/icons/warehouse_white.png"/>
           <p:cNvPicPr>
             <a:picLocks noChangeAspect="1"/>
           </p:cNvPicPr>
@@ -11070,7 +10541,7 @@
         </p:blipFill>
         <p:spPr>
           <a:xfrm>
-            <a:off x="5707685" y="1839773"/>
+            <a:off x="2004365" y="1839773"/>
             <a:ext cx="380390" cy="380390"/>
           </a:xfrm>
           <a:prstGeom prst="rect">
@@ -11080,13 +10551,13 @@
       </p:pic>
       <p:sp>
         <p:nvSpPr>
-          <p:cNvPr id="22" name="Text 18"/>
-          <p:cNvSpPr/>
-          <p:nvPr/>
-        </p:nvSpPr>
-        <p:spPr>
-          <a:xfrm>
-            <a:off x="4206240" y="2514600"/>
+          <p:cNvPr id="9" name="Text 6"/>
+          <p:cNvSpPr/>
+          <p:nvPr/>
+        </p:nvSpPr>
+        <p:spPr>
+          <a:xfrm>
+            <a:off x="502920" y="2514600"/>
             <a:ext cx="3383280" cy="365760"/>
           </a:xfrm>
           <a:prstGeom prst="rect">
@@ -11105,13 +10576,13 @@
             <a:r>
               <a:rPr lang="en-US" sz="1700" b="1" dirty="0">
                 <a:solidFill>
-                  <a:srgbClr val="0F2A47"/>
+                  <a:srgbClr val="FFFFFF"/>
                 </a:solidFill>
                 <a:latin typeface="Cambria" pitchFamily="34" charset="0"/>
                 <a:ea typeface="Cambria" pitchFamily="34" charset="-122"/>
                 <a:cs typeface="Cambria" pitchFamily="34" charset="-120"/>
               </a:rPr>
-              <a:t>Seller Fulfillment</a:t>
+              <a:t>Processing</a:t>
             </a:r>
             <a:endParaRPr lang="en-US" sz="1700" dirty="0"/>
           </a:p>
@@ -11119,13 +10590,13 @@
       </p:sp>
       <p:sp>
         <p:nvSpPr>
-          <p:cNvPr id="23" name="Text 19"/>
-          <p:cNvSpPr/>
-          <p:nvPr/>
-        </p:nvSpPr>
-        <p:spPr>
-          <a:xfrm>
-            <a:off x="4206240" y="2852928"/>
+          <p:cNvPr id="10" name="Text 7"/>
+          <p:cNvSpPr/>
+          <p:nvPr/>
+        </p:nvSpPr>
+        <p:spPr>
+          <a:xfrm>
+            <a:off x="502920" y="2852928"/>
             <a:ext cx="3383280" cy="274320"/>
           </a:xfrm>
           <a:prstGeom prst="rect">
@@ -11144,13 +10615,13 @@
             <a:r>
               <a:rPr lang="en-US" sz="1100" i="1" dirty="0">
                 <a:solidFill>
-                  <a:srgbClr val="64748B"/>
+                  <a:srgbClr val="B3ABDD"/>
                 </a:solidFill>
                 <a:latin typeface="Calibri" pitchFamily="34" charset="0"/>
                 <a:ea typeface="Calibri" pitchFamily="34" charset="-122"/>
                 <a:cs typeface="Calibri" pitchFamily="34" charset="-120"/>
               </a:rPr>
-              <a:t>Approval → Carrier</a:t>
+              <a:t>Purchase → Approval</a:t>
             </a:r>
             <a:endParaRPr lang="en-US" sz="1100" dirty="0"/>
           </a:p>
@@ -11158,13 +10629,13 @@
       </p:sp>
       <p:sp>
         <p:nvSpPr>
-          <p:cNvPr id="24" name="Text 20"/>
-          <p:cNvSpPr/>
-          <p:nvPr/>
-        </p:nvSpPr>
-        <p:spPr>
-          <a:xfrm>
-            <a:off x="4480560" y="3337560"/>
+          <p:cNvPr id="11" name="Text 8"/>
+          <p:cNvSpPr/>
+          <p:nvPr/>
+        </p:nvSpPr>
+        <p:spPr>
+          <a:xfrm>
+            <a:off x="777240" y="3337560"/>
             <a:ext cx="2834640" cy="228600"/>
           </a:xfrm>
           <a:prstGeom prst="rect">
@@ -11183,7 +10654,7 @@
             <a:r>
               <a:rPr lang="en-US" sz="1050" dirty="0">
                 <a:solidFill>
-                  <a:srgbClr val="64748B"/>
+                  <a:srgbClr val="B3ABDD"/>
                 </a:solidFill>
                 <a:latin typeface="Calibri" pitchFamily="34" charset="0"/>
                 <a:ea typeface="Calibri" pitchFamily="34" charset="-122"/>
@@ -11197,13 +10668,13 @@
       </p:sp>
       <p:sp>
         <p:nvSpPr>
-          <p:cNvPr id="25" name="Text 21"/>
-          <p:cNvSpPr/>
-          <p:nvPr/>
-        </p:nvSpPr>
-        <p:spPr>
-          <a:xfrm>
-            <a:off x="4480560" y="3557016"/>
+          <p:cNvPr id="12" name="Text 9"/>
+          <p:cNvSpPr/>
+          <p:nvPr/>
+        </p:nvSpPr>
+        <p:spPr>
+          <a:xfrm>
+            <a:off x="777240" y="3557016"/>
             <a:ext cx="2834640" cy="320040"/>
           </a:xfrm>
           <a:prstGeom prst="rect">
@@ -11222,13 +10693,13 @@
             <a:r>
               <a:rPr lang="en-US" sz="1700" b="1" dirty="0">
                 <a:solidFill>
-                  <a:srgbClr val="0D9488"/>
+                  <a:srgbClr val="5ED9B8"/>
                 </a:solidFill>
                 <a:latin typeface="Cambria" pitchFamily="34" charset="0"/>
                 <a:ea typeface="Cambria" pitchFamily="34" charset="-122"/>
                 <a:cs typeface="Cambria" pitchFamily="34" charset="-120"/>
               </a:rPr>
-              <a:t>−4.06 days</a:t>
+              <a:t>0.26 days</a:t>
             </a:r>
             <a:endParaRPr lang="en-US" sz="1700" dirty="0"/>
           </a:p>
@@ -11236,13 +10707,13 @@
       </p:sp>
       <p:sp>
         <p:nvSpPr>
-          <p:cNvPr id="26" name="Shape 22"/>
-          <p:cNvSpPr/>
-          <p:nvPr/>
-        </p:nvSpPr>
-        <p:spPr>
-          <a:xfrm>
-            <a:off x="4480560" y="3959352"/>
+          <p:cNvPr id="13" name="Shape 10"/>
+          <p:cNvSpPr/>
+          <p:nvPr/>
+        </p:nvSpPr>
+        <p:spPr>
+          <a:xfrm>
+            <a:off x="777240" y="3959352"/>
             <a:ext cx="2834640" cy="0"/>
           </a:xfrm>
           <a:prstGeom prst="line">
@@ -11251,7 +10722,7 @@
           <a:noFill/>
           <a:ln w="12700">
             <a:solidFill>
-              <a:srgbClr val="E2E8F0"/>
+              <a:srgbClr val="352F6E"/>
             </a:solidFill>
             <a:prstDash val="solid"/>
           </a:ln>
@@ -11266,13 +10737,13 @@
       </p:sp>
       <p:sp>
         <p:nvSpPr>
-          <p:cNvPr id="27" name="Text 23"/>
-          <p:cNvSpPr/>
-          <p:nvPr/>
-        </p:nvSpPr>
-        <p:spPr>
-          <a:xfrm>
-            <a:off x="4480560" y="4050792"/>
+          <p:cNvPr id="14" name="Text 11"/>
+          <p:cNvSpPr/>
+          <p:nvPr/>
+        </p:nvSpPr>
+        <p:spPr>
+          <a:xfrm>
+            <a:off x="777240" y="4050792"/>
             <a:ext cx="2834640" cy="228600"/>
           </a:xfrm>
           <a:prstGeom prst="rect">
@@ -11291,7 +10762,7 @@
             <a:r>
               <a:rPr lang="en-US" sz="1050" dirty="0">
                 <a:solidFill>
-                  <a:srgbClr val="64748B"/>
+                  <a:srgbClr val="B3ABDD"/>
                 </a:solidFill>
                 <a:latin typeface="Calibri" pitchFamily="34" charset="0"/>
                 <a:ea typeface="Calibri" pitchFamily="34" charset="-122"/>
@@ -11305,13 +10776,13 @@
       </p:sp>
       <p:sp>
         <p:nvSpPr>
-          <p:cNvPr id="28" name="Text 24"/>
-          <p:cNvSpPr/>
-          <p:nvPr/>
-        </p:nvSpPr>
-        <p:spPr>
-          <a:xfrm>
-            <a:off x="4480560" y="4270248"/>
+          <p:cNvPr id="15" name="Text 12"/>
+          <p:cNvSpPr/>
+          <p:nvPr/>
+        </p:nvSpPr>
+        <p:spPr>
+          <a:xfrm>
+            <a:off x="777240" y="4270248"/>
             <a:ext cx="2834640" cy="320040"/>
           </a:xfrm>
           <a:prstGeom prst="rect">
@@ -11330,13 +10801,13 @@
             <a:r>
               <a:rPr lang="en-US" sz="1700" b="1" dirty="0">
                 <a:solidFill>
-                  <a:srgbClr val="0F2A47"/>
+                  <a:srgbClr val="FFFFFF"/>
                 </a:solidFill>
                 <a:latin typeface="Cambria" pitchFamily="34" charset="0"/>
                 <a:ea typeface="Cambria" pitchFamily="34" charset="-122"/>
                 <a:cs typeface="Cambria" pitchFamily="34" charset="-120"/>
               </a:rPr>
-              <a:t>−0.95 days</a:t>
+              <a:t>0.33 days</a:t>
             </a:r>
             <a:endParaRPr lang="en-US" sz="1700" dirty="0"/>
           </a:p>
@@ -11344,13 +10815,13 @@
       </p:sp>
       <p:sp>
         <p:nvSpPr>
-          <p:cNvPr id="29" name="Text 25"/>
-          <p:cNvSpPr/>
-          <p:nvPr/>
-        </p:nvSpPr>
-        <p:spPr>
-          <a:xfrm>
-            <a:off x="4480560" y="4672584"/>
+          <p:cNvPr id="16" name="Text 13"/>
+          <p:cNvSpPr/>
+          <p:nvPr/>
+        </p:nvSpPr>
+        <p:spPr>
+          <a:xfrm>
+            <a:off x="777240" y="4672584"/>
             <a:ext cx="2834640" cy="256032"/>
           </a:xfrm>
           <a:prstGeom prst="rect">
@@ -11369,13 +10840,13 @@
             <a:r>
               <a:rPr lang="en-US" sz="1200" b="1" dirty="0">
                 <a:solidFill>
-                  <a:srgbClr val="475569"/>
+                  <a:srgbClr val="D8D4F0"/>
                 </a:solidFill>
                 <a:latin typeface="Calibri" pitchFamily="34" charset="0"/>
                 <a:ea typeface="Calibri" pitchFamily="34" charset="-122"/>
                 <a:cs typeface="Calibri" pitchFamily="34" charset="-120"/>
               </a:rPr>
-              <a:t>Gap: +3.11d</a:t>
+              <a:t>Gap: +0.07d</a:t>
             </a:r>
             <a:endParaRPr lang="en-US" sz="1200" dirty="0"/>
           </a:p>
@@ -11383,20 +10854,20 @@
       </p:sp>
       <p:sp>
         <p:nvSpPr>
-          <p:cNvPr id="30" name="Shape 26"/>
-          <p:cNvSpPr/>
-          <p:nvPr/>
-        </p:nvSpPr>
-        <p:spPr>
-          <a:xfrm>
-            <a:off x="4480560" y="5074920"/>
+          <p:cNvPr id="17" name="Shape 14"/>
+          <p:cNvSpPr/>
+          <p:nvPr/>
+        </p:nvSpPr>
+        <p:spPr>
+          <a:xfrm>
+            <a:off x="777240" y="5074920"/>
             <a:ext cx="2834640" cy="347472"/>
           </a:xfrm>
           <a:prstGeom prst="rect">
             <a:avLst/>
           </a:prstGeom>
           <a:solidFill>
-            <a:srgbClr val="0D9488"/>
+            <a:srgbClr val="5ED9B8"/>
           </a:solidFill>
           <a:ln/>
         </p:spPr>
@@ -11410,13 +10881,13 @@
       </p:sp>
       <p:sp>
         <p:nvSpPr>
-          <p:cNvPr id="31" name="Text 27"/>
-          <p:cNvSpPr/>
-          <p:nvPr/>
-        </p:nvSpPr>
-        <p:spPr>
-          <a:xfrm>
-            <a:off x="4480560" y="5074920"/>
+          <p:cNvPr id="18" name="Text 15"/>
+          <p:cNvSpPr/>
+          <p:nvPr/>
+        </p:nvSpPr>
+        <p:spPr>
+          <a:xfrm>
+            <a:off x="777240" y="5074920"/>
             <a:ext cx="2834640" cy="347472"/>
           </a:xfrm>
           <a:prstGeom prst="rect">
@@ -11449,30 +10920,30 @@
       </p:sp>
       <p:sp>
         <p:nvSpPr>
-          <p:cNvPr id="32" name="Shape 28"/>
-          <p:cNvSpPr/>
-          <p:nvPr/>
-        </p:nvSpPr>
-        <p:spPr>
-          <a:xfrm>
-            <a:off x="7909560" y="1371600"/>
+          <p:cNvPr id="19" name="Shape 16"/>
+          <p:cNvSpPr/>
+          <p:nvPr/>
+        </p:nvSpPr>
+        <p:spPr>
+          <a:xfrm>
+            <a:off x="4206240" y="1371600"/>
             <a:ext cx="3383280" cy="4160520"/>
           </a:xfrm>
           <a:prstGeom prst="rect">
             <a:avLst/>
           </a:prstGeom>
           <a:solidFill>
-            <a:srgbClr val="FEECEC"/>
+            <a:srgbClr val="352F6E"/>
           </a:solidFill>
           <a:ln w="12700">
             <a:solidFill>
-              <a:srgbClr val="E2E8F0"/>
+              <a:srgbClr val="352F6E"/>
             </a:solidFill>
             <a:prstDash val="solid"/>
           </a:ln>
           <a:effectLst>
             <a:outerShdw blurRad="88900" dist="25400" dir="5400000" algn="bl" rotWithShape="0">
-              <a:srgbClr val="1B3A5C">
+              <a:srgbClr val="2C2660">
                 <a:alpha val="8000"/>
               </a:srgbClr>
             </a:outerShdw>
@@ -11488,47 +10959,20 @@
       </p:sp>
       <p:sp>
         <p:nvSpPr>
-          <p:cNvPr id="33" name="Shape 29"/>
-          <p:cNvSpPr/>
-          <p:nvPr/>
-        </p:nvSpPr>
-        <p:spPr>
-          <a:xfrm>
-            <a:off x="7909560" y="1371600"/>
-            <a:ext cx="3383280" cy="73152"/>
-          </a:xfrm>
-          <a:prstGeom prst="rect">
+          <p:cNvPr id="20" name="Shape 17"/>
+          <p:cNvSpPr/>
+          <p:nvPr/>
+        </p:nvSpPr>
+        <p:spPr>
+          <a:xfrm>
+            <a:off x="5532120" y="1664208"/>
+            <a:ext cx="731520" cy="731520"/>
+          </a:xfrm>
+          <a:prstGeom prst="ellipse">
             <a:avLst/>
           </a:prstGeom>
           <a:solidFill>
-            <a:srgbClr val="DC2626"/>
-          </a:solidFill>
-          <a:ln/>
-        </p:spPr>
-        <p:txBody>
-          <a:bodyPr/>
-          <a:lstStyle/>
-          <a:p>
-            <a:endParaRPr lang="en-US"/>
-          </a:p>
-        </p:txBody>
-      </p:sp>
-      <p:sp>
-        <p:nvSpPr>
-          <p:cNvPr id="34" name="Shape 30"/>
-          <p:cNvSpPr/>
-          <p:nvPr/>
-        </p:nvSpPr>
-        <p:spPr>
-          <a:xfrm>
-            <a:off x="9235440" y="1664208"/>
-            <a:ext cx="731520" cy="731520"/>
-          </a:xfrm>
-          <a:prstGeom prst="ellipse">
-            <a:avLst/>
-          </a:prstGeom>
-          <a:solidFill>
-            <a:srgbClr val="DC2626"/>
+            <a:srgbClr val="352E6E"/>
           </a:solidFill>
           <a:ln/>
         </p:spPr>
@@ -11542,7 +10986,7 @@
       </p:sp>
       <p:pic>
         <p:nvPicPr>
-          <p:cNvPr id="35" name="Image 2" descr="/home/claude/build/icons/shipfast_red.png"/>
+          <p:cNvPr id="21" name="Image 1" descr="/home/claude/build/icons/warehouse_white.png"/>
           <p:cNvPicPr>
             <a:picLocks noChangeAspect="1"/>
           </p:cNvPicPr>
@@ -11556,7 +11000,7 @@
         </p:blipFill>
         <p:spPr>
           <a:xfrm>
-            <a:off x="9411005" y="1839773"/>
+            <a:off x="5707685" y="1839773"/>
             <a:ext cx="380390" cy="380390"/>
           </a:xfrm>
           <a:prstGeom prst="rect">
@@ -11566,13 +11010,13 @@
       </p:pic>
       <p:sp>
         <p:nvSpPr>
-          <p:cNvPr id="36" name="Text 31"/>
-          <p:cNvSpPr/>
-          <p:nvPr/>
-        </p:nvSpPr>
-        <p:spPr>
-          <a:xfrm>
-            <a:off x="7909560" y="2514600"/>
+          <p:cNvPr id="22" name="Text 18"/>
+          <p:cNvSpPr/>
+          <p:nvPr/>
+        </p:nvSpPr>
+        <p:spPr>
+          <a:xfrm>
+            <a:off x="4206240" y="2514600"/>
             <a:ext cx="3383280" cy="365760"/>
           </a:xfrm>
           <a:prstGeom prst="rect">
@@ -11591,13 +11035,13 @@
             <a:r>
               <a:rPr lang="en-US" sz="1700" b="1" dirty="0">
                 <a:solidFill>
-                  <a:srgbClr val="0F2A47"/>
+                  <a:srgbClr val="FFFFFF"/>
                 </a:solidFill>
                 <a:latin typeface="Cambria" pitchFamily="34" charset="0"/>
                 <a:ea typeface="Cambria" pitchFamily="34" charset="-122"/>
                 <a:cs typeface="Cambria" pitchFamily="34" charset="-120"/>
               </a:rPr>
-              <a:t>Shipping</a:t>
+              <a:t>Seller Fulfillment</a:t>
             </a:r>
             <a:endParaRPr lang="en-US" sz="1700" dirty="0"/>
           </a:p>
@@ -11605,13 +11049,13 @@
       </p:sp>
       <p:sp>
         <p:nvSpPr>
-          <p:cNvPr id="37" name="Text 32"/>
-          <p:cNvSpPr/>
-          <p:nvPr/>
-        </p:nvSpPr>
-        <p:spPr>
-          <a:xfrm>
-            <a:off x="7909560" y="2852928"/>
+          <p:cNvPr id="23" name="Text 19"/>
+          <p:cNvSpPr/>
+          <p:nvPr/>
+        </p:nvSpPr>
+        <p:spPr>
+          <a:xfrm>
+            <a:off x="4206240" y="2852928"/>
             <a:ext cx="3383280" cy="274320"/>
           </a:xfrm>
           <a:prstGeom prst="rect">
@@ -11630,13 +11074,13 @@
             <a:r>
               <a:rPr lang="en-US" sz="1100" i="1" dirty="0">
                 <a:solidFill>
-                  <a:srgbClr val="64748B"/>
+                  <a:srgbClr val="B3ABDD"/>
                 </a:solidFill>
                 <a:latin typeface="Calibri" pitchFamily="34" charset="0"/>
                 <a:ea typeface="Calibri" pitchFamily="34" charset="-122"/>
                 <a:cs typeface="Calibri" pitchFamily="34" charset="-120"/>
               </a:rPr>
-              <a:t>Carrier → Customer</a:t>
+              <a:t>Approval → Carrier</a:t>
             </a:r>
             <a:endParaRPr lang="en-US" sz="1100" dirty="0"/>
           </a:p>
@@ -11644,13 +11088,13 @@
       </p:sp>
       <p:sp>
         <p:nvSpPr>
-          <p:cNvPr id="38" name="Text 33"/>
-          <p:cNvSpPr/>
-          <p:nvPr/>
-        </p:nvSpPr>
-        <p:spPr>
-          <a:xfrm>
-            <a:off x="8183880" y="3337560"/>
+          <p:cNvPr id="24" name="Text 20"/>
+          <p:cNvSpPr/>
+          <p:nvPr/>
+        </p:nvSpPr>
+        <p:spPr>
+          <a:xfrm>
+            <a:off x="4480560" y="3337560"/>
             <a:ext cx="2834640" cy="228600"/>
           </a:xfrm>
           <a:prstGeom prst="rect">
@@ -11669,7 +11113,7 @@
             <a:r>
               <a:rPr lang="en-US" sz="1050" dirty="0">
                 <a:solidFill>
-                  <a:srgbClr val="64748B"/>
+                  <a:srgbClr val="B3ABDD"/>
                 </a:solidFill>
                 <a:latin typeface="Calibri" pitchFamily="34" charset="0"/>
                 <a:ea typeface="Calibri" pitchFamily="34" charset="-122"/>
@@ -11683,13 +11127,13 @@
       </p:sp>
       <p:sp>
         <p:nvSpPr>
-          <p:cNvPr id="39" name="Text 34"/>
-          <p:cNvSpPr/>
-          <p:nvPr/>
-        </p:nvSpPr>
-        <p:spPr>
-          <a:xfrm>
-            <a:off x="8183880" y="3557016"/>
+          <p:cNvPr id="25" name="Text 21"/>
+          <p:cNvSpPr/>
+          <p:nvPr/>
+        </p:nvSpPr>
+        <p:spPr>
+          <a:xfrm>
+            <a:off x="4480560" y="3557016"/>
             <a:ext cx="2834640" cy="320040"/>
           </a:xfrm>
           <a:prstGeom prst="rect">
@@ -11708,13 +11152,13 @@
             <a:r>
               <a:rPr lang="en-US" sz="1700" b="1" dirty="0">
                 <a:solidFill>
-                  <a:srgbClr val="0D9488"/>
+                  <a:srgbClr val="5ED9B8"/>
                 </a:solidFill>
                 <a:latin typeface="Cambria" pitchFamily="34" charset="0"/>
                 <a:ea typeface="Cambria" pitchFamily="34" charset="-122"/>
                 <a:cs typeface="Cambria" pitchFamily="34" charset="-120"/>
               </a:rPr>
-              <a:t>7.51 days</a:t>
+              <a:t>−4.06 days</a:t>
             </a:r>
             <a:endParaRPr lang="en-US" sz="1700" dirty="0"/>
           </a:p>
@@ -11722,13 +11166,13 @@
       </p:sp>
       <p:sp>
         <p:nvSpPr>
-          <p:cNvPr id="40" name="Shape 35"/>
-          <p:cNvSpPr/>
-          <p:nvPr/>
-        </p:nvSpPr>
-        <p:spPr>
-          <a:xfrm>
-            <a:off x="8183880" y="3959352"/>
+          <p:cNvPr id="26" name="Shape 22"/>
+          <p:cNvSpPr/>
+          <p:nvPr/>
+        </p:nvSpPr>
+        <p:spPr>
+          <a:xfrm>
+            <a:off x="4480560" y="3959352"/>
             <a:ext cx="2834640" cy="0"/>
           </a:xfrm>
           <a:prstGeom prst="line">
@@ -11737,7 +11181,7 @@
           <a:noFill/>
           <a:ln w="12700">
             <a:solidFill>
-              <a:srgbClr val="E2E8F0"/>
+              <a:srgbClr val="352F6E"/>
             </a:solidFill>
             <a:prstDash val="solid"/>
           </a:ln>
@@ -11752,13 +11196,13 @@
       </p:sp>
       <p:sp>
         <p:nvSpPr>
-          <p:cNvPr id="41" name="Text 36"/>
-          <p:cNvSpPr/>
-          <p:nvPr/>
-        </p:nvSpPr>
-        <p:spPr>
-          <a:xfrm>
-            <a:off x="8183880" y="4050792"/>
+          <p:cNvPr id="27" name="Text 23"/>
+          <p:cNvSpPr/>
+          <p:nvPr/>
+        </p:nvSpPr>
+        <p:spPr>
+          <a:xfrm>
+            <a:off x="4480560" y="4050792"/>
             <a:ext cx="2834640" cy="228600"/>
           </a:xfrm>
           <a:prstGeom prst="rect">
@@ -11777,7 +11221,7 @@
             <a:r>
               <a:rPr lang="en-US" sz="1050" dirty="0">
                 <a:solidFill>
-                  <a:srgbClr val="64748B"/>
+                  <a:srgbClr val="B3ABDD"/>
                 </a:solidFill>
                 <a:latin typeface="Calibri" pitchFamily="34" charset="0"/>
                 <a:ea typeface="Calibri" pitchFamily="34" charset="-122"/>
@@ -11791,13 +11235,13 @@
       </p:sp>
       <p:sp>
         <p:nvSpPr>
-          <p:cNvPr id="42" name="Text 37"/>
-          <p:cNvSpPr/>
-          <p:nvPr/>
-        </p:nvSpPr>
-        <p:spPr>
-          <a:xfrm>
-            <a:off x="8183880" y="4270248"/>
+          <p:cNvPr id="28" name="Text 24"/>
+          <p:cNvSpPr/>
+          <p:nvPr/>
+        </p:nvSpPr>
+        <p:spPr>
+          <a:xfrm>
+            <a:off x="4480560" y="4270248"/>
             <a:ext cx="2834640" cy="320040"/>
           </a:xfrm>
           <a:prstGeom prst="rect">
@@ -11816,13 +11260,13 @@
             <a:r>
               <a:rPr lang="en-US" sz="1700" b="1" dirty="0">
                 <a:solidFill>
-                  <a:srgbClr val="DC2626"/>
+                  <a:srgbClr val="FFFFFF"/>
                 </a:solidFill>
                 <a:latin typeface="Cambria" pitchFamily="34" charset="0"/>
                 <a:ea typeface="Cambria" pitchFamily="34" charset="-122"/>
                 <a:cs typeface="Cambria" pitchFamily="34" charset="-120"/>
               </a:rPr>
-              <a:t>27.38 days</a:t>
+              <a:t>−0.95 days</a:t>
             </a:r>
             <a:endParaRPr lang="en-US" sz="1700" dirty="0"/>
           </a:p>
@@ -11830,13 +11274,13 @@
       </p:sp>
       <p:sp>
         <p:nvSpPr>
-          <p:cNvPr id="43" name="Text 38"/>
-          <p:cNvSpPr/>
-          <p:nvPr/>
-        </p:nvSpPr>
-        <p:spPr>
-          <a:xfrm>
-            <a:off x="8183880" y="4672584"/>
+          <p:cNvPr id="29" name="Text 25"/>
+          <p:cNvSpPr/>
+          <p:nvPr/>
+        </p:nvSpPr>
+        <p:spPr>
+          <a:xfrm>
+            <a:off x="4480560" y="4672584"/>
             <a:ext cx="2834640" cy="256032"/>
           </a:xfrm>
           <a:prstGeom prst="rect">
@@ -11855,13 +11299,13 @@
             <a:r>
               <a:rPr lang="en-US" sz="1200" b="1" dirty="0">
                 <a:solidFill>
-                  <a:srgbClr val="DC2626"/>
+                  <a:srgbClr val="D8D4F0"/>
                 </a:solidFill>
                 <a:latin typeface="Calibri" pitchFamily="34" charset="0"/>
                 <a:ea typeface="Calibri" pitchFamily="34" charset="-122"/>
                 <a:cs typeface="Calibri" pitchFamily="34" charset="-120"/>
               </a:rPr>
-              <a:t>Gap: +19.87d</a:t>
+              <a:t>Gap: +3.11d</a:t>
             </a:r>
             <a:endParaRPr lang="en-US" sz="1200" dirty="0"/>
           </a:p>
@@ -11869,20 +11313,20 @@
       </p:sp>
       <p:sp>
         <p:nvSpPr>
-          <p:cNvPr id="44" name="Shape 39"/>
-          <p:cNvSpPr/>
-          <p:nvPr/>
-        </p:nvSpPr>
-        <p:spPr>
-          <a:xfrm>
-            <a:off x="8183880" y="5074920"/>
+          <p:cNvPr id="30" name="Shape 26"/>
+          <p:cNvSpPr/>
+          <p:nvPr/>
+        </p:nvSpPr>
+        <p:spPr>
+          <a:xfrm>
+            <a:off x="4480560" y="5074920"/>
             <a:ext cx="2834640" cy="347472"/>
           </a:xfrm>
           <a:prstGeom prst="rect">
             <a:avLst/>
           </a:prstGeom>
           <a:solidFill>
-            <a:srgbClr val="DC2626"/>
+            <a:srgbClr val="5ED9B8"/>
           </a:solidFill>
           <a:ln/>
         </p:spPr>
@@ -11896,13 +11340,13 @@
       </p:sp>
       <p:sp>
         <p:nvSpPr>
-          <p:cNvPr id="45" name="Text 40"/>
-          <p:cNvSpPr/>
-          <p:nvPr/>
-        </p:nvSpPr>
-        <p:spPr>
-          <a:xfrm>
-            <a:off x="8183880" y="5074920"/>
+          <p:cNvPr id="31" name="Text 27"/>
+          <p:cNvSpPr/>
+          <p:nvPr/>
+        </p:nvSpPr>
+        <p:spPr>
+          <a:xfrm>
+            <a:off x="4480560" y="5074920"/>
             <a:ext cx="2834640" cy="347472"/>
           </a:xfrm>
           <a:prstGeom prst="rect">
@@ -11927,7 +11371,7 @@
                 <a:ea typeface="Calibri" pitchFamily="34" charset="-122"/>
                 <a:cs typeface="Calibri" pitchFamily="34" charset="-120"/>
               </a:rPr>
-              <a:t>PRIMARY BOTTLENECK</a:t>
+              <a:t>Not a bottleneck</a:t>
             </a:r>
             <a:endParaRPr lang="en-US" sz="1050" dirty="0"/>
           </a:p>
@@ -11935,14 +11379,131 @@
       </p:sp>
       <p:sp>
         <p:nvSpPr>
-          <p:cNvPr id="46" name="Text 41"/>
-          <p:cNvSpPr/>
-          <p:nvPr/>
-        </p:nvSpPr>
-        <p:spPr>
-          <a:xfrm>
-            <a:off x="502920" y="6537960"/>
-            <a:ext cx="8229600" cy="228600"/>
+          <p:cNvPr id="32" name="Shape 28"/>
+          <p:cNvSpPr/>
+          <p:nvPr/>
+        </p:nvSpPr>
+        <p:spPr>
+          <a:xfrm>
+            <a:off x="7909560" y="1371600"/>
+            <a:ext cx="3383280" cy="4160520"/>
+          </a:xfrm>
+          <a:prstGeom prst="rect">
+            <a:avLst/>
+          </a:prstGeom>
+          <a:solidFill>
+            <a:srgbClr val="3D2A4A"/>
+          </a:solidFill>
+          <a:ln w="12700">
+            <a:solidFill>
+              <a:srgbClr val="352F6E"/>
+            </a:solidFill>
+            <a:prstDash val="solid"/>
+          </a:ln>
+          <a:effectLst>
+            <a:outerShdw blurRad="88900" dist="25400" dir="5400000" algn="bl" rotWithShape="0">
+              <a:srgbClr val="2C2660">
+                <a:alpha val="8000"/>
+              </a:srgbClr>
+            </a:outerShdw>
+          </a:effectLst>
+        </p:spPr>
+        <p:txBody>
+          <a:bodyPr/>
+          <a:lstStyle/>
+          <a:p>
+            <a:endParaRPr lang="en-US"/>
+          </a:p>
+        </p:txBody>
+      </p:sp>
+      <p:sp>
+        <p:nvSpPr>
+          <p:cNvPr id="33" name="Shape 29"/>
+          <p:cNvSpPr/>
+          <p:nvPr/>
+        </p:nvSpPr>
+        <p:spPr>
+          <a:xfrm>
+            <a:off x="7909560" y="1371600"/>
+            <a:ext cx="3383280" cy="73152"/>
+          </a:xfrm>
+          <a:prstGeom prst="rect">
+            <a:avLst/>
+          </a:prstGeom>
+          <a:solidFill>
+            <a:srgbClr val="EB5C75"/>
+          </a:solidFill>
+          <a:ln/>
+        </p:spPr>
+        <p:txBody>
+          <a:bodyPr/>
+          <a:lstStyle/>
+          <a:p>
+            <a:endParaRPr lang="en-US"/>
+          </a:p>
+        </p:txBody>
+      </p:sp>
+      <p:sp>
+        <p:nvSpPr>
+          <p:cNvPr id="34" name="Shape 30"/>
+          <p:cNvSpPr/>
+          <p:nvPr/>
+        </p:nvSpPr>
+        <p:spPr>
+          <a:xfrm>
+            <a:off x="9235440" y="1664208"/>
+            <a:ext cx="731520" cy="731520"/>
+          </a:xfrm>
+          <a:prstGeom prst="ellipse">
+            <a:avLst/>
+          </a:prstGeom>
+          <a:solidFill>
+            <a:srgbClr val="EB5C75"/>
+          </a:solidFill>
+          <a:ln/>
+        </p:spPr>
+        <p:txBody>
+          <a:bodyPr/>
+          <a:lstStyle/>
+          <a:p>
+            <a:endParaRPr lang="en-US"/>
+          </a:p>
+        </p:txBody>
+      </p:sp>
+      <p:pic>
+        <p:nvPicPr>
+          <p:cNvPr id="35" name="Image 2" descr="/home/claude/build/icons/shipfast_red.png"/>
+          <p:cNvPicPr>
+            <a:picLocks noChangeAspect="1"/>
+          </p:cNvPicPr>
+          <p:nvPr/>
+        </p:nvPicPr>
+        <p:blipFill>
+          <a:blip r:embed="rId6"/>
+          <a:stretch>
+            <a:fillRect/>
+          </a:stretch>
+        </p:blipFill>
+        <p:spPr>
+          <a:xfrm>
+            <a:off x="9411005" y="1839773"/>
+            <a:ext cx="380390" cy="380390"/>
+          </a:xfrm>
+          <a:prstGeom prst="rect">
+            <a:avLst/>
+          </a:prstGeom>
+        </p:spPr>
+      </p:pic>
+      <p:sp>
+        <p:nvSpPr>
+          <p:cNvPr id="36" name="Text 31"/>
+          <p:cNvSpPr/>
+          <p:nvPr/>
+        </p:nvSpPr>
+        <p:spPr>
+          <a:xfrm>
+            <a:off x="7909560" y="2514600"/>
+            <a:ext cx="3383280" cy="365760"/>
           </a:xfrm>
           <a:prstGeom prst="rect">
             <a:avLst/>
@@ -11954,18 +11515,387 @@
           <a:bodyPr wrap="square" lIns="0" tIns="0" rIns="0" bIns="0" rtlCol="0" anchor="ctr"/>
           <a:lstStyle/>
           <a:p>
-            <a:pPr marL="0" indent="0">
+            <a:pPr marL="0" indent="0" algn="ctr">
               <a:buNone/>
             </a:pPr>
             <a:r>
-              <a:rPr lang="en-US" sz="900" dirty="0">
-                <a:solidFill>
-                  <a:srgbClr val="64748B"/>
+              <a:rPr lang="en-US" sz="1700" b="1" dirty="0">
+                <a:solidFill>
+                  <a:srgbClr val="FFFFFF"/>
+                </a:solidFill>
+                <a:latin typeface="Cambria" pitchFamily="34" charset="0"/>
+                <a:ea typeface="Cambria" pitchFamily="34" charset="-122"/>
+                <a:cs typeface="Cambria" pitchFamily="34" charset="-120"/>
+              </a:rPr>
+              <a:t>Shipping</a:t>
+            </a:r>
+            <a:endParaRPr lang="en-US" sz="1700" dirty="0"/>
+          </a:p>
+        </p:txBody>
+      </p:sp>
+      <p:sp>
+        <p:nvSpPr>
+          <p:cNvPr id="37" name="Text 32"/>
+          <p:cNvSpPr/>
+          <p:nvPr/>
+        </p:nvSpPr>
+        <p:spPr>
+          <a:xfrm>
+            <a:off x="7909560" y="2852928"/>
+            <a:ext cx="3383280" cy="274320"/>
+          </a:xfrm>
+          <a:prstGeom prst="rect">
+            <a:avLst/>
+          </a:prstGeom>
+          <a:noFill/>
+          <a:ln/>
+        </p:spPr>
+        <p:txBody>
+          <a:bodyPr wrap="square" lIns="0" tIns="0" rIns="0" bIns="0" rtlCol="0" anchor="ctr"/>
+          <a:lstStyle/>
+          <a:p>
+            <a:pPr marL="0" indent="0" algn="ctr">
+              <a:buNone/>
+            </a:pPr>
+            <a:r>
+              <a:rPr lang="en-US" sz="1100" i="1" dirty="0">
+                <a:solidFill>
+                  <a:srgbClr val="B3ABDD"/>
                 </a:solidFill>
                 <a:latin typeface="Calibri" pitchFamily="34" charset="0"/>
                 <a:ea typeface="Calibri" pitchFamily="34" charset="-122"/>
                 <a:cs typeface="Calibri" pitchFamily="34" charset="-120"/>
               </a:rPr>
+              <a:t>Carrier → Customer</a:t>
+            </a:r>
+            <a:endParaRPr lang="en-US" sz="1100" dirty="0"/>
+          </a:p>
+        </p:txBody>
+      </p:sp>
+      <p:sp>
+        <p:nvSpPr>
+          <p:cNvPr id="38" name="Text 33"/>
+          <p:cNvSpPr/>
+          <p:nvPr/>
+        </p:nvSpPr>
+        <p:spPr>
+          <a:xfrm>
+            <a:off x="8183880" y="3337560"/>
+            <a:ext cx="2834640" cy="228600"/>
+          </a:xfrm>
+          <a:prstGeom prst="rect">
+            <a:avLst/>
+          </a:prstGeom>
+          <a:noFill/>
+          <a:ln/>
+        </p:spPr>
+        <p:txBody>
+          <a:bodyPr wrap="square" lIns="0" tIns="0" rIns="0" bIns="0" rtlCol="0" anchor="ctr"/>
+          <a:lstStyle/>
+          <a:p>
+            <a:pPr marL="0" indent="0">
+              <a:buNone/>
+            </a:pPr>
+            <a:r>
+              <a:rPr lang="en-US" sz="1050" dirty="0">
+                <a:solidFill>
+                  <a:srgbClr val="B3ABDD"/>
+                </a:solidFill>
+                <a:latin typeface="Calibri" pitchFamily="34" charset="0"/>
+                <a:ea typeface="Calibri" pitchFamily="34" charset="-122"/>
+                <a:cs typeface="Calibri" pitchFamily="34" charset="-120"/>
+              </a:rPr>
+              <a:t>On-Time Orders</a:t>
+            </a:r>
+            <a:endParaRPr lang="en-US" sz="1050" dirty="0"/>
+          </a:p>
+        </p:txBody>
+      </p:sp>
+      <p:sp>
+        <p:nvSpPr>
+          <p:cNvPr id="39" name="Text 34"/>
+          <p:cNvSpPr/>
+          <p:nvPr/>
+        </p:nvSpPr>
+        <p:spPr>
+          <a:xfrm>
+            <a:off x="8183880" y="3557016"/>
+            <a:ext cx="2834640" cy="320040"/>
+          </a:xfrm>
+          <a:prstGeom prst="rect">
+            <a:avLst/>
+          </a:prstGeom>
+          <a:noFill/>
+          <a:ln/>
+        </p:spPr>
+        <p:txBody>
+          <a:bodyPr wrap="square" lIns="0" tIns="0" rIns="0" bIns="0" rtlCol="0" anchor="ctr"/>
+          <a:lstStyle/>
+          <a:p>
+            <a:pPr marL="0" indent="0">
+              <a:buNone/>
+            </a:pPr>
+            <a:r>
+              <a:rPr lang="en-US" sz="1700" b="1" dirty="0">
+                <a:solidFill>
+                  <a:srgbClr val="5ED9B8"/>
+                </a:solidFill>
+                <a:latin typeface="Cambria" pitchFamily="34" charset="0"/>
+                <a:ea typeface="Cambria" pitchFamily="34" charset="-122"/>
+                <a:cs typeface="Cambria" pitchFamily="34" charset="-120"/>
+              </a:rPr>
+              <a:t>7.51 days</a:t>
+            </a:r>
+            <a:endParaRPr lang="en-US" sz="1700" dirty="0"/>
+          </a:p>
+        </p:txBody>
+      </p:sp>
+      <p:sp>
+        <p:nvSpPr>
+          <p:cNvPr id="40" name="Shape 35"/>
+          <p:cNvSpPr/>
+          <p:nvPr/>
+        </p:nvSpPr>
+        <p:spPr>
+          <a:xfrm>
+            <a:off x="8183880" y="3959352"/>
+            <a:ext cx="2834640" cy="0"/>
+          </a:xfrm>
+          <a:prstGeom prst="line">
+            <a:avLst/>
+          </a:prstGeom>
+          <a:noFill/>
+          <a:ln w="12700">
+            <a:solidFill>
+              <a:srgbClr val="352F6E"/>
+            </a:solidFill>
+            <a:prstDash val="solid"/>
+          </a:ln>
+        </p:spPr>
+        <p:txBody>
+          <a:bodyPr/>
+          <a:lstStyle/>
+          <a:p>
+            <a:endParaRPr lang="en-US"/>
+          </a:p>
+        </p:txBody>
+      </p:sp>
+      <p:sp>
+        <p:nvSpPr>
+          <p:cNvPr id="41" name="Text 36"/>
+          <p:cNvSpPr/>
+          <p:nvPr/>
+        </p:nvSpPr>
+        <p:spPr>
+          <a:xfrm>
+            <a:off x="8183880" y="4050792"/>
+            <a:ext cx="2834640" cy="228600"/>
+          </a:xfrm>
+          <a:prstGeom prst="rect">
+            <a:avLst/>
+          </a:prstGeom>
+          <a:noFill/>
+          <a:ln/>
+        </p:spPr>
+        <p:txBody>
+          <a:bodyPr wrap="square" lIns="0" tIns="0" rIns="0" bIns="0" rtlCol="0" anchor="ctr"/>
+          <a:lstStyle/>
+          <a:p>
+            <a:pPr marL="0" indent="0">
+              <a:buNone/>
+            </a:pPr>
+            <a:r>
+              <a:rPr lang="en-US" sz="1050" dirty="0">
+                <a:solidFill>
+                  <a:srgbClr val="B3ABDD"/>
+                </a:solidFill>
+                <a:latin typeface="Calibri" pitchFamily="34" charset="0"/>
+                <a:ea typeface="Calibri" pitchFamily="34" charset="-122"/>
+                <a:cs typeface="Calibri" pitchFamily="34" charset="-120"/>
+              </a:rPr>
+              <a:t>Late Orders</a:t>
+            </a:r>
+            <a:endParaRPr lang="en-US" sz="1050" dirty="0"/>
+          </a:p>
+        </p:txBody>
+      </p:sp>
+      <p:sp>
+        <p:nvSpPr>
+          <p:cNvPr id="42" name="Text 37"/>
+          <p:cNvSpPr/>
+          <p:nvPr/>
+        </p:nvSpPr>
+        <p:spPr>
+          <a:xfrm>
+            <a:off x="8183880" y="4270248"/>
+            <a:ext cx="2834640" cy="320040"/>
+          </a:xfrm>
+          <a:prstGeom prst="rect">
+            <a:avLst/>
+          </a:prstGeom>
+          <a:noFill/>
+          <a:ln/>
+        </p:spPr>
+        <p:txBody>
+          <a:bodyPr wrap="square" lIns="0" tIns="0" rIns="0" bIns="0" rtlCol="0" anchor="ctr"/>
+          <a:lstStyle/>
+          <a:p>
+            <a:pPr marL="0" indent="0">
+              <a:buNone/>
+            </a:pPr>
+            <a:r>
+              <a:rPr lang="en-US" sz="1700" b="1" dirty="0">
+                <a:solidFill>
+                  <a:srgbClr val="EB5C75"/>
+                </a:solidFill>
+                <a:latin typeface="Cambria" pitchFamily="34" charset="0"/>
+                <a:ea typeface="Cambria" pitchFamily="34" charset="-122"/>
+                <a:cs typeface="Cambria" pitchFamily="34" charset="-120"/>
+              </a:rPr>
+              <a:t>27.38 days</a:t>
+            </a:r>
+            <a:endParaRPr lang="en-US" sz="1700" dirty="0"/>
+          </a:p>
+        </p:txBody>
+      </p:sp>
+      <p:sp>
+        <p:nvSpPr>
+          <p:cNvPr id="43" name="Text 38"/>
+          <p:cNvSpPr/>
+          <p:nvPr/>
+        </p:nvSpPr>
+        <p:spPr>
+          <a:xfrm>
+            <a:off x="8183880" y="4672584"/>
+            <a:ext cx="2834640" cy="256032"/>
+          </a:xfrm>
+          <a:prstGeom prst="rect">
+            <a:avLst/>
+          </a:prstGeom>
+          <a:noFill/>
+          <a:ln/>
+        </p:spPr>
+        <p:txBody>
+          <a:bodyPr wrap="square" lIns="0" tIns="0" rIns="0" bIns="0" rtlCol="0" anchor="ctr"/>
+          <a:lstStyle/>
+          <a:p>
+            <a:pPr marL="0" indent="0">
+              <a:buNone/>
+            </a:pPr>
+            <a:r>
+              <a:rPr lang="en-US" sz="1200" b="1" dirty="0">
+                <a:solidFill>
+                  <a:srgbClr val="EB5C75"/>
+                </a:solidFill>
+                <a:latin typeface="Calibri" pitchFamily="34" charset="0"/>
+                <a:ea typeface="Calibri" pitchFamily="34" charset="-122"/>
+                <a:cs typeface="Calibri" pitchFamily="34" charset="-120"/>
+              </a:rPr>
+              <a:t>Gap: +19.87d</a:t>
+            </a:r>
+            <a:endParaRPr lang="en-US" sz="1200" dirty="0"/>
+          </a:p>
+        </p:txBody>
+      </p:sp>
+      <p:sp>
+        <p:nvSpPr>
+          <p:cNvPr id="44" name="Shape 39"/>
+          <p:cNvSpPr/>
+          <p:nvPr/>
+        </p:nvSpPr>
+        <p:spPr>
+          <a:xfrm>
+            <a:off x="8183880" y="5074920"/>
+            <a:ext cx="2834640" cy="347472"/>
+          </a:xfrm>
+          <a:prstGeom prst="rect">
+            <a:avLst/>
+          </a:prstGeom>
+          <a:solidFill>
+            <a:srgbClr val="EB5C75"/>
+          </a:solidFill>
+          <a:ln/>
+        </p:spPr>
+        <p:txBody>
+          <a:bodyPr/>
+          <a:lstStyle/>
+          <a:p>
+            <a:endParaRPr lang="en-US"/>
+          </a:p>
+        </p:txBody>
+      </p:sp>
+      <p:sp>
+        <p:nvSpPr>
+          <p:cNvPr id="45" name="Text 40"/>
+          <p:cNvSpPr/>
+          <p:nvPr/>
+        </p:nvSpPr>
+        <p:spPr>
+          <a:xfrm>
+            <a:off x="8183880" y="5074920"/>
+            <a:ext cx="2834640" cy="347472"/>
+          </a:xfrm>
+          <a:prstGeom prst="rect">
+            <a:avLst/>
+          </a:prstGeom>
+          <a:noFill/>
+          <a:ln/>
+        </p:spPr>
+        <p:txBody>
+          <a:bodyPr wrap="square" lIns="0" tIns="0" rIns="0" bIns="0" rtlCol="0" anchor="ctr"/>
+          <a:lstStyle/>
+          <a:p>
+            <a:pPr marL="0" indent="0" algn="ctr">
+              <a:buNone/>
+            </a:pPr>
+            <a:r>
+              <a:rPr lang="en-US" sz="1050" b="1" kern="0" spc="50" dirty="0">
+                <a:solidFill>
+                  <a:srgbClr val="FFFFFF"/>
+                </a:solidFill>
+                <a:latin typeface="Calibri" pitchFamily="34" charset="0"/>
+                <a:ea typeface="Calibri" pitchFamily="34" charset="-122"/>
+                <a:cs typeface="Calibri" pitchFamily="34" charset="-120"/>
+              </a:rPr>
+              <a:t>PRIMARY BOTTLENECK</a:t>
+            </a:r>
+            <a:endParaRPr lang="en-US" sz="1050" dirty="0"/>
+          </a:p>
+        </p:txBody>
+      </p:sp>
+      <p:sp>
+        <p:nvSpPr>
+          <p:cNvPr id="46" name="Text 41"/>
+          <p:cNvSpPr/>
+          <p:nvPr/>
+        </p:nvSpPr>
+        <p:spPr>
+          <a:xfrm>
+            <a:off x="502920" y="6537960"/>
+            <a:ext cx="8229600" cy="228600"/>
+          </a:xfrm>
+          <a:prstGeom prst="rect">
+            <a:avLst/>
+          </a:prstGeom>
+          <a:noFill/>
+          <a:ln/>
+        </p:spPr>
+        <p:txBody>
+          <a:bodyPr wrap="square" lIns="0" tIns="0" rIns="0" bIns="0" rtlCol="0" anchor="ctr"/>
+          <a:lstStyle/>
+          <a:p>
+            <a:pPr marL="0" indent="0">
+              <a:buNone/>
+            </a:pPr>
+            <a:r>
+              <a:rPr lang="en-US" sz="900" dirty="0">
+                <a:solidFill>
+                  <a:srgbClr val="B3ABDD"/>
+                </a:solidFill>
+                <a:latin typeface="Calibri" pitchFamily="34" charset="0"/>
+                <a:ea typeface="Calibri" pitchFamily="34" charset="-122"/>
+                <a:cs typeface="Calibri" pitchFamily="34" charset="-120"/>
+              </a:rPr>
               <a:t>Olist Delivery Performance &amp; SLA Analysis  </a:t>
             </a:r>
             <a:endParaRPr lang="en-US" sz="900" dirty="0"/>
@@ -11999,7 +11929,7 @@
             <a:r>
               <a:rPr lang="en-US" sz="900" dirty="0">
                 <a:solidFill>
-                  <a:srgbClr val="64748B"/>
+                  <a:srgbClr val="B3ABDD"/>
                 </a:solidFill>
                 <a:latin typeface="Calibri" pitchFamily="34" charset="0"/>
                 <a:ea typeface="Calibri" pitchFamily="34" charset="-122"/>
@@ -12024,9 +11954,12 @@
   <p:cSld name="Slide 11">
     <p:bg>
       <p:bgPr>
-        <a:solidFill>
-          <a:srgbClr val="FFFFFF"/>
-        </a:solidFill>
+        <a:blipFill rotWithShape="1">
+          <a:blip r:embed="rId3"/>
+          <a:stretch>
+            <a:fillRect/>
+          </a:stretch>
+        </a:blipFill>
         <a:effectLst/>
       </p:bgPr>
     </p:bg>
@@ -12059,7 +11992,7 @@
             <a:avLst/>
           </a:prstGeom>
           <a:solidFill>
-            <a:srgbClr val="1B3A5C"/>
+            <a:srgbClr val="2C2660"/>
           </a:solidFill>
           <a:ln/>
         </p:spPr>
@@ -12098,7 +12031,7 @@
             <a:r>
               <a:rPr lang="en-US" sz="1100" b="1" kern="0" spc="200" dirty="0">
                 <a:solidFill>
-                  <a:srgbClr val="5EEAD4"/>
+                  <a:srgbClr val="F2A0B5"/>
                 </a:solidFill>
                 <a:latin typeface="Calibri" pitchFamily="34" charset="0"/>
                 <a:ea typeface="Calibri" pitchFamily="34" charset="-122"/>
@@ -12176,7 +12109,7 @@
             <a:r>
               <a:rPr lang="en-US" sz="1200" dirty="0">
                 <a:solidFill>
-                  <a:srgbClr val="C9D9E8"/>
+                  <a:srgbClr val="E4E1F5"/>
                 </a:solidFill>
                 <a:latin typeface="Calibri" pitchFamily="34" charset="0"/>
                 <a:ea typeface="Calibri" pitchFamily="34" charset="-122"/>
@@ -12195,7 +12128,7 @@
           <p:nvPr>
             <p:extLst>
               <p:ext uri="{D42A27DB-BD31-4B8C-83A1-F6EECF244321}">
-                <p14:modId xmlns:p14="http://schemas.microsoft.com/office/powerpoint/2010/main" val="1656880003"/>
+                <p14:modId xmlns:p14="http://schemas.microsoft.com/office/powerpoint/2010/main" val="2201656921"/>
               </p:ext>
             </p:extLst>
           </p:nvPr>
@@ -12206,7 +12139,7 @@
         </p:xfrm>
         <a:graphic>
           <a:graphicData uri="http://schemas.openxmlformats.org/drawingml/2006/chart">
-            <c:chart xmlns:c="http://schemas.openxmlformats.org/drawingml/2006/chart" xmlns:r="http://schemas.openxmlformats.org/officeDocument/2006/relationships" r:id="rId3"/>
+            <c:chart xmlns:c="http://schemas.openxmlformats.org/drawingml/2006/chart" xmlns:r="http://schemas.openxmlformats.org/officeDocument/2006/relationships" r:id="rId4"/>
           </a:graphicData>
         </a:graphic>
       </p:graphicFrame>
@@ -12225,17 +12158,17 @@
             <a:avLst/>
           </a:prstGeom>
           <a:solidFill>
-            <a:srgbClr val="F4F6F9"/>
+            <a:srgbClr val="352F6E"/>
           </a:solidFill>
           <a:ln w="12700">
             <a:solidFill>
-              <a:srgbClr val="E2E8F0"/>
+              <a:srgbClr val="352F6E"/>
             </a:solidFill>
             <a:prstDash val="solid"/>
           </a:ln>
           <a:effectLst>
             <a:outerShdw blurRad="88900" dist="25400" dir="5400000" algn="bl" rotWithShape="0">
-              <a:srgbClr val="1B3A5C">
+              <a:srgbClr val="2C2660">
                 <a:alpha val="8000"/>
               </a:srgbClr>
             </a:outerShdw>
@@ -12264,7 +12197,7 @@
             <a:avLst/>
           </a:prstGeom>
           <a:solidFill>
-            <a:srgbClr val="DC2626"/>
+            <a:srgbClr val="EB5C75"/>
           </a:solidFill>
           <a:ln/>
         </p:spPr>
@@ -12303,7 +12236,7 @@
             <a:r>
               <a:rPr lang="en-US" sz="2800" b="1" dirty="0">
                 <a:solidFill>
-                  <a:srgbClr val="0F2A47"/>
+                  <a:srgbClr val="FFFFFF"/>
                 </a:solidFill>
                 <a:latin typeface="Cambria" pitchFamily="34" charset="0"/>
                 <a:ea typeface="Cambria" pitchFamily="34" charset="-122"/>
@@ -12342,7 +12275,7 @@
             <a:r>
               <a:rPr lang="en-US" sz="1100" dirty="0">
                 <a:solidFill>
-                  <a:srgbClr val="475569"/>
+                  <a:srgbClr val="D8D4F0"/>
                 </a:solidFill>
                 <a:latin typeface="Calibri" pitchFamily="34" charset="0"/>
                 <a:ea typeface="Calibri" pitchFamily="34" charset="-122"/>
@@ -12369,17 +12302,17 @@
             <a:avLst/>
           </a:prstGeom>
           <a:solidFill>
-            <a:srgbClr val="F4F6F9"/>
+            <a:srgbClr val="352F6E"/>
           </a:solidFill>
           <a:ln w="12700">
             <a:solidFill>
-              <a:srgbClr val="E2E8F0"/>
+              <a:srgbClr val="352F6E"/>
             </a:solidFill>
             <a:prstDash val="solid"/>
           </a:ln>
           <a:effectLst>
             <a:outerShdw blurRad="88900" dist="25400" dir="5400000" algn="bl" rotWithShape="0">
-              <a:srgbClr val="1B3A5C">
+              <a:srgbClr val="2C2660">
                 <a:alpha val="8000"/>
               </a:srgbClr>
             </a:outerShdw>
@@ -12420,7 +12353,7 @@
             <a:r>
               <a:rPr lang="en-US" sz="1200" b="1" dirty="0">
                 <a:solidFill>
-                  <a:srgbClr val="1B3A5C"/>
+                  <a:srgbClr val="E4E1F5"/>
                 </a:solidFill>
                 <a:latin typeface="Calibri" pitchFamily="34" charset="0"/>
                 <a:ea typeface="Calibri" pitchFamily="34" charset="-122"/>
@@ -12462,7 +12395,7 @@
             <a:r>
               <a:rPr lang="en-US" sz="1150" dirty="0">
                 <a:solidFill>
-                  <a:srgbClr val="475569"/>
+                  <a:srgbClr val="D8D4F0"/>
                 </a:solidFill>
                 <a:latin typeface="Calibri" pitchFamily="34" charset="0"/>
                 <a:ea typeface="Calibri" pitchFamily="34" charset="-122"/>
@@ -12489,11 +12422,11 @@
             <a:avLst/>
           </a:prstGeom>
           <a:solidFill>
-            <a:srgbClr val="FEECEC"/>
+            <a:srgbClr val="3D2A4A"/>
           </a:solidFill>
           <a:ln w="12700">
             <a:solidFill>
-              <a:srgbClr val="E2E8F0"/>
+              <a:srgbClr val="352F6E"/>
             </a:solidFill>
             <a:prstDash val="solid"/>
           </a:ln>
@@ -12521,7 +12454,7 @@
             <a:avLst/>
           </a:prstGeom>
           <a:solidFill>
-            <a:srgbClr val="DC2626"/>
+            <a:srgbClr val="EB5C75"/>
           </a:solidFill>
           <a:ln/>
         </p:spPr>
@@ -12560,7 +12493,7 @@
             <a:r>
               <a:rPr lang="en-US" sz="1100" b="1" kern="0" spc="100" dirty="0">
                 <a:solidFill>
-                  <a:srgbClr val="DC2626"/>
+                  <a:srgbClr val="EB5C75"/>
                 </a:solidFill>
                 <a:latin typeface="Calibri" pitchFamily="34" charset="0"/>
                 <a:ea typeface="Calibri" pitchFamily="34" charset="-122"/>
@@ -12602,7 +12535,7 @@
             <a:r>
               <a:rPr lang="en-US" sz="1300" dirty="0">
                 <a:solidFill>
-                  <a:srgbClr val="475569"/>
+                  <a:srgbClr val="D8D4F0"/>
                 </a:solidFill>
                 <a:latin typeface="Calibri" pitchFamily="34" charset="0"/>
                 <a:ea typeface="Calibri" pitchFamily="34" charset="-122"/>
@@ -12641,7 +12574,7 @@
             <a:r>
               <a:rPr lang="en-US" sz="900" dirty="0">
                 <a:solidFill>
-                  <a:srgbClr val="64748B"/>
+                  <a:srgbClr val="B3ABDD"/>
                 </a:solidFill>
                 <a:latin typeface="Calibri" pitchFamily="34" charset="0"/>
                 <a:ea typeface="Calibri" pitchFamily="34" charset="-122"/>
@@ -12680,7 +12613,7 @@
             <a:r>
               <a:rPr lang="en-US" sz="900" dirty="0">
                 <a:solidFill>
-                  <a:srgbClr val="64748B"/>
+                  <a:srgbClr val="B3ABDD"/>
                 </a:solidFill>
                 <a:latin typeface="Calibri" pitchFamily="34" charset="0"/>
                 <a:ea typeface="Calibri" pitchFamily="34" charset="-122"/>
@@ -12705,9 +12638,12 @@
   <p:cSld name="Slide 12">
     <p:bg>
       <p:bgPr>
-        <a:solidFill>
-          <a:srgbClr val="FFFFFF"/>
-        </a:solidFill>
+        <a:blipFill rotWithShape="1">
+          <a:blip r:embed="rId3"/>
+          <a:stretch>
+            <a:fillRect/>
+          </a:stretch>
+        </a:blipFill>
         <a:effectLst/>
       </p:bgPr>
     </p:bg>
@@ -12740,7 +12676,7 @@
             <a:avLst/>
           </a:prstGeom>
           <a:solidFill>
-            <a:srgbClr val="1B3A5C"/>
+            <a:srgbClr val="2C2660"/>
           </a:solidFill>
           <a:ln/>
         </p:spPr>
@@ -12779,7 +12715,7 @@
             <a:r>
               <a:rPr lang="en-US" sz="1100" b="1" kern="0" spc="200" dirty="0">
                 <a:solidFill>
-                  <a:srgbClr val="5EEAD4"/>
+                  <a:srgbClr val="F2A0B5"/>
                 </a:solidFill>
                 <a:latin typeface="Calibri" pitchFamily="34" charset="0"/>
                 <a:ea typeface="Calibri" pitchFamily="34" charset="-122"/>
@@ -12857,7 +12793,7 @@
             <a:r>
               <a:rPr lang="en-US" sz="1200" dirty="0">
                 <a:solidFill>
-                  <a:srgbClr val="C9D9E8"/>
+                  <a:srgbClr val="E4E1F5"/>
                 </a:solidFill>
                 <a:latin typeface="Calibri" pitchFamily="34" charset="0"/>
                 <a:ea typeface="Calibri" pitchFamily="34" charset="-122"/>
@@ -12887,7 +12823,7 @@
         </p:xfrm>
         <a:graphic>
           <a:graphicData uri="http://schemas.openxmlformats.org/drawingml/2006/chart">
-            <c:chart xmlns:c="http://schemas.openxmlformats.org/drawingml/2006/chart" xmlns:r="http://schemas.openxmlformats.org/officeDocument/2006/relationships" r:id="rId3"/>
+            <c:chart xmlns:c="http://schemas.openxmlformats.org/drawingml/2006/chart" xmlns:r="http://schemas.openxmlformats.org/officeDocument/2006/relationships" r:id="rId4"/>
           </a:graphicData>
         </a:graphic>
       </p:graphicFrame>
@@ -12906,17 +12842,17 @@
             <a:avLst/>
           </a:prstGeom>
           <a:solidFill>
-            <a:srgbClr val="F4F6F9"/>
+            <a:srgbClr val="352F6E"/>
           </a:solidFill>
           <a:ln w="12700">
             <a:solidFill>
-              <a:srgbClr val="E2E8F0"/>
+              <a:srgbClr val="352F6E"/>
             </a:solidFill>
             <a:prstDash val="solid"/>
           </a:ln>
           <a:effectLst>
             <a:outerShdw blurRad="88900" dist="25400" dir="5400000" algn="bl" rotWithShape="0">
-              <a:srgbClr val="1B3A5C">
+              <a:srgbClr val="2C2660">
                 <a:alpha val="8000"/>
               </a:srgbClr>
             </a:outerShdw>
@@ -12945,7 +12881,7 @@
             <a:avLst/>
           </a:prstGeom>
           <a:solidFill>
-            <a:srgbClr val="DC2626"/>
+            <a:srgbClr val="EB5C75"/>
           </a:solidFill>
           <a:ln/>
         </p:spPr>
@@ -12984,7 +12920,7 @@
             <a:r>
               <a:rPr lang="en-US" sz="2400" b="1" dirty="0">
                 <a:solidFill>
-                  <a:srgbClr val="0F2A47"/>
+                  <a:srgbClr val="FFFFFF"/>
                 </a:solidFill>
                 <a:latin typeface="Cambria" pitchFamily="34" charset="0"/>
                 <a:ea typeface="Cambria" pitchFamily="34" charset="-122"/>
@@ -13023,7 +12959,7 @@
             <a:r>
               <a:rPr lang="en-US" sz="1000" dirty="0">
                 <a:solidFill>
-                  <a:srgbClr val="475569"/>
+                  <a:srgbClr val="D8D4F0"/>
                 </a:solidFill>
                 <a:latin typeface="Calibri" pitchFamily="34" charset="0"/>
                 <a:ea typeface="Calibri" pitchFamily="34" charset="-122"/>
@@ -13050,17 +12986,17 @@
             <a:avLst/>
           </a:prstGeom>
           <a:solidFill>
-            <a:srgbClr val="F4F6F9"/>
+            <a:srgbClr val="352F6E"/>
           </a:solidFill>
           <a:ln w="12700">
             <a:solidFill>
-              <a:srgbClr val="E2E8F0"/>
+              <a:srgbClr val="352F6E"/>
             </a:solidFill>
             <a:prstDash val="solid"/>
           </a:ln>
           <a:effectLst>
             <a:outerShdw blurRad="88900" dist="25400" dir="5400000" algn="bl" rotWithShape="0">
-              <a:srgbClr val="1B3A5C">
+              <a:srgbClr val="2C2660">
                 <a:alpha val="8000"/>
               </a:srgbClr>
             </a:outerShdw>
@@ -13089,7 +13025,7 @@
             <a:avLst/>
           </a:prstGeom>
           <a:solidFill>
-            <a:srgbClr val="0D9488"/>
+            <a:srgbClr val="5ED9B8"/>
           </a:solidFill>
           <a:ln/>
         </p:spPr>
@@ -13128,7 +13064,7 @@
             <a:r>
               <a:rPr lang="en-US" sz="2400" b="1" dirty="0">
                 <a:solidFill>
-                  <a:srgbClr val="0F2A47"/>
+                  <a:srgbClr val="FFFFFF"/>
                 </a:solidFill>
                 <a:latin typeface="Cambria" pitchFamily="34" charset="0"/>
                 <a:ea typeface="Cambria" pitchFamily="34" charset="-122"/>
@@ -13167,7 +13103,7 @@
             <a:r>
               <a:rPr lang="en-US" sz="1000" dirty="0">
                 <a:solidFill>
-                  <a:srgbClr val="475569"/>
+                  <a:srgbClr val="D8D4F0"/>
                 </a:solidFill>
                 <a:latin typeface="Calibri" pitchFamily="34" charset="0"/>
                 <a:ea typeface="Calibri" pitchFamily="34" charset="-122"/>
@@ -13194,11 +13130,11 @@
             <a:avLst/>
           </a:prstGeom>
           <a:solidFill>
-            <a:srgbClr val="FEECEC"/>
+            <a:srgbClr val="3D2A4A"/>
           </a:solidFill>
           <a:ln w="12700">
             <a:solidFill>
-              <a:srgbClr val="E2E8F0"/>
+              <a:srgbClr val="352F6E"/>
             </a:solidFill>
             <a:prstDash val="solid"/>
           </a:ln>
@@ -13226,7 +13162,7 @@
             <a:avLst/>
           </a:prstGeom>
           <a:solidFill>
-            <a:srgbClr val="DC2626"/>
+            <a:srgbClr val="EB5C75"/>
           </a:solidFill>
           <a:ln/>
         </p:spPr>
@@ -13265,7 +13201,7 @@
             <a:r>
               <a:rPr lang="en-US" sz="1100" b="1" kern="0" spc="100" dirty="0">
                 <a:solidFill>
-                  <a:srgbClr val="DC2626"/>
+                  <a:srgbClr val="EB5C75"/>
                 </a:solidFill>
                 <a:latin typeface="Calibri" pitchFamily="34" charset="0"/>
                 <a:ea typeface="Calibri" pitchFamily="34" charset="-122"/>
@@ -13307,7 +13243,7 @@
             <a:r>
               <a:rPr lang="en-US" sz="1150" dirty="0">
                 <a:solidFill>
-                  <a:srgbClr val="475569"/>
+                  <a:srgbClr val="D8D4F0"/>
                 </a:solidFill>
                 <a:latin typeface="Calibri" pitchFamily="34" charset="0"/>
                 <a:ea typeface="Calibri" pitchFamily="34" charset="-122"/>
@@ -13346,7 +13282,7 @@
             <a:r>
               <a:rPr lang="en-US" sz="900" dirty="0">
                 <a:solidFill>
-                  <a:srgbClr val="64748B"/>
+                  <a:srgbClr val="B3ABDD"/>
                 </a:solidFill>
                 <a:latin typeface="Calibri" pitchFamily="34" charset="0"/>
                 <a:ea typeface="Calibri" pitchFamily="34" charset="-122"/>
@@ -13385,7 +13321,7 @@
             <a:r>
               <a:rPr lang="en-US" sz="900" dirty="0">
                 <a:solidFill>
-                  <a:srgbClr val="64748B"/>
+                  <a:srgbClr val="B3ABDD"/>
                 </a:solidFill>
                 <a:latin typeface="Calibri" pitchFamily="34" charset="0"/>
                 <a:ea typeface="Calibri" pitchFamily="34" charset="-122"/>
@@ -13410,9 +13346,12 @@
   <p:cSld name="Slide 13">
     <p:bg>
       <p:bgPr>
-        <a:solidFill>
-          <a:srgbClr val="FFFFFF"/>
-        </a:solidFill>
+        <a:blipFill rotWithShape="1">
+          <a:blip r:embed="rId3"/>
+          <a:stretch>
+            <a:fillRect/>
+          </a:stretch>
+        </a:blipFill>
         <a:effectLst/>
       </p:bgPr>
     </p:bg>
@@ -13445,7 +13384,7 @@
             <a:avLst/>
           </a:prstGeom>
           <a:solidFill>
-            <a:srgbClr val="1B3A5C"/>
+            <a:srgbClr val="2C2660"/>
           </a:solidFill>
           <a:ln/>
         </p:spPr>
@@ -13484,7 +13423,7 @@
             <a:r>
               <a:rPr lang="en-US" sz="1100" b="1" kern="0" spc="200" dirty="0">
                 <a:solidFill>
-                  <a:srgbClr val="5EEAD4"/>
+                  <a:srgbClr val="F2A0B5"/>
                 </a:solidFill>
                 <a:latin typeface="Calibri" pitchFamily="34" charset="0"/>
                 <a:ea typeface="Calibri" pitchFamily="34" charset="-122"/>
@@ -13562,7 +13501,7 @@
             <a:r>
               <a:rPr lang="en-US" sz="1200" dirty="0">
                 <a:solidFill>
-                  <a:srgbClr val="C9D9E8"/>
+                  <a:srgbClr val="E4E1F5"/>
                 </a:solidFill>
                 <a:latin typeface="Calibri" pitchFamily="34" charset="0"/>
                 <a:ea typeface="Calibri" pitchFamily="34" charset="-122"/>
@@ -13586,7 +13525,7 @@
         </p:xfrm>
         <a:graphic>
           <a:graphicData uri="http://schemas.openxmlformats.org/drawingml/2006/chart">
-            <c:chart xmlns:c="http://schemas.openxmlformats.org/drawingml/2006/chart" xmlns:r="http://schemas.openxmlformats.org/officeDocument/2006/relationships" r:id="rId3"/>
+            <c:chart xmlns:c="http://schemas.openxmlformats.org/drawingml/2006/chart" xmlns:r="http://schemas.openxmlformats.org/officeDocument/2006/relationships" r:id="rId4"/>
           </a:graphicData>
         </a:graphic>
       </p:graphicFrame>
@@ -13605,17 +13544,17 @@
             <a:avLst/>
           </a:prstGeom>
           <a:solidFill>
-            <a:srgbClr val="F4F6F9"/>
+            <a:srgbClr val="352F6E"/>
           </a:solidFill>
           <a:ln w="12700">
             <a:solidFill>
-              <a:srgbClr val="E2E8F0"/>
+              <a:srgbClr val="352F6E"/>
             </a:solidFill>
             <a:prstDash val="solid"/>
           </a:ln>
           <a:effectLst>
             <a:outerShdw blurRad="88900" dist="25400" dir="5400000" algn="bl" rotWithShape="0">
-              <a:srgbClr val="1B3A5C">
+              <a:srgbClr val="2C2660">
                 <a:alpha val="8000"/>
               </a:srgbClr>
             </a:outerShdw>
@@ -13644,7 +13583,7 @@
             <a:avLst/>
           </a:prstGeom>
           <a:solidFill>
-            <a:srgbClr val="0D9488"/>
+            <a:srgbClr val="5ED9B8"/>
           </a:solidFill>
           <a:ln/>
         </p:spPr>
@@ -13659,204 +13598,6 @@
       <p:pic>
         <p:nvPicPr>
           <p:cNvPr id="9" name="Image 0" descr="/home/claude/build/icons/smile_white.png"/>
-          <p:cNvPicPr>
-            <a:picLocks noChangeAspect="1"/>
-          </p:cNvPicPr>
-          <p:nvPr/>
-        </p:nvPicPr>
-        <p:blipFill>
-          <a:blip r:embed="rId4"/>
-          <a:stretch>
-            <a:fillRect/>
-          </a:stretch>
-        </p:blipFill>
-        <p:spPr>
-          <a:xfrm>
-            <a:off x="6430061" y="1656893"/>
-            <a:ext cx="261518" cy="261518"/>
-          </a:xfrm>
-          <a:prstGeom prst="rect">
-            <a:avLst/>
-          </a:prstGeom>
-        </p:spPr>
-      </p:pic>
-      <p:sp>
-        <p:nvSpPr>
-          <p:cNvPr id="10" name="Text 6"/>
-          <p:cNvSpPr/>
-          <p:nvPr/>
-        </p:nvSpPr>
-        <p:spPr>
-          <a:xfrm>
-            <a:off x="6949440" y="1508760"/>
-            <a:ext cx="2057400" cy="457200"/>
-          </a:xfrm>
-          <a:prstGeom prst="rect">
-            <a:avLst/>
-          </a:prstGeom>
-          <a:noFill/>
-          <a:ln/>
-        </p:spPr>
-        <p:txBody>
-          <a:bodyPr wrap="square" lIns="0" tIns="0" rIns="0" bIns="0" rtlCol="0" anchor="ctr"/>
-          <a:lstStyle/>
-          <a:p>
-            <a:pPr marL="0" indent="0">
-              <a:buNone/>
-            </a:pPr>
-            <a:r>
-              <a:rPr lang="en-US" sz="2600" b="1" dirty="0">
-                <a:solidFill>
-                  <a:srgbClr val="0D9488"/>
-                </a:solidFill>
-                <a:latin typeface="Cambria" pitchFamily="34" charset="0"/>
-                <a:ea typeface="Cambria" pitchFamily="34" charset="-122"/>
-                <a:cs typeface="Cambria" pitchFamily="34" charset="-120"/>
-              </a:rPr>
-              <a:t>4.29 / 5</a:t>
-            </a:r>
-            <a:endParaRPr lang="en-US" sz="2600" dirty="0"/>
-          </a:p>
-        </p:txBody>
-      </p:sp>
-      <p:sp>
-        <p:nvSpPr>
-          <p:cNvPr id="11" name="Text 7"/>
-          <p:cNvSpPr/>
-          <p:nvPr/>
-        </p:nvSpPr>
-        <p:spPr>
-          <a:xfrm>
-            <a:off x="6949440" y="1965960"/>
-            <a:ext cx="2057400" cy="274320"/>
-          </a:xfrm>
-          <a:prstGeom prst="rect">
-            <a:avLst/>
-          </a:prstGeom>
-          <a:noFill/>
-          <a:ln/>
-        </p:spPr>
-        <p:txBody>
-          <a:bodyPr wrap="square" lIns="0" tIns="0" rIns="0" bIns="0" rtlCol="0" anchor="ctr"/>
-          <a:lstStyle/>
-          <a:p>
-            <a:pPr marL="0" indent="0">
-              <a:buNone/>
-            </a:pPr>
-            <a:r>
-              <a:rPr lang="en-US" sz="1100" dirty="0">
-                <a:solidFill>
-                  <a:srgbClr val="64748B"/>
-                </a:solidFill>
-                <a:latin typeface="Calibri" pitchFamily="34" charset="0"/>
-                <a:ea typeface="Calibri" pitchFamily="34" charset="-122"/>
-                <a:cs typeface="Calibri" pitchFamily="34" charset="-120"/>
-              </a:rPr>
-              <a:t>On-Time Orders</a:t>
-            </a:r>
-            <a:endParaRPr lang="en-US" sz="1100" dirty="0"/>
-          </a:p>
-        </p:txBody>
-      </p:sp>
-      <p:sp>
-        <p:nvSpPr>
-          <p:cNvPr id="12" name="Text 8"/>
-          <p:cNvSpPr/>
-          <p:nvPr/>
-        </p:nvSpPr>
-        <p:spPr>
-          <a:xfrm>
-            <a:off x="6949440" y="2240280"/>
-            <a:ext cx="2057400" cy="274320"/>
-          </a:xfrm>
-          <a:prstGeom prst="rect">
-            <a:avLst/>
-          </a:prstGeom>
-          <a:noFill/>
-          <a:ln/>
-        </p:spPr>
-        <p:txBody>
-          <a:bodyPr wrap="square" lIns="0" tIns="0" rIns="0" bIns="0" rtlCol="0" anchor="ctr"/>
-          <a:lstStyle/>
-          <a:p>
-            <a:pPr marL="0" indent="0">
-              <a:buNone/>
-            </a:pPr>
-            <a:r>
-              <a:rPr lang="en-US" sz="1000" i="1" dirty="0">
-                <a:solidFill>
-                  <a:srgbClr val="64748B"/>
-                </a:solidFill>
-                <a:latin typeface="Calibri" pitchFamily="34" charset="0"/>
-                <a:ea typeface="Calibri" pitchFamily="34" charset="-122"/>
-                <a:cs typeface="Calibri" pitchFamily="34" charset="-120"/>
-              </a:rPr>
-              <a:t>89,443 reviews</a:t>
-            </a:r>
-            <a:endParaRPr lang="en-US" sz="1000" dirty="0"/>
-          </a:p>
-        </p:txBody>
-      </p:sp>
-      <p:sp>
-        <p:nvSpPr>
-          <p:cNvPr id="13" name="Shape 9"/>
-          <p:cNvSpPr/>
-          <p:nvPr/>
-        </p:nvSpPr>
-        <p:spPr>
-          <a:xfrm>
-            <a:off x="8869680" y="1481328"/>
-            <a:ext cx="0" cy="1188720"/>
-          </a:xfrm>
-          <a:prstGeom prst="line">
-            <a:avLst/>
-          </a:prstGeom>
-          <a:noFill/>
-          <a:ln w="12700">
-            <a:solidFill>
-              <a:srgbClr val="E2E8F0"/>
-            </a:solidFill>
-            <a:prstDash val="solid"/>
-          </a:ln>
-        </p:spPr>
-        <p:txBody>
-          <a:bodyPr/>
-          <a:lstStyle/>
-          <a:p>
-            <a:endParaRPr lang="en-US"/>
-          </a:p>
-        </p:txBody>
-      </p:sp>
-      <p:sp>
-        <p:nvSpPr>
-          <p:cNvPr id="14" name="Shape 10"/>
-          <p:cNvSpPr/>
-          <p:nvPr/>
-        </p:nvSpPr>
-        <p:spPr>
-          <a:xfrm>
-            <a:off x="9189720" y="1536192"/>
-            <a:ext cx="502920" cy="502920"/>
-          </a:xfrm>
-          <a:prstGeom prst="ellipse">
-            <a:avLst/>
-          </a:prstGeom>
-          <a:solidFill>
-            <a:srgbClr val="DC2626"/>
-          </a:solidFill>
-          <a:ln/>
-        </p:spPr>
-        <p:txBody>
-          <a:bodyPr/>
-          <a:lstStyle/>
-          <a:p>
-            <a:endParaRPr lang="en-US"/>
-          </a:p>
-        </p:txBody>
-      </p:sp>
-      <p:pic>
-        <p:nvPicPr>
-          <p:cNvPr id="15" name="Image 1" descr="/home/claude/build/icons/frown_white.png"/>
           <p:cNvPicPr>
             <a:picLocks noChangeAspect="1"/>
           </p:cNvPicPr>
@@ -13870,7 +13611,7 @@
         </p:blipFill>
         <p:spPr>
           <a:xfrm>
-            <a:off x="9310421" y="1656893"/>
+            <a:off x="6430061" y="1656893"/>
             <a:ext cx="261518" cy="261518"/>
           </a:xfrm>
           <a:prstGeom prst="rect">
@@ -13880,13 +13621,13 @@
       </p:pic>
       <p:sp>
         <p:nvSpPr>
-          <p:cNvPr id="16" name="Text 11"/>
-          <p:cNvSpPr/>
-          <p:nvPr/>
-        </p:nvSpPr>
-        <p:spPr>
-          <a:xfrm>
-            <a:off x="9829800" y="1508760"/>
+          <p:cNvPr id="10" name="Text 6"/>
+          <p:cNvSpPr/>
+          <p:nvPr/>
+        </p:nvSpPr>
+        <p:spPr>
+          <a:xfrm>
+            <a:off x="6949440" y="1508760"/>
             <a:ext cx="2057400" cy="457200"/>
           </a:xfrm>
           <a:prstGeom prst="rect">
@@ -13905,13 +13646,13 @@
             <a:r>
               <a:rPr lang="en-US" sz="2600" b="1" dirty="0">
                 <a:solidFill>
-                  <a:srgbClr val="DC2626"/>
+                  <a:srgbClr val="5ED9B8"/>
                 </a:solidFill>
                 <a:latin typeface="Cambria" pitchFamily="34" charset="0"/>
                 <a:ea typeface="Cambria" pitchFamily="34" charset="-122"/>
                 <a:cs typeface="Cambria" pitchFamily="34" charset="-120"/>
               </a:rPr>
-              <a:t>2.27 / 5</a:t>
+              <a:t>4.29 / 5</a:t>
             </a:r>
             <a:endParaRPr lang="en-US" sz="2600" dirty="0"/>
           </a:p>
@@ -13919,13 +13660,13 @@
       </p:sp>
       <p:sp>
         <p:nvSpPr>
-          <p:cNvPr id="17" name="Text 12"/>
-          <p:cNvSpPr/>
-          <p:nvPr/>
-        </p:nvSpPr>
-        <p:spPr>
-          <a:xfrm>
-            <a:off x="9829800" y="1965960"/>
+          <p:cNvPr id="11" name="Text 7"/>
+          <p:cNvSpPr/>
+          <p:nvPr/>
+        </p:nvSpPr>
+        <p:spPr>
+          <a:xfrm>
+            <a:off x="6949440" y="1965960"/>
             <a:ext cx="2057400" cy="274320"/>
           </a:xfrm>
           <a:prstGeom prst="rect">
@@ -13944,13 +13685,13 @@
             <a:r>
               <a:rPr lang="en-US" sz="1100" dirty="0">
                 <a:solidFill>
-                  <a:srgbClr val="64748B"/>
+                  <a:srgbClr val="B3ABDD"/>
                 </a:solidFill>
                 <a:latin typeface="Calibri" pitchFamily="34" charset="0"/>
                 <a:ea typeface="Calibri" pitchFamily="34" charset="-122"/>
                 <a:cs typeface="Calibri" pitchFamily="34" charset="-120"/>
               </a:rPr>
-              <a:t>Late Orders</a:t>
+              <a:t>On-Time Orders</a:t>
             </a:r>
             <a:endParaRPr lang="en-US" sz="1100" dirty="0"/>
           </a:p>
@@ -13958,13 +13699,13 @@
       </p:sp>
       <p:sp>
         <p:nvSpPr>
-          <p:cNvPr id="18" name="Text 13"/>
-          <p:cNvSpPr/>
-          <p:nvPr/>
-        </p:nvSpPr>
-        <p:spPr>
-          <a:xfrm>
-            <a:off x="9829800" y="2240280"/>
+          <p:cNvPr id="12" name="Text 8"/>
+          <p:cNvSpPr/>
+          <p:nvPr/>
+        </p:nvSpPr>
+        <p:spPr>
+          <a:xfrm>
+            <a:off x="6949440" y="2240280"/>
             <a:ext cx="2057400" cy="274320"/>
           </a:xfrm>
           <a:prstGeom prst="rect">
@@ -13983,12 +13724,210 @@
             <a:r>
               <a:rPr lang="en-US" sz="1000" i="1" dirty="0">
                 <a:solidFill>
-                  <a:srgbClr val="64748B"/>
+                  <a:srgbClr val="B3ABDD"/>
                 </a:solidFill>
                 <a:latin typeface="Calibri" pitchFamily="34" charset="0"/>
                 <a:ea typeface="Calibri" pitchFamily="34" charset="-122"/>
                 <a:cs typeface="Calibri" pitchFamily="34" charset="-120"/>
               </a:rPr>
+              <a:t>89,443 reviews</a:t>
+            </a:r>
+            <a:endParaRPr lang="en-US" sz="1000" dirty="0"/>
+          </a:p>
+        </p:txBody>
+      </p:sp>
+      <p:sp>
+        <p:nvSpPr>
+          <p:cNvPr id="13" name="Shape 9"/>
+          <p:cNvSpPr/>
+          <p:nvPr/>
+        </p:nvSpPr>
+        <p:spPr>
+          <a:xfrm>
+            <a:off x="8869680" y="1481328"/>
+            <a:ext cx="0" cy="1188720"/>
+          </a:xfrm>
+          <a:prstGeom prst="line">
+            <a:avLst/>
+          </a:prstGeom>
+          <a:noFill/>
+          <a:ln w="12700">
+            <a:solidFill>
+              <a:srgbClr val="352F6E"/>
+            </a:solidFill>
+            <a:prstDash val="solid"/>
+          </a:ln>
+        </p:spPr>
+        <p:txBody>
+          <a:bodyPr/>
+          <a:lstStyle/>
+          <a:p>
+            <a:endParaRPr lang="en-US"/>
+          </a:p>
+        </p:txBody>
+      </p:sp>
+      <p:sp>
+        <p:nvSpPr>
+          <p:cNvPr id="14" name="Shape 10"/>
+          <p:cNvSpPr/>
+          <p:nvPr/>
+        </p:nvSpPr>
+        <p:spPr>
+          <a:xfrm>
+            <a:off x="9189720" y="1536192"/>
+            <a:ext cx="502920" cy="502920"/>
+          </a:xfrm>
+          <a:prstGeom prst="ellipse">
+            <a:avLst/>
+          </a:prstGeom>
+          <a:solidFill>
+            <a:srgbClr val="EB5C75"/>
+          </a:solidFill>
+          <a:ln/>
+        </p:spPr>
+        <p:txBody>
+          <a:bodyPr/>
+          <a:lstStyle/>
+          <a:p>
+            <a:endParaRPr lang="en-US"/>
+          </a:p>
+        </p:txBody>
+      </p:sp>
+      <p:pic>
+        <p:nvPicPr>
+          <p:cNvPr id="15" name="Image 1" descr="/home/claude/build/icons/frown_white.png"/>
+          <p:cNvPicPr>
+            <a:picLocks noChangeAspect="1"/>
+          </p:cNvPicPr>
+          <p:nvPr/>
+        </p:nvPicPr>
+        <p:blipFill>
+          <a:blip r:embed="rId6"/>
+          <a:stretch>
+            <a:fillRect/>
+          </a:stretch>
+        </p:blipFill>
+        <p:spPr>
+          <a:xfrm>
+            <a:off x="9310421" y="1656893"/>
+            <a:ext cx="261518" cy="261518"/>
+          </a:xfrm>
+          <a:prstGeom prst="rect">
+            <a:avLst/>
+          </a:prstGeom>
+        </p:spPr>
+      </p:pic>
+      <p:sp>
+        <p:nvSpPr>
+          <p:cNvPr id="16" name="Text 11"/>
+          <p:cNvSpPr/>
+          <p:nvPr/>
+        </p:nvSpPr>
+        <p:spPr>
+          <a:xfrm>
+            <a:off x="9829800" y="1508760"/>
+            <a:ext cx="2057400" cy="457200"/>
+          </a:xfrm>
+          <a:prstGeom prst="rect">
+            <a:avLst/>
+          </a:prstGeom>
+          <a:noFill/>
+          <a:ln/>
+        </p:spPr>
+        <p:txBody>
+          <a:bodyPr wrap="square" lIns="0" tIns="0" rIns="0" bIns="0" rtlCol="0" anchor="ctr"/>
+          <a:lstStyle/>
+          <a:p>
+            <a:pPr marL="0" indent="0">
+              <a:buNone/>
+            </a:pPr>
+            <a:r>
+              <a:rPr lang="en-US" sz="2600" b="1" dirty="0">
+                <a:solidFill>
+                  <a:srgbClr val="EB5C75"/>
+                </a:solidFill>
+                <a:latin typeface="Cambria" pitchFamily="34" charset="0"/>
+                <a:ea typeface="Cambria" pitchFamily="34" charset="-122"/>
+                <a:cs typeface="Cambria" pitchFamily="34" charset="-120"/>
+              </a:rPr>
+              <a:t>2.27 / 5</a:t>
+            </a:r>
+            <a:endParaRPr lang="en-US" sz="2600" dirty="0"/>
+          </a:p>
+        </p:txBody>
+      </p:sp>
+      <p:sp>
+        <p:nvSpPr>
+          <p:cNvPr id="17" name="Text 12"/>
+          <p:cNvSpPr/>
+          <p:nvPr/>
+        </p:nvSpPr>
+        <p:spPr>
+          <a:xfrm>
+            <a:off x="9829800" y="1965960"/>
+            <a:ext cx="2057400" cy="274320"/>
+          </a:xfrm>
+          <a:prstGeom prst="rect">
+            <a:avLst/>
+          </a:prstGeom>
+          <a:noFill/>
+          <a:ln/>
+        </p:spPr>
+        <p:txBody>
+          <a:bodyPr wrap="square" lIns="0" tIns="0" rIns="0" bIns="0" rtlCol="0" anchor="ctr"/>
+          <a:lstStyle/>
+          <a:p>
+            <a:pPr marL="0" indent="0">
+              <a:buNone/>
+            </a:pPr>
+            <a:r>
+              <a:rPr lang="en-US" sz="1100" dirty="0">
+                <a:solidFill>
+                  <a:srgbClr val="B3ABDD"/>
+                </a:solidFill>
+                <a:latin typeface="Calibri" pitchFamily="34" charset="0"/>
+                <a:ea typeface="Calibri" pitchFamily="34" charset="-122"/>
+                <a:cs typeface="Calibri" pitchFamily="34" charset="-120"/>
+              </a:rPr>
+              <a:t>Late Orders</a:t>
+            </a:r>
+            <a:endParaRPr lang="en-US" sz="1100" dirty="0"/>
+          </a:p>
+        </p:txBody>
+      </p:sp>
+      <p:sp>
+        <p:nvSpPr>
+          <p:cNvPr id="18" name="Text 13"/>
+          <p:cNvSpPr/>
+          <p:nvPr/>
+        </p:nvSpPr>
+        <p:spPr>
+          <a:xfrm>
+            <a:off x="9829800" y="2240280"/>
+            <a:ext cx="2057400" cy="274320"/>
+          </a:xfrm>
+          <a:prstGeom prst="rect">
+            <a:avLst/>
+          </a:prstGeom>
+          <a:noFill/>
+          <a:ln/>
+        </p:spPr>
+        <p:txBody>
+          <a:bodyPr wrap="square" lIns="0" tIns="0" rIns="0" bIns="0" rtlCol="0" anchor="ctr"/>
+          <a:lstStyle/>
+          <a:p>
+            <a:pPr marL="0" indent="0">
+              <a:buNone/>
+            </a:pPr>
+            <a:r>
+              <a:rPr lang="en-US" sz="1000" i="1" dirty="0">
+                <a:solidFill>
+                  <a:srgbClr val="B3ABDD"/>
+                </a:solidFill>
+                <a:latin typeface="Calibri" pitchFamily="34" charset="0"/>
+                <a:ea typeface="Calibri" pitchFamily="34" charset="-122"/>
+                <a:cs typeface="Calibri" pitchFamily="34" charset="-120"/>
+              </a:rPr>
               <a:t>6,381 reviews</a:t>
             </a:r>
             <a:endParaRPr lang="en-US" sz="1000" dirty="0"/>
@@ -14010,17 +13949,17 @@
             <a:avLst/>
           </a:prstGeom>
           <a:solidFill>
-            <a:srgbClr val="F4F6F9"/>
+            <a:srgbClr val="352F6E"/>
           </a:solidFill>
           <a:ln w="12700">
             <a:solidFill>
-              <a:srgbClr val="E2E8F0"/>
+              <a:srgbClr val="352F6E"/>
             </a:solidFill>
             <a:prstDash val="solid"/>
           </a:ln>
           <a:effectLst>
             <a:outerShdw blurRad="88900" dist="25400" dir="5400000" algn="bl" rotWithShape="0">
-              <a:srgbClr val="1B3A5C">
+              <a:srgbClr val="2C2660">
                 <a:alpha val="8000"/>
               </a:srgbClr>
             </a:outerShdw>
@@ -14049,7 +13988,7 @@
             <a:avLst/>
           </a:prstGeom>
           <a:solidFill>
-            <a:srgbClr val="DC2626"/>
+            <a:srgbClr val="EB5C75"/>
           </a:solidFill>
           <a:ln/>
         </p:spPr>
@@ -14088,7 +14027,7 @@
             <a:r>
               <a:rPr lang="en-US" sz="2700" b="1" dirty="0">
                 <a:solidFill>
-                  <a:srgbClr val="0F2A47"/>
+                  <a:srgbClr val="FFFFFF"/>
                 </a:solidFill>
                 <a:latin typeface="Cambria" pitchFamily="34" charset="0"/>
                 <a:ea typeface="Cambria" pitchFamily="34" charset="-122"/>
@@ -14127,7 +14066,7 @@
             <a:r>
               <a:rPr lang="en-US" sz="1100" dirty="0">
                 <a:solidFill>
-                  <a:srgbClr val="475569"/>
+                  <a:srgbClr val="D8D4F0"/>
                 </a:solidFill>
                 <a:latin typeface="Calibri" pitchFamily="34" charset="0"/>
                 <a:ea typeface="Calibri" pitchFamily="34" charset="-122"/>
@@ -14154,11 +14093,11 @@
             <a:avLst/>
           </a:prstGeom>
           <a:solidFill>
-            <a:srgbClr val="FEECEC"/>
+            <a:srgbClr val="3D2A4A"/>
           </a:solidFill>
           <a:ln w="12700">
             <a:solidFill>
-              <a:srgbClr val="E2E8F0"/>
+              <a:srgbClr val="352F6E"/>
             </a:solidFill>
             <a:prstDash val="solid"/>
           </a:ln>
@@ -14186,7 +14125,7 @@
             <a:avLst/>
           </a:prstGeom>
           <a:solidFill>
-            <a:srgbClr val="DC2626"/>
+            <a:srgbClr val="EB5C75"/>
           </a:solidFill>
           <a:ln/>
         </p:spPr>
@@ -14225,7 +14164,7 @@
             <a:r>
               <a:rPr lang="en-US" sz="1100" b="1" kern="0" spc="100" dirty="0">
                 <a:solidFill>
-                  <a:srgbClr val="DC2626"/>
+                  <a:srgbClr val="EB5C75"/>
                 </a:solidFill>
                 <a:latin typeface="Calibri" pitchFamily="34" charset="0"/>
                 <a:ea typeface="Calibri" pitchFamily="34" charset="-122"/>
@@ -14267,7 +14206,7 @@
             <a:r>
               <a:rPr lang="en-US" sz="1300" dirty="0">
                 <a:solidFill>
-                  <a:srgbClr val="475569"/>
+                  <a:srgbClr val="D8D4F0"/>
                 </a:solidFill>
                 <a:latin typeface="Calibri" pitchFamily="34" charset="0"/>
                 <a:ea typeface="Calibri" pitchFamily="34" charset="-122"/>
@@ -14306,7 +14245,7 @@
             <a:r>
               <a:rPr lang="en-US" sz="900" dirty="0">
                 <a:solidFill>
-                  <a:srgbClr val="64748B"/>
+                  <a:srgbClr val="B3ABDD"/>
                 </a:solidFill>
                 <a:latin typeface="Calibri" pitchFamily="34" charset="0"/>
                 <a:ea typeface="Calibri" pitchFamily="34" charset="-122"/>
@@ -14345,7 +14284,7 @@
             <a:r>
               <a:rPr lang="en-US" sz="900" dirty="0">
                 <a:solidFill>
-                  <a:srgbClr val="64748B"/>
+                  <a:srgbClr val="B3ABDD"/>
                 </a:solidFill>
                 <a:latin typeface="Calibri" pitchFamily="34" charset="0"/>
                 <a:ea typeface="Calibri" pitchFamily="34" charset="-122"/>
@@ -14370,9 +14309,12 @@
   <p:cSld name="Slide 14">
     <p:bg>
       <p:bgPr>
-        <a:solidFill>
-          <a:srgbClr val="FFFFFF"/>
-        </a:solidFill>
+        <a:blipFill rotWithShape="1">
+          <a:blip r:embed="rId3"/>
+          <a:stretch>
+            <a:fillRect/>
+          </a:stretch>
+        </a:blipFill>
         <a:effectLst/>
       </p:bgPr>
     </p:bg>
@@ -14405,7 +14347,7 @@
             <a:avLst/>
           </a:prstGeom>
           <a:solidFill>
-            <a:srgbClr val="1B3A5C"/>
+            <a:srgbClr val="2C2660"/>
           </a:solidFill>
           <a:ln/>
         </p:spPr>
@@ -14444,7 +14386,7 @@
             <a:r>
               <a:rPr lang="en-US" sz="1100" b="1" kern="0" spc="200" dirty="0">
                 <a:solidFill>
-                  <a:srgbClr val="5EEAD4"/>
+                  <a:srgbClr val="F2A0B5"/>
                 </a:solidFill>
                 <a:latin typeface="Calibri" pitchFamily="34" charset="0"/>
                 <a:ea typeface="Calibri" pitchFamily="34" charset="-122"/>
@@ -14522,7 +14464,7 @@
             <a:r>
               <a:rPr lang="en-US" sz="1200" dirty="0">
                 <a:solidFill>
-                  <a:srgbClr val="C9D9E8"/>
+                  <a:srgbClr val="E4E1F5"/>
                 </a:solidFill>
                 <a:latin typeface="Calibri" pitchFamily="34" charset="0"/>
                 <a:ea typeface="Calibri" pitchFamily="34" charset="-122"/>
@@ -14549,17 +14491,17 @@
             <a:avLst/>
           </a:prstGeom>
           <a:solidFill>
-            <a:srgbClr val="F4F6F9"/>
+            <a:srgbClr val="352F6E"/>
           </a:solidFill>
           <a:ln w="12700">
             <a:solidFill>
-              <a:srgbClr val="E2E8F0"/>
+              <a:srgbClr val="352F6E"/>
             </a:solidFill>
             <a:prstDash val="solid"/>
           </a:ln>
           <a:effectLst>
             <a:outerShdw blurRad="88900" dist="25400" dir="5400000" algn="bl" rotWithShape="0">
-              <a:srgbClr val="1B3A5C">
+              <a:srgbClr val="2C2660">
                 <a:alpha val="8000"/>
               </a:srgbClr>
             </a:outerShdw>
@@ -14588,7 +14530,7 @@
             <a:avLst/>
           </a:prstGeom>
           <a:solidFill>
-            <a:srgbClr val="DC2626"/>
+            <a:srgbClr val="EB5C75"/>
           </a:solidFill>
           <a:ln/>
         </p:spPr>
@@ -14627,7 +14569,7 @@
             <a:r>
               <a:rPr lang="en-US" sz="2800" b="1" dirty="0">
                 <a:solidFill>
-                  <a:srgbClr val="DC2626"/>
+                  <a:srgbClr val="EB5C75"/>
                 </a:solidFill>
                 <a:latin typeface="Cambria" pitchFamily="34" charset="0"/>
                 <a:ea typeface="Cambria" pitchFamily="34" charset="-122"/>
@@ -14669,7 +14611,7 @@
             <a:r>
               <a:rPr lang="en-US" sz="1300" b="1" dirty="0">
                 <a:solidFill>
-                  <a:srgbClr val="0F2A47"/>
+                  <a:srgbClr val="FFFFFF"/>
                 </a:solidFill>
                 <a:latin typeface="Calibri" pitchFamily="34" charset="0"/>
                 <a:ea typeface="Calibri" pitchFamily="34" charset="-122"/>
@@ -14711,7 +14653,7 @@
             <a:r>
               <a:rPr lang="en-US" sz="1100" dirty="0">
                 <a:solidFill>
-                  <a:srgbClr val="475569"/>
+                  <a:srgbClr val="D8D4F0"/>
                 </a:solidFill>
                 <a:latin typeface="Calibri" pitchFamily="34" charset="0"/>
                 <a:ea typeface="Calibri" pitchFamily="34" charset="-122"/>
@@ -14738,17 +14680,17 @@
             <a:avLst/>
           </a:prstGeom>
           <a:solidFill>
-            <a:srgbClr val="F4F6F9"/>
+            <a:srgbClr val="352F6E"/>
           </a:solidFill>
           <a:ln w="12700">
             <a:solidFill>
-              <a:srgbClr val="E2E8F0"/>
+              <a:srgbClr val="352F6E"/>
             </a:solidFill>
             <a:prstDash val="solid"/>
           </a:ln>
           <a:effectLst>
             <a:outerShdw blurRad="88900" dist="25400" dir="5400000" algn="bl" rotWithShape="0">
-              <a:srgbClr val="1B3A5C">
+              <a:srgbClr val="2C2660">
                 <a:alpha val="8000"/>
               </a:srgbClr>
             </a:outerShdw>
@@ -14777,7 +14719,7 @@
             <a:avLst/>
           </a:prstGeom>
           <a:solidFill>
-            <a:srgbClr val="DC2626"/>
+            <a:srgbClr val="EB5C75"/>
           </a:solidFill>
           <a:ln/>
         </p:spPr>
@@ -14816,7 +14758,7 @@
             <a:r>
               <a:rPr lang="en-US" sz="2800" b="1" dirty="0">
                 <a:solidFill>
-                  <a:srgbClr val="DC2626"/>
+                  <a:srgbClr val="EB5C75"/>
                 </a:solidFill>
                 <a:latin typeface="Cambria" pitchFamily="34" charset="0"/>
                 <a:ea typeface="Cambria" pitchFamily="34" charset="-122"/>
@@ -14858,7 +14800,7 @@
             <a:r>
               <a:rPr lang="en-US" sz="1300" b="1" dirty="0">
                 <a:solidFill>
-                  <a:srgbClr val="0F2A47"/>
+                  <a:srgbClr val="FFFFFF"/>
                 </a:solidFill>
                 <a:latin typeface="Calibri" pitchFamily="34" charset="0"/>
                 <a:ea typeface="Calibri" pitchFamily="34" charset="-122"/>
@@ -14900,7 +14842,7 @@
             <a:r>
               <a:rPr lang="en-US" sz="1100" dirty="0">
                 <a:solidFill>
-                  <a:srgbClr val="475569"/>
+                  <a:srgbClr val="D8D4F0"/>
                 </a:solidFill>
                 <a:latin typeface="Calibri" pitchFamily="34" charset="0"/>
                 <a:ea typeface="Calibri" pitchFamily="34" charset="-122"/>
@@ -14927,17 +14869,17 @@
             <a:avLst/>
           </a:prstGeom>
           <a:solidFill>
-            <a:srgbClr val="F4F6F9"/>
+            <a:srgbClr val="352F6E"/>
           </a:solidFill>
           <a:ln w="12700">
             <a:solidFill>
-              <a:srgbClr val="E2E8F0"/>
+              <a:srgbClr val="352F6E"/>
             </a:solidFill>
             <a:prstDash val="solid"/>
           </a:ln>
           <a:effectLst>
             <a:outerShdw blurRad="88900" dist="25400" dir="5400000" algn="bl" rotWithShape="0">
-              <a:srgbClr val="1B3A5C">
+              <a:srgbClr val="2C2660">
                 <a:alpha val="8000"/>
               </a:srgbClr>
             </a:outerShdw>
@@ -14966,7 +14908,7 @@
             <a:avLst/>
           </a:prstGeom>
           <a:solidFill>
-            <a:srgbClr val="D97706"/>
+            <a:srgbClr val="F0A35E"/>
           </a:solidFill>
           <a:ln/>
         </p:spPr>
@@ -15005,7 +14947,7 @@
             <a:r>
               <a:rPr lang="en-US" sz="2800" b="1" dirty="0">
                 <a:solidFill>
-                  <a:srgbClr val="D97706"/>
+                  <a:srgbClr val="F0A35E"/>
                 </a:solidFill>
                 <a:latin typeface="Cambria" pitchFamily="34" charset="0"/>
                 <a:ea typeface="Cambria" pitchFamily="34" charset="-122"/>
@@ -15047,7 +14989,7 @@
             <a:r>
               <a:rPr lang="en-US" sz="1300" b="1" dirty="0">
                 <a:solidFill>
-                  <a:srgbClr val="0F2A47"/>
+                  <a:srgbClr val="FFFFFF"/>
                 </a:solidFill>
                 <a:latin typeface="Calibri" pitchFamily="34" charset="0"/>
                 <a:ea typeface="Calibri" pitchFamily="34" charset="-122"/>
@@ -15089,7 +15031,7 @@
             <a:r>
               <a:rPr lang="en-US" sz="1100" dirty="0">
                 <a:solidFill>
-                  <a:srgbClr val="475569"/>
+                  <a:srgbClr val="D8D4F0"/>
                 </a:solidFill>
                 <a:latin typeface="Calibri" pitchFamily="34" charset="0"/>
                 <a:ea typeface="Calibri" pitchFamily="34" charset="-122"/>
@@ -15116,17 +15058,17 @@
             <a:avLst/>
           </a:prstGeom>
           <a:solidFill>
-            <a:srgbClr val="F4F6F9"/>
+            <a:srgbClr val="352F6E"/>
           </a:solidFill>
           <a:ln w="12700">
             <a:solidFill>
-              <a:srgbClr val="E2E8F0"/>
+              <a:srgbClr val="352F6E"/>
             </a:solidFill>
             <a:prstDash val="solid"/>
           </a:ln>
           <a:effectLst>
             <a:outerShdw blurRad="88900" dist="25400" dir="5400000" algn="bl" rotWithShape="0">
-              <a:srgbClr val="1B3A5C">
+              <a:srgbClr val="2C2660">
                 <a:alpha val="8000"/>
               </a:srgbClr>
             </a:outerShdw>
@@ -15155,7 +15097,7 @@
             <a:avLst/>
           </a:prstGeom>
           <a:solidFill>
-            <a:srgbClr val="DC2626"/>
+            <a:srgbClr val="EB5C75"/>
           </a:solidFill>
           <a:ln/>
         </p:spPr>
@@ -15194,7 +15136,7 @@
             <a:r>
               <a:rPr lang="en-US" sz="2800" b="1" dirty="0">
                 <a:solidFill>
-                  <a:srgbClr val="DC2626"/>
+                  <a:srgbClr val="EB5C75"/>
                 </a:solidFill>
                 <a:latin typeface="Cambria" pitchFamily="34" charset="0"/>
                 <a:ea typeface="Cambria" pitchFamily="34" charset="-122"/>
@@ -15236,7 +15178,7 @@
             <a:r>
               <a:rPr lang="en-US" sz="1300" b="1" dirty="0">
                 <a:solidFill>
-                  <a:srgbClr val="0F2A47"/>
+                  <a:srgbClr val="FFFFFF"/>
                 </a:solidFill>
                 <a:latin typeface="Calibri" pitchFamily="34" charset="0"/>
                 <a:ea typeface="Calibri" pitchFamily="34" charset="-122"/>
@@ -15278,7 +15220,7 @@
             <a:r>
               <a:rPr lang="en-US" sz="1100" dirty="0">
                 <a:solidFill>
-                  <a:srgbClr val="475569"/>
+                  <a:srgbClr val="D8D4F0"/>
                 </a:solidFill>
                 <a:latin typeface="Calibri" pitchFamily="34" charset="0"/>
                 <a:ea typeface="Calibri" pitchFamily="34" charset="-122"/>
@@ -15305,17 +15247,17 @@
             <a:avLst/>
           </a:prstGeom>
           <a:solidFill>
-            <a:srgbClr val="F4F6F9"/>
+            <a:srgbClr val="352F6E"/>
           </a:solidFill>
           <a:ln w="12700">
             <a:solidFill>
-              <a:srgbClr val="E2E8F0"/>
+              <a:srgbClr val="352F6E"/>
             </a:solidFill>
             <a:prstDash val="solid"/>
           </a:ln>
           <a:effectLst>
             <a:outerShdw blurRad="88900" dist="25400" dir="5400000" algn="bl" rotWithShape="0">
-              <a:srgbClr val="1B3A5C">
+              <a:srgbClr val="2C2660">
                 <a:alpha val="8000"/>
               </a:srgbClr>
             </a:outerShdw>
@@ -15344,7 +15286,7 @@
             <a:avLst/>
           </a:prstGeom>
           <a:solidFill>
-            <a:srgbClr val="D97706"/>
+            <a:srgbClr val="F0A35E"/>
           </a:solidFill>
           <a:ln/>
         </p:spPr>
@@ -15383,7 +15325,7 @@
             <a:r>
               <a:rPr lang="en-US" sz="2800" b="1" dirty="0">
                 <a:solidFill>
-                  <a:srgbClr val="D97706"/>
+                  <a:srgbClr val="F0A35E"/>
                 </a:solidFill>
                 <a:latin typeface="Cambria" pitchFamily="34" charset="0"/>
                 <a:ea typeface="Cambria" pitchFamily="34" charset="-122"/>
@@ -15425,7 +15367,7 @@
             <a:r>
               <a:rPr lang="en-US" sz="1300" b="1" dirty="0">
                 <a:solidFill>
-                  <a:srgbClr val="0F2A47"/>
+                  <a:srgbClr val="FFFFFF"/>
                 </a:solidFill>
                 <a:latin typeface="Calibri" pitchFamily="34" charset="0"/>
                 <a:ea typeface="Calibri" pitchFamily="34" charset="-122"/>
@@ -15467,7 +15409,7 @@
             <a:r>
               <a:rPr lang="en-US" sz="1100" dirty="0">
                 <a:solidFill>
-                  <a:srgbClr val="475569"/>
+                  <a:srgbClr val="D8D4F0"/>
                 </a:solidFill>
                 <a:latin typeface="Calibri" pitchFamily="34" charset="0"/>
                 <a:ea typeface="Calibri" pitchFamily="34" charset="-122"/>
@@ -15494,17 +15436,17 @@
             <a:avLst/>
           </a:prstGeom>
           <a:solidFill>
-            <a:srgbClr val="F4F6F9"/>
+            <a:srgbClr val="352F6E"/>
           </a:solidFill>
           <a:ln w="12700">
             <a:solidFill>
-              <a:srgbClr val="E2E8F0"/>
+              <a:srgbClr val="352F6E"/>
             </a:solidFill>
             <a:prstDash val="solid"/>
           </a:ln>
           <a:effectLst>
             <a:outerShdw blurRad="88900" dist="25400" dir="5400000" algn="bl" rotWithShape="0">
-              <a:srgbClr val="1B3A5C">
+              <a:srgbClr val="2C2660">
                 <a:alpha val="8000"/>
               </a:srgbClr>
             </a:outerShdw>
@@ -15533,7 +15475,7 @@
             <a:avLst/>
           </a:prstGeom>
           <a:solidFill>
-            <a:srgbClr val="0D9488"/>
+            <a:srgbClr val="5ED9B8"/>
           </a:solidFill>
           <a:ln/>
         </p:spPr>
@@ -15572,7 +15514,7 @@
             <a:r>
               <a:rPr lang="en-US" sz="2800" b="1" dirty="0">
                 <a:solidFill>
-                  <a:srgbClr val="0D9488"/>
+                  <a:srgbClr val="5ED9B8"/>
                 </a:solidFill>
                 <a:latin typeface="Cambria" pitchFamily="34" charset="0"/>
                 <a:ea typeface="Cambria" pitchFamily="34" charset="-122"/>
@@ -15614,7 +15556,7 @@
             <a:r>
               <a:rPr lang="en-US" sz="1300" b="1" dirty="0">
                 <a:solidFill>
-                  <a:srgbClr val="0F2A47"/>
+                  <a:srgbClr val="FFFFFF"/>
                 </a:solidFill>
                 <a:latin typeface="Calibri" pitchFamily="34" charset="0"/>
                 <a:ea typeface="Calibri" pitchFamily="34" charset="-122"/>
@@ -15656,7 +15598,7 @@
             <a:r>
               <a:rPr lang="en-US" sz="1100" dirty="0">
                 <a:solidFill>
-                  <a:srgbClr val="475569"/>
+                  <a:srgbClr val="D8D4F0"/>
                 </a:solidFill>
                 <a:latin typeface="Calibri" pitchFamily="34" charset="0"/>
                 <a:ea typeface="Calibri" pitchFamily="34" charset="-122"/>
@@ -15695,7 +15637,7 @@
             <a:r>
               <a:rPr lang="en-US" sz="900" dirty="0">
                 <a:solidFill>
-                  <a:srgbClr val="64748B"/>
+                  <a:srgbClr val="B3ABDD"/>
                 </a:solidFill>
                 <a:latin typeface="Calibri" pitchFamily="34" charset="0"/>
                 <a:ea typeface="Calibri" pitchFamily="34" charset="-122"/>
@@ -15734,7 +15676,7 @@
             <a:r>
               <a:rPr lang="en-US" sz="900" dirty="0">
                 <a:solidFill>
-                  <a:srgbClr val="64748B"/>
+                  <a:srgbClr val="B3ABDD"/>
                 </a:solidFill>
                 <a:latin typeface="Calibri" pitchFamily="34" charset="0"/>
                 <a:ea typeface="Calibri" pitchFamily="34" charset="-122"/>
@@ -15759,9 +15701,12 @@
   <p:cSld name="Slide 15">
     <p:bg>
       <p:bgPr>
-        <a:solidFill>
-          <a:srgbClr val="FFFFFF"/>
-        </a:solidFill>
+        <a:blipFill rotWithShape="1">
+          <a:blip r:embed="rId3"/>
+          <a:stretch>
+            <a:fillRect/>
+          </a:stretch>
+        </a:blipFill>
         <a:effectLst/>
       </p:bgPr>
     </p:bg>
@@ -15794,7 +15739,7 @@
             <a:avLst/>
           </a:prstGeom>
           <a:solidFill>
-            <a:srgbClr val="1B3A5C"/>
+            <a:srgbClr val="2C2660"/>
           </a:solidFill>
           <a:ln/>
         </p:spPr>
@@ -15833,7 +15778,7 @@
             <a:r>
               <a:rPr lang="en-US" sz="1100" b="1" kern="0" spc="200" dirty="0">
                 <a:solidFill>
-                  <a:srgbClr val="5EEAD4"/>
+                  <a:srgbClr val="F2A0B5"/>
                 </a:solidFill>
                 <a:latin typeface="Calibri" pitchFamily="34" charset="0"/>
                 <a:ea typeface="Calibri" pitchFamily="34" charset="-122"/>
@@ -15911,7 +15856,7 @@
             <a:r>
               <a:rPr lang="en-US" sz="1200" dirty="0">
                 <a:solidFill>
-                  <a:srgbClr val="C9D9E8"/>
+                  <a:srgbClr val="E4E1F5"/>
                 </a:solidFill>
                 <a:latin typeface="Calibri" pitchFamily="34" charset="0"/>
                 <a:ea typeface="Calibri" pitchFamily="34" charset="-122"/>
@@ -15938,17 +15883,17 @@
             <a:avLst/>
           </a:prstGeom>
           <a:solidFill>
-            <a:srgbClr val="F4F6F9"/>
+            <a:srgbClr val="352F6E"/>
           </a:solidFill>
           <a:ln w="12700">
             <a:solidFill>
-              <a:srgbClr val="E2E8F0"/>
+              <a:srgbClr val="352F6E"/>
             </a:solidFill>
             <a:prstDash val="solid"/>
           </a:ln>
           <a:effectLst>
             <a:outerShdw blurRad="88900" dist="25400" dir="5400000" algn="bl" rotWithShape="0">
-              <a:srgbClr val="1B3A5C">
+              <a:srgbClr val="2C2660">
                 <a:alpha val="8000"/>
               </a:srgbClr>
             </a:outerShdw>
@@ -15977,7 +15922,7 @@
             <a:avLst/>
           </a:prstGeom>
           <a:solidFill>
-            <a:srgbClr val="DC2626"/>
+            <a:srgbClr val="EB5C75"/>
           </a:solidFill>
           <a:ln/>
         </p:spPr>
@@ -16058,7 +16003,7 @@
             <a:r>
               <a:rPr lang="en-US" sz="1350" b="1" dirty="0">
                 <a:solidFill>
-                  <a:srgbClr val="0F2A47"/>
+                  <a:srgbClr val="FFFFFF"/>
                 </a:solidFill>
                 <a:latin typeface="Calibri" pitchFamily="34" charset="0"/>
                 <a:ea typeface="Calibri" pitchFamily="34" charset="-122"/>
@@ -16100,7 +16045,7 @@
             <a:r>
               <a:rPr lang="en-US" sz="1080" dirty="0">
                 <a:solidFill>
-                  <a:srgbClr val="475569"/>
+                  <a:srgbClr val="D8D4F0"/>
                 </a:solidFill>
                 <a:latin typeface="Calibri" pitchFamily="34" charset="0"/>
                 <a:ea typeface="Calibri" pitchFamily="34" charset="-122"/>
@@ -16129,7 +16074,7 @@
           <a:noFill/>
           <a:ln w="12700">
             <a:solidFill>
-              <a:srgbClr val="E2E8F0"/>
+              <a:srgbClr val="352F6E"/>
             </a:solidFill>
             <a:prstDash val="solid"/>
           </a:ln>
@@ -16169,7 +16114,7 @@
             <a:r>
               <a:rPr lang="en-US" sz="1030" b="1" i="1" dirty="0">
                 <a:solidFill>
-                  <a:srgbClr val="DC2626"/>
+                  <a:srgbClr val="EB5C75"/>
                 </a:solidFill>
                 <a:latin typeface="Calibri" pitchFamily="34" charset="0"/>
                 <a:ea typeface="Calibri" pitchFamily="34" charset="-122"/>
@@ -16177,7 +16122,7 @@
               </a:rPr>
               <a:t>Est. 40–60% reduction in late deliveries for these states.</a:t>
             </a:r>
-            <a:endParaRPr lang="en-US" sz="1030" dirty="0"/>
+            <a:endParaRPr lang="en-US" sz="1030" b="1" dirty="0"/>
           </a:p>
         </p:txBody>
       </p:sp>
@@ -16196,17 +16141,17 @@
             <a:avLst/>
           </a:prstGeom>
           <a:solidFill>
-            <a:srgbClr val="F4F6F9"/>
+            <a:srgbClr val="352F6E"/>
           </a:solidFill>
           <a:ln w="12700">
             <a:solidFill>
-              <a:srgbClr val="E2E8F0"/>
+              <a:srgbClr val="352F6E"/>
             </a:solidFill>
             <a:prstDash val="solid"/>
           </a:ln>
           <a:effectLst>
             <a:outerShdw blurRad="88900" dist="25400" dir="5400000" algn="bl" rotWithShape="0">
-              <a:srgbClr val="1B3A5C">
+              <a:srgbClr val="2C2660">
                 <a:alpha val="8000"/>
               </a:srgbClr>
             </a:outerShdw>
@@ -16235,7 +16180,7 @@
             <a:avLst/>
           </a:prstGeom>
           <a:solidFill>
-            <a:srgbClr val="D97706"/>
+            <a:srgbClr val="F0A35E"/>
           </a:solidFill>
           <a:ln/>
         </p:spPr>
@@ -16316,7 +16261,7 @@
             <a:r>
               <a:rPr lang="en-US" sz="1350" b="1" dirty="0">
                 <a:solidFill>
-                  <a:srgbClr val="0F2A47"/>
+                  <a:srgbClr val="FFFFFF"/>
                 </a:solidFill>
                 <a:latin typeface="Calibri" pitchFamily="34" charset="0"/>
                 <a:ea typeface="Calibri" pitchFamily="34" charset="-122"/>
@@ -16358,7 +16303,7 @@
             <a:r>
               <a:rPr lang="en-US" sz="1080" dirty="0">
                 <a:solidFill>
-                  <a:srgbClr val="475569"/>
+                  <a:srgbClr val="D8D4F0"/>
                 </a:solidFill>
                 <a:latin typeface="Calibri" pitchFamily="34" charset="0"/>
                 <a:ea typeface="Calibri" pitchFamily="34" charset="-122"/>
@@ -16387,7 +16332,7 @@
           <a:noFill/>
           <a:ln w="12700">
             <a:solidFill>
-              <a:srgbClr val="E2E8F0"/>
+              <a:srgbClr val="352F6E"/>
             </a:solidFill>
             <a:prstDash val="solid"/>
           </a:ln>
@@ -16427,7 +16372,7 @@
             <a:r>
               <a:rPr lang="en-US" sz="1030" b="1" i="1" dirty="0">
                 <a:solidFill>
-                  <a:srgbClr val="D97706"/>
+                  <a:srgbClr val="F0A35E"/>
                 </a:solidFill>
                 <a:latin typeface="Calibri" pitchFamily="34" charset="0"/>
                 <a:ea typeface="Calibri" pitchFamily="34" charset="-122"/>
@@ -16454,17 +16399,17 @@
             <a:avLst/>
           </a:prstGeom>
           <a:solidFill>
-            <a:srgbClr val="F4F6F9"/>
+            <a:srgbClr val="352F6E"/>
           </a:solidFill>
           <a:ln w="12700">
             <a:solidFill>
-              <a:srgbClr val="E2E8F0"/>
+              <a:srgbClr val="352F6E"/>
             </a:solidFill>
             <a:prstDash val="solid"/>
           </a:ln>
           <a:effectLst>
             <a:outerShdw blurRad="88900" dist="25400" dir="5400000" algn="bl" rotWithShape="0">
-              <a:srgbClr val="1B3A5C">
+              <a:srgbClr val="2C2660">
                 <a:alpha val="8000"/>
               </a:srgbClr>
             </a:outerShdw>
@@ -16493,7 +16438,7 @@
             <a:avLst/>
           </a:prstGeom>
           <a:solidFill>
-            <a:srgbClr val="274A70"/>
+            <a:srgbClr val="8B85E8"/>
           </a:solidFill>
           <a:ln/>
         </p:spPr>
@@ -16574,7 +16519,7 @@
             <a:r>
               <a:rPr lang="en-US" sz="1350" b="1" dirty="0">
                 <a:solidFill>
-                  <a:srgbClr val="0F2A47"/>
+                  <a:srgbClr val="FFFFFF"/>
                 </a:solidFill>
                 <a:latin typeface="Calibri" pitchFamily="34" charset="0"/>
                 <a:ea typeface="Calibri" pitchFamily="34" charset="-122"/>
@@ -16616,7 +16561,7 @@
             <a:r>
               <a:rPr lang="en-US" sz="1080" dirty="0">
                 <a:solidFill>
-                  <a:srgbClr val="475569"/>
+                  <a:srgbClr val="D8D4F0"/>
                 </a:solidFill>
                 <a:latin typeface="Calibri" pitchFamily="34" charset="0"/>
                 <a:ea typeface="Calibri" pitchFamily="34" charset="-122"/>
@@ -16645,7 +16590,7 @@
           <a:noFill/>
           <a:ln w="12700">
             <a:solidFill>
-              <a:srgbClr val="E2E8F0"/>
+              <a:srgbClr val="352F6E"/>
             </a:solidFill>
             <a:prstDash val="solid"/>
           </a:ln>
@@ -16685,7 +16630,7 @@
             <a:r>
               <a:rPr lang="en-US" sz="1030" b="1" i="1" dirty="0">
                 <a:solidFill>
-                  <a:srgbClr val="274A70"/>
+                  <a:srgbClr val="D8D4F0"/>
                 </a:solidFill>
                 <a:latin typeface="Calibri" pitchFamily="34" charset="0"/>
                 <a:ea typeface="Calibri" pitchFamily="34" charset="-122"/>
@@ -16712,17 +16657,17 @@
             <a:avLst/>
           </a:prstGeom>
           <a:solidFill>
-            <a:srgbClr val="F4F6F9"/>
+            <a:srgbClr val="352F6E"/>
           </a:solidFill>
           <a:ln w="12700">
             <a:solidFill>
-              <a:srgbClr val="E2E8F0"/>
+              <a:srgbClr val="352F6E"/>
             </a:solidFill>
             <a:prstDash val="solid"/>
           </a:ln>
           <a:effectLst>
             <a:outerShdw blurRad="88900" dist="25400" dir="5400000" algn="bl" rotWithShape="0">
-              <a:srgbClr val="1B3A5C">
+              <a:srgbClr val="2C2660">
                 <a:alpha val="8000"/>
               </a:srgbClr>
             </a:outerShdw>
@@ -16751,7 +16696,7 @@
             <a:avLst/>
           </a:prstGeom>
           <a:solidFill>
-            <a:srgbClr val="0D9488"/>
+            <a:srgbClr val="5ED9B8"/>
           </a:solidFill>
           <a:ln/>
         </p:spPr>
@@ -16832,7 +16777,7 @@
             <a:r>
               <a:rPr lang="en-US" sz="1350" b="1" dirty="0">
                 <a:solidFill>
-                  <a:srgbClr val="0F2A47"/>
+                  <a:srgbClr val="FFFFFF"/>
                 </a:solidFill>
                 <a:latin typeface="Calibri" pitchFamily="34" charset="0"/>
                 <a:ea typeface="Calibri" pitchFamily="34" charset="-122"/>
@@ -16874,7 +16819,7 @@
             <a:r>
               <a:rPr lang="en-US" sz="1080" dirty="0">
                 <a:solidFill>
-                  <a:srgbClr val="475569"/>
+                  <a:srgbClr val="D8D4F0"/>
                 </a:solidFill>
                 <a:latin typeface="Calibri" pitchFamily="34" charset="0"/>
                 <a:ea typeface="Calibri" pitchFamily="34" charset="-122"/>
@@ -16903,7 +16848,7 @@
           <a:noFill/>
           <a:ln w="12700">
             <a:solidFill>
-              <a:srgbClr val="E2E8F0"/>
+              <a:srgbClr val="352F6E"/>
             </a:solidFill>
             <a:prstDash val="solid"/>
           </a:ln>
@@ -16943,7 +16888,7 @@
             <a:r>
               <a:rPr lang="en-US" sz="1030" b="1" i="1" dirty="0">
                 <a:solidFill>
-                  <a:srgbClr val="0D9488"/>
+                  <a:srgbClr val="5ED9B8"/>
                 </a:solidFill>
                 <a:latin typeface="Calibri" pitchFamily="34" charset="0"/>
                 <a:ea typeface="Calibri" pitchFamily="34" charset="-122"/>
@@ -16982,7 +16927,7 @@
             <a:r>
               <a:rPr lang="en-US" sz="900" dirty="0">
                 <a:solidFill>
-                  <a:srgbClr val="64748B"/>
+                  <a:srgbClr val="B3ABDD"/>
                 </a:solidFill>
                 <a:latin typeface="Calibri" pitchFamily="34" charset="0"/>
                 <a:ea typeface="Calibri" pitchFamily="34" charset="-122"/>
@@ -17021,7 +16966,7 @@
             <a:r>
               <a:rPr lang="en-US" sz="900" dirty="0">
                 <a:solidFill>
-                  <a:srgbClr val="64748B"/>
+                  <a:srgbClr val="B3ABDD"/>
                 </a:solidFill>
                 <a:latin typeface="Calibri" pitchFamily="34" charset="0"/>
                 <a:ea typeface="Calibri" pitchFamily="34" charset="-122"/>
@@ -17046,9 +16991,12 @@
   <p:cSld name="Slide 16">
     <p:bg>
       <p:bgPr>
-        <a:solidFill>
-          <a:srgbClr val="FFFFFF"/>
-        </a:solidFill>
+        <a:blipFill rotWithShape="1">
+          <a:blip r:embed="rId3"/>
+          <a:stretch>
+            <a:fillRect/>
+          </a:stretch>
+        </a:blipFill>
         <a:effectLst/>
       </p:bgPr>
     </p:bg>
@@ -17081,7 +17029,7 @@
             <a:avLst/>
           </a:prstGeom>
           <a:solidFill>
-            <a:srgbClr val="1B3A5C"/>
+            <a:srgbClr val="2C2660"/>
           </a:solidFill>
           <a:ln/>
         </p:spPr>
@@ -17120,7 +17068,7 @@
             <a:r>
               <a:rPr lang="en-US" sz="1100" b="1" kern="0" spc="200" dirty="0">
                 <a:solidFill>
-                  <a:srgbClr val="5EEAD4"/>
+                  <a:srgbClr val="F2A0B5"/>
                 </a:solidFill>
                 <a:latin typeface="Calibri" pitchFamily="34" charset="0"/>
                 <a:ea typeface="Calibri" pitchFamily="34" charset="-122"/>
@@ -17198,7 +17146,7 @@
             <a:r>
               <a:rPr lang="en-US" sz="1200" dirty="0">
                 <a:solidFill>
-                  <a:srgbClr val="C9D9E8"/>
+                  <a:srgbClr val="E4E1F5"/>
                 </a:solidFill>
                 <a:latin typeface="Calibri" pitchFamily="34" charset="0"/>
                 <a:ea typeface="Calibri" pitchFamily="34" charset="-122"/>
@@ -17225,7 +17173,7 @@
             <a:avLst/>
           </a:prstGeom>
           <a:solidFill>
-            <a:srgbClr val="1B3A5C"/>
+            <a:srgbClr val="2C2660"/>
           </a:solidFill>
           <a:ln/>
         </p:spPr>
@@ -17330,11 +17278,11 @@
             <a:avLst/>
           </a:prstGeom>
           <a:solidFill>
-            <a:srgbClr val="FFFFFF"/>
+            <a:srgbClr val="241F52"/>
           </a:solidFill>
           <a:ln w="9525">
             <a:solidFill>
-              <a:srgbClr val="E2E8F0"/>
+              <a:srgbClr val="352F6E"/>
             </a:solidFill>
             <a:prstDash val="solid"/>
           </a:ln>
@@ -17374,7 +17322,7 @@
             <a:r>
               <a:rPr lang="en-US" sz="1080" b="1" dirty="0">
                 <a:solidFill>
-                  <a:srgbClr val="0F2A47"/>
+                  <a:srgbClr val="FFFFFF"/>
                 </a:solidFill>
                 <a:latin typeface="Calibri" pitchFamily="34" charset="0"/>
                 <a:ea typeface="Calibri" pitchFamily="34" charset="-122"/>
@@ -17413,7 +17361,7 @@
             <a:r>
               <a:rPr lang="en-US" sz="1030" dirty="0">
                 <a:solidFill>
-                  <a:srgbClr val="475569"/>
+                  <a:srgbClr val="D8D4F0"/>
                 </a:solidFill>
                 <a:latin typeface="Calibri" pitchFamily="34" charset="0"/>
                 <a:ea typeface="Calibri" pitchFamily="34" charset="-122"/>
@@ -17440,11 +17388,11 @@
             <a:avLst/>
           </a:prstGeom>
           <a:solidFill>
-            <a:srgbClr val="F4F6F9"/>
+            <a:srgbClr val="352F6E"/>
           </a:solidFill>
           <a:ln w="9525">
             <a:solidFill>
-              <a:srgbClr val="E2E8F0"/>
+              <a:srgbClr val="352F6E"/>
             </a:solidFill>
             <a:prstDash val="solid"/>
           </a:ln>
@@ -17484,7 +17432,7 @@
             <a:r>
               <a:rPr lang="en-US" sz="1080" b="1" dirty="0">
                 <a:solidFill>
-                  <a:srgbClr val="0F2A47"/>
+                  <a:srgbClr val="FFFFFF"/>
                 </a:solidFill>
                 <a:latin typeface="Calibri" pitchFamily="34" charset="0"/>
                 <a:ea typeface="Calibri" pitchFamily="34" charset="-122"/>
@@ -17523,7 +17471,7 @@
             <a:r>
               <a:rPr lang="en-US" sz="1030" dirty="0">
                 <a:solidFill>
-                  <a:srgbClr val="475569"/>
+                  <a:srgbClr val="D8D4F0"/>
                 </a:solidFill>
                 <a:latin typeface="Calibri" pitchFamily="34" charset="0"/>
                 <a:ea typeface="Calibri" pitchFamily="34" charset="-122"/>
@@ -17550,11 +17498,11 @@
             <a:avLst/>
           </a:prstGeom>
           <a:solidFill>
-            <a:srgbClr val="FFFFFF"/>
+            <a:srgbClr val="241F52"/>
           </a:solidFill>
           <a:ln w="9525">
             <a:solidFill>
-              <a:srgbClr val="E2E8F0"/>
+              <a:srgbClr val="352F6E"/>
             </a:solidFill>
             <a:prstDash val="solid"/>
           </a:ln>
@@ -17594,7 +17542,7 @@
             <a:r>
               <a:rPr lang="en-US" sz="1080" b="1" dirty="0">
                 <a:solidFill>
-                  <a:srgbClr val="0F2A47"/>
+                  <a:srgbClr val="FFFFFF"/>
                 </a:solidFill>
                 <a:latin typeface="Calibri" pitchFamily="34" charset="0"/>
                 <a:ea typeface="Calibri" pitchFamily="34" charset="-122"/>
@@ -17633,7 +17581,7 @@
             <a:r>
               <a:rPr lang="en-US" sz="1030" dirty="0">
                 <a:solidFill>
-                  <a:srgbClr val="475569"/>
+                  <a:srgbClr val="D8D4F0"/>
                 </a:solidFill>
                 <a:latin typeface="Calibri" pitchFamily="34" charset="0"/>
                 <a:ea typeface="Calibri" pitchFamily="34" charset="-122"/>
@@ -17660,11 +17608,11 @@
             <a:avLst/>
           </a:prstGeom>
           <a:solidFill>
-            <a:srgbClr val="F4F6F9"/>
+            <a:srgbClr val="352F6E"/>
           </a:solidFill>
           <a:ln w="9525">
             <a:solidFill>
-              <a:srgbClr val="E2E8F0"/>
+              <a:srgbClr val="352F6E"/>
             </a:solidFill>
             <a:prstDash val="solid"/>
           </a:ln>
@@ -17704,7 +17652,7 @@
             <a:r>
               <a:rPr lang="en-US" sz="1080" b="1" dirty="0">
                 <a:solidFill>
-                  <a:srgbClr val="0F2A47"/>
+                  <a:srgbClr val="FFFFFF"/>
                 </a:solidFill>
                 <a:latin typeface="Calibri" pitchFamily="34" charset="0"/>
                 <a:ea typeface="Calibri" pitchFamily="34" charset="-122"/>
@@ -17743,7 +17691,7 @@
             <a:r>
               <a:rPr lang="en-US" sz="1030" dirty="0">
                 <a:solidFill>
-                  <a:srgbClr val="475569"/>
+                  <a:srgbClr val="D8D4F0"/>
                 </a:solidFill>
                 <a:latin typeface="Calibri" pitchFamily="34" charset="0"/>
                 <a:ea typeface="Calibri" pitchFamily="34" charset="-122"/>
@@ -17770,11 +17718,11 @@
             <a:avLst/>
           </a:prstGeom>
           <a:solidFill>
-            <a:srgbClr val="FFFFFF"/>
+            <a:srgbClr val="241F52"/>
           </a:solidFill>
           <a:ln w="9525">
             <a:solidFill>
-              <a:srgbClr val="E2E8F0"/>
+              <a:srgbClr val="352F6E"/>
             </a:solidFill>
             <a:prstDash val="solid"/>
           </a:ln>
@@ -17814,7 +17762,7 @@
             <a:r>
               <a:rPr lang="en-US" sz="1080" b="1" dirty="0">
                 <a:solidFill>
-                  <a:srgbClr val="0F2A47"/>
+                  <a:srgbClr val="FFFFFF"/>
                 </a:solidFill>
                 <a:latin typeface="Calibri" pitchFamily="34" charset="0"/>
                 <a:ea typeface="Calibri" pitchFamily="34" charset="-122"/>
@@ -17853,7 +17801,7 @@
             <a:r>
               <a:rPr lang="en-US" sz="1030" dirty="0">
                 <a:solidFill>
-                  <a:srgbClr val="475569"/>
+                  <a:srgbClr val="D8D4F0"/>
                 </a:solidFill>
                 <a:latin typeface="Calibri" pitchFamily="34" charset="0"/>
                 <a:ea typeface="Calibri" pitchFamily="34" charset="-122"/>
@@ -17880,11 +17828,11 @@
             <a:avLst/>
           </a:prstGeom>
           <a:solidFill>
-            <a:srgbClr val="F4F6F9"/>
+            <a:srgbClr val="352F6E"/>
           </a:solidFill>
           <a:ln w="9525">
             <a:solidFill>
-              <a:srgbClr val="E2E8F0"/>
+              <a:srgbClr val="352F6E"/>
             </a:solidFill>
             <a:prstDash val="solid"/>
           </a:ln>
@@ -17924,7 +17872,7 @@
             <a:r>
               <a:rPr lang="en-US" sz="1080" b="1" dirty="0">
                 <a:solidFill>
-                  <a:srgbClr val="0F2A47"/>
+                  <a:srgbClr val="FFFFFF"/>
                 </a:solidFill>
                 <a:latin typeface="Calibri" pitchFamily="34" charset="0"/>
                 <a:ea typeface="Calibri" pitchFamily="34" charset="-122"/>
@@ -17963,7 +17911,7 @@
             <a:r>
               <a:rPr lang="en-US" sz="1030" dirty="0">
                 <a:solidFill>
-                  <a:srgbClr val="475569"/>
+                  <a:srgbClr val="D8D4F0"/>
                 </a:solidFill>
                 <a:latin typeface="Calibri" pitchFamily="34" charset="0"/>
                 <a:ea typeface="Calibri" pitchFamily="34" charset="-122"/>
@@ -17990,11 +17938,11 @@
             <a:avLst/>
           </a:prstGeom>
           <a:solidFill>
-            <a:srgbClr val="FFFFFF"/>
+            <a:srgbClr val="241F52"/>
           </a:solidFill>
           <a:ln w="9525">
             <a:solidFill>
-              <a:srgbClr val="E2E8F0"/>
+              <a:srgbClr val="352F6E"/>
             </a:solidFill>
             <a:prstDash val="solid"/>
           </a:ln>
@@ -18034,7 +17982,7 @@
             <a:r>
               <a:rPr lang="en-US" sz="1080" b="1" dirty="0">
                 <a:solidFill>
-                  <a:srgbClr val="0F2A47"/>
+                  <a:srgbClr val="FFFFFF"/>
                 </a:solidFill>
                 <a:latin typeface="Calibri" pitchFamily="34" charset="0"/>
                 <a:ea typeface="Calibri" pitchFamily="34" charset="-122"/>
@@ -18073,7 +18021,7 @@
             <a:r>
               <a:rPr lang="en-US" sz="1030" dirty="0">
                 <a:solidFill>
-                  <a:srgbClr val="475569"/>
+                  <a:srgbClr val="D8D4F0"/>
                 </a:solidFill>
                 <a:latin typeface="Calibri" pitchFamily="34" charset="0"/>
                 <a:ea typeface="Calibri" pitchFamily="34" charset="-122"/>
@@ -18100,11 +18048,11 @@
             <a:avLst/>
           </a:prstGeom>
           <a:solidFill>
-            <a:srgbClr val="F4F6F9"/>
+            <a:srgbClr val="352F6E"/>
           </a:solidFill>
           <a:ln w="9525">
             <a:solidFill>
-              <a:srgbClr val="E2E8F0"/>
+              <a:srgbClr val="352F6E"/>
             </a:solidFill>
             <a:prstDash val="solid"/>
           </a:ln>
@@ -18144,7 +18092,7 @@
             <a:r>
               <a:rPr lang="en-US" sz="1080" b="1" dirty="0">
                 <a:solidFill>
-                  <a:srgbClr val="0F2A47"/>
+                  <a:srgbClr val="FFFFFF"/>
                 </a:solidFill>
                 <a:latin typeface="Calibri" pitchFamily="34" charset="0"/>
                 <a:ea typeface="Calibri" pitchFamily="34" charset="-122"/>
@@ -18183,7 +18131,7 @@
             <a:r>
               <a:rPr lang="en-US" sz="1030" dirty="0">
                 <a:solidFill>
-                  <a:srgbClr val="475569"/>
+                  <a:srgbClr val="D8D4F0"/>
                 </a:solidFill>
                 <a:latin typeface="Calibri" pitchFamily="34" charset="0"/>
                 <a:ea typeface="Calibri" pitchFamily="34" charset="-122"/>
@@ -18210,11 +18158,11 @@
             <a:avLst/>
           </a:prstGeom>
           <a:solidFill>
-            <a:srgbClr val="FFFFFF"/>
+            <a:srgbClr val="241F52"/>
           </a:solidFill>
           <a:ln w="9525">
             <a:solidFill>
-              <a:srgbClr val="E2E8F0"/>
+              <a:srgbClr val="352F6E"/>
             </a:solidFill>
             <a:prstDash val="solid"/>
           </a:ln>
@@ -18254,7 +18202,7 @@
             <a:r>
               <a:rPr lang="en-US" sz="1080" b="1" dirty="0">
                 <a:solidFill>
-                  <a:srgbClr val="0F2A47"/>
+                  <a:srgbClr val="FFFFFF"/>
                 </a:solidFill>
                 <a:latin typeface="Calibri" pitchFamily="34" charset="0"/>
                 <a:ea typeface="Calibri" pitchFamily="34" charset="-122"/>
@@ -18293,7 +18241,7 @@
             <a:r>
               <a:rPr lang="en-US" sz="1030" dirty="0">
                 <a:solidFill>
-                  <a:srgbClr val="475569"/>
+                  <a:srgbClr val="D8D4F0"/>
                 </a:solidFill>
                 <a:latin typeface="Calibri" pitchFamily="34" charset="0"/>
                 <a:ea typeface="Calibri" pitchFamily="34" charset="-122"/>
@@ -18333,9 +18281,9 @@
               <a:buNone/>
             </a:pPr>
             <a:r>
-              <a:rPr lang="en-US" sz="900" i="1" dirty="0">
-                <a:solidFill>
-                  <a:srgbClr val="64748B"/>
+              <a:rPr lang="en-US" sz="900" b="1" i="1" dirty="0">
+                <a:solidFill>
+                  <a:srgbClr val="B3ABDD"/>
                 </a:solidFill>
                 <a:latin typeface="Calibri" pitchFamily="34" charset="0"/>
                 <a:ea typeface="Calibri" pitchFamily="34" charset="-122"/>
@@ -18343,7 +18291,7 @@
               </a:rPr>
               <a:t>SLA = formal commitment that an order will be delivered on/before the estimated date. No explicit contractual SLA exists in the public dataset; the estimated delivery date is used as the SLA benchmark.  |  Data: Olist Brazilian E-Commerce Public Dataset (Kaggle), Jan 2017–Aug 2018. Tools: Python (pandas, NumPy, Matplotlib, Seaborn).</a:t>
             </a:r>
-            <a:endParaRPr lang="en-US" sz="900" dirty="0"/>
+            <a:endParaRPr lang="en-US" sz="900" b="1" dirty="0"/>
           </a:p>
         </p:txBody>
       </p:sp>
@@ -18374,7 +18322,7 @@
             <a:r>
               <a:rPr lang="en-US" sz="900" dirty="0">
                 <a:solidFill>
-                  <a:srgbClr val="64748B"/>
+                  <a:srgbClr val="B3ABDD"/>
                 </a:solidFill>
                 <a:latin typeface="Calibri" pitchFamily="34" charset="0"/>
                 <a:ea typeface="Calibri" pitchFamily="34" charset="-122"/>
@@ -18413,7 +18361,7 @@
             <a:r>
               <a:rPr lang="en-US" sz="900" dirty="0">
                 <a:solidFill>
-                  <a:srgbClr val="64748B"/>
+                  <a:srgbClr val="B3ABDD"/>
                 </a:solidFill>
                 <a:latin typeface="Calibri" pitchFamily="34" charset="0"/>
                 <a:ea typeface="Calibri" pitchFamily="34" charset="-122"/>
@@ -18438,9 +18386,12 @@
   <p:cSld name="Slide 17">
     <p:bg>
       <p:bgPr>
-        <a:solidFill>
-          <a:srgbClr val="0F2A47"/>
-        </a:solidFill>
+        <a:blipFill rotWithShape="1">
+          <a:blip r:embed="rId3"/>
+          <a:stretch>
+            <a:fillRect/>
+          </a:stretch>
+        </a:blipFill>
         <a:effectLst/>
       </p:bgPr>
     </p:bg>
@@ -18473,7 +18424,7 @@
             <a:avLst/>
           </a:prstGeom>
           <a:solidFill>
-            <a:srgbClr val="23456B"/>
+            <a:srgbClr val="2C2660"/>
           </a:solidFill>
           <a:ln/>
         </p:spPr>
@@ -18500,7 +18451,7 @@
             <a:avLst/>
           </a:prstGeom>
           <a:solidFill>
-            <a:srgbClr val="1B3A5C"/>
+            <a:srgbClr val="2C2660"/>
           </a:solidFill>
           <a:ln/>
         </p:spPr>
@@ -18527,7 +18478,7 @@
             <a:avLst/>
           </a:prstGeom>
           <a:solidFill>
-            <a:srgbClr val="1B3A5C"/>
+            <a:srgbClr val="2C2660"/>
           </a:solidFill>
           <a:ln/>
         </p:spPr>
@@ -18554,7 +18505,7 @@
             <a:avLst/>
           </a:prstGeom>
           <a:solidFill>
-            <a:srgbClr val="23456B"/>
+            <a:srgbClr val="2C2660"/>
           </a:solidFill>
           <a:ln/>
         </p:spPr>
@@ -18581,7 +18532,7 @@
             <a:avLst/>
           </a:prstGeom>
           <a:solidFill>
-            <a:srgbClr val="1B3A5C"/>
+            <a:srgbClr val="2C2660"/>
           </a:solidFill>
           <a:ln/>
         </p:spPr>
@@ -18608,7 +18559,7 @@
             <a:avLst/>
           </a:prstGeom>
           <a:solidFill>
-            <a:srgbClr val="1B3A5C"/>
+            <a:srgbClr val="2C2660"/>
           </a:solidFill>
           <a:ln/>
         </p:spPr>
@@ -18635,7 +18586,7 @@
             <a:avLst/>
           </a:prstGeom>
           <a:solidFill>
-            <a:srgbClr val="23456B"/>
+            <a:srgbClr val="2C2660"/>
           </a:solidFill>
           <a:ln/>
         </p:spPr>
@@ -18662,7 +18613,7 @@
             <a:avLst/>
           </a:prstGeom>
           <a:solidFill>
-            <a:srgbClr val="1B3A5C"/>
+            <a:srgbClr val="2C2660"/>
           </a:solidFill>
           <a:ln/>
         </p:spPr>
@@ -18689,7 +18640,7 @@
             <a:avLst/>
           </a:prstGeom>
           <a:solidFill>
-            <a:srgbClr val="1B3A5C"/>
+            <a:srgbClr val="2C2660"/>
           </a:solidFill>
           <a:ln/>
         </p:spPr>
@@ -18716,7 +18667,7 @@
             <a:avLst/>
           </a:prstGeom>
           <a:solidFill>
-            <a:srgbClr val="23456B"/>
+            <a:srgbClr val="2C2660"/>
           </a:solidFill>
           <a:ln/>
         </p:spPr>
@@ -18743,7 +18694,7 @@
             <a:avLst/>
           </a:prstGeom>
           <a:solidFill>
-            <a:srgbClr val="1B3A5C"/>
+            <a:srgbClr val="2C2660"/>
           </a:solidFill>
           <a:ln/>
         </p:spPr>
@@ -18770,7 +18721,7 @@
             <a:avLst/>
           </a:prstGeom>
           <a:solidFill>
-            <a:srgbClr val="1B3A5C"/>
+            <a:srgbClr val="2C2660"/>
           </a:solidFill>
           <a:ln/>
         </p:spPr>
@@ -18797,7 +18748,7 @@
             <a:avLst/>
           </a:prstGeom>
           <a:solidFill>
-            <a:srgbClr val="23456B"/>
+            <a:srgbClr val="2C2660"/>
           </a:solidFill>
           <a:ln/>
         </p:spPr>
@@ -18824,7 +18775,7 @@
             <a:avLst/>
           </a:prstGeom>
           <a:solidFill>
-            <a:srgbClr val="1B3A5C"/>
+            <a:srgbClr val="2C2660"/>
           </a:solidFill>
           <a:ln/>
         </p:spPr>
@@ -18851,7 +18802,7 @@
             <a:avLst/>
           </a:prstGeom>
           <a:solidFill>
-            <a:srgbClr val="1B3A5C"/>
+            <a:srgbClr val="2C2660"/>
           </a:solidFill>
           <a:ln/>
         </p:spPr>
@@ -18878,7 +18829,7 @@
             <a:avLst/>
           </a:prstGeom>
           <a:solidFill>
-            <a:srgbClr val="23456B"/>
+            <a:srgbClr val="2C2660"/>
           </a:solidFill>
           <a:ln/>
         </p:spPr>
@@ -18905,7 +18856,7 @@
             <a:avLst/>
           </a:prstGeom>
           <a:solidFill>
-            <a:srgbClr val="1B3A5C"/>
+            <a:srgbClr val="2C2660"/>
           </a:solidFill>
           <a:ln/>
         </p:spPr>
@@ -18932,7 +18883,7 @@
             <a:avLst/>
           </a:prstGeom>
           <a:solidFill>
-            <a:srgbClr val="1B3A5C"/>
+            <a:srgbClr val="2C2660"/>
           </a:solidFill>
           <a:ln/>
         </p:spPr>
@@ -18959,7 +18910,7 @@
             <a:avLst/>
           </a:prstGeom>
           <a:solidFill>
-            <a:srgbClr val="23456B"/>
+            <a:srgbClr val="2C2660"/>
           </a:solidFill>
           <a:ln/>
         </p:spPr>
@@ -18986,7 +18937,7 @@
             <a:avLst/>
           </a:prstGeom>
           <a:solidFill>
-            <a:srgbClr val="1B3A5C"/>
+            <a:srgbClr val="2C2660"/>
           </a:solidFill>
           <a:ln/>
         </p:spPr>
@@ -19013,7 +18964,7 @@
             <a:avLst/>
           </a:prstGeom>
           <a:solidFill>
-            <a:srgbClr val="1B3A5C"/>
+            <a:srgbClr val="2C2660"/>
           </a:solidFill>
           <a:ln/>
         </p:spPr>
@@ -19040,7 +18991,7 @@
             <a:avLst/>
           </a:prstGeom>
           <a:solidFill>
-            <a:srgbClr val="23456B"/>
+            <a:srgbClr val="2C2660"/>
           </a:solidFill>
           <a:ln/>
         </p:spPr>
@@ -19067,7 +19018,7 @@
             <a:avLst/>
           </a:prstGeom>
           <a:solidFill>
-            <a:srgbClr val="1B3A5C"/>
+            <a:srgbClr val="2C2660"/>
           </a:solidFill>
           <a:ln/>
         </p:spPr>
@@ -19094,7 +19045,7 @@
             <a:avLst/>
           </a:prstGeom>
           <a:solidFill>
-            <a:srgbClr val="1B3A5C"/>
+            <a:srgbClr val="2C2660"/>
           </a:solidFill>
           <a:ln/>
         </p:spPr>
@@ -19121,7 +19072,7 @@
             <a:avLst/>
           </a:prstGeom>
           <a:solidFill>
-            <a:srgbClr val="23456B"/>
+            <a:srgbClr val="2C2660"/>
           </a:solidFill>
           <a:ln/>
         </p:spPr>
@@ -19148,7 +19099,7 @@
             <a:avLst/>
           </a:prstGeom>
           <a:solidFill>
-            <a:srgbClr val="1B3A5C"/>
+            <a:srgbClr val="2C2660"/>
           </a:solidFill>
           <a:ln/>
         </p:spPr>
@@ -19175,7 +19126,7 @@
             <a:avLst/>
           </a:prstGeom>
           <a:solidFill>
-            <a:srgbClr val="1B3A5C"/>
+            <a:srgbClr val="2C2660"/>
           </a:solidFill>
           <a:ln/>
         </p:spPr>
@@ -19202,7 +19153,7 @@
             <a:avLst/>
           </a:prstGeom>
           <a:solidFill>
-            <a:srgbClr val="23456B"/>
+            <a:srgbClr val="2C2660"/>
           </a:solidFill>
           <a:ln/>
         </p:spPr>
@@ -19229,7 +19180,7 @@
             <a:avLst/>
           </a:prstGeom>
           <a:solidFill>
-            <a:srgbClr val="1B3A5C"/>
+            <a:srgbClr val="2C2660"/>
           </a:solidFill>
           <a:ln/>
         </p:spPr>
@@ -19256,7 +19207,7 @@
             <a:avLst/>
           </a:prstGeom>
           <a:solidFill>
-            <a:srgbClr val="1B3A5C"/>
+            <a:srgbClr val="2C2660"/>
           </a:solidFill>
           <a:ln/>
         </p:spPr>
@@ -19283,7 +19234,7 @@
             <a:avLst/>
           </a:prstGeom>
           <a:solidFill>
-            <a:srgbClr val="23456B"/>
+            <a:srgbClr val="2C2660"/>
           </a:solidFill>
           <a:ln/>
         </p:spPr>
@@ -19310,7 +19261,7 @@
             <a:avLst/>
           </a:prstGeom>
           <a:solidFill>
-            <a:srgbClr val="1B3A5C"/>
+            <a:srgbClr val="2C2660"/>
           </a:solidFill>
           <a:ln/>
         </p:spPr>
@@ -19337,7 +19288,7 @@
             <a:avLst/>
           </a:prstGeom>
           <a:solidFill>
-            <a:srgbClr val="1B3A5C"/>
+            <a:srgbClr val="2C2660"/>
           </a:solidFill>
           <a:ln/>
         </p:spPr>
@@ -19364,7 +19315,7 @@
             <a:avLst/>
           </a:prstGeom>
           <a:solidFill>
-            <a:srgbClr val="23456B"/>
+            <a:srgbClr val="2C2660"/>
           </a:solidFill>
           <a:ln/>
         </p:spPr>
@@ -19391,7 +19342,7 @@
             <a:avLst/>
           </a:prstGeom>
           <a:solidFill>
-            <a:srgbClr val="1B3A5C"/>
+            <a:srgbClr val="2C2660"/>
           </a:solidFill>
           <a:ln/>
         </p:spPr>
@@ -19485,7 +19436,7 @@
             <a:avLst/>
           </a:prstGeom>
           <a:solidFill>
-            <a:srgbClr val="D97706"/>
+            <a:srgbClr val="F0A35E"/>
           </a:solidFill>
           <a:ln/>
         </p:spPr>
@@ -19524,7 +19475,7 @@
             <a:r>
               <a:rPr lang="en-US" sz="1250" dirty="0">
                 <a:solidFill>
-                  <a:srgbClr val="C9D9E8"/>
+                  <a:srgbClr val="E4E1F5"/>
                 </a:solidFill>
                 <a:latin typeface="Calibri" pitchFamily="34" charset="0"/>
                 <a:ea typeface="Calibri" pitchFamily="34" charset="-122"/>
@@ -19560,7 +19511,7 @@
             <a:r>
               <a:rPr lang="en-US" sz="1250" dirty="0">
                 <a:solidFill>
-                  <a:srgbClr val="C9D9E8"/>
+                  <a:srgbClr val="E4E1F5"/>
                 </a:solidFill>
                 <a:latin typeface="Calibri" pitchFamily="34" charset="0"/>
                 <a:ea typeface="Calibri" pitchFamily="34" charset="-122"/>
@@ -19587,11 +19538,11 @@
             <a:avLst/>
           </a:prstGeom>
           <a:solidFill>
-            <a:srgbClr val="16324F"/>
+            <a:srgbClr val="241F52"/>
           </a:solidFill>
           <a:ln w="12700">
             <a:solidFill>
-              <a:srgbClr val="5EEAD4"/>
+              <a:srgbClr val="F2A0B5"/>
             </a:solidFill>
             <a:prstDash val="solid"/>
           </a:ln>
@@ -19841,9 +19792,12 @@
   <p:cSld name="Slide 2">
     <p:bg>
       <p:bgPr>
-        <a:solidFill>
-          <a:srgbClr val="FFFFFF"/>
-        </a:solidFill>
+        <a:blipFill rotWithShape="1">
+          <a:blip r:embed="rId3"/>
+          <a:stretch>
+            <a:fillRect/>
+          </a:stretch>
+        </a:blipFill>
         <a:effectLst/>
       </p:bgPr>
     </p:bg>
@@ -19876,7 +19830,7 @@
             <a:avLst/>
           </a:prstGeom>
           <a:solidFill>
-            <a:srgbClr val="1B3A5C"/>
+            <a:srgbClr val="2C2660"/>
           </a:solidFill>
           <a:ln/>
         </p:spPr>
@@ -19915,7 +19869,7 @@
             <a:r>
               <a:rPr lang="en-US" sz="1100" b="1" kern="0" spc="200" dirty="0">
                 <a:solidFill>
-                  <a:srgbClr val="5EEAD4"/>
+                  <a:srgbClr val="F2A0B5"/>
                 </a:solidFill>
                 <a:latin typeface="Calibri" pitchFamily="34" charset="0"/>
                 <a:ea typeface="Calibri" pitchFamily="34" charset="-122"/>
@@ -19981,7 +19935,7 @@
             <a:avLst/>
           </a:prstGeom>
           <a:solidFill>
-            <a:srgbClr val="0D9488"/>
+            <a:srgbClr val="5ED9B8"/>
           </a:solidFill>
           <a:ln/>
         </p:spPr>
@@ -20059,7 +20013,7 @@
             <a:r>
               <a:rPr lang="en-US" sz="1500" b="1" dirty="0">
                 <a:solidFill>
-                  <a:srgbClr val="0F2A47"/>
+                  <a:srgbClr val="FFFFFF"/>
                 </a:solidFill>
                 <a:latin typeface="Calibri" pitchFamily="34" charset="0"/>
                 <a:ea typeface="Calibri" pitchFamily="34" charset="-122"/>
@@ -20098,7 +20052,7 @@
             <a:r>
               <a:rPr lang="en-US" sz="1150" dirty="0">
                 <a:solidFill>
-                  <a:srgbClr val="64748B"/>
+                  <a:srgbClr val="B3ABDD"/>
                 </a:solidFill>
                 <a:latin typeface="Calibri" pitchFamily="34" charset="0"/>
                 <a:ea typeface="Calibri" pitchFamily="34" charset="-122"/>
@@ -20127,7 +20081,7 @@
           <a:noFill/>
           <a:ln w="12700">
             <a:solidFill>
-              <a:srgbClr val="E2E8F0"/>
+              <a:srgbClr val="352F6E"/>
             </a:solidFill>
             <a:prstDash val="solid"/>
           </a:ln>
@@ -20155,7 +20109,7 @@
             <a:avLst/>
           </a:prstGeom>
           <a:solidFill>
-            <a:srgbClr val="D97706"/>
+            <a:srgbClr val="F0A35E"/>
           </a:solidFill>
           <a:ln/>
         </p:spPr>
@@ -20233,7 +20187,7 @@
             <a:r>
               <a:rPr lang="en-US" sz="1500" b="1" dirty="0">
                 <a:solidFill>
-                  <a:srgbClr val="0F2A47"/>
+                  <a:srgbClr val="FFFFFF"/>
                 </a:solidFill>
                 <a:latin typeface="Calibri" pitchFamily="34" charset="0"/>
                 <a:ea typeface="Calibri" pitchFamily="34" charset="-122"/>
@@ -20272,7 +20226,7 @@
             <a:r>
               <a:rPr lang="en-US" sz="1150" dirty="0">
                 <a:solidFill>
-                  <a:srgbClr val="64748B"/>
+                  <a:srgbClr val="B3ABDD"/>
                 </a:solidFill>
                 <a:latin typeface="Calibri" pitchFamily="34" charset="0"/>
                 <a:ea typeface="Calibri" pitchFamily="34" charset="-122"/>
@@ -20301,7 +20255,7 @@
           <a:noFill/>
           <a:ln w="12700">
             <a:solidFill>
-              <a:srgbClr val="E2E8F0"/>
+              <a:srgbClr val="352F6E"/>
             </a:solidFill>
             <a:prstDash val="solid"/>
           </a:ln>
@@ -20329,7 +20283,7 @@
             <a:avLst/>
           </a:prstGeom>
           <a:solidFill>
-            <a:srgbClr val="DC2626"/>
+            <a:srgbClr val="EB5C75"/>
           </a:solidFill>
           <a:ln/>
         </p:spPr>
@@ -20407,7 +20361,7 @@
             <a:r>
               <a:rPr lang="en-US" sz="1500" b="1" dirty="0">
                 <a:solidFill>
-                  <a:srgbClr val="0F2A47"/>
+                  <a:srgbClr val="FFFFFF"/>
                 </a:solidFill>
                 <a:latin typeface="Calibri" pitchFamily="34" charset="0"/>
                 <a:ea typeface="Calibri" pitchFamily="34" charset="-122"/>
@@ -20446,7 +20400,7 @@
             <a:r>
               <a:rPr lang="en-US" sz="1150" dirty="0">
                 <a:solidFill>
-                  <a:srgbClr val="64748B"/>
+                  <a:srgbClr val="B3ABDD"/>
                 </a:solidFill>
                 <a:latin typeface="Calibri" pitchFamily="34" charset="0"/>
                 <a:ea typeface="Calibri" pitchFamily="34" charset="-122"/>
@@ -20475,7 +20429,7 @@
           <a:noFill/>
           <a:ln w="12700">
             <a:solidFill>
-              <a:srgbClr val="E2E8F0"/>
+              <a:srgbClr val="352F6E"/>
             </a:solidFill>
             <a:prstDash val="solid"/>
           </a:ln>
@@ -20503,7 +20457,7 @@
             <a:avLst/>
           </a:prstGeom>
           <a:solidFill>
-            <a:srgbClr val="274A70"/>
+            <a:srgbClr val="8B85E8"/>
           </a:solidFill>
           <a:ln/>
         </p:spPr>
@@ -20581,7 +20535,7 @@
             <a:r>
               <a:rPr lang="en-US" sz="1500" b="1" dirty="0">
                 <a:solidFill>
-                  <a:srgbClr val="0F2A47"/>
+                  <a:srgbClr val="FFFFFF"/>
                 </a:solidFill>
                 <a:latin typeface="Calibri" pitchFamily="34" charset="0"/>
                 <a:ea typeface="Calibri" pitchFamily="34" charset="-122"/>
@@ -20620,7 +20574,7 @@
             <a:r>
               <a:rPr lang="en-US" sz="1150" dirty="0">
                 <a:solidFill>
-                  <a:srgbClr val="64748B"/>
+                  <a:srgbClr val="B3ABDD"/>
                 </a:solidFill>
                 <a:latin typeface="Calibri" pitchFamily="34" charset="0"/>
                 <a:ea typeface="Calibri" pitchFamily="34" charset="-122"/>
@@ -20649,7 +20603,7 @@
           <a:noFill/>
           <a:ln w="12700">
             <a:solidFill>
-              <a:srgbClr val="E2E8F0"/>
+              <a:srgbClr val="352F6E"/>
             </a:solidFill>
             <a:prstDash val="solid"/>
           </a:ln>
@@ -20677,7 +20631,7 @@
             <a:avLst/>
           </a:prstGeom>
           <a:solidFill>
-            <a:srgbClr val="0D9488"/>
+            <a:srgbClr val="5ED9B8"/>
           </a:solidFill>
           <a:ln/>
         </p:spPr>
@@ -20755,7 +20709,7 @@
             <a:r>
               <a:rPr lang="en-US" sz="1500" b="1" dirty="0">
                 <a:solidFill>
-                  <a:srgbClr val="0F2A47"/>
+                  <a:srgbClr val="FFFFFF"/>
                 </a:solidFill>
                 <a:latin typeface="Calibri" pitchFamily="34" charset="0"/>
                 <a:ea typeface="Calibri" pitchFamily="34" charset="-122"/>
@@ -20794,7 +20748,7 @@
             <a:r>
               <a:rPr lang="en-US" sz="1150" dirty="0">
                 <a:solidFill>
-                  <a:srgbClr val="64748B"/>
+                  <a:srgbClr val="B3ABDD"/>
                 </a:solidFill>
                 <a:latin typeface="Calibri" pitchFamily="34" charset="0"/>
                 <a:ea typeface="Calibri" pitchFamily="34" charset="-122"/>
@@ -20823,7 +20777,7 @@
           <a:noFill/>
           <a:ln w="12700">
             <a:solidFill>
-              <a:srgbClr val="E2E8F0"/>
+              <a:srgbClr val="352F6E"/>
             </a:solidFill>
             <a:prstDash val="solid"/>
           </a:ln>
@@ -20851,7 +20805,7 @@
             <a:avLst/>
           </a:prstGeom>
           <a:solidFill>
-            <a:srgbClr val="D97706"/>
+            <a:srgbClr val="F0A35E"/>
           </a:solidFill>
           <a:ln/>
         </p:spPr>
@@ -20929,7 +20883,7 @@
             <a:r>
               <a:rPr lang="en-US" sz="1500" b="1" dirty="0">
                 <a:solidFill>
-                  <a:srgbClr val="0F2A47"/>
+                  <a:srgbClr val="FFFFFF"/>
                 </a:solidFill>
                 <a:latin typeface="Calibri" pitchFamily="34" charset="0"/>
                 <a:ea typeface="Calibri" pitchFamily="34" charset="-122"/>
@@ -20968,7 +20922,7 @@
             <a:r>
               <a:rPr lang="en-US" sz="1150" dirty="0">
                 <a:solidFill>
-                  <a:srgbClr val="64748B"/>
+                  <a:srgbClr val="B3ABDD"/>
                 </a:solidFill>
                 <a:latin typeface="Calibri" pitchFamily="34" charset="0"/>
                 <a:ea typeface="Calibri" pitchFamily="34" charset="-122"/>
@@ -20997,7 +20951,7 @@
           <a:noFill/>
           <a:ln w="12700">
             <a:solidFill>
-              <a:srgbClr val="E2E8F0"/>
+              <a:srgbClr val="352F6E"/>
             </a:solidFill>
             <a:prstDash val="solid"/>
           </a:ln>
@@ -21025,7 +20979,7 @@
             <a:avLst/>
           </a:prstGeom>
           <a:solidFill>
-            <a:srgbClr val="DC2626"/>
+            <a:srgbClr val="EB5C75"/>
           </a:solidFill>
           <a:ln/>
         </p:spPr>
@@ -21103,7 +21057,7 @@
             <a:r>
               <a:rPr lang="en-US" sz="1500" b="1" dirty="0">
                 <a:solidFill>
-                  <a:srgbClr val="0F2A47"/>
+                  <a:srgbClr val="FFFFFF"/>
                 </a:solidFill>
                 <a:latin typeface="Calibri" pitchFamily="34" charset="0"/>
                 <a:ea typeface="Calibri" pitchFamily="34" charset="-122"/>
@@ -21142,7 +21096,7 @@
             <a:r>
               <a:rPr lang="en-US" sz="1150" dirty="0">
                 <a:solidFill>
-                  <a:srgbClr val="64748B"/>
+                  <a:srgbClr val="B3ABDD"/>
                 </a:solidFill>
                 <a:latin typeface="Calibri" pitchFamily="34" charset="0"/>
                 <a:ea typeface="Calibri" pitchFamily="34" charset="-122"/>
@@ -21167,9 +21121,12 @@
   <p:cSld name="Slide 3">
     <p:bg>
       <p:bgPr>
-        <a:solidFill>
-          <a:srgbClr val="FFFFFF"/>
-        </a:solidFill>
+        <a:blipFill rotWithShape="1">
+          <a:blip r:embed="rId3"/>
+          <a:stretch>
+            <a:fillRect/>
+          </a:stretch>
+        </a:blipFill>
         <a:effectLst/>
       </p:bgPr>
     </p:bg>
@@ -21202,7 +21159,7 @@
             <a:avLst/>
           </a:prstGeom>
           <a:solidFill>
-            <a:srgbClr val="1B3A5C"/>
+            <a:srgbClr val="2C2660"/>
           </a:solidFill>
           <a:ln/>
         </p:spPr>
@@ -21241,7 +21198,7 @@
             <a:r>
               <a:rPr lang="en-US" sz="1100" b="1" kern="0" spc="200" dirty="0">
                 <a:solidFill>
-                  <a:srgbClr val="5EEAD4"/>
+                  <a:srgbClr val="F2A0B5"/>
                 </a:solidFill>
                 <a:latin typeface="Calibri" pitchFamily="34" charset="0"/>
                 <a:ea typeface="Calibri" pitchFamily="34" charset="-122"/>
@@ -21319,7 +21276,7 @@
             <a:r>
               <a:rPr lang="en-US" sz="1200" dirty="0">
                 <a:solidFill>
-                  <a:srgbClr val="C9D9E8"/>
+                  <a:srgbClr val="E4E1F5"/>
                 </a:solidFill>
                 <a:latin typeface="Calibri" pitchFamily="34" charset="0"/>
                 <a:ea typeface="Calibri" pitchFamily="34" charset="-122"/>
@@ -21343,7 +21300,7 @@
         </p:xfrm>
         <a:graphic>
           <a:graphicData uri="http://schemas.openxmlformats.org/drawingml/2006/chart">
-            <c:chart xmlns:c="http://schemas.openxmlformats.org/drawingml/2006/chart" xmlns:r="http://schemas.openxmlformats.org/officeDocument/2006/relationships" r:id="rId3"/>
+            <c:chart xmlns:c="http://schemas.openxmlformats.org/drawingml/2006/chart" xmlns:r="http://schemas.openxmlformats.org/officeDocument/2006/relationships" r:id="rId4"/>
           </a:graphicData>
         </a:graphic>
       </p:graphicFrame>
@@ -21374,7 +21331,7 @@
             <a:r>
               <a:rPr lang="en-US" sz="2600" b="1" dirty="0">
                 <a:solidFill>
-                  <a:srgbClr val="0F2A47"/>
+                  <a:srgbClr val="FFFFFF"/>
                 </a:solidFill>
                 <a:latin typeface="Cambria" pitchFamily="34" charset="0"/>
                 <a:ea typeface="Cambria" pitchFamily="34" charset="-122"/>
@@ -21391,7 +21348,7 @@
             <a:r>
               <a:rPr lang="en-US" sz="1200" dirty="0">
                 <a:solidFill>
-                  <a:srgbClr val="64748B"/>
+                  <a:srgbClr val="B3ABDD"/>
                 </a:solidFill>
                 <a:latin typeface="Cambria" pitchFamily="34" charset="0"/>
                 <a:ea typeface="Cambria" pitchFamily="34" charset="-122"/>
@@ -21418,7 +21375,7 @@
             <a:avLst/>
           </a:prstGeom>
           <a:solidFill>
-            <a:srgbClr val="0D9488"/>
+            <a:srgbClr val="5ED9B8"/>
           </a:solidFill>
           <a:ln/>
         </p:spPr>
@@ -21457,7 +21414,7 @@
             <a:r>
               <a:rPr lang="en-US" sz="1250" dirty="0">
                 <a:solidFill>
-                  <a:srgbClr val="475569"/>
+                  <a:srgbClr val="D8D4F0"/>
                 </a:solidFill>
                 <a:latin typeface="Calibri" pitchFamily="34" charset="0"/>
                 <a:ea typeface="Calibri" pitchFamily="34" charset="-122"/>
@@ -21484,7 +21441,7 @@
             <a:avLst/>
           </a:prstGeom>
           <a:solidFill>
-            <a:srgbClr val="DC2626"/>
+            <a:srgbClr val="EB5C75"/>
           </a:solidFill>
           <a:ln/>
         </p:spPr>
@@ -21523,7 +21480,7 @@
             <a:r>
               <a:rPr lang="en-US" sz="1250" dirty="0">
                 <a:solidFill>
-                  <a:srgbClr val="475569"/>
+                  <a:srgbClr val="D8D4F0"/>
                 </a:solidFill>
                 <a:latin typeface="Calibri" pitchFamily="34" charset="0"/>
                 <a:ea typeface="Calibri" pitchFamily="34" charset="-122"/>
@@ -21550,17 +21507,17 @@
             <a:avLst/>
           </a:prstGeom>
           <a:solidFill>
-            <a:srgbClr val="F4F6F9"/>
+            <a:srgbClr val="352F6E"/>
           </a:solidFill>
           <a:ln w="12700">
             <a:solidFill>
-              <a:srgbClr val="E2E8F0"/>
+              <a:srgbClr val="352F6E"/>
             </a:solidFill>
             <a:prstDash val="solid"/>
           </a:ln>
           <a:effectLst>
             <a:outerShdw blurRad="88900" dist="25400" dir="5400000" algn="bl" rotWithShape="0">
-              <a:srgbClr val="1B3A5C">
+              <a:srgbClr val="2C2660">
                 <a:alpha val="8000"/>
               </a:srgbClr>
             </a:outerShdw>
@@ -21589,7 +21546,7 @@
             <a:avLst/>
           </a:prstGeom>
           <a:solidFill>
-            <a:srgbClr val="0D9488"/>
+            <a:srgbClr val="5ED9B8"/>
           </a:solidFill>
           <a:ln/>
         </p:spPr>
@@ -21628,7 +21585,7 @@
             <a:r>
               <a:rPr lang="en-US" sz="2700" b="1" dirty="0">
                 <a:solidFill>
-                  <a:srgbClr val="0F2A47"/>
+                  <a:srgbClr val="FFFFFF"/>
                 </a:solidFill>
                 <a:latin typeface="Cambria" pitchFamily="34" charset="0"/>
                 <a:ea typeface="Cambria" pitchFamily="34" charset="-122"/>
@@ -21667,7 +21624,7 @@
             <a:r>
               <a:rPr lang="en-US" sz="1100" dirty="0">
                 <a:solidFill>
-                  <a:srgbClr val="475569"/>
+                  <a:srgbClr val="D8D4F0"/>
                 </a:solidFill>
                 <a:latin typeface="Calibri" pitchFamily="34" charset="0"/>
                 <a:ea typeface="Calibri" pitchFamily="34" charset="-122"/>
@@ -21694,17 +21651,17 @@
             <a:avLst/>
           </a:prstGeom>
           <a:solidFill>
-            <a:srgbClr val="F4F6F9"/>
+            <a:srgbClr val="352F6E"/>
           </a:solidFill>
           <a:ln w="12700">
             <a:solidFill>
-              <a:srgbClr val="E2E8F0"/>
+              <a:srgbClr val="352F6E"/>
             </a:solidFill>
             <a:prstDash val="solid"/>
           </a:ln>
           <a:effectLst>
             <a:outerShdw blurRad="88900" dist="25400" dir="5400000" algn="bl" rotWithShape="0">
-              <a:srgbClr val="1B3A5C">
+              <a:srgbClr val="2C2660">
                 <a:alpha val="8000"/>
               </a:srgbClr>
             </a:outerShdw>
@@ -21733,7 +21690,7 @@
             <a:avLst/>
           </a:prstGeom>
           <a:solidFill>
-            <a:srgbClr val="DC2626"/>
+            <a:srgbClr val="EB5C75"/>
           </a:solidFill>
           <a:ln/>
         </p:spPr>
@@ -21772,7 +21729,7 @@
             <a:r>
               <a:rPr lang="en-US" sz="2700" b="1" dirty="0">
                 <a:solidFill>
-                  <a:srgbClr val="0F2A47"/>
+                  <a:srgbClr val="FFFFFF"/>
                 </a:solidFill>
                 <a:latin typeface="Cambria" pitchFamily="34" charset="0"/>
                 <a:ea typeface="Cambria" pitchFamily="34" charset="-122"/>
@@ -21811,7 +21768,7 @@
             <a:r>
               <a:rPr lang="en-US" sz="1100" dirty="0">
                 <a:solidFill>
-                  <a:srgbClr val="475569"/>
+                  <a:srgbClr val="D8D4F0"/>
                 </a:solidFill>
                 <a:latin typeface="Calibri" pitchFamily="34" charset="0"/>
                 <a:ea typeface="Calibri" pitchFamily="34" charset="-122"/>
@@ -21838,17 +21795,17 @@
             <a:avLst/>
           </a:prstGeom>
           <a:solidFill>
-            <a:srgbClr val="F4F6F9"/>
+            <a:srgbClr val="352F6E"/>
           </a:solidFill>
           <a:ln w="12700">
             <a:solidFill>
-              <a:srgbClr val="E2E8F0"/>
+              <a:srgbClr val="352F6E"/>
             </a:solidFill>
             <a:prstDash val="solid"/>
           </a:ln>
           <a:effectLst>
             <a:outerShdw blurRad="88900" dist="25400" dir="5400000" algn="bl" rotWithShape="0">
-              <a:srgbClr val="1B3A5C">
+              <a:srgbClr val="2C2660">
                 <a:alpha val="8000"/>
               </a:srgbClr>
             </a:outerShdw>
@@ -21877,7 +21834,7 @@
             <a:avLst/>
           </a:prstGeom>
           <a:solidFill>
-            <a:srgbClr val="274A70"/>
+            <a:srgbClr val="352E6E"/>
           </a:solidFill>
           <a:ln/>
         </p:spPr>
@@ -21916,7 +21873,7 @@
             <a:r>
               <a:rPr lang="en-US" sz="2700" b="1" dirty="0">
                 <a:solidFill>
-                  <a:srgbClr val="0F2A47"/>
+                  <a:srgbClr val="FFFFFF"/>
                 </a:solidFill>
                 <a:latin typeface="Cambria" pitchFamily="34" charset="0"/>
                 <a:ea typeface="Cambria" pitchFamily="34" charset="-122"/>
@@ -21955,7 +21912,7 @@
             <a:r>
               <a:rPr lang="en-US" sz="1100" dirty="0">
                 <a:solidFill>
-                  <a:srgbClr val="475569"/>
+                  <a:srgbClr val="D8D4F0"/>
                 </a:solidFill>
                 <a:latin typeface="Calibri" pitchFamily="34" charset="0"/>
                 <a:ea typeface="Calibri" pitchFamily="34" charset="-122"/>
@@ -21982,11 +21939,11 @@
             <a:avLst/>
           </a:prstGeom>
           <a:solidFill>
-            <a:srgbClr val="FEECEC"/>
+            <a:srgbClr val="3D2A4A"/>
           </a:solidFill>
           <a:ln w="12700">
             <a:solidFill>
-              <a:srgbClr val="E2E8F0"/>
+              <a:srgbClr val="352F6E"/>
             </a:solidFill>
             <a:prstDash val="solid"/>
           </a:ln>
@@ -22014,7 +21971,7 @@
             <a:avLst/>
           </a:prstGeom>
           <a:solidFill>
-            <a:srgbClr val="DC2626"/>
+            <a:srgbClr val="EB5C75"/>
           </a:solidFill>
           <a:ln/>
         </p:spPr>
@@ -22053,7 +22010,7 @@
             <a:r>
               <a:rPr lang="en-US" sz="1100" b="1" kern="0" spc="100" dirty="0">
                 <a:solidFill>
-                  <a:srgbClr val="DC2626"/>
+                  <a:srgbClr val="EB5C75"/>
                 </a:solidFill>
                 <a:latin typeface="Calibri" pitchFamily="34" charset="0"/>
                 <a:ea typeface="Calibri" pitchFamily="34" charset="-122"/>
@@ -22095,7 +22052,7 @@
             <a:r>
               <a:rPr lang="en-US" sz="1300" dirty="0">
                 <a:solidFill>
-                  <a:srgbClr val="475569"/>
+                  <a:srgbClr val="D8D4F0"/>
                 </a:solidFill>
                 <a:latin typeface="Calibri" pitchFamily="34" charset="0"/>
                 <a:ea typeface="Calibri" pitchFamily="34" charset="-122"/>
@@ -22134,7 +22091,7 @@
             <a:r>
               <a:rPr lang="en-US" sz="900" dirty="0">
                 <a:solidFill>
-                  <a:srgbClr val="64748B"/>
+                  <a:srgbClr val="B3ABDD"/>
                 </a:solidFill>
                 <a:latin typeface="Calibri" pitchFamily="34" charset="0"/>
                 <a:ea typeface="Calibri" pitchFamily="34" charset="-122"/>
@@ -22173,7 +22130,7 @@
             <a:r>
               <a:rPr lang="en-US" sz="900" dirty="0">
                 <a:solidFill>
-                  <a:srgbClr val="64748B"/>
+                  <a:srgbClr val="B3ABDD"/>
                 </a:solidFill>
                 <a:latin typeface="Calibri" pitchFamily="34" charset="0"/>
                 <a:ea typeface="Calibri" pitchFamily="34" charset="-122"/>
@@ -22198,9 +22155,12 @@
   <p:cSld name="Slide 4">
     <p:bg>
       <p:bgPr>
-        <a:solidFill>
-          <a:srgbClr val="FFFFFF"/>
-        </a:solidFill>
+        <a:blipFill rotWithShape="1">
+          <a:blip r:embed="rId3"/>
+          <a:stretch>
+            <a:fillRect/>
+          </a:stretch>
+        </a:blipFill>
         <a:effectLst/>
       </p:bgPr>
     </p:bg>
@@ -22233,7 +22193,7 @@
             <a:avLst/>
           </a:prstGeom>
           <a:solidFill>
-            <a:srgbClr val="1B3A5C"/>
+            <a:srgbClr val="2C2660"/>
           </a:solidFill>
           <a:ln/>
         </p:spPr>
@@ -22272,7 +22232,7 @@
             <a:r>
               <a:rPr lang="en-US" sz="1100" b="1" kern="0" spc="200" dirty="0">
                 <a:solidFill>
-                  <a:srgbClr val="5EEAD4"/>
+                  <a:srgbClr val="F2A0B5"/>
                 </a:solidFill>
                 <a:latin typeface="Calibri" pitchFamily="34" charset="0"/>
                 <a:ea typeface="Calibri" pitchFamily="34" charset="-122"/>
@@ -22350,7 +22310,7 @@
             <a:r>
               <a:rPr lang="en-US" sz="1200" dirty="0">
                 <a:solidFill>
-                  <a:srgbClr val="C9D9E8"/>
+                  <a:srgbClr val="E4E1F5"/>
                 </a:solidFill>
                 <a:latin typeface="Calibri" pitchFamily="34" charset="0"/>
                 <a:ea typeface="Calibri" pitchFamily="34" charset="-122"/>
@@ -22374,7 +22334,7 @@
         </p:xfrm>
         <a:graphic>
           <a:graphicData uri="http://schemas.openxmlformats.org/drawingml/2006/chart">
-            <c:chart xmlns:c="http://schemas.openxmlformats.org/drawingml/2006/chart" xmlns:r="http://schemas.openxmlformats.org/officeDocument/2006/relationships" r:id="rId3"/>
+            <c:chart xmlns:c="http://schemas.openxmlformats.org/drawingml/2006/chart" xmlns:r="http://schemas.openxmlformats.org/officeDocument/2006/relationships" r:id="rId4"/>
           </a:graphicData>
         </a:graphic>
       </p:graphicFrame>
@@ -22393,17 +22353,17 @@
             <a:avLst/>
           </a:prstGeom>
           <a:solidFill>
-            <a:srgbClr val="F4F6F9"/>
+            <a:srgbClr val="352F6E"/>
           </a:solidFill>
           <a:ln w="12700">
             <a:solidFill>
-              <a:srgbClr val="E2E8F0"/>
+              <a:srgbClr val="352F6E"/>
             </a:solidFill>
             <a:prstDash val="solid"/>
           </a:ln>
           <a:effectLst>
             <a:outerShdw blurRad="88900" dist="25400" dir="5400000" algn="bl" rotWithShape="0">
-              <a:srgbClr val="1B3A5C">
+              <a:srgbClr val="2C2660">
                 <a:alpha val="8000"/>
               </a:srgbClr>
             </a:outerShdw>
@@ -22432,7 +22392,7 @@
             <a:avLst/>
           </a:prstGeom>
           <a:solidFill>
-            <a:srgbClr val="0D9488"/>
+            <a:srgbClr val="5ED9B8"/>
           </a:solidFill>
           <a:ln/>
         </p:spPr>
@@ -22471,7 +22431,7 @@
             <a:r>
               <a:rPr lang="en-US" sz="2600" b="1" dirty="0">
                 <a:solidFill>
-                  <a:srgbClr val="0F2A47"/>
+                  <a:srgbClr val="FFFFFF"/>
                 </a:solidFill>
                 <a:latin typeface="Cambria" pitchFamily="34" charset="0"/>
                 <a:ea typeface="Cambria" pitchFamily="34" charset="-122"/>
@@ -22510,7 +22470,7 @@
             <a:r>
               <a:rPr lang="en-US" sz="1100" dirty="0">
                 <a:solidFill>
-                  <a:srgbClr val="475569"/>
+                  <a:srgbClr val="D8D4F0"/>
                 </a:solidFill>
                 <a:latin typeface="Calibri" pitchFamily="34" charset="0"/>
                 <a:ea typeface="Calibri" pitchFamily="34" charset="-122"/>
@@ -22537,17 +22497,17 @@
             <a:avLst/>
           </a:prstGeom>
           <a:solidFill>
-            <a:srgbClr val="F4F6F9"/>
+            <a:srgbClr val="352F6E"/>
           </a:solidFill>
           <a:ln w="12700">
             <a:solidFill>
-              <a:srgbClr val="E2E8F0"/>
+              <a:srgbClr val="352F6E"/>
             </a:solidFill>
             <a:prstDash val="solid"/>
           </a:ln>
           <a:effectLst>
             <a:outerShdw blurRad="88900" dist="25400" dir="5400000" algn="bl" rotWithShape="0">
-              <a:srgbClr val="1B3A5C">
+              <a:srgbClr val="2C2660">
                 <a:alpha val="8000"/>
               </a:srgbClr>
             </a:outerShdw>
@@ -22576,7 +22536,7 @@
             <a:avLst/>
           </a:prstGeom>
           <a:solidFill>
-            <a:srgbClr val="DC2626"/>
+            <a:srgbClr val="EB5C75"/>
           </a:solidFill>
           <a:ln/>
         </p:spPr>
@@ -22615,7 +22575,7 @@
             <a:r>
               <a:rPr lang="en-US" sz="2600" b="1" dirty="0">
                 <a:solidFill>
-                  <a:srgbClr val="0F2A47"/>
+                  <a:srgbClr val="FFFFFF"/>
                 </a:solidFill>
                 <a:latin typeface="Cambria" pitchFamily="34" charset="0"/>
                 <a:ea typeface="Cambria" pitchFamily="34" charset="-122"/>
@@ -22654,7 +22614,7 @@
             <a:r>
               <a:rPr lang="en-US" sz="1100" dirty="0">
                 <a:solidFill>
-                  <a:srgbClr val="475569"/>
+                  <a:srgbClr val="D8D4F0"/>
                 </a:solidFill>
                 <a:latin typeface="Calibri" pitchFamily="34" charset="0"/>
                 <a:ea typeface="Calibri" pitchFamily="34" charset="-122"/>
@@ -22681,11 +22641,11 @@
             <a:avLst/>
           </a:prstGeom>
           <a:solidFill>
-            <a:srgbClr val="FEECEC"/>
+            <a:srgbClr val="3D2A4A"/>
           </a:solidFill>
           <a:ln w="12700">
             <a:solidFill>
-              <a:srgbClr val="E2E8F0"/>
+              <a:srgbClr val="352F6E"/>
             </a:solidFill>
             <a:prstDash val="solid"/>
           </a:ln>
@@ -22713,7 +22673,7 @@
             <a:avLst/>
           </a:prstGeom>
           <a:solidFill>
-            <a:srgbClr val="DC2626"/>
+            <a:srgbClr val="EB5C75"/>
           </a:solidFill>
           <a:ln/>
         </p:spPr>
@@ -22752,7 +22712,7 @@
             <a:r>
               <a:rPr lang="en-US" sz="1100" b="1" kern="0" spc="100" dirty="0">
                 <a:solidFill>
-                  <a:srgbClr val="DC2626"/>
+                  <a:srgbClr val="EB5C75"/>
                 </a:solidFill>
                 <a:latin typeface="Calibri" pitchFamily="34" charset="0"/>
                 <a:ea typeface="Calibri" pitchFamily="34" charset="-122"/>
@@ -22794,7 +22754,7 @@
             <a:r>
               <a:rPr lang="en-US" sz="1300" dirty="0">
                 <a:solidFill>
-                  <a:srgbClr val="475569"/>
+                  <a:srgbClr val="D8D4F0"/>
                 </a:solidFill>
                 <a:latin typeface="Calibri" pitchFamily="34" charset="0"/>
                 <a:ea typeface="Calibri" pitchFamily="34" charset="-122"/>
@@ -22833,7 +22793,7 @@
             <a:r>
               <a:rPr lang="en-US" sz="900" dirty="0">
                 <a:solidFill>
-                  <a:srgbClr val="64748B"/>
+                  <a:srgbClr val="B3ABDD"/>
                 </a:solidFill>
                 <a:latin typeface="Calibri" pitchFamily="34" charset="0"/>
                 <a:ea typeface="Calibri" pitchFamily="34" charset="-122"/>
@@ -22872,7 +22832,7 @@
             <a:r>
               <a:rPr lang="en-US" sz="900" dirty="0">
                 <a:solidFill>
-                  <a:srgbClr val="64748B"/>
+                  <a:srgbClr val="B3ABDD"/>
                 </a:solidFill>
                 <a:latin typeface="Calibri" pitchFamily="34" charset="0"/>
                 <a:ea typeface="Calibri" pitchFamily="34" charset="-122"/>
@@ -22897,9 +22857,12 @@
   <p:cSld name="Slide 5">
     <p:bg>
       <p:bgPr>
-        <a:solidFill>
-          <a:srgbClr val="FFFFFF"/>
-        </a:solidFill>
+        <a:blipFill rotWithShape="1">
+          <a:blip r:embed="rId3"/>
+          <a:stretch>
+            <a:fillRect/>
+          </a:stretch>
+        </a:blipFill>
         <a:effectLst/>
       </p:bgPr>
     </p:bg>
@@ -22932,7 +22895,7 @@
             <a:avLst/>
           </a:prstGeom>
           <a:solidFill>
-            <a:srgbClr val="1B3A5C"/>
+            <a:srgbClr val="2C2660"/>
           </a:solidFill>
           <a:ln/>
         </p:spPr>
@@ -22971,7 +22934,7 @@
             <a:r>
               <a:rPr lang="en-US" sz="1100" b="1" kern="0" spc="200" dirty="0">
                 <a:solidFill>
-                  <a:srgbClr val="5EEAD4"/>
+                  <a:srgbClr val="F2A0B5"/>
                 </a:solidFill>
                 <a:latin typeface="Calibri" pitchFamily="34" charset="0"/>
                 <a:ea typeface="Calibri" pitchFamily="34" charset="-122"/>
@@ -23049,7 +23012,7 @@
             <a:r>
               <a:rPr lang="en-US" sz="1200" dirty="0">
                 <a:solidFill>
-                  <a:srgbClr val="C9D9E8"/>
+                  <a:srgbClr val="E4E1F5"/>
                 </a:solidFill>
                 <a:latin typeface="Calibri" pitchFamily="34" charset="0"/>
                 <a:ea typeface="Calibri" pitchFamily="34" charset="-122"/>
@@ -23073,7 +23036,7 @@
         </p:xfrm>
         <a:graphic>
           <a:graphicData uri="http://schemas.openxmlformats.org/drawingml/2006/chart">
-            <c:chart xmlns:c="http://schemas.openxmlformats.org/drawingml/2006/chart" xmlns:r="http://schemas.openxmlformats.org/officeDocument/2006/relationships" r:id="rId3"/>
+            <c:chart xmlns:c="http://schemas.openxmlformats.org/drawingml/2006/chart" xmlns:r="http://schemas.openxmlformats.org/officeDocument/2006/relationships" r:id="rId4"/>
           </a:graphicData>
         </a:graphic>
       </p:graphicFrame>
@@ -23092,17 +23055,17 @@
             <a:avLst/>
           </a:prstGeom>
           <a:solidFill>
-            <a:srgbClr val="F4F6F9"/>
+            <a:srgbClr val="352F6E"/>
           </a:solidFill>
           <a:ln w="12700">
             <a:solidFill>
-              <a:srgbClr val="E2E8F0"/>
+              <a:srgbClr val="352F6E"/>
             </a:solidFill>
             <a:prstDash val="solid"/>
           </a:ln>
           <a:effectLst>
             <a:outerShdw blurRad="88900" dist="25400" dir="5400000" algn="bl" rotWithShape="0">
-              <a:srgbClr val="1B3A5C">
+              <a:srgbClr val="2C2660">
                 <a:alpha val="8000"/>
               </a:srgbClr>
             </a:outerShdw>
@@ -23131,7 +23094,7 @@
             <a:avLst/>
           </a:prstGeom>
           <a:solidFill>
-            <a:srgbClr val="DC2626"/>
+            <a:srgbClr val="EB5C75"/>
           </a:solidFill>
           <a:ln/>
         </p:spPr>
@@ -23170,7 +23133,7 @@
             <a:r>
               <a:rPr lang="en-US" sz="2400" b="1" dirty="0">
                 <a:solidFill>
-                  <a:srgbClr val="0F2A47"/>
+                  <a:srgbClr val="FFFFFF"/>
                 </a:solidFill>
                 <a:latin typeface="Cambria" pitchFamily="34" charset="0"/>
                 <a:ea typeface="Cambria" pitchFamily="34" charset="-122"/>
@@ -23209,7 +23172,7 @@
             <a:r>
               <a:rPr lang="en-US" sz="1100" dirty="0">
                 <a:solidFill>
-                  <a:srgbClr val="475569"/>
+                  <a:srgbClr val="D8D4F0"/>
                 </a:solidFill>
                 <a:latin typeface="Calibri" pitchFamily="34" charset="0"/>
                 <a:ea typeface="Calibri" pitchFamily="34" charset="-122"/>
@@ -23236,17 +23199,17 @@
             <a:avLst/>
           </a:prstGeom>
           <a:solidFill>
-            <a:srgbClr val="F4F6F9"/>
+            <a:srgbClr val="352F6E"/>
           </a:solidFill>
           <a:ln w="12700">
             <a:solidFill>
-              <a:srgbClr val="E2E8F0"/>
+              <a:srgbClr val="352F6E"/>
             </a:solidFill>
             <a:prstDash val="solid"/>
           </a:ln>
           <a:effectLst>
             <a:outerShdw blurRad="88900" dist="25400" dir="5400000" algn="bl" rotWithShape="0">
-              <a:srgbClr val="1B3A5C">
+              <a:srgbClr val="2C2660">
                 <a:alpha val="8000"/>
               </a:srgbClr>
             </a:outerShdw>
@@ -23275,7 +23238,7 @@
             <a:avLst/>
           </a:prstGeom>
           <a:solidFill>
-            <a:srgbClr val="D97706"/>
+            <a:srgbClr val="F0A35E"/>
           </a:solidFill>
           <a:ln/>
         </p:spPr>
@@ -23314,7 +23277,7 @@
             <a:r>
               <a:rPr lang="en-US" sz="2400" b="1" dirty="0">
                 <a:solidFill>
-                  <a:srgbClr val="0F2A47"/>
+                  <a:srgbClr val="FFFFFF"/>
                 </a:solidFill>
                 <a:latin typeface="Cambria" pitchFamily="34" charset="0"/>
                 <a:ea typeface="Cambria" pitchFamily="34" charset="-122"/>
@@ -23353,7 +23316,7 @@
             <a:r>
               <a:rPr lang="en-US" sz="1100" dirty="0">
                 <a:solidFill>
-                  <a:srgbClr val="475569"/>
+                  <a:srgbClr val="D8D4F0"/>
                 </a:solidFill>
                 <a:latin typeface="Calibri" pitchFamily="34" charset="0"/>
                 <a:ea typeface="Calibri" pitchFamily="34" charset="-122"/>
@@ -23380,17 +23343,17 @@
             <a:avLst/>
           </a:prstGeom>
           <a:solidFill>
-            <a:srgbClr val="F4F6F9"/>
+            <a:srgbClr val="352F6E"/>
           </a:solidFill>
           <a:ln w="12700">
             <a:solidFill>
-              <a:srgbClr val="E2E8F0"/>
+              <a:srgbClr val="352F6E"/>
             </a:solidFill>
             <a:prstDash val="solid"/>
           </a:ln>
           <a:effectLst>
             <a:outerShdw blurRad="88900" dist="25400" dir="5400000" algn="bl" rotWithShape="0">
-              <a:srgbClr val="1B3A5C">
+              <a:srgbClr val="2C2660">
                 <a:alpha val="8000"/>
               </a:srgbClr>
             </a:outerShdw>
@@ -23419,7 +23382,7 @@
             <a:avLst/>
           </a:prstGeom>
           <a:solidFill>
-            <a:srgbClr val="0D9488"/>
+            <a:srgbClr val="5ED9B8"/>
           </a:solidFill>
           <a:ln/>
         </p:spPr>
@@ -23458,7 +23421,7 @@
             <a:r>
               <a:rPr lang="en-US" sz="2400" b="1" dirty="0">
                 <a:solidFill>
-                  <a:srgbClr val="0F2A47"/>
+                  <a:srgbClr val="FFFFFF"/>
                 </a:solidFill>
                 <a:latin typeface="Cambria" pitchFamily="34" charset="0"/>
                 <a:ea typeface="Cambria" pitchFamily="34" charset="-122"/>
@@ -23497,7 +23460,7 @@
             <a:r>
               <a:rPr lang="en-US" sz="1100" dirty="0">
                 <a:solidFill>
-                  <a:srgbClr val="475569"/>
+                  <a:srgbClr val="D8D4F0"/>
                 </a:solidFill>
                 <a:latin typeface="Calibri" pitchFamily="34" charset="0"/>
                 <a:ea typeface="Calibri" pitchFamily="34" charset="-122"/>
@@ -23524,11 +23487,11 @@
             <a:avLst/>
           </a:prstGeom>
           <a:solidFill>
-            <a:srgbClr val="FEECEC"/>
+            <a:srgbClr val="3D2A4A"/>
           </a:solidFill>
           <a:ln w="12700">
             <a:solidFill>
-              <a:srgbClr val="E2E8F0"/>
+              <a:srgbClr val="352F6E"/>
             </a:solidFill>
             <a:prstDash val="solid"/>
           </a:ln>
@@ -23556,7 +23519,7 @@
             <a:avLst/>
           </a:prstGeom>
           <a:solidFill>
-            <a:srgbClr val="DC2626"/>
+            <a:srgbClr val="EB5C75"/>
           </a:solidFill>
           <a:ln/>
         </p:spPr>
@@ -23595,7 +23558,7 @@
             <a:r>
               <a:rPr lang="en-US" sz="1100" b="1" kern="0" spc="100" dirty="0">
                 <a:solidFill>
-                  <a:srgbClr val="DC2626"/>
+                  <a:srgbClr val="EB5C75"/>
                 </a:solidFill>
                 <a:latin typeface="Calibri" pitchFamily="34" charset="0"/>
                 <a:ea typeface="Calibri" pitchFamily="34" charset="-122"/>
@@ -23637,7 +23600,7 @@
             <a:r>
               <a:rPr lang="en-US" sz="1300" dirty="0">
                 <a:solidFill>
-                  <a:srgbClr val="475569"/>
+                  <a:srgbClr val="D8D4F0"/>
                 </a:solidFill>
                 <a:latin typeface="Calibri" pitchFamily="34" charset="0"/>
                 <a:ea typeface="Calibri" pitchFamily="34" charset="-122"/>
@@ -23676,7 +23639,7 @@
             <a:r>
               <a:rPr lang="en-US" sz="900" dirty="0">
                 <a:solidFill>
-                  <a:srgbClr val="64748B"/>
+                  <a:srgbClr val="B3ABDD"/>
                 </a:solidFill>
                 <a:latin typeface="Calibri" pitchFamily="34" charset="0"/>
                 <a:ea typeface="Calibri" pitchFamily="34" charset="-122"/>
@@ -23715,7 +23678,7 @@
             <a:r>
               <a:rPr lang="en-US" sz="900" dirty="0">
                 <a:solidFill>
-                  <a:srgbClr val="64748B"/>
+                  <a:srgbClr val="B3ABDD"/>
                 </a:solidFill>
                 <a:latin typeface="Calibri" pitchFamily="34" charset="0"/>
                 <a:ea typeface="Calibri" pitchFamily="34" charset="-122"/>
@@ -23740,9 +23703,12 @@
   <p:cSld name="Slide 6">
     <p:bg>
       <p:bgPr>
-        <a:solidFill>
-          <a:srgbClr val="FFFFFF"/>
-        </a:solidFill>
+        <a:blipFill rotWithShape="1">
+          <a:blip r:embed="rId3"/>
+          <a:stretch>
+            <a:fillRect/>
+          </a:stretch>
+        </a:blipFill>
         <a:effectLst/>
       </p:bgPr>
     </p:bg>
@@ -23775,7 +23741,7 @@
             <a:avLst/>
           </a:prstGeom>
           <a:solidFill>
-            <a:srgbClr val="1B3A5C"/>
+            <a:srgbClr val="2C2660"/>
           </a:solidFill>
           <a:ln/>
         </p:spPr>
@@ -23814,7 +23780,7 @@
             <a:r>
               <a:rPr lang="en-US" sz="1100" b="1" kern="0" spc="200" dirty="0">
                 <a:solidFill>
-                  <a:srgbClr val="5EEAD4"/>
+                  <a:srgbClr val="F2A0B5"/>
                 </a:solidFill>
                 <a:latin typeface="Calibri" pitchFamily="34" charset="0"/>
                 <a:ea typeface="Calibri" pitchFamily="34" charset="-122"/>
@@ -23892,7 +23858,7 @@
             <a:r>
               <a:rPr lang="en-US" sz="1200" dirty="0">
                 <a:solidFill>
-                  <a:srgbClr val="C9D9E8"/>
+                  <a:srgbClr val="E4E1F5"/>
                 </a:solidFill>
                 <a:latin typeface="Calibri" pitchFamily="34" charset="0"/>
                 <a:ea typeface="Calibri" pitchFamily="34" charset="-122"/>
@@ -23916,7 +23882,7 @@
         </p:xfrm>
         <a:graphic>
           <a:graphicData uri="http://schemas.openxmlformats.org/drawingml/2006/chart">
-            <c:chart xmlns:c="http://schemas.openxmlformats.org/drawingml/2006/chart" xmlns:r="http://schemas.openxmlformats.org/officeDocument/2006/relationships" r:id="rId3"/>
+            <c:chart xmlns:c="http://schemas.openxmlformats.org/drawingml/2006/chart" xmlns:r="http://schemas.openxmlformats.org/officeDocument/2006/relationships" r:id="rId4"/>
           </a:graphicData>
         </a:graphic>
       </p:graphicFrame>
@@ -23935,17 +23901,17 @@
             <a:avLst/>
           </a:prstGeom>
           <a:solidFill>
-            <a:srgbClr val="F4F6F9"/>
+            <a:srgbClr val="352F6E"/>
           </a:solidFill>
           <a:ln w="12700">
             <a:solidFill>
-              <a:srgbClr val="E2E8F0"/>
+              <a:srgbClr val="352F6E"/>
             </a:solidFill>
             <a:prstDash val="solid"/>
           </a:ln>
           <a:effectLst>
             <a:outerShdw blurRad="88900" dist="25400" dir="5400000" algn="bl" rotWithShape="0">
-              <a:srgbClr val="1B3A5C">
+              <a:srgbClr val="2C2660">
                 <a:alpha val="8000"/>
               </a:srgbClr>
             </a:outerShdw>
@@ -23986,7 +23952,7 @@
             <a:r>
               <a:rPr lang="en-US" sz="1100" b="1" kern="0" spc="100" dirty="0">
                 <a:solidFill>
-                  <a:srgbClr val="1B3A5C"/>
+                  <a:srgbClr val="E4E1F5"/>
                 </a:solidFill>
                 <a:latin typeface="Calibri" pitchFamily="34" charset="0"/>
                 <a:ea typeface="Calibri" pitchFamily="34" charset="-122"/>
@@ -24032,7 +23998,7 @@
             <a:r>
               <a:rPr lang="en-US" sz="1250" b="1" dirty="0">
                 <a:solidFill>
-                  <a:srgbClr val="0F2A47"/>
+                  <a:srgbClr val="FFFFFF"/>
                 </a:solidFill>
                 <a:latin typeface="Calibri" pitchFamily="34" charset="0"/>
                 <a:ea typeface="Calibri" pitchFamily="34" charset="-122"/>
@@ -24056,7 +24022,7 @@
             <a:r>
               <a:rPr lang="en-US" sz="1250" dirty="0">
                 <a:solidFill>
-                  <a:srgbClr val="475569"/>
+                  <a:srgbClr val="D8D4F0"/>
                 </a:solidFill>
                 <a:latin typeface="Calibri" pitchFamily="34" charset="0"/>
                 <a:ea typeface="Calibri" pitchFamily="34" charset="-122"/>
@@ -24080,7 +24046,7 @@
             <a:r>
               <a:rPr lang="en-US" sz="1250" dirty="0">
                 <a:solidFill>
-                  <a:srgbClr val="475569"/>
+                  <a:srgbClr val="D8D4F0"/>
                 </a:solidFill>
                 <a:latin typeface="Calibri" pitchFamily="34" charset="0"/>
                 <a:ea typeface="Calibri" pitchFamily="34" charset="-122"/>
@@ -24107,11 +24073,11 @@
             <a:avLst/>
           </a:prstGeom>
           <a:solidFill>
-            <a:srgbClr val="FEF3E2"/>
+            <a:srgbClr val="3D3450"/>
           </a:solidFill>
           <a:ln w="12700">
             <a:solidFill>
-              <a:srgbClr val="E2E8F0"/>
+              <a:srgbClr val="352F6E"/>
             </a:solidFill>
             <a:prstDash val="solid"/>
           </a:ln>
@@ -24139,7 +24105,7 @@
             <a:avLst/>
           </a:prstGeom>
           <a:solidFill>
-            <a:srgbClr val="D97706"/>
+            <a:srgbClr val="F0A35E"/>
           </a:solidFill>
           <a:ln/>
         </p:spPr>
@@ -24178,7 +24144,7 @@
             <a:r>
               <a:rPr lang="en-US" sz="1100" b="1" kern="0" spc="100" dirty="0">
                 <a:solidFill>
-                  <a:srgbClr val="92400E"/>
+                  <a:srgbClr val="F0A35E"/>
                 </a:solidFill>
                 <a:latin typeface="Calibri" pitchFamily="34" charset="0"/>
                 <a:ea typeface="Calibri" pitchFamily="34" charset="-122"/>
@@ -24220,7 +24186,7 @@
             <a:r>
               <a:rPr lang="en-US" sz="1300" dirty="0">
                 <a:solidFill>
-                  <a:srgbClr val="475569"/>
+                  <a:srgbClr val="D8D4F0"/>
                 </a:solidFill>
                 <a:latin typeface="Calibri" pitchFamily="34" charset="0"/>
                 <a:ea typeface="Calibri" pitchFamily="34" charset="-122"/>
@@ -24259,7 +24225,7 @@
             <a:r>
               <a:rPr lang="en-US" sz="900" dirty="0">
                 <a:solidFill>
-                  <a:srgbClr val="64748B"/>
+                  <a:srgbClr val="B3ABDD"/>
                 </a:solidFill>
                 <a:latin typeface="Calibri" pitchFamily="34" charset="0"/>
                 <a:ea typeface="Calibri" pitchFamily="34" charset="-122"/>
@@ -24298,7 +24264,7 @@
             <a:r>
               <a:rPr lang="en-US" sz="900" dirty="0">
                 <a:solidFill>
-                  <a:srgbClr val="64748B"/>
+                  <a:srgbClr val="B3ABDD"/>
                 </a:solidFill>
                 <a:latin typeface="Calibri" pitchFamily="34" charset="0"/>
                 <a:ea typeface="Calibri" pitchFamily="34" charset="-122"/>
@@ -24323,9 +24289,12 @@
   <p:cSld name="Slide 7">
     <p:bg>
       <p:bgPr>
-        <a:solidFill>
-          <a:srgbClr val="FFFFFF"/>
-        </a:solidFill>
+        <a:blipFill rotWithShape="1">
+          <a:blip r:embed="rId3"/>
+          <a:stretch>
+            <a:fillRect/>
+          </a:stretch>
+        </a:blipFill>
         <a:effectLst/>
       </p:bgPr>
     </p:bg>
@@ -24358,7 +24327,7 @@
             <a:avLst/>
           </a:prstGeom>
           <a:solidFill>
-            <a:srgbClr val="1B3A5C"/>
+            <a:srgbClr val="2C2660"/>
           </a:solidFill>
           <a:ln/>
         </p:spPr>
@@ -24397,7 +24366,7 @@
             <a:r>
               <a:rPr lang="en-US" sz="1100" b="1" kern="0" spc="200" dirty="0">
                 <a:solidFill>
-                  <a:srgbClr val="5EEAD4"/>
+                  <a:srgbClr val="F2A0B5"/>
                 </a:solidFill>
                 <a:latin typeface="Calibri" pitchFamily="34" charset="0"/>
                 <a:ea typeface="Calibri" pitchFamily="34" charset="-122"/>
@@ -24475,7 +24444,7 @@
             <a:r>
               <a:rPr lang="en-US" sz="1200" dirty="0">
                 <a:solidFill>
-                  <a:srgbClr val="C9D9E8"/>
+                  <a:srgbClr val="E4E1F5"/>
                 </a:solidFill>
                 <a:latin typeface="Calibri" pitchFamily="34" charset="0"/>
                 <a:ea typeface="Calibri" pitchFamily="34" charset="-122"/>
@@ -24505,7 +24474,7 @@
         </p:xfrm>
         <a:graphic>
           <a:graphicData uri="http://schemas.openxmlformats.org/drawingml/2006/chart">
-            <c:chart xmlns:c="http://schemas.openxmlformats.org/drawingml/2006/chart" xmlns:r="http://schemas.openxmlformats.org/officeDocument/2006/relationships" r:id="rId3"/>
+            <c:chart xmlns:c="http://schemas.openxmlformats.org/drawingml/2006/chart" xmlns:r="http://schemas.openxmlformats.org/officeDocument/2006/relationships" r:id="rId4"/>
           </a:graphicData>
         </a:graphic>
       </p:graphicFrame>
@@ -24524,17 +24493,17 @@
             <a:avLst/>
           </a:prstGeom>
           <a:solidFill>
-            <a:srgbClr val="F4F6F9"/>
+            <a:srgbClr val="352F6E"/>
           </a:solidFill>
           <a:ln w="12700">
             <a:solidFill>
-              <a:srgbClr val="E2E8F0"/>
+              <a:srgbClr val="352F6E"/>
             </a:solidFill>
             <a:prstDash val="solid"/>
           </a:ln>
           <a:effectLst>
             <a:outerShdw blurRad="88900" dist="25400" dir="5400000" algn="bl" rotWithShape="0">
-              <a:srgbClr val="1B3A5C">
+              <a:srgbClr val="2C2660">
                 <a:alpha val="8000"/>
               </a:srgbClr>
             </a:outerShdw>
@@ -24563,7 +24532,7 @@
             <a:avLst/>
           </a:prstGeom>
           <a:solidFill>
-            <a:srgbClr val="DC2626"/>
+            <a:srgbClr val="EB5C75"/>
           </a:solidFill>
           <a:ln/>
         </p:spPr>
@@ -24602,7 +24571,7 @@
             <a:r>
               <a:rPr lang="en-US" sz="2400" b="1" dirty="0">
                 <a:solidFill>
-                  <a:srgbClr val="0F2A47"/>
+                  <a:srgbClr val="FFFFFF"/>
                 </a:solidFill>
                 <a:latin typeface="Cambria" pitchFamily="34" charset="0"/>
                 <a:ea typeface="Cambria" pitchFamily="34" charset="-122"/>
@@ -24641,7 +24610,7 @@
             <a:r>
               <a:rPr lang="en-US" sz="1100" dirty="0">
                 <a:solidFill>
-                  <a:srgbClr val="475569"/>
+                  <a:srgbClr val="D8D4F0"/>
                 </a:solidFill>
                 <a:latin typeface="Calibri" pitchFamily="34" charset="0"/>
                 <a:ea typeface="Calibri" pitchFamily="34" charset="-122"/>
@@ -24668,17 +24637,17 @@
             <a:avLst/>
           </a:prstGeom>
           <a:solidFill>
-            <a:srgbClr val="F4F6F9"/>
+            <a:srgbClr val="352F6E"/>
           </a:solidFill>
           <a:ln w="12700">
             <a:solidFill>
-              <a:srgbClr val="E2E8F0"/>
+              <a:srgbClr val="352F6E"/>
             </a:solidFill>
             <a:prstDash val="solid"/>
           </a:ln>
           <a:effectLst>
             <a:outerShdw blurRad="88900" dist="25400" dir="5400000" algn="bl" rotWithShape="0">
-              <a:srgbClr val="1B3A5C">
+              <a:srgbClr val="2C2660">
                 <a:alpha val="8000"/>
               </a:srgbClr>
             </a:outerShdw>
@@ -24707,7 +24676,7 @@
             <a:avLst/>
           </a:prstGeom>
           <a:solidFill>
-            <a:srgbClr val="0D9488"/>
+            <a:srgbClr val="5ED9B8"/>
           </a:solidFill>
           <a:ln/>
         </p:spPr>
@@ -24746,7 +24715,7 @@
             <a:r>
               <a:rPr lang="en-US" sz="2400" b="1" dirty="0">
                 <a:solidFill>
-                  <a:srgbClr val="0F2A47"/>
+                  <a:srgbClr val="FFFFFF"/>
                 </a:solidFill>
                 <a:latin typeface="Cambria" pitchFamily="34" charset="0"/>
                 <a:ea typeface="Cambria" pitchFamily="34" charset="-122"/>
@@ -24785,7 +24754,7 @@
             <a:r>
               <a:rPr lang="en-US" sz="1100" dirty="0">
                 <a:solidFill>
-                  <a:srgbClr val="475569"/>
+                  <a:srgbClr val="D8D4F0"/>
                 </a:solidFill>
                 <a:latin typeface="Calibri" pitchFamily="34" charset="0"/>
                 <a:ea typeface="Calibri" pitchFamily="34" charset="-122"/>
@@ -24812,11 +24781,11 @@
             <a:avLst/>
           </a:prstGeom>
           <a:solidFill>
-            <a:srgbClr val="FEECEC"/>
+            <a:srgbClr val="3D2A4A"/>
           </a:solidFill>
           <a:ln w="12700">
             <a:solidFill>
-              <a:srgbClr val="E2E8F0"/>
+              <a:srgbClr val="352F6E"/>
             </a:solidFill>
             <a:prstDash val="solid"/>
           </a:ln>
@@ -24844,7 +24813,7 @@
             <a:avLst/>
           </a:prstGeom>
           <a:solidFill>
-            <a:srgbClr val="DC2626"/>
+            <a:srgbClr val="EB5C75"/>
           </a:solidFill>
           <a:ln/>
         </p:spPr>
@@ -24883,7 +24852,7 @@
             <a:r>
               <a:rPr lang="en-US" sz="1100" b="1" kern="0" spc="100" dirty="0">
                 <a:solidFill>
-                  <a:srgbClr val="DC2626"/>
+                  <a:srgbClr val="EB5C75"/>
                 </a:solidFill>
                 <a:latin typeface="Calibri" pitchFamily="34" charset="0"/>
                 <a:ea typeface="Calibri" pitchFamily="34" charset="-122"/>
@@ -24925,7 +24894,7 @@
             <a:r>
               <a:rPr lang="en-US" sz="1300" dirty="0">
                 <a:solidFill>
-                  <a:srgbClr val="475569"/>
+                  <a:srgbClr val="D8D4F0"/>
                 </a:solidFill>
                 <a:latin typeface="Calibri" pitchFamily="34" charset="0"/>
                 <a:ea typeface="Calibri" pitchFamily="34" charset="-122"/>
@@ -24964,7 +24933,7 @@
             <a:r>
               <a:rPr lang="en-US" sz="900" dirty="0">
                 <a:solidFill>
-                  <a:srgbClr val="64748B"/>
+                  <a:srgbClr val="B3ABDD"/>
                 </a:solidFill>
                 <a:latin typeface="Calibri" pitchFamily="34" charset="0"/>
                 <a:ea typeface="Calibri" pitchFamily="34" charset="-122"/>
@@ -25003,7 +24972,7 @@
             <a:r>
               <a:rPr lang="en-US" sz="900" dirty="0">
                 <a:solidFill>
-                  <a:srgbClr val="64748B"/>
+                  <a:srgbClr val="B3ABDD"/>
                 </a:solidFill>
                 <a:latin typeface="Calibri" pitchFamily="34" charset="0"/>
                 <a:ea typeface="Calibri" pitchFamily="34" charset="-122"/>
@@ -25028,9 +24997,12 @@
   <p:cSld name="Slide 8">
     <p:bg>
       <p:bgPr>
-        <a:solidFill>
-          <a:srgbClr val="FFFFFF"/>
-        </a:solidFill>
+        <a:blipFill rotWithShape="1">
+          <a:blip r:embed="rId3"/>
+          <a:stretch>
+            <a:fillRect/>
+          </a:stretch>
+        </a:blipFill>
         <a:effectLst/>
       </p:bgPr>
     </p:bg>
@@ -25063,7 +25035,7 @@
             <a:avLst/>
           </a:prstGeom>
           <a:solidFill>
-            <a:srgbClr val="1B3A5C"/>
+            <a:srgbClr val="2C2660"/>
           </a:solidFill>
           <a:ln/>
         </p:spPr>
@@ -25102,7 +25074,7 @@
             <a:r>
               <a:rPr lang="en-US" sz="1100" b="1" kern="0" spc="200" dirty="0">
                 <a:solidFill>
-                  <a:srgbClr val="5EEAD4"/>
+                  <a:srgbClr val="F2A0B5"/>
                 </a:solidFill>
                 <a:latin typeface="Calibri" pitchFamily="34" charset="0"/>
                 <a:ea typeface="Calibri" pitchFamily="34" charset="-122"/>
@@ -25180,7 +25152,7 @@
             <a:r>
               <a:rPr lang="en-US" sz="1200" dirty="0">
                 <a:solidFill>
-                  <a:srgbClr val="C9D9E8"/>
+                  <a:srgbClr val="E4E1F5"/>
                 </a:solidFill>
                 <a:latin typeface="Calibri" pitchFamily="34" charset="0"/>
                 <a:ea typeface="Calibri" pitchFamily="34" charset="-122"/>
@@ -25199,7 +25171,7 @@
           <p:nvPr>
             <p:extLst>
               <p:ext uri="{D42A27DB-BD31-4B8C-83A1-F6EECF244321}">
-                <p14:modId xmlns:p14="http://schemas.microsoft.com/office/powerpoint/2010/main" val="4088197947"/>
+                <p14:modId xmlns:p14="http://schemas.microsoft.com/office/powerpoint/2010/main" val="1489987102"/>
               </p:ext>
             </p:extLst>
           </p:nvPr>
@@ -25210,7 +25182,7 @@
         </p:xfrm>
         <a:graphic>
           <a:graphicData uri="http://schemas.openxmlformats.org/drawingml/2006/chart">
-            <c:chart xmlns:c="http://schemas.openxmlformats.org/drawingml/2006/chart" xmlns:r="http://schemas.openxmlformats.org/officeDocument/2006/relationships" r:id="rId3"/>
+            <c:chart xmlns:c="http://schemas.openxmlformats.org/drawingml/2006/chart" xmlns:r="http://schemas.openxmlformats.org/officeDocument/2006/relationships" r:id="rId4"/>
           </a:graphicData>
         </a:graphic>
       </p:graphicFrame>
@@ -25229,17 +25201,17 @@
             <a:avLst/>
           </a:prstGeom>
           <a:solidFill>
-            <a:srgbClr val="F4F6F9"/>
+            <a:srgbClr val="352F6E"/>
           </a:solidFill>
           <a:ln w="12700">
             <a:solidFill>
-              <a:srgbClr val="E2E8F0"/>
+              <a:srgbClr val="352F6E"/>
             </a:solidFill>
             <a:prstDash val="solid"/>
           </a:ln>
           <a:effectLst>
             <a:outerShdw blurRad="88900" dist="25400" dir="5400000" algn="bl" rotWithShape="0">
-              <a:srgbClr val="1B3A5C">
+              <a:srgbClr val="2C2660">
                 <a:alpha val="8000"/>
               </a:srgbClr>
             </a:outerShdw>
@@ -25268,7 +25240,7 @@
             <a:avLst/>
           </a:prstGeom>
           <a:solidFill>
-            <a:srgbClr val="DC2626"/>
+            <a:srgbClr val="EB5C75"/>
           </a:solidFill>
           <a:ln/>
         </p:spPr>
@@ -25307,7 +25279,7 @@
             <a:r>
               <a:rPr lang="en-US" sz="2400" b="1" dirty="0">
                 <a:solidFill>
-                  <a:srgbClr val="0F2A47"/>
+                  <a:srgbClr val="FFFFFF"/>
                 </a:solidFill>
                 <a:latin typeface="Cambria" pitchFamily="34" charset="0"/>
                 <a:ea typeface="Cambria" pitchFamily="34" charset="-122"/>
@@ -25346,7 +25318,7 @@
             <a:r>
               <a:rPr lang="en-US" sz="1100" dirty="0">
                 <a:solidFill>
-                  <a:srgbClr val="475569"/>
+                  <a:srgbClr val="D8D4F0"/>
                 </a:solidFill>
                 <a:latin typeface="Calibri" pitchFamily="34" charset="0"/>
                 <a:ea typeface="Calibri" pitchFamily="34" charset="-122"/>
@@ -25373,17 +25345,17 @@
             <a:avLst/>
           </a:prstGeom>
           <a:solidFill>
-            <a:srgbClr val="F4F6F9"/>
+            <a:srgbClr val="352F6E"/>
           </a:solidFill>
           <a:ln w="12700">
             <a:solidFill>
-              <a:srgbClr val="E2E8F0"/>
+              <a:srgbClr val="352F6E"/>
             </a:solidFill>
             <a:prstDash val="solid"/>
           </a:ln>
           <a:effectLst>
             <a:outerShdw blurRad="88900" dist="25400" dir="5400000" algn="bl" rotWithShape="0">
-              <a:srgbClr val="1B3A5C">
+              <a:srgbClr val="2C2660">
                 <a:alpha val="8000"/>
               </a:srgbClr>
             </a:outerShdw>
@@ -25412,7 +25384,7 @@
             <a:avLst/>
           </a:prstGeom>
           <a:solidFill>
-            <a:srgbClr val="D97706"/>
+            <a:srgbClr val="F0A35E"/>
           </a:solidFill>
           <a:ln/>
         </p:spPr>
@@ -25451,7 +25423,7 @@
             <a:r>
               <a:rPr lang="en-US" sz="2400" b="1" dirty="0">
                 <a:solidFill>
-                  <a:srgbClr val="0F2A47"/>
+                  <a:srgbClr val="FFFFFF"/>
                 </a:solidFill>
                 <a:latin typeface="Cambria" pitchFamily="34" charset="0"/>
                 <a:ea typeface="Cambria" pitchFamily="34" charset="-122"/>
@@ -25490,7 +25462,7 @@
             <a:r>
               <a:rPr lang="en-US" sz="1100" dirty="0">
                 <a:solidFill>
-                  <a:srgbClr val="475569"/>
+                  <a:srgbClr val="D8D4F0"/>
                 </a:solidFill>
                 <a:latin typeface="Calibri" pitchFamily="34" charset="0"/>
                 <a:ea typeface="Calibri" pitchFamily="34" charset="-122"/>
@@ -25517,11 +25489,11 @@
             <a:avLst/>
           </a:prstGeom>
           <a:solidFill>
-            <a:srgbClr val="FEF3E2"/>
+            <a:srgbClr val="3D3450"/>
           </a:solidFill>
           <a:ln w="12700">
             <a:solidFill>
-              <a:srgbClr val="E2E8F0"/>
+              <a:srgbClr val="352F6E"/>
             </a:solidFill>
             <a:prstDash val="solid"/>
           </a:ln>
@@ -25549,7 +25521,7 @@
             <a:avLst/>
           </a:prstGeom>
           <a:solidFill>
-            <a:srgbClr val="D97706"/>
+            <a:srgbClr val="F0A35E"/>
           </a:solidFill>
           <a:ln/>
         </p:spPr>
@@ -25588,7 +25560,7 @@
             <a:r>
               <a:rPr lang="en-US" sz="1100" b="1" kern="0" spc="100" dirty="0">
                 <a:solidFill>
-                  <a:srgbClr val="92400E"/>
+                  <a:srgbClr val="F0A35E"/>
                 </a:solidFill>
                 <a:latin typeface="Calibri" pitchFamily="34" charset="0"/>
                 <a:ea typeface="Calibri" pitchFamily="34" charset="-122"/>
@@ -25630,7 +25602,7 @@
             <a:r>
               <a:rPr lang="en-US" sz="1300" dirty="0">
                 <a:solidFill>
-                  <a:srgbClr val="475569"/>
+                  <a:srgbClr val="D8D4F0"/>
                 </a:solidFill>
                 <a:latin typeface="Calibri" pitchFamily="34" charset="0"/>
                 <a:ea typeface="Calibri" pitchFamily="34" charset="-122"/>
@@ -25669,7 +25641,7 @@
             <a:r>
               <a:rPr lang="en-US" sz="900" dirty="0">
                 <a:solidFill>
-                  <a:srgbClr val="64748B"/>
+                  <a:srgbClr val="B3ABDD"/>
                 </a:solidFill>
                 <a:latin typeface="Calibri" pitchFamily="34" charset="0"/>
                 <a:ea typeface="Calibri" pitchFamily="34" charset="-122"/>
@@ -25708,7 +25680,7 @@
             <a:r>
               <a:rPr lang="en-US" sz="900" dirty="0">
                 <a:solidFill>
-                  <a:srgbClr val="64748B"/>
+                  <a:srgbClr val="B3ABDD"/>
                 </a:solidFill>
                 <a:latin typeface="Calibri" pitchFamily="34" charset="0"/>
                 <a:ea typeface="Calibri" pitchFamily="34" charset="-122"/>
@@ -25733,9 +25705,12 @@
   <p:cSld name="Slide 9">
     <p:bg>
       <p:bgPr>
-        <a:solidFill>
-          <a:srgbClr val="FFFFFF"/>
-        </a:solidFill>
+        <a:blipFill rotWithShape="1">
+          <a:blip r:embed="rId3"/>
+          <a:stretch>
+            <a:fillRect/>
+          </a:stretch>
+        </a:blipFill>
         <a:effectLst/>
       </p:bgPr>
     </p:bg>
@@ -25768,7 +25743,7 @@
             <a:avLst/>
           </a:prstGeom>
           <a:solidFill>
-            <a:srgbClr val="1B3A5C"/>
+            <a:srgbClr val="2C2660"/>
           </a:solidFill>
           <a:ln/>
         </p:spPr>
@@ -25807,7 +25782,7 @@
             <a:r>
               <a:rPr lang="en-US" sz="1100" b="1" kern="0" spc="200" dirty="0">
                 <a:solidFill>
-                  <a:srgbClr val="5EEAD4"/>
+                  <a:srgbClr val="F2A0B5"/>
                 </a:solidFill>
                 <a:latin typeface="Calibri" pitchFamily="34" charset="0"/>
                 <a:ea typeface="Calibri" pitchFamily="34" charset="-122"/>
@@ -25885,7 +25860,7 @@
             <a:r>
               <a:rPr lang="en-US" sz="1200" dirty="0">
                 <a:solidFill>
-                  <a:srgbClr val="C9D9E8"/>
+                  <a:srgbClr val="E4E1F5"/>
                 </a:solidFill>
                 <a:latin typeface="Calibri" pitchFamily="34" charset="0"/>
                 <a:ea typeface="Calibri" pitchFamily="34" charset="-122"/>
@@ -25904,7 +25879,7 @@
           <p:nvPr>
             <p:extLst>
               <p:ext uri="{D42A27DB-BD31-4B8C-83A1-F6EECF244321}">
-                <p14:modId xmlns:p14="http://schemas.microsoft.com/office/powerpoint/2010/main" val="1220034472"/>
+                <p14:modId xmlns:p14="http://schemas.microsoft.com/office/powerpoint/2010/main" val="2970336644"/>
               </p:ext>
             </p:extLst>
           </p:nvPr>
@@ -25915,7 +25890,7 @@
         </p:xfrm>
         <a:graphic>
           <a:graphicData uri="http://schemas.openxmlformats.org/drawingml/2006/chart">
-            <c:chart xmlns:c="http://schemas.openxmlformats.org/drawingml/2006/chart" xmlns:r="http://schemas.openxmlformats.org/officeDocument/2006/relationships" r:id="rId3"/>
+            <c:chart xmlns:c="http://schemas.openxmlformats.org/drawingml/2006/chart" xmlns:r="http://schemas.openxmlformats.org/officeDocument/2006/relationships" r:id="rId4"/>
           </a:graphicData>
         </a:graphic>
       </p:graphicFrame>
@@ -25934,17 +25909,17 @@
             <a:avLst/>
           </a:prstGeom>
           <a:solidFill>
-            <a:srgbClr val="F4F6F9"/>
+            <a:srgbClr val="352F6E"/>
           </a:solidFill>
           <a:ln w="12700">
             <a:solidFill>
-              <a:srgbClr val="E2E8F0"/>
+              <a:srgbClr val="352F6E"/>
             </a:solidFill>
             <a:prstDash val="solid"/>
           </a:ln>
           <a:effectLst>
             <a:outerShdw blurRad="88900" dist="25400" dir="5400000" algn="bl" rotWithShape="0">
-              <a:srgbClr val="1B3A5C">
+              <a:srgbClr val="2C2660">
                 <a:alpha val="8000"/>
               </a:srgbClr>
             </a:outerShdw>
@@ -25973,7 +25948,7 @@
             <a:avLst/>
           </a:prstGeom>
           <a:solidFill>
-            <a:srgbClr val="0D9488"/>
+            <a:srgbClr val="5ED9B8"/>
           </a:solidFill>
           <a:ln/>
         </p:spPr>
@@ -26012,7 +25987,7 @@
             <a:r>
               <a:rPr lang="en-US" sz="1300" b="1" dirty="0">
                 <a:solidFill>
-                  <a:srgbClr val="0F2A47"/>
+                  <a:srgbClr val="FFFFFF"/>
                 </a:solidFill>
                 <a:latin typeface="Calibri" pitchFamily="34" charset="0"/>
                 <a:ea typeface="Calibri" pitchFamily="34" charset="-122"/>
@@ -26051,7 +26026,7 @@
             <a:r>
               <a:rPr lang="en-US" sz="1050" dirty="0">
                 <a:solidFill>
-                  <a:srgbClr val="64748B"/>
+                  <a:srgbClr val="B3ABDD"/>
                 </a:solidFill>
                 <a:latin typeface="Calibri" pitchFamily="34" charset="0"/>
                 <a:ea typeface="Calibri" pitchFamily="34" charset="-122"/>
@@ -26090,7 +26065,7 @@
             <a:r>
               <a:rPr lang="en-US" sz="1500" b="1" dirty="0">
                 <a:solidFill>
-                  <a:srgbClr val="0D9488"/>
+                  <a:srgbClr val="5ED9B8"/>
                 </a:solidFill>
                 <a:latin typeface="Cambria" pitchFamily="34" charset="0"/>
                 <a:ea typeface="Cambria" pitchFamily="34" charset="-122"/>
@@ -26127,9 +26102,9 @@
               <a:buNone/>
             </a:pPr>
             <a:r>
-              <a:rPr lang="en-US" sz="1000" i="1" dirty="0">
-                <a:solidFill>
-                  <a:srgbClr val="475569"/>
+              <a:rPr lang="en-US" sz="1000" b="1" i="1" dirty="0">
+                <a:solidFill>
+                  <a:srgbClr val="4E989B"/>
                 </a:solidFill>
                 <a:latin typeface="Calibri" pitchFamily="34" charset="0"/>
                 <a:ea typeface="Calibri" pitchFamily="34" charset="-122"/>
@@ -26137,7 +26112,11 @@
               </a:rPr>
               <a:t>More Reliable</a:t>
             </a:r>
-            <a:endParaRPr lang="en-US" sz="1000" dirty="0"/>
+            <a:endParaRPr lang="en-US" sz="1000" b="1" dirty="0">
+              <a:solidFill>
+                <a:srgbClr val="4E989B"/>
+              </a:solidFill>
+            </a:endParaRPr>
           </a:p>
         </p:txBody>
       </p:sp>
@@ -26156,17 +26135,17 @@
             <a:avLst/>
           </a:prstGeom>
           <a:solidFill>
-            <a:srgbClr val="F4F6F9"/>
+            <a:srgbClr val="352F6E"/>
           </a:solidFill>
           <a:ln w="12700">
             <a:solidFill>
-              <a:srgbClr val="E2E8F0"/>
+              <a:srgbClr val="352F6E"/>
             </a:solidFill>
             <a:prstDash val="solid"/>
           </a:ln>
           <a:effectLst>
             <a:outerShdw blurRad="88900" dist="25400" dir="5400000" algn="bl" rotWithShape="0">
-              <a:srgbClr val="1B3A5C">
+              <a:srgbClr val="2C2660">
                 <a:alpha val="8000"/>
               </a:srgbClr>
             </a:outerShdw>
@@ -26195,7 +26174,7 @@
             <a:avLst/>
           </a:prstGeom>
           <a:solidFill>
-            <a:srgbClr val="D97706"/>
+            <a:srgbClr val="F0A35E"/>
           </a:solidFill>
           <a:ln/>
         </p:spPr>
@@ -26234,7 +26213,7 @@
             <a:r>
               <a:rPr lang="en-US" sz="1300" b="1" dirty="0">
                 <a:solidFill>
-                  <a:srgbClr val="0F2A47"/>
+                  <a:srgbClr val="FFFFFF"/>
                 </a:solidFill>
                 <a:latin typeface="Calibri" pitchFamily="34" charset="0"/>
                 <a:ea typeface="Calibri" pitchFamily="34" charset="-122"/>
@@ -26273,7 +26252,7 @@
             <a:r>
               <a:rPr lang="en-US" sz="1050" dirty="0">
                 <a:solidFill>
-                  <a:srgbClr val="64748B"/>
+                  <a:srgbClr val="B3ABDD"/>
                 </a:solidFill>
                 <a:latin typeface="Calibri" pitchFamily="34" charset="0"/>
                 <a:ea typeface="Calibri" pitchFamily="34" charset="-122"/>
@@ -26312,7 +26291,7 @@
             <a:r>
               <a:rPr lang="en-US" sz="1500" b="1" dirty="0">
                 <a:solidFill>
-                  <a:srgbClr val="D97706"/>
+                  <a:srgbClr val="F0A35E"/>
                 </a:solidFill>
                 <a:latin typeface="Cambria" pitchFamily="34" charset="0"/>
                 <a:ea typeface="Cambria" pitchFamily="34" charset="-122"/>
@@ -26349,9 +26328,9 @@
               <a:buNone/>
             </a:pPr>
             <a:r>
-              <a:rPr lang="en-US" sz="1000" i="1" dirty="0">
-                <a:solidFill>
-                  <a:srgbClr val="475569"/>
+              <a:rPr lang="en-US" sz="1000" b="1" i="1" dirty="0">
+                <a:solidFill>
+                  <a:srgbClr val="F0A35E"/>
                 </a:solidFill>
                 <a:latin typeface="Calibri" pitchFamily="34" charset="0"/>
                 <a:ea typeface="Calibri" pitchFamily="34" charset="-122"/>
@@ -26359,7 +26338,11 @@
               </a:rPr>
               <a:t>Moderate</a:t>
             </a:r>
-            <a:endParaRPr lang="en-US" sz="1000" dirty="0"/>
+            <a:endParaRPr lang="en-US" sz="1000" b="1" dirty="0">
+              <a:solidFill>
+                <a:srgbClr val="F0A35E"/>
+              </a:solidFill>
+            </a:endParaRPr>
           </a:p>
         </p:txBody>
       </p:sp>
@@ -26378,17 +26361,17 @@
             <a:avLst/>
           </a:prstGeom>
           <a:solidFill>
-            <a:srgbClr val="F4F6F9"/>
+            <a:srgbClr val="352F6E"/>
           </a:solidFill>
           <a:ln w="12700">
             <a:solidFill>
-              <a:srgbClr val="E2E8F0"/>
+              <a:srgbClr val="352F6E"/>
             </a:solidFill>
             <a:prstDash val="solid"/>
           </a:ln>
           <a:effectLst>
             <a:outerShdw blurRad="88900" dist="25400" dir="5400000" algn="bl" rotWithShape="0">
-              <a:srgbClr val="1B3A5C">
+              <a:srgbClr val="2C2660">
                 <a:alpha val="8000"/>
               </a:srgbClr>
             </a:outerShdw>
@@ -26417,7 +26400,7 @@
             <a:avLst/>
           </a:prstGeom>
           <a:solidFill>
-            <a:srgbClr val="DC2626"/>
+            <a:srgbClr val="EB5C75"/>
           </a:solidFill>
           <a:ln/>
         </p:spPr>
@@ -26456,7 +26439,7 @@
             <a:r>
               <a:rPr lang="en-US" sz="1300" b="1" dirty="0">
                 <a:solidFill>
-                  <a:srgbClr val="0F2A47"/>
+                  <a:srgbClr val="FFFFFF"/>
                 </a:solidFill>
                 <a:latin typeface="Calibri" pitchFamily="34" charset="0"/>
                 <a:ea typeface="Calibri" pitchFamily="34" charset="-122"/>
@@ -26495,7 +26478,7 @@
             <a:r>
               <a:rPr lang="en-US" sz="1050" dirty="0">
                 <a:solidFill>
-                  <a:srgbClr val="64748B"/>
+                  <a:srgbClr val="B3ABDD"/>
                 </a:solidFill>
                 <a:latin typeface="Calibri" pitchFamily="34" charset="0"/>
                 <a:ea typeface="Calibri" pitchFamily="34" charset="-122"/>
@@ -26534,7 +26517,7 @@
             <a:r>
               <a:rPr lang="en-US" sz="1500" b="1" dirty="0">
                 <a:solidFill>
-                  <a:srgbClr val="DC2626"/>
+                  <a:srgbClr val="EB5C75"/>
                 </a:solidFill>
                 <a:latin typeface="Cambria" pitchFamily="34" charset="0"/>
                 <a:ea typeface="Cambria" pitchFamily="34" charset="-122"/>
@@ -26571,9 +26554,9 @@
               <a:buNone/>
             </a:pPr>
             <a:r>
-              <a:rPr lang="en-US" sz="1000" i="1" dirty="0">
-                <a:solidFill>
-                  <a:srgbClr val="475569"/>
+              <a:rPr lang="en-US" sz="1000" b="1" i="1" dirty="0">
+                <a:solidFill>
+                  <a:srgbClr val="EB5C75"/>
                 </a:solidFill>
                 <a:latin typeface="Calibri" pitchFamily="34" charset="0"/>
                 <a:ea typeface="Calibri" pitchFamily="34" charset="-122"/>
@@ -26581,7 +26564,11 @@
               </a:rPr>
               <a:t>High Variance</a:t>
             </a:r>
-            <a:endParaRPr lang="en-US" sz="1000" dirty="0"/>
+            <a:endParaRPr lang="en-US" sz="1000" b="1" dirty="0">
+              <a:solidFill>
+                <a:srgbClr val="EB5C75"/>
+              </a:solidFill>
+            </a:endParaRPr>
           </a:p>
         </p:txBody>
       </p:sp>
@@ -26600,11 +26587,11 @@
             <a:avLst/>
           </a:prstGeom>
           <a:solidFill>
-            <a:srgbClr val="E7F6F4"/>
+            <a:srgbClr val="2E2A5C"/>
           </a:solidFill>
           <a:ln w="12700">
             <a:solidFill>
-              <a:srgbClr val="E2E8F0"/>
+              <a:srgbClr val="352F6E"/>
             </a:solidFill>
             <a:prstDash val="solid"/>
           </a:ln>
@@ -26632,7 +26619,7 @@
             <a:avLst/>
           </a:prstGeom>
           <a:solidFill>
-            <a:srgbClr val="0D9488"/>
+            <a:srgbClr val="5ED9B8"/>
           </a:solidFill>
           <a:ln/>
         </p:spPr>
@@ -26671,7 +26658,7 @@
             <a:r>
               <a:rPr lang="en-US" sz="1100" b="1" kern="0" spc="100" dirty="0">
                 <a:solidFill>
-                  <a:srgbClr val="0D9488"/>
+                  <a:srgbClr val="5ED9B8"/>
                 </a:solidFill>
                 <a:latin typeface="Calibri" pitchFamily="34" charset="0"/>
                 <a:ea typeface="Calibri" pitchFamily="34" charset="-122"/>
@@ -26713,7 +26700,7 @@
             <a:r>
               <a:rPr lang="en-US" sz="1200" dirty="0">
                 <a:solidFill>
-                  <a:srgbClr val="475569"/>
+                  <a:srgbClr val="D8D4F0"/>
                 </a:solidFill>
                 <a:latin typeface="Calibri" pitchFamily="34" charset="0"/>
                 <a:ea typeface="Calibri" pitchFamily="34" charset="-122"/>
@@ -26752,7 +26739,7 @@
             <a:r>
               <a:rPr lang="en-US" sz="900" dirty="0">
                 <a:solidFill>
-                  <a:srgbClr val="64748B"/>
+                  <a:srgbClr val="B3ABDD"/>
                 </a:solidFill>
                 <a:latin typeface="Calibri" pitchFamily="34" charset="0"/>
                 <a:ea typeface="Calibri" pitchFamily="34" charset="-122"/>
@@ -26791,7 +26778,7 @@
             <a:r>
               <a:rPr lang="en-US" sz="900" dirty="0">
                 <a:solidFill>
-                  <a:srgbClr val="64748B"/>
+                  <a:srgbClr val="B3ABDD"/>
                 </a:solidFill>
                 <a:latin typeface="Calibri" pitchFamily="34" charset="0"/>
                 <a:ea typeface="Calibri" pitchFamily="34" charset="-122"/>
